--- a/presentation/couverture-code-conference.pptx
+++ b/presentation/couverture-code-conference.pptx
@@ -5,36 +5,36 @@
     <p:sldMasterId id="2147483648" r:id="rId1"/>
   </p:sldMasterIdLst>
   <p:sldIdLst>
-    <p:sldId id="256" r:id="rId7"/>
-    <p:sldId id="257" r:id="rId8"/>
-    <p:sldId id="258" r:id="rId9"/>
-    <p:sldId id="259" r:id="rId10"/>
-    <p:sldId id="260" r:id="rId11"/>
-    <p:sldId id="261" r:id="rId12"/>
-    <p:sldId id="262" r:id="rId13"/>
-    <p:sldId id="263" r:id="rId14"/>
-    <p:sldId id="264" r:id="rId15"/>
-    <p:sldId id="265" r:id="rId16"/>
-    <p:sldId id="266" r:id="rId17"/>
-    <p:sldId id="267" r:id="rId18"/>
-    <p:sldId id="268" r:id="rId19"/>
-    <p:sldId id="269" r:id="rId20"/>
-    <p:sldId id="270" r:id="rId21"/>
-    <p:sldId id="271" r:id="rId22"/>
-    <p:sldId id="272" r:id="rId23"/>
-    <p:sldId id="273" r:id="rId24"/>
-    <p:sldId id="274" r:id="rId25"/>
-    <p:sldId id="275" r:id="rId26"/>
-    <p:sldId id="276" r:id="rId27"/>
-    <p:sldId id="277" r:id="rId28"/>
-    <p:sldId id="278" r:id="rId29"/>
-    <p:sldId id="279" r:id="rId30"/>
-    <p:sldId id="280" r:id="rId31"/>
-    <p:sldId id="281" r:id="rId32"/>
-    <p:sldId id="282" r:id="rId33"/>
-    <p:sldId id="283" r:id="rId34"/>
+    <p:sldId id="256" r:id="rId2"/>
+    <p:sldId id="257" r:id="rId3"/>
+    <p:sldId id="258" r:id="rId4"/>
+    <p:sldId id="259" r:id="rId5"/>
+    <p:sldId id="260" r:id="rId6"/>
+    <p:sldId id="261" r:id="rId7"/>
+    <p:sldId id="262" r:id="rId8"/>
+    <p:sldId id="263" r:id="rId9"/>
+    <p:sldId id="264" r:id="rId10"/>
+    <p:sldId id="265" r:id="rId11"/>
+    <p:sldId id="266" r:id="rId12"/>
+    <p:sldId id="267" r:id="rId13"/>
+    <p:sldId id="268" r:id="rId14"/>
+    <p:sldId id="269" r:id="rId15"/>
+    <p:sldId id="270" r:id="rId16"/>
+    <p:sldId id="271" r:id="rId17"/>
+    <p:sldId id="272" r:id="rId18"/>
+    <p:sldId id="273" r:id="rId19"/>
+    <p:sldId id="274" r:id="rId20"/>
+    <p:sldId id="275" r:id="rId21"/>
+    <p:sldId id="276" r:id="rId22"/>
+    <p:sldId id="277" r:id="rId23"/>
+    <p:sldId id="278" r:id="rId24"/>
+    <p:sldId id="279" r:id="rId25"/>
+    <p:sldId id="280" r:id="rId26"/>
+    <p:sldId id="281" r:id="rId27"/>
+    <p:sldId id="282" r:id="rId28"/>
+    <p:sldId id="283" r:id="rId29"/>
   </p:sldIdLst>
-  <p:sldSz cx="12191695" cy="6858000" type="screen4x3"/>
+  <p:sldSz cx="12192000" cy="6858000"/>
   <p:notesSz cx="6858000" cy="9144000"/>
   <p:defaultTextStyle>
     <a:defPPr>
@@ -131,6 +131,22 @@
       </a:defRPr>
     </a:lvl9pPr>
   </p:defaultTextStyle>
+  <p:extLst>
+    <p:ext uri="{EFAFB233-063F-42B5-8137-9DF3F51BA10A}">
+      <p15:sldGuideLst xmlns:p15="http://schemas.microsoft.com/office/powerpoint/2012/main">
+        <p15:guide id="1" orient="horz" pos="2160">
+          <p15:clr>
+            <a:srgbClr val="A4A3A4"/>
+          </p15:clr>
+        </p15:guide>
+        <p15:guide id="2" pos="2880">
+          <p15:clr>
+            <a:srgbClr val="A4A3A4"/>
+          </p15:clr>
+        </p15:guide>
+      </p15:sldGuideLst>
+    </p:ext>
+  </p:extLst>
 </p:presentation>
 </file>
 
@@ -172,10 +188,9 @@
           <a:lstStyle/>
           <a:p>
             <a:r>
-              <a:rPr lang="en-US" smtClean="0"/>
+              <a:rPr lang="en-US"/>
               <a:t>Click to edit Master title style</a:t>
             </a:r>
-            <a:endParaRPr lang="en-US"/>
           </a:p>
         </p:txBody>
       </p:sp>
@@ -291,10 +306,9 @@
           </a:lstStyle>
           <a:p>
             <a:r>
-              <a:rPr lang="en-US" smtClean="0"/>
+              <a:rPr lang="en-US"/>
               <a:t>Click to edit Master subtitle style</a:t>
             </a:r>
-            <a:endParaRPr lang="en-US"/>
           </a:p>
         </p:txBody>
       </p:sp>
@@ -315,7 +329,7 @@
           <a:p>
             <a:fld id="{5BCAD085-E8A6-8845-BD4E-CB4CCA059FC4}" type="datetimeFigureOut">
               <a:rPr lang="en-US" smtClean="0"/>
-              <a:t>1/27/13</a:t>
+              <a:t>9/14/26</a:t>
             </a:fld>
             <a:endParaRPr lang="en-US"/>
           </a:p>
@@ -357,7 +371,7 @@
           <a:p>
             <a:fld id="{C1FF6DA9-008F-8B48-92A6-B652298478BF}" type="slidenum">
               <a:rPr lang="en-US" smtClean="0"/>
-              <a:t>‹#›</a:t>
+              <a:t>‹N°›</a:t>
             </a:fld>
             <a:endParaRPr lang="en-US"/>
           </a:p>
@@ -409,10 +423,9 @@
           <a:lstStyle/>
           <a:p>
             <a:r>
-              <a:rPr lang="en-US" smtClean="0"/>
+              <a:rPr lang="en-US"/>
               <a:t>Click to edit Master title style</a:t>
             </a:r>
-            <a:endParaRPr lang="en-US"/>
           </a:p>
         </p:txBody>
       </p:sp>
@@ -433,38 +446,37 @@
           <a:p>
             <a:pPr lvl="0"/>
             <a:r>
-              <a:rPr lang="en-US" smtClean="0"/>
+              <a:rPr lang="en-US"/>
               <a:t>Click to edit Master text styles</a:t>
             </a:r>
           </a:p>
           <a:p>
             <a:pPr lvl="1"/>
             <a:r>
-              <a:rPr lang="en-US" smtClean="0"/>
+              <a:rPr lang="en-US"/>
               <a:t>Second level</a:t>
             </a:r>
           </a:p>
           <a:p>
             <a:pPr lvl="2"/>
             <a:r>
-              <a:rPr lang="en-US" smtClean="0"/>
+              <a:rPr lang="en-US"/>
               <a:t>Third level</a:t>
             </a:r>
           </a:p>
           <a:p>
             <a:pPr lvl="3"/>
             <a:r>
-              <a:rPr lang="en-US" smtClean="0"/>
+              <a:rPr lang="en-US"/>
               <a:t>Fourth level</a:t>
             </a:r>
           </a:p>
           <a:p>
             <a:pPr lvl="4"/>
             <a:r>
-              <a:rPr lang="en-US" smtClean="0"/>
+              <a:rPr lang="en-US"/>
               <a:t>Fifth level</a:t>
             </a:r>
-            <a:endParaRPr lang="en-US"/>
           </a:p>
         </p:txBody>
       </p:sp>
@@ -485,7 +497,7 @@
           <a:p>
             <a:fld id="{5BCAD085-E8A6-8845-BD4E-CB4CCA059FC4}" type="datetimeFigureOut">
               <a:rPr lang="en-US" smtClean="0"/>
-              <a:t>1/27/13</a:t>
+              <a:t>9/14/26</a:t>
             </a:fld>
             <a:endParaRPr lang="en-US"/>
           </a:p>
@@ -527,7 +539,7 @@
           <a:p>
             <a:fld id="{C1FF6DA9-008F-8B48-92A6-B652298478BF}" type="slidenum">
               <a:rPr lang="en-US" smtClean="0"/>
-              <a:t>‹#›</a:t>
+              <a:t>‹N°›</a:t>
             </a:fld>
             <a:endParaRPr lang="en-US"/>
           </a:p>
@@ -584,10 +596,9 @@
           <a:lstStyle/>
           <a:p>
             <a:r>
-              <a:rPr lang="en-US" smtClean="0"/>
+              <a:rPr lang="en-US"/>
               <a:t>Click to edit Master title style</a:t>
             </a:r>
-            <a:endParaRPr lang="en-US"/>
           </a:p>
         </p:txBody>
       </p:sp>
@@ -613,38 +624,37 @@
           <a:p>
             <a:pPr lvl="0"/>
             <a:r>
-              <a:rPr lang="en-US" smtClean="0"/>
+              <a:rPr lang="en-US"/>
               <a:t>Click to edit Master text styles</a:t>
             </a:r>
           </a:p>
           <a:p>
             <a:pPr lvl="1"/>
             <a:r>
-              <a:rPr lang="en-US" smtClean="0"/>
+              <a:rPr lang="en-US"/>
               <a:t>Second level</a:t>
             </a:r>
           </a:p>
           <a:p>
             <a:pPr lvl="2"/>
             <a:r>
-              <a:rPr lang="en-US" smtClean="0"/>
+              <a:rPr lang="en-US"/>
               <a:t>Third level</a:t>
             </a:r>
           </a:p>
           <a:p>
             <a:pPr lvl="3"/>
             <a:r>
-              <a:rPr lang="en-US" smtClean="0"/>
+              <a:rPr lang="en-US"/>
               <a:t>Fourth level</a:t>
             </a:r>
           </a:p>
           <a:p>
             <a:pPr lvl="4"/>
             <a:r>
-              <a:rPr lang="en-US" smtClean="0"/>
+              <a:rPr lang="en-US"/>
               <a:t>Fifth level</a:t>
             </a:r>
-            <a:endParaRPr lang="en-US"/>
           </a:p>
         </p:txBody>
       </p:sp>
@@ -665,7 +675,7 @@
           <a:p>
             <a:fld id="{5BCAD085-E8A6-8845-BD4E-CB4CCA059FC4}" type="datetimeFigureOut">
               <a:rPr lang="en-US" smtClean="0"/>
-              <a:t>1/27/13</a:t>
+              <a:t>9/14/26</a:t>
             </a:fld>
             <a:endParaRPr lang="en-US"/>
           </a:p>
@@ -707,7 +717,7 @@
           <a:p>
             <a:fld id="{C1FF6DA9-008F-8B48-92A6-B652298478BF}" type="slidenum">
               <a:rPr lang="en-US" smtClean="0"/>
-              <a:t>‹#›</a:t>
+              <a:t>‹N°›</a:t>
             </a:fld>
             <a:endParaRPr lang="en-US"/>
           </a:p>
@@ -759,10 +769,9 @@
           <a:lstStyle/>
           <a:p>
             <a:r>
-              <a:rPr lang="en-US" smtClean="0"/>
+              <a:rPr lang="en-US"/>
               <a:t>Click to edit Master title style</a:t>
             </a:r>
-            <a:endParaRPr lang="en-US"/>
           </a:p>
         </p:txBody>
       </p:sp>
@@ -783,38 +792,37 @@
           <a:p>
             <a:pPr lvl="0"/>
             <a:r>
-              <a:rPr lang="en-US" smtClean="0"/>
+              <a:rPr lang="en-US"/>
               <a:t>Click to edit Master text styles</a:t>
             </a:r>
           </a:p>
           <a:p>
             <a:pPr lvl="1"/>
             <a:r>
-              <a:rPr lang="en-US" smtClean="0"/>
+              <a:rPr lang="en-US"/>
               <a:t>Second level</a:t>
             </a:r>
           </a:p>
           <a:p>
             <a:pPr lvl="2"/>
             <a:r>
-              <a:rPr lang="en-US" smtClean="0"/>
+              <a:rPr lang="en-US"/>
               <a:t>Third level</a:t>
             </a:r>
           </a:p>
           <a:p>
             <a:pPr lvl="3"/>
             <a:r>
-              <a:rPr lang="en-US" smtClean="0"/>
+              <a:rPr lang="en-US"/>
               <a:t>Fourth level</a:t>
             </a:r>
           </a:p>
           <a:p>
             <a:pPr lvl="4"/>
             <a:r>
-              <a:rPr lang="en-US" smtClean="0"/>
+              <a:rPr lang="en-US"/>
               <a:t>Fifth level</a:t>
             </a:r>
-            <a:endParaRPr lang="en-US"/>
           </a:p>
         </p:txBody>
       </p:sp>
@@ -835,7 +843,7 @@
           <a:p>
             <a:fld id="{5BCAD085-E8A6-8845-BD4E-CB4CCA059FC4}" type="datetimeFigureOut">
               <a:rPr lang="en-US" smtClean="0"/>
-              <a:t>1/27/13</a:t>
+              <a:t>9/14/26</a:t>
             </a:fld>
             <a:endParaRPr lang="en-US"/>
           </a:p>
@@ -877,7 +885,7 @@
           <a:p>
             <a:fld id="{C1FF6DA9-008F-8B48-92A6-B652298478BF}" type="slidenum">
               <a:rPr lang="en-US" smtClean="0"/>
-              <a:t>‹#›</a:t>
+              <a:t>‹N°›</a:t>
             </a:fld>
             <a:endParaRPr lang="en-US"/>
           </a:p>
@@ -938,10 +946,9 @@
           </a:lstStyle>
           <a:p>
             <a:r>
-              <a:rPr lang="en-US" smtClean="0"/>
+              <a:rPr lang="en-US"/>
               <a:t>Click to edit Master title style</a:t>
             </a:r>
-            <a:endParaRPr lang="en-US"/>
           </a:p>
         </p:txBody>
       </p:sp>
@@ -1058,7 +1065,7 @@
           <a:p>
             <a:pPr lvl="0"/>
             <a:r>
-              <a:rPr lang="en-US" smtClean="0"/>
+              <a:rPr lang="en-US"/>
               <a:t>Click to edit Master text styles</a:t>
             </a:r>
           </a:p>
@@ -1081,7 +1088,7 @@
           <a:p>
             <a:fld id="{5BCAD085-E8A6-8845-BD4E-CB4CCA059FC4}" type="datetimeFigureOut">
               <a:rPr lang="en-US" smtClean="0"/>
-              <a:t>1/27/13</a:t>
+              <a:t>9/14/26</a:t>
             </a:fld>
             <a:endParaRPr lang="en-US"/>
           </a:p>
@@ -1123,7 +1130,7 @@
           <a:p>
             <a:fld id="{C1FF6DA9-008F-8B48-92A6-B652298478BF}" type="slidenum">
               <a:rPr lang="en-US" smtClean="0"/>
-              <a:t>‹#›</a:t>
+              <a:t>‹N°›</a:t>
             </a:fld>
             <a:endParaRPr lang="en-US"/>
           </a:p>
@@ -1175,10 +1182,9 @@
           <a:lstStyle/>
           <a:p>
             <a:r>
-              <a:rPr lang="en-US" smtClean="0"/>
+              <a:rPr lang="en-US"/>
               <a:t>Click to edit Master title style</a:t>
             </a:r>
-            <a:endParaRPr lang="en-US"/>
           </a:p>
         </p:txBody>
       </p:sp>
@@ -1232,38 +1238,37 @@
           <a:p>
             <a:pPr lvl="0"/>
             <a:r>
-              <a:rPr lang="en-US" smtClean="0"/>
+              <a:rPr lang="en-US"/>
               <a:t>Click to edit Master text styles</a:t>
             </a:r>
           </a:p>
           <a:p>
             <a:pPr lvl="1"/>
             <a:r>
-              <a:rPr lang="en-US" smtClean="0"/>
+              <a:rPr lang="en-US"/>
               <a:t>Second level</a:t>
             </a:r>
           </a:p>
           <a:p>
             <a:pPr lvl="2"/>
             <a:r>
-              <a:rPr lang="en-US" smtClean="0"/>
+              <a:rPr lang="en-US"/>
               <a:t>Third level</a:t>
             </a:r>
           </a:p>
           <a:p>
             <a:pPr lvl="3"/>
             <a:r>
-              <a:rPr lang="en-US" smtClean="0"/>
+              <a:rPr lang="en-US"/>
               <a:t>Fourth level</a:t>
             </a:r>
           </a:p>
           <a:p>
             <a:pPr lvl="4"/>
             <a:r>
-              <a:rPr lang="en-US" smtClean="0"/>
+              <a:rPr lang="en-US"/>
               <a:t>Fifth level</a:t>
             </a:r>
-            <a:endParaRPr lang="en-US"/>
           </a:p>
         </p:txBody>
       </p:sp>
@@ -1317,38 +1322,37 @@
           <a:p>
             <a:pPr lvl="0"/>
             <a:r>
-              <a:rPr lang="en-US" smtClean="0"/>
+              <a:rPr lang="en-US"/>
               <a:t>Click to edit Master text styles</a:t>
             </a:r>
           </a:p>
           <a:p>
             <a:pPr lvl="1"/>
             <a:r>
-              <a:rPr lang="en-US" smtClean="0"/>
+              <a:rPr lang="en-US"/>
               <a:t>Second level</a:t>
             </a:r>
           </a:p>
           <a:p>
             <a:pPr lvl="2"/>
             <a:r>
-              <a:rPr lang="en-US" smtClean="0"/>
+              <a:rPr lang="en-US"/>
               <a:t>Third level</a:t>
             </a:r>
           </a:p>
           <a:p>
             <a:pPr lvl="3"/>
             <a:r>
-              <a:rPr lang="en-US" smtClean="0"/>
+              <a:rPr lang="en-US"/>
               <a:t>Fourth level</a:t>
             </a:r>
           </a:p>
           <a:p>
             <a:pPr lvl="4"/>
             <a:r>
-              <a:rPr lang="en-US" smtClean="0"/>
+              <a:rPr lang="en-US"/>
               <a:t>Fifth level</a:t>
             </a:r>
-            <a:endParaRPr lang="en-US"/>
           </a:p>
         </p:txBody>
       </p:sp>
@@ -1369,7 +1373,7 @@
           <a:p>
             <a:fld id="{5BCAD085-E8A6-8845-BD4E-CB4CCA059FC4}" type="datetimeFigureOut">
               <a:rPr lang="en-US" smtClean="0"/>
-              <a:t>1/27/13</a:t>
+              <a:t>9/14/26</a:t>
             </a:fld>
             <a:endParaRPr lang="en-US"/>
           </a:p>
@@ -1411,7 +1415,7 @@
           <a:p>
             <a:fld id="{C1FF6DA9-008F-8B48-92A6-B652298478BF}" type="slidenum">
               <a:rPr lang="en-US" smtClean="0"/>
-              <a:t>‹#›</a:t>
+              <a:t>‹N°›</a:t>
             </a:fld>
             <a:endParaRPr lang="en-US"/>
           </a:p>
@@ -1467,10 +1471,9 @@
           </a:lstStyle>
           <a:p>
             <a:r>
-              <a:rPr lang="en-US" smtClean="0"/>
+              <a:rPr lang="en-US"/>
               <a:t>Click to edit Master title style</a:t>
             </a:r>
-            <a:endParaRPr lang="en-US"/>
           </a:p>
         </p:txBody>
       </p:sp>
@@ -1533,7 +1536,7 @@
           <a:p>
             <a:pPr lvl="0"/>
             <a:r>
-              <a:rPr lang="en-US" smtClean="0"/>
+              <a:rPr lang="en-US"/>
               <a:t>Click to edit Master text styles</a:t>
             </a:r>
           </a:p>
@@ -1589,38 +1592,37 @@
           <a:p>
             <a:pPr lvl="0"/>
             <a:r>
-              <a:rPr lang="en-US" smtClean="0"/>
+              <a:rPr lang="en-US"/>
               <a:t>Click to edit Master text styles</a:t>
             </a:r>
           </a:p>
           <a:p>
             <a:pPr lvl="1"/>
             <a:r>
-              <a:rPr lang="en-US" smtClean="0"/>
+              <a:rPr lang="en-US"/>
               <a:t>Second level</a:t>
             </a:r>
           </a:p>
           <a:p>
             <a:pPr lvl="2"/>
             <a:r>
-              <a:rPr lang="en-US" smtClean="0"/>
+              <a:rPr lang="en-US"/>
               <a:t>Third level</a:t>
             </a:r>
           </a:p>
           <a:p>
             <a:pPr lvl="3"/>
             <a:r>
-              <a:rPr lang="en-US" smtClean="0"/>
+              <a:rPr lang="en-US"/>
               <a:t>Fourth level</a:t>
             </a:r>
           </a:p>
           <a:p>
             <a:pPr lvl="4"/>
             <a:r>
-              <a:rPr lang="en-US" smtClean="0"/>
+              <a:rPr lang="en-US"/>
               <a:t>Fifth level</a:t>
             </a:r>
-            <a:endParaRPr lang="en-US"/>
           </a:p>
         </p:txBody>
       </p:sp>
@@ -1683,7 +1685,7 @@
           <a:p>
             <a:pPr lvl="0"/>
             <a:r>
-              <a:rPr lang="en-US" smtClean="0"/>
+              <a:rPr lang="en-US"/>
               <a:t>Click to edit Master text styles</a:t>
             </a:r>
           </a:p>
@@ -1739,38 +1741,37 @@
           <a:p>
             <a:pPr lvl="0"/>
             <a:r>
-              <a:rPr lang="en-US" smtClean="0"/>
+              <a:rPr lang="en-US"/>
               <a:t>Click to edit Master text styles</a:t>
             </a:r>
           </a:p>
           <a:p>
             <a:pPr lvl="1"/>
             <a:r>
-              <a:rPr lang="en-US" smtClean="0"/>
+              <a:rPr lang="en-US"/>
               <a:t>Second level</a:t>
             </a:r>
           </a:p>
           <a:p>
             <a:pPr lvl="2"/>
             <a:r>
-              <a:rPr lang="en-US" smtClean="0"/>
+              <a:rPr lang="en-US"/>
               <a:t>Third level</a:t>
             </a:r>
           </a:p>
           <a:p>
             <a:pPr lvl="3"/>
             <a:r>
-              <a:rPr lang="en-US" smtClean="0"/>
+              <a:rPr lang="en-US"/>
               <a:t>Fourth level</a:t>
             </a:r>
           </a:p>
           <a:p>
             <a:pPr lvl="4"/>
             <a:r>
-              <a:rPr lang="en-US" smtClean="0"/>
+              <a:rPr lang="en-US"/>
               <a:t>Fifth level</a:t>
             </a:r>
-            <a:endParaRPr lang="en-US"/>
           </a:p>
         </p:txBody>
       </p:sp>
@@ -1791,7 +1792,7 @@
           <a:p>
             <a:fld id="{5BCAD085-E8A6-8845-BD4E-CB4CCA059FC4}" type="datetimeFigureOut">
               <a:rPr lang="en-US" smtClean="0"/>
-              <a:t>1/27/13</a:t>
+              <a:t>9/14/26</a:t>
             </a:fld>
             <a:endParaRPr lang="en-US"/>
           </a:p>
@@ -1833,7 +1834,7 @@
           <a:p>
             <a:fld id="{C1FF6DA9-008F-8B48-92A6-B652298478BF}" type="slidenum">
               <a:rPr lang="en-US" smtClean="0"/>
-              <a:t>‹#›</a:t>
+              <a:t>‹N°›</a:t>
             </a:fld>
             <a:endParaRPr lang="en-US"/>
           </a:p>
@@ -1885,10 +1886,9 @@
           <a:lstStyle/>
           <a:p>
             <a:r>
-              <a:rPr lang="en-US" smtClean="0"/>
+              <a:rPr lang="en-US"/>
               <a:t>Click to edit Master title style</a:t>
             </a:r>
-            <a:endParaRPr lang="en-US"/>
           </a:p>
         </p:txBody>
       </p:sp>
@@ -1909,7 +1909,7 @@
           <a:p>
             <a:fld id="{5BCAD085-E8A6-8845-BD4E-CB4CCA059FC4}" type="datetimeFigureOut">
               <a:rPr lang="en-US" smtClean="0"/>
-              <a:t>1/27/13</a:t>
+              <a:t>9/14/26</a:t>
             </a:fld>
             <a:endParaRPr lang="en-US"/>
           </a:p>
@@ -1951,7 +1951,7 @@
           <a:p>
             <a:fld id="{C1FF6DA9-008F-8B48-92A6-B652298478BF}" type="slidenum">
               <a:rPr lang="en-US" smtClean="0"/>
-              <a:t>‹#›</a:t>
+              <a:t>‹N°›</a:t>
             </a:fld>
             <a:endParaRPr lang="en-US"/>
           </a:p>
@@ -2004,7 +2004,7 @@
           <a:p>
             <a:fld id="{5BCAD085-E8A6-8845-BD4E-CB4CCA059FC4}" type="datetimeFigureOut">
               <a:rPr lang="en-US" smtClean="0"/>
-              <a:t>1/27/13</a:t>
+              <a:t>9/14/26</a:t>
             </a:fld>
             <a:endParaRPr lang="en-US"/>
           </a:p>
@@ -2046,7 +2046,7 @@
           <a:p>
             <a:fld id="{C1FF6DA9-008F-8B48-92A6-B652298478BF}" type="slidenum">
               <a:rPr lang="en-US" smtClean="0"/>
-              <a:t>‹#›</a:t>
+              <a:t>‹N°›</a:t>
             </a:fld>
             <a:endParaRPr lang="en-US"/>
           </a:p>
@@ -2107,10 +2107,9 @@
           </a:lstStyle>
           <a:p>
             <a:r>
-              <a:rPr lang="en-US" smtClean="0"/>
+              <a:rPr lang="en-US"/>
               <a:t>Click to edit Master title style</a:t>
             </a:r>
-            <a:endParaRPr lang="en-US"/>
           </a:p>
         </p:txBody>
       </p:sp>
@@ -2164,38 +2163,37 @@
           <a:p>
             <a:pPr lvl="0"/>
             <a:r>
-              <a:rPr lang="en-US" smtClean="0"/>
+              <a:rPr lang="en-US"/>
               <a:t>Click to edit Master text styles</a:t>
             </a:r>
           </a:p>
           <a:p>
             <a:pPr lvl="1"/>
             <a:r>
-              <a:rPr lang="en-US" smtClean="0"/>
+              <a:rPr lang="en-US"/>
               <a:t>Second level</a:t>
             </a:r>
           </a:p>
           <a:p>
             <a:pPr lvl="2"/>
             <a:r>
-              <a:rPr lang="en-US" smtClean="0"/>
+              <a:rPr lang="en-US"/>
               <a:t>Third level</a:t>
             </a:r>
           </a:p>
           <a:p>
             <a:pPr lvl="3"/>
             <a:r>
-              <a:rPr lang="en-US" smtClean="0"/>
+              <a:rPr lang="en-US"/>
               <a:t>Fourth level</a:t>
             </a:r>
           </a:p>
           <a:p>
             <a:pPr lvl="4"/>
             <a:r>
-              <a:rPr lang="en-US" smtClean="0"/>
+              <a:rPr lang="en-US"/>
               <a:t>Fifth level</a:t>
             </a:r>
-            <a:endParaRPr lang="en-US"/>
           </a:p>
         </p:txBody>
       </p:sp>
@@ -2258,7 +2256,7 @@
           <a:p>
             <a:pPr lvl="0"/>
             <a:r>
-              <a:rPr lang="en-US" smtClean="0"/>
+              <a:rPr lang="en-US"/>
               <a:t>Click to edit Master text styles</a:t>
             </a:r>
           </a:p>
@@ -2281,7 +2279,7 @@
           <a:p>
             <a:fld id="{5BCAD085-E8A6-8845-BD4E-CB4CCA059FC4}" type="datetimeFigureOut">
               <a:rPr lang="en-US" smtClean="0"/>
-              <a:t>1/27/13</a:t>
+              <a:t>9/14/26</a:t>
             </a:fld>
             <a:endParaRPr lang="en-US"/>
           </a:p>
@@ -2323,7 +2321,7 @@
           <a:p>
             <a:fld id="{C1FF6DA9-008F-8B48-92A6-B652298478BF}" type="slidenum">
               <a:rPr lang="en-US" smtClean="0"/>
-              <a:t>‹#›</a:t>
+              <a:t>‹N°›</a:t>
             </a:fld>
             <a:endParaRPr lang="en-US"/>
           </a:p>
@@ -2384,10 +2382,9 @@
           </a:lstStyle>
           <a:p>
             <a:r>
-              <a:rPr lang="en-US" smtClean="0"/>
+              <a:rPr lang="en-US"/>
               <a:t>Click to edit Master title style</a:t>
             </a:r>
-            <a:endParaRPr lang="en-US"/>
           </a:p>
         </p:txBody>
       </p:sp>
@@ -2511,7 +2508,7 @@
           <a:p>
             <a:pPr lvl="0"/>
             <a:r>
-              <a:rPr lang="en-US" smtClean="0"/>
+              <a:rPr lang="en-US"/>
               <a:t>Click to edit Master text styles</a:t>
             </a:r>
           </a:p>
@@ -2534,7 +2531,7 @@
           <a:p>
             <a:fld id="{5BCAD085-E8A6-8845-BD4E-CB4CCA059FC4}" type="datetimeFigureOut">
               <a:rPr lang="en-US" smtClean="0"/>
-              <a:t>1/27/13</a:t>
+              <a:t>9/14/26</a:t>
             </a:fld>
             <a:endParaRPr lang="en-US"/>
           </a:p>
@@ -2576,7 +2573,7 @@
           <a:p>
             <a:fld id="{C1FF6DA9-008F-8B48-92A6-B652298478BF}" type="slidenum">
               <a:rPr lang="en-US" smtClean="0"/>
-              <a:t>‹#›</a:t>
+              <a:t>‹N°›</a:t>
             </a:fld>
             <a:endParaRPr lang="en-US"/>
           </a:p>
@@ -2643,10 +2640,9 @@
           <a:lstStyle/>
           <a:p>
             <a:r>
-              <a:rPr lang="en-US" smtClean="0"/>
+              <a:rPr lang="en-US"/>
               <a:t>Click to edit Master title style</a:t>
             </a:r>
-            <a:endParaRPr lang="en-US"/>
           </a:p>
         </p:txBody>
       </p:sp>
@@ -2677,38 +2673,37 @@
           <a:p>
             <a:pPr lvl="0"/>
             <a:r>
-              <a:rPr lang="en-US" smtClean="0"/>
+              <a:rPr lang="en-US"/>
               <a:t>Click to edit Master text styles</a:t>
             </a:r>
           </a:p>
           <a:p>
             <a:pPr lvl="1"/>
             <a:r>
-              <a:rPr lang="en-US" smtClean="0"/>
+              <a:rPr lang="en-US"/>
               <a:t>Second level</a:t>
             </a:r>
           </a:p>
           <a:p>
             <a:pPr lvl="2"/>
             <a:r>
-              <a:rPr lang="en-US" smtClean="0"/>
+              <a:rPr lang="en-US"/>
               <a:t>Third level</a:t>
             </a:r>
           </a:p>
           <a:p>
             <a:pPr lvl="3"/>
             <a:r>
-              <a:rPr lang="en-US" smtClean="0"/>
+              <a:rPr lang="en-US"/>
               <a:t>Fourth level</a:t>
             </a:r>
           </a:p>
           <a:p>
             <a:pPr lvl="4"/>
             <a:r>
-              <a:rPr lang="en-US" smtClean="0"/>
+              <a:rPr lang="en-US"/>
               <a:t>Fifth level</a:t>
             </a:r>
-            <a:endParaRPr lang="en-US"/>
           </a:p>
         </p:txBody>
       </p:sp>
@@ -2747,7 +2742,7 @@
           <a:p>
             <a:fld id="{5BCAD085-E8A6-8845-BD4E-CB4CCA059FC4}" type="datetimeFigureOut">
               <a:rPr lang="en-US" smtClean="0"/>
-              <a:t>1/27/13</a:t>
+              <a:t>9/14/26</a:t>
             </a:fld>
             <a:endParaRPr lang="en-US"/>
           </a:p>
@@ -2825,7 +2820,7 @@
           <a:p>
             <a:fld id="{C1FF6DA9-008F-8B48-92A6-B652298478BF}" type="slidenum">
               <a:rPr lang="en-US" smtClean="0"/>
-              <a:t>‹#›</a:t>
+              <a:t>‹N°›</a:t>
             </a:fld>
             <a:endParaRPr lang="en-US"/>
           </a:p>
@@ -3106,7 +3101,7 @@
 </file>
 
 <file path=ppt/slides/slide1.xml><?xml version="1.0" encoding="utf-8"?>
-<p:sld xmlns:a="http://schemas.openxmlformats.org/drawingml/2006/main" xmlns:p="http://schemas.openxmlformats.org/presentationml/2006/main" xmlns:r="http://schemas.openxmlformats.org/officeDocument/2006/relationships">
+<p:sld xmlns:a="http://schemas.openxmlformats.org/drawingml/2006/main" xmlns:r="http://schemas.openxmlformats.org/officeDocument/2006/relationships" xmlns:p="http://schemas.openxmlformats.org/presentationml/2006/main">
   <p:cSld>
     <p:bg>
       <p:bgPr>
@@ -3122,7 +3117,14 @@
         <p:cNvGrpSpPr/>
         <p:nvPr/>
       </p:nvGrpSpPr>
-      <p:grpSpPr/>
+      <p:grpSpPr>
+        <a:xfrm>
+          <a:off x="0" y="0"/>
+          <a:ext cx="0" cy="0"/>
+          <a:chOff x="0" y="0"/>
+          <a:chExt cx="0" cy="0"/>
+        </a:xfrm>
+      </p:grpSpPr>
       <p:sp>
         <p:nvSpPr>
           <p:cNvPr id="2" name="Oval 1"/>
@@ -3164,6 +3166,7 @@
           <a:lstStyle/>
           <a:p>
             <a:pPr algn="ctr"/>
+            <a:endParaRPr/>
           </a:p>
         </p:txBody>
       </p:sp>
@@ -3208,6 +3211,7 @@
           <a:lstStyle/>
           <a:p>
             <a:pPr algn="ctr"/>
+            <a:endParaRPr/>
           </a:p>
         </p:txBody>
       </p:sp>
@@ -3252,6 +3256,7 @@
           <a:lstStyle/>
           <a:p>
             <a:pPr algn="ctr"/>
+            <a:endParaRPr/>
           </a:p>
         </p:txBody>
       </p:sp>
@@ -3296,6 +3301,7 @@
           <a:lstStyle/>
           <a:p>
             <a:pPr algn="ctr"/>
+            <a:endParaRPr/>
           </a:p>
         </p:txBody>
       </p:sp>
@@ -3340,6 +3346,7 @@
           <a:lstStyle/>
           <a:p>
             <a:pPr algn="ctr"/>
+            <a:endParaRPr/>
           </a:p>
         </p:txBody>
       </p:sp>
@@ -3384,6 +3391,7 @@
           <a:lstStyle/>
           <a:p>
             <a:pPr algn="ctr"/>
+            <a:endParaRPr/>
           </a:p>
         </p:txBody>
       </p:sp>
@@ -3428,6 +3436,7 @@
           <a:lstStyle/>
           <a:p>
             <a:pPr algn="ctr"/>
+            <a:endParaRPr/>
           </a:p>
         </p:txBody>
       </p:sp>
@@ -3472,6 +3481,7 @@
           <a:lstStyle/>
           <a:p>
             <a:pPr algn="ctr"/>
+            <a:endParaRPr/>
           </a:p>
         </p:txBody>
       </p:sp>
@@ -3516,6 +3526,7 @@
           <a:lstStyle/>
           <a:p>
             <a:pPr algn="ctr"/>
+            <a:endParaRPr/>
           </a:p>
         </p:txBody>
       </p:sp>
@@ -3560,6 +3571,7 @@
           <a:lstStyle/>
           <a:p>
             <a:pPr algn="ctr"/>
+            <a:endParaRPr/>
           </a:p>
         </p:txBody>
       </p:sp>
@@ -3604,6 +3616,7 @@
           <a:lstStyle/>
           <a:p>
             <a:pPr algn="ctr"/>
+            <a:endParaRPr/>
           </a:p>
         </p:txBody>
       </p:sp>
@@ -3648,6 +3661,7 @@
           <a:lstStyle/>
           <a:p>
             <a:pPr algn="ctr"/>
+            <a:endParaRPr/>
           </a:p>
         </p:txBody>
       </p:sp>
@@ -3692,6 +3706,7 @@
           <a:lstStyle/>
           <a:p>
             <a:pPr algn="ctr"/>
+            <a:endParaRPr/>
           </a:p>
         </p:txBody>
       </p:sp>
@@ -3736,6 +3751,7 @@
           <a:lstStyle/>
           <a:p>
             <a:pPr algn="ctr"/>
+            <a:endParaRPr/>
           </a:p>
         </p:txBody>
       </p:sp>
@@ -3780,6 +3796,7 @@
           <a:lstStyle/>
           <a:p>
             <a:pPr algn="ctr"/>
+            <a:endParaRPr/>
           </a:p>
         </p:txBody>
       </p:sp>
@@ -3824,6 +3841,7 @@
           <a:lstStyle/>
           <a:p>
             <a:pPr algn="ctr"/>
+            <a:endParaRPr/>
           </a:p>
         </p:txBody>
       </p:sp>
@@ -3868,6 +3886,7 @@
           <a:lstStyle/>
           <a:p>
             <a:pPr algn="ctr"/>
+            <a:endParaRPr/>
           </a:p>
         </p:txBody>
       </p:sp>
@@ -3912,6 +3931,7 @@
           <a:lstStyle/>
           <a:p>
             <a:pPr algn="ctr"/>
+            <a:endParaRPr/>
           </a:p>
         </p:txBody>
       </p:sp>
@@ -3956,6 +3976,7 @@
           <a:lstStyle/>
           <a:p>
             <a:pPr algn="ctr"/>
+            <a:endParaRPr/>
           </a:p>
         </p:txBody>
       </p:sp>
@@ -4000,6 +4021,7 @@
           <a:lstStyle/>
           <a:p>
             <a:pPr algn="ctr"/>
+            <a:endParaRPr/>
           </a:p>
         </p:txBody>
       </p:sp>
@@ -4044,6 +4066,7 @@
           <a:lstStyle/>
           <a:p>
             <a:pPr algn="ctr"/>
+            <a:endParaRPr/>
           </a:p>
         </p:txBody>
       </p:sp>
@@ -4088,6 +4111,7 @@
           <a:lstStyle/>
           <a:p>
             <a:pPr algn="ctr"/>
+            <a:endParaRPr/>
           </a:p>
         </p:txBody>
       </p:sp>
@@ -4132,6 +4156,7 @@
           <a:lstStyle/>
           <a:p>
             <a:pPr algn="ctr"/>
+            <a:endParaRPr/>
           </a:p>
         </p:txBody>
       </p:sp>
@@ -4176,6 +4201,7 @@
           <a:lstStyle/>
           <a:p>
             <a:pPr algn="ctr"/>
+            <a:endParaRPr/>
           </a:p>
         </p:txBody>
       </p:sp>
@@ -4220,6 +4246,7 @@
           <a:lstStyle/>
           <a:p>
             <a:pPr algn="ctr"/>
+            <a:endParaRPr/>
           </a:p>
         </p:txBody>
       </p:sp>
@@ -4264,6 +4291,7 @@
           <a:lstStyle/>
           <a:p>
             <a:pPr algn="ctr"/>
+            <a:endParaRPr/>
           </a:p>
         </p:txBody>
       </p:sp>
@@ -4308,6 +4336,7 @@
           <a:lstStyle/>
           <a:p>
             <a:pPr algn="ctr"/>
+            <a:endParaRPr/>
           </a:p>
         </p:txBody>
       </p:sp>
@@ -4352,6 +4381,7 @@
           <a:lstStyle/>
           <a:p>
             <a:pPr algn="ctr"/>
+            <a:endParaRPr/>
           </a:p>
         </p:txBody>
       </p:sp>
@@ -4396,6 +4426,7 @@
           <a:lstStyle/>
           <a:p>
             <a:pPr algn="ctr"/>
+            <a:endParaRPr/>
           </a:p>
         </p:txBody>
       </p:sp>
@@ -4440,6 +4471,7 @@
           <a:lstStyle/>
           <a:p>
             <a:pPr algn="ctr"/>
+            <a:endParaRPr/>
           </a:p>
         </p:txBody>
       </p:sp>
@@ -4484,6 +4516,7 @@
           <a:lstStyle/>
           <a:p>
             <a:pPr algn="ctr"/>
+            <a:endParaRPr/>
           </a:p>
         </p:txBody>
       </p:sp>
@@ -4504,7 +4537,7 @@
           <a:noFill/>
         </p:spPr>
         <p:txBody>
-          <a:bodyPr wrap="square" anchor="t" lIns="0" rIns="0" tIns="0" bIns="0">
+          <a:bodyPr wrap="square" lIns="0" tIns="0" rIns="0" bIns="0" anchor="t">
             <a:spAutoFit/>
           </a:bodyPr>
           <a:lstStyle/>
@@ -4546,7 +4579,7 @@
           <a:noFill/>
         </p:spPr>
         <p:txBody>
-          <a:bodyPr wrap="square" anchor="t" lIns="0" rIns="0" tIns="0" bIns="0">
+          <a:bodyPr wrap="square" lIns="0" tIns="0" rIns="0" bIns="0" anchor="t">
             <a:spAutoFit/>
           </a:bodyPr>
           <a:lstStyle/>
@@ -4607,7 +4640,7 @@
           <a:noFill/>
         </p:spPr>
         <p:txBody>
-          <a:bodyPr wrap="square" anchor="t" lIns="0" rIns="0" tIns="0" bIns="0">
+          <a:bodyPr wrap="square" lIns="0" tIns="0" rIns="0" bIns="0" anchor="t">
             <a:spAutoFit/>
           </a:bodyPr>
           <a:lstStyle/>
@@ -4649,7 +4682,7 @@
           <a:noFill/>
         </p:spPr>
         <p:txBody>
-          <a:bodyPr wrap="square" anchor="t" lIns="0" rIns="0" tIns="0" bIns="0">
+          <a:bodyPr wrap="square" lIns="0" tIns="0" rIns="0" bIns="0" anchor="t">
             <a:spAutoFit/>
           </a:bodyPr>
           <a:lstStyle/>
@@ -4691,7 +4724,7 @@
           <a:noFill/>
         </p:spPr>
         <p:txBody>
-          <a:bodyPr wrap="square" anchor="t" lIns="0" rIns="0" tIns="0" bIns="0">
+          <a:bodyPr wrap="square" lIns="0" tIns="0" rIns="0" bIns="0" anchor="t">
             <a:spAutoFit/>
           </a:bodyPr>
           <a:lstStyle/>
@@ -4725,7 +4758,7 @@
 </file>
 
 <file path=ppt/slides/slide10.xml><?xml version="1.0" encoding="utf-8"?>
-<p:sld xmlns:a="http://schemas.openxmlformats.org/drawingml/2006/main" xmlns:p="http://schemas.openxmlformats.org/presentationml/2006/main" xmlns:r="http://schemas.openxmlformats.org/officeDocument/2006/relationships">
+<p:sld xmlns:a="http://schemas.openxmlformats.org/drawingml/2006/main" xmlns:r="http://schemas.openxmlformats.org/officeDocument/2006/relationships" xmlns:p="http://schemas.openxmlformats.org/presentationml/2006/main">
   <p:cSld>
     <p:bg>
       <p:bgPr>
@@ -4741,7 +4774,14 @@
         <p:cNvGrpSpPr/>
         <p:nvPr/>
       </p:nvGrpSpPr>
-      <p:grpSpPr/>
+      <p:grpSpPr>
+        <a:xfrm>
+          <a:off x="0" y="0"/>
+          <a:ext cx="0" cy="0"/>
+          <a:chOff x="0" y="0"/>
+          <a:chExt cx="0" cy="0"/>
+        </a:xfrm>
+      </p:grpSpPr>
       <p:sp>
         <p:nvSpPr>
           <p:cNvPr id="2" name="Rectangle 1"/>
@@ -4783,6 +4823,7 @@
           <a:lstStyle/>
           <a:p>
             <a:pPr algn="ctr"/>
+            <a:endParaRPr/>
           </a:p>
         </p:txBody>
       </p:sp>
@@ -4803,7 +4844,7 @@
           <a:noFill/>
         </p:spPr>
         <p:txBody>
-          <a:bodyPr wrap="square" anchor="t" lIns="0" rIns="0" tIns="0" bIns="0">
+          <a:bodyPr wrap="square" lIns="0" tIns="0" rIns="0" bIns="0" anchor="t">
             <a:spAutoFit/>
           </a:bodyPr>
           <a:lstStyle/>
@@ -4845,7 +4886,7 @@
           <a:noFill/>
         </p:spPr>
         <p:txBody>
-          <a:bodyPr wrap="square" anchor="t" lIns="0" rIns="0" tIns="0" bIns="0">
+          <a:bodyPr wrap="square" lIns="0" tIns="0" rIns="0" bIns="0" anchor="t">
             <a:spAutoFit/>
           </a:bodyPr>
           <a:lstStyle/>
@@ -4887,7 +4928,7 @@
           <a:noFill/>
         </p:spPr>
         <p:txBody>
-          <a:bodyPr wrap="square" anchor="t" lIns="0" rIns="0" tIns="0" bIns="0">
+          <a:bodyPr wrap="square" lIns="0" tIns="0" rIns="0" bIns="0" anchor="t">
             <a:spAutoFit/>
           </a:bodyPr>
           <a:lstStyle/>
@@ -4972,6 +5013,7 @@
           <a:lstStyle/>
           <a:p>
             <a:pPr algn="ctr"/>
+            <a:endParaRPr/>
           </a:p>
         </p:txBody>
       </p:sp>
@@ -5016,6 +5058,7 @@
           <a:lstStyle/>
           <a:p>
             <a:pPr algn="ctr"/>
+            <a:endParaRPr/>
           </a:p>
         </p:txBody>
       </p:sp>
@@ -5036,7 +5079,7 @@
           <a:noFill/>
         </p:spPr>
         <p:txBody>
-          <a:bodyPr wrap="square" anchor="t" lIns="0" rIns="0" tIns="0" bIns="0">
+          <a:bodyPr wrap="square" lIns="0" tIns="0" rIns="0" bIns="0" anchor="t">
             <a:spAutoFit/>
           </a:bodyPr>
           <a:lstStyle/>
@@ -5078,7 +5121,7 @@
           <a:noFill/>
         </p:spPr>
         <p:txBody>
-          <a:bodyPr wrap="square" anchor="t" lIns="0" rIns="0" tIns="0" bIns="0">
+          <a:bodyPr wrap="square" lIns="0" tIns="0" rIns="0" bIns="0" anchor="t">
             <a:spAutoFit/>
           </a:bodyPr>
           <a:lstStyle/>
@@ -5144,6 +5187,7 @@
           <a:lstStyle/>
           <a:p>
             <a:pPr algn="ctr"/>
+            <a:endParaRPr/>
           </a:p>
         </p:txBody>
       </p:sp>
@@ -5188,6 +5232,7 @@
           <a:lstStyle/>
           <a:p>
             <a:pPr algn="ctr"/>
+            <a:endParaRPr/>
           </a:p>
         </p:txBody>
       </p:sp>
@@ -5208,7 +5253,7 @@
           <a:noFill/>
         </p:spPr>
         <p:txBody>
-          <a:bodyPr wrap="square" anchor="t" lIns="0" rIns="0" tIns="0" bIns="0">
+          <a:bodyPr wrap="square" lIns="0" tIns="0" rIns="0" bIns="0" anchor="t">
             <a:spAutoFit/>
           </a:bodyPr>
           <a:lstStyle/>
@@ -5250,7 +5295,7 @@
           <a:noFill/>
         </p:spPr>
         <p:txBody>
-          <a:bodyPr wrap="square" anchor="t" lIns="0" rIns="0" tIns="0" bIns="0">
+          <a:bodyPr wrap="square" lIns="0" tIns="0" rIns="0" bIns="0" anchor="t">
             <a:spAutoFit/>
           </a:bodyPr>
           <a:lstStyle/>
@@ -5316,6 +5361,7 @@
           <a:lstStyle/>
           <a:p>
             <a:pPr algn="ctr"/>
+            <a:endParaRPr/>
           </a:p>
         </p:txBody>
       </p:sp>
@@ -5360,6 +5406,7 @@
           <a:lstStyle/>
           <a:p>
             <a:pPr algn="ctr"/>
+            <a:endParaRPr/>
           </a:p>
         </p:txBody>
       </p:sp>
@@ -5380,7 +5427,7 @@
           <a:noFill/>
         </p:spPr>
         <p:txBody>
-          <a:bodyPr wrap="square" anchor="t" lIns="0" rIns="0" tIns="0" bIns="0">
+          <a:bodyPr wrap="square" lIns="0" tIns="0" rIns="0" bIns="0" anchor="t">
             <a:spAutoFit/>
           </a:bodyPr>
           <a:lstStyle/>
@@ -5422,7 +5469,7 @@
           <a:noFill/>
         </p:spPr>
         <p:txBody>
-          <a:bodyPr wrap="square" anchor="t" lIns="0" rIns="0" tIns="0" bIns="0">
+          <a:bodyPr wrap="square" lIns="0" tIns="0" rIns="0" bIns="0" anchor="t">
             <a:spAutoFit/>
           </a:bodyPr>
           <a:lstStyle/>
@@ -5464,7 +5511,7 @@
           <a:noFill/>
         </p:spPr>
         <p:txBody>
-          <a:bodyPr wrap="square" anchor="t" lIns="0" rIns="0" tIns="0" bIns="0">
+          <a:bodyPr wrap="square" lIns="0" tIns="0" rIns="0" bIns="0" anchor="t">
             <a:spAutoFit/>
           </a:bodyPr>
           <a:lstStyle/>
@@ -5525,7 +5572,7 @@
           <a:noFill/>
         </p:spPr>
         <p:txBody>
-          <a:bodyPr wrap="square" anchor="t" lIns="0" rIns="0" tIns="0" bIns="0">
+          <a:bodyPr wrap="square" lIns="0" tIns="0" rIns="0" bIns="0" anchor="t">
             <a:spAutoFit/>
           </a:bodyPr>
           <a:lstStyle/>
@@ -5567,7 +5614,7 @@
           <a:noFill/>
         </p:spPr>
         <p:txBody>
-          <a:bodyPr wrap="square" anchor="t" lIns="0" rIns="0" tIns="0" bIns="0">
+          <a:bodyPr wrap="square" lIns="0" tIns="0" rIns="0" bIns="0" anchor="t">
             <a:spAutoFit/>
           </a:bodyPr>
           <a:lstStyle/>
@@ -5601,7 +5648,7 @@
 </file>
 
 <file path=ppt/slides/slide11.xml><?xml version="1.0" encoding="utf-8"?>
-<p:sld xmlns:a="http://schemas.openxmlformats.org/drawingml/2006/main" xmlns:p="http://schemas.openxmlformats.org/presentationml/2006/main" xmlns:r="http://schemas.openxmlformats.org/officeDocument/2006/relationships">
+<p:sld xmlns:a="http://schemas.openxmlformats.org/drawingml/2006/main" xmlns:r="http://schemas.openxmlformats.org/officeDocument/2006/relationships" xmlns:p="http://schemas.openxmlformats.org/presentationml/2006/main">
   <p:cSld>
     <p:bg>
       <p:bgPr>
@@ -5617,7 +5664,14 @@
         <p:cNvGrpSpPr/>
         <p:nvPr/>
       </p:nvGrpSpPr>
-      <p:grpSpPr/>
+      <p:grpSpPr>
+        <a:xfrm>
+          <a:off x="0" y="0"/>
+          <a:ext cx="0" cy="0"/>
+          <a:chOff x="0" y="0"/>
+          <a:chExt cx="0" cy="0"/>
+        </a:xfrm>
+      </p:grpSpPr>
       <p:sp>
         <p:nvSpPr>
           <p:cNvPr id="2" name="Rectangle 1"/>
@@ -5659,6 +5713,7 @@
           <a:lstStyle/>
           <a:p>
             <a:pPr algn="ctr"/>
+            <a:endParaRPr/>
           </a:p>
         </p:txBody>
       </p:sp>
@@ -5679,7 +5734,7 @@
           <a:noFill/>
         </p:spPr>
         <p:txBody>
-          <a:bodyPr wrap="square" anchor="t" lIns="0" rIns="0" tIns="0" bIns="0">
+          <a:bodyPr wrap="square" lIns="0" tIns="0" rIns="0" bIns="0" anchor="t">
             <a:spAutoFit/>
           </a:bodyPr>
           <a:lstStyle/>
@@ -5721,7 +5776,7 @@
           <a:noFill/>
         </p:spPr>
         <p:txBody>
-          <a:bodyPr wrap="square" anchor="t" lIns="0" rIns="0" tIns="0" bIns="0">
+          <a:bodyPr wrap="square" lIns="0" tIns="0" rIns="0" bIns="0" anchor="t">
             <a:spAutoFit/>
           </a:bodyPr>
           <a:lstStyle/>
@@ -5787,6 +5842,7 @@
           <a:lstStyle/>
           <a:p>
             <a:pPr algn="ctr"/>
+            <a:endParaRPr/>
           </a:p>
         </p:txBody>
       </p:sp>
@@ -5807,7 +5863,7 @@
           <a:noFill/>
         </p:spPr>
         <p:txBody>
-          <a:bodyPr wrap="square" anchor="t" lIns="0" rIns="0" tIns="0" bIns="0">
+          <a:bodyPr wrap="square" lIns="0" tIns="0" rIns="0" bIns="0" anchor="t">
             <a:spAutoFit/>
           </a:bodyPr>
           <a:lstStyle/>
@@ -5858,15 +5914,12 @@
                 <a:spcPts val="0"/>
               </a:spcAft>
             </a:pPr>
-            <a:r>
-              <a:rPr sz="1450" b="0" i="0">
-                <a:solidFill>
-                  <a:srgbClr val="E3E8F0"/>
-                </a:solidFill>
-                <a:latin typeface="Consolas"/>
-              </a:rPr>
-              <a:t/>
-            </a:r>
+            <a:endParaRPr sz="1450" b="0" i="0">
+              <a:solidFill>
+                <a:srgbClr val="E3E8F0"/>
+              </a:solidFill>
+              <a:latin typeface="Consolas"/>
+            </a:endParaRPr>
           </a:p>
           <a:p>
             <a:pPr algn="l">
@@ -6001,7 +6054,7 @@
           <a:noFill/>
         </p:spPr>
         <p:txBody>
-          <a:bodyPr wrap="square" anchor="t" lIns="0" rIns="0" tIns="0" bIns="0">
+          <a:bodyPr wrap="square" lIns="0" tIns="0" rIns="0" bIns="0" anchor="t">
             <a:spAutoFit/>
           </a:bodyPr>
           <a:lstStyle/>
@@ -6062,7 +6115,7 @@
           <a:noFill/>
         </p:spPr>
         <p:txBody>
-          <a:bodyPr wrap="square" anchor="t" lIns="0" rIns="0" tIns="0" bIns="0">
+          <a:bodyPr wrap="square" lIns="0" tIns="0" rIns="0" bIns="0" anchor="t">
             <a:spAutoFit/>
           </a:bodyPr>
           <a:lstStyle/>
@@ -6104,7 +6157,7 @@
           <a:noFill/>
         </p:spPr>
         <p:txBody>
-          <a:bodyPr wrap="square" anchor="t" lIns="0" rIns="0" tIns="0" bIns="0">
+          <a:bodyPr wrap="square" lIns="0" tIns="0" rIns="0" bIns="0" anchor="t">
             <a:spAutoFit/>
           </a:bodyPr>
           <a:lstStyle/>
@@ -6138,7 +6191,7 @@
 </file>
 
 <file path=ppt/slides/slide12.xml><?xml version="1.0" encoding="utf-8"?>
-<p:sld xmlns:a="http://schemas.openxmlformats.org/drawingml/2006/main" xmlns:p="http://schemas.openxmlformats.org/presentationml/2006/main" xmlns:r="http://schemas.openxmlformats.org/officeDocument/2006/relationships">
+<p:sld xmlns:a="http://schemas.openxmlformats.org/drawingml/2006/main" xmlns:r="http://schemas.openxmlformats.org/officeDocument/2006/relationships" xmlns:p="http://schemas.openxmlformats.org/presentationml/2006/main">
   <p:cSld>
     <p:bg>
       <p:bgPr>
@@ -6154,7 +6207,14 @@
         <p:cNvGrpSpPr/>
         <p:nvPr/>
       </p:nvGrpSpPr>
-      <p:grpSpPr/>
+      <p:grpSpPr>
+        <a:xfrm>
+          <a:off x="0" y="0"/>
+          <a:ext cx="0" cy="0"/>
+          <a:chOff x="0" y="0"/>
+          <a:chExt cx="0" cy="0"/>
+        </a:xfrm>
+      </p:grpSpPr>
       <p:sp>
         <p:nvSpPr>
           <p:cNvPr id="2" name="Rectangle 1"/>
@@ -6196,6 +6256,7 @@
           <a:lstStyle/>
           <a:p>
             <a:pPr algn="ctr"/>
+            <a:endParaRPr/>
           </a:p>
         </p:txBody>
       </p:sp>
@@ -6216,7 +6277,7 @@
           <a:noFill/>
         </p:spPr>
         <p:txBody>
-          <a:bodyPr wrap="square" anchor="t" lIns="0" rIns="0" tIns="0" bIns="0">
+          <a:bodyPr wrap="square" lIns="0" tIns="0" rIns="0" bIns="0" anchor="t">
             <a:spAutoFit/>
           </a:bodyPr>
           <a:lstStyle/>
@@ -6258,7 +6319,7 @@
           <a:noFill/>
         </p:spPr>
         <p:txBody>
-          <a:bodyPr wrap="square" anchor="t" lIns="0" rIns="0" tIns="0" bIns="0">
+          <a:bodyPr wrap="square" lIns="0" tIns="0" rIns="0" bIns="0" anchor="t">
             <a:spAutoFit/>
           </a:bodyPr>
           <a:lstStyle/>
@@ -6324,6 +6385,7 @@
           <a:lstStyle/>
           <a:p>
             <a:pPr algn="ctr"/>
+            <a:endParaRPr/>
           </a:p>
         </p:txBody>
       </p:sp>
@@ -6368,6 +6430,7 @@
           <a:lstStyle/>
           <a:p>
             <a:pPr algn="ctr"/>
+            <a:endParaRPr/>
           </a:p>
         </p:txBody>
       </p:sp>
@@ -6388,7 +6451,7 @@
           <a:noFill/>
         </p:spPr>
         <p:txBody>
-          <a:bodyPr wrap="square" anchor="t" lIns="0" rIns="0" tIns="0" bIns="0">
+          <a:bodyPr wrap="square" lIns="0" tIns="0" rIns="0" bIns="0" anchor="t">
             <a:spAutoFit/>
           </a:bodyPr>
           <a:lstStyle/>
@@ -6430,7 +6493,7 @@
           <a:noFill/>
         </p:spPr>
         <p:txBody>
-          <a:bodyPr wrap="square" anchor="t" lIns="0" rIns="0" tIns="0" bIns="0">
+          <a:bodyPr wrap="square" lIns="0" tIns="0" rIns="0" bIns="0" anchor="t">
             <a:spAutoFit/>
           </a:bodyPr>
           <a:lstStyle/>
@@ -6472,7 +6535,7 @@
           <a:noFill/>
         </p:spPr>
         <p:txBody>
-          <a:bodyPr wrap="square" anchor="t" lIns="0" rIns="0" tIns="0" bIns="0">
+          <a:bodyPr wrap="square" lIns="0" tIns="0" rIns="0" bIns="0" anchor="t">
             <a:spAutoFit/>
           </a:bodyPr>
           <a:lstStyle/>
@@ -6514,7 +6577,7 @@
           <a:noFill/>
         </p:spPr>
         <p:txBody>
-          <a:bodyPr wrap="square" anchor="t" lIns="0" rIns="0" tIns="0" bIns="0">
+          <a:bodyPr wrap="square" lIns="0" tIns="0" rIns="0" bIns="0" anchor="t">
             <a:spAutoFit/>
           </a:bodyPr>
           <a:lstStyle/>
@@ -6556,7 +6619,7 @@
           <a:noFill/>
         </p:spPr>
         <p:txBody>
-          <a:bodyPr wrap="square" anchor="t" lIns="0" rIns="0" tIns="0" bIns="0">
+          <a:bodyPr wrap="square" lIns="0" tIns="0" rIns="0" bIns="0" anchor="t">
             <a:spAutoFit/>
           </a:bodyPr>
           <a:lstStyle/>
@@ -6622,6 +6685,7 @@
           <a:lstStyle/>
           <a:p>
             <a:pPr algn="ctr"/>
+            <a:endParaRPr/>
           </a:p>
         </p:txBody>
       </p:sp>
@@ -6666,6 +6730,7 @@
           <a:lstStyle/>
           <a:p>
             <a:pPr algn="ctr"/>
+            <a:endParaRPr/>
           </a:p>
         </p:txBody>
       </p:sp>
@@ -6686,7 +6751,7 @@
           <a:noFill/>
         </p:spPr>
         <p:txBody>
-          <a:bodyPr wrap="square" anchor="t" lIns="0" rIns="0" tIns="0" bIns="0">
+          <a:bodyPr wrap="square" lIns="0" tIns="0" rIns="0" bIns="0" anchor="t">
             <a:spAutoFit/>
           </a:bodyPr>
           <a:lstStyle/>
@@ -6728,7 +6793,7 @@
           <a:noFill/>
         </p:spPr>
         <p:txBody>
-          <a:bodyPr wrap="square" anchor="t" lIns="0" rIns="0" tIns="0" bIns="0">
+          <a:bodyPr wrap="square" lIns="0" tIns="0" rIns="0" bIns="0" anchor="t">
             <a:spAutoFit/>
           </a:bodyPr>
           <a:lstStyle/>
@@ -6770,7 +6835,7 @@
           <a:noFill/>
         </p:spPr>
         <p:txBody>
-          <a:bodyPr wrap="square" anchor="t" lIns="0" rIns="0" tIns="0" bIns="0">
+          <a:bodyPr wrap="square" lIns="0" tIns="0" rIns="0" bIns="0" anchor="t">
             <a:spAutoFit/>
           </a:bodyPr>
           <a:lstStyle/>
@@ -6812,7 +6877,7 @@
           <a:noFill/>
         </p:spPr>
         <p:txBody>
-          <a:bodyPr wrap="square" anchor="t" lIns="0" rIns="0" tIns="0" bIns="0">
+          <a:bodyPr wrap="square" lIns="0" tIns="0" rIns="0" bIns="0" anchor="t">
             <a:spAutoFit/>
           </a:bodyPr>
           <a:lstStyle/>
@@ -6854,7 +6919,7 @@
           <a:noFill/>
         </p:spPr>
         <p:txBody>
-          <a:bodyPr wrap="square" anchor="t" lIns="0" rIns="0" tIns="0" bIns="0">
+          <a:bodyPr wrap="square" lIns="0" tIns="0" rIns="0" bIns="0" anchor="t">
             <a:spAutoFit/>
           </a:bodyPr>
           <a:lstStyle/>
@@ -6896,7 +6961,7 @@
           <a:noFill/>
         </p:spPr>
         <p:txBody>
-          <a:bodyPr wrap="square" anchor="t" lIns="0" rIns="0" tIns="0" bIns="0">
+          <a:bodyPr wrap="square" lIns="0" tIns="0" rIns="0" bIns="0" anchor="t">
             <a:spAutoFit/>
           </a:bodyPr>
           <a:lstStyle/>
@@ -6938,7 +7003,7 @@
           <a:noFill/>
         </p:spPr>
         <p:txBody>
-          <a:bodyPr wrap="square" anchor="t" lIns="0" rIns="0" tIns="0" bIns="0">
+          <a:bodyPr wrap="square" lIns="0" tIns="0" rIns="0" bIns="0" anchor="t">
             <a:spAutoFit/>
           </a:bodyPr>
           <a:lstStyle/>
@@ -6980,7 +7045,7 @@
           <a:noFill/>
         </p:spPr>
         <p:txBody>
-          <a:bodyPr wrap="square" anchor="t" lIns="0" rIns="0" tIns="0" bIns="0">
+          <a:bodyPr wrap="square" lIns="0" tIns="0" rIns="0" bIns="0" anchor="t">
             <a:spAutoFit/>
           </a:bodyPr>
           <a:lstStyle/>
@@ -7014,7 +7079,7 @@
 </file>
 
 <file path=ppt/slides/slide13.xml><?xml version="1.0" encoding="utf-8"?>
-<p:sld xmlns:a="http://schemas.openxmlformats.org/drawingml/2006/main" xmlns:p="http://schemas.openxmlformats.org/presentationml/2006/main" xmlns:r="http://schemas.openxmlformats.org/officeDocument/2006/relationships">
+<p:sld xmlns:a="http://schemas.openxmlformats.org/drawingml/2006/main" xmlns:r="http://schemas.openxmlformats.org/officeDocument/2006/relationships" xmlns:p="http://schemas.openxmlformats.org/presentationml/2006/main">
   <p:cSld>
     <p:bg>
       <p:bgPr>
@@ -7030,7 +7095,14 @@
         <p:cNvGrpSpPr/>
         <p:nvPr/>
       </p:nvGrpSpPr>
-      <p:grpSpPr/>
+      <p:grpSpPr>
+        <a:xfrm>
+          <a:off x="0" y="0"/>
+          <a:ext cx="0" cy="0"/>
+          <a:chOff x="0" y="0"/>
+          <a:chExt cx="0" cy="0"/>
+        </a:xfrm>
+      </p:grpSpPr>
       <p:sp>
         <p:nvSpPr>
           <p:cNvPr id="2" name="Oval 1"/>
@@ -7072,6 +7144,7 @@
           <a:lstStyle/>
           <a:p>
             <a:pPr algn="ctr"/>
+            <a:endParaRPr/>
           </a:p>
         </p:txBody>
       </p:sp>
@@ -7116,6 +7189,7 @@
           <a:lstStyle/>
           <a:p>
             <a:pPr algn="ctr"/>
+            <a:endParaRPr/>
           </a:p>
         </p:txBody>
       </p:sp>
@@ -7160,6 +7234,7 @@
           <a:lstStyle/>
           <a:p>
             <a:pPr algn="ctr"/>
+            <a:endParaRPr/>
           </a:p>
         </p:txBody>
       </p:sp>
@@ -7204,6 +7279,7 @@
           <a:lstStyle/>
           <a:p>
             <a:pPr algn="ctr"/>
+            <a:endParaRPr/>
           </a:p>
         </p:txBody>
       </p:sp>
@@ -7248,6 +7324,7 @@
           <a:lstStyle/>
           <a:p>
             <a:pPr algn="ctr"/>
+            <a:endParaRPr/>
           </a:p>
         </p:txBody>
       </p:sp>
@@ -7292,6 +7369,7 @@
           <a:lstStyle/>
           <a:p>
             <a:pPr algn="ctr"/>
+            <a:endParaRPr/>
           </a:p>
         </p:txBody>
       </p:sp>
@@ -7336,6 +7414,7 @@
           <a:lstStyle/>
           <a:p>
             <a:pPr algn="ctr"/>
+            <a:endParaRPr/>
           </a:p>
         </p:txBody>
       </p:sp>
@@ -7380,6 +7459,7 @@
           <a:lstStyle/>
           <a:p>
             <a:pPr algn="ctr"/>
+            <a:endParaRPr/>
           </a:p>
         </p:txBody>
       </p:sp>
@@ -7424,6 +7504,7 @@
           <a:lstStyle/>
           <a:p>
             <a:pPr algn="ctr"/>
+            <a:endParaRPr/>
           </a:p>
         </p:txBody>
       </p:sp>
@@ -7468,6 +7549,7 @@
           <a:lstStyle/>
           <a:p>
             <a:pPr algn="ctr"/>
+            <a:endParaRPr/>
           </a:p>
         </p:txBody>
       </p:sp>
@@ -7512,6 +7594,7 @@
           <a:lstStyle/>
           <a:p>
             <a:pPr algn="ctr"/>
+            <a:endParaRPr/>
           </a:p>
         </p:txBody>
       </p:sp>
@@ -7556,6 +7639,7 @@
           <a:lstStyle/>
           <a:p>
             <a:pPr algn="ctr"/>
+            <a:endParaRPr/>
           </a:p>
         </p:txBody>
       </p:sp>
@@ -7600,6 +7684,7 @@
           <a:lstStyle/>
           <a:p>
             <a:pPr algn="ctr"/>
+            <a:endParaRPr/>
           </a:p>
         </p:txBody>
       </p:sp>
@@ -7644,6 +7729,7 @@
           <a:lstStyle/>
           <a:p>
             <a:pPr algn="ctr"/>
+            <a:endParaRPr/>
           </a:p>
         </p:txBody>
       </p:sp>
@@ -7688,6 +7774,7 @@
           <a:lstStyle/>
           <a:p>
             <a:pPr algn="ctr"/>
+            <a:endParaRPr/>
           </a:p>
         </p:txBody>
       </p:sp>
@@ -7732,6 +7819,7 @@
           <a:lstStyle/>
           <a:p>
             <a:pPr algn="ctr"/>
+            <a:endParaRPr/>
           </a:p>
         </p:txBody>
       </p:sp>
@@ -7776,6 +7864,7 @@
           <a:lstStyle/>
           <a:p>
             <a:pPr algn="ctr"/>
+            <a:endParaRPr/>
           </a:p>
         </p:txBody>
       </p:sp>
@@ -7820,6 +7909,7 @@
           <a:lstStyle/>
           <a:p>
             <a:pPr algn="ctr"/>
+            <a:endParaRPr/>
           </a:p>
         </p:txBody>
       </p:sp>
@@ -7864,6 +7954,7 @@
           <a:lstStyle/>
           <a:p>
             <a:pPr algn="ctr"/>
+            <a:endParaRPr/>
           </a:p>
         </p:txBody>
       </p:sp>
@@ -7908,6 +7999,7 @@
           <a:lstStyle/>
           <a:p>
             <a:pPr algn="ctr"/>
+            <a:endParaRPr/>
           </a:p>
         </p:txBody>
       </p:sp>
@@ -7952,6 +8044,7 @@
           <a:lstStyle/>
           <a:p>
             <a:pPr algn="ctr"/>
+            <a:endParaRPr/>
           </a:p>
         </p:txBody>
       </p:sp>
@@ -7996,6 +8089,7 @@
           <a:lstStyle/>
           <a:p>
             <a:pPr algn="ctr"/>
+            <a:endParaRPr/>
           </a:p>
         </p:txBody>
       </p:sp>
@@ -8040,6 +8134,7 @@
           <a:lstStyle/>
           <a:p>
             <a:pPr algn="ctr"/>
+            <a:endParaRPr/>
           </a:p>
         </p:txBody>
       </p:sp>
@@ -8084,6 +8179,7 @@
           <a:lstStyle/>
           <a:p>
             <a:pPr algn="ctr"/>
+            <a:endParaRPr/>
           </a:p>
         </p:txBody>
       </p:sp>
@@ -8128,6 +8224,7 @@
           <a:lstStyle/>
           <a:p>
             <a:pPr algn="ctr"/>
+            <a:endParaRPr/>
           </a:p>
         </p:txBody>
       </p:sp>
@@ -8172,6 +8269,7 @@
           <a:lstStyle/>
           <a:p>
             <a:pPr algn="ctr"/>
+            <a:endParaRPr/>
           </a:p>
         </p:txBody>
       </p:sp>
@@ -8216,6 +8314,7 @@
           <a:lstStyle/>
           <a:p>
             <a:pPr algn="ctr"/>
+            <a:endParaRPr/>
           </a:p>
         </p:txBody>
       </p:sp>
@@ -8260,6 +8359,7 @@
           <a:lstStyle/>
           <a:p>
             <a:pPr algn="ctr"/>
+            <a:endParaRPr/>
           </a:p>
         </p:txBody>
       </p:sp>
@@ -8304,6 +8404,7 @@
           <a:lstStyle/>
           <a:p>
             <a:pPr algn="ctr"/>
+            <a:endParaRPr/>
           </a:p>
         </p:txBody>
       </p:sp>
@@ -8348,6 +8449,7 @@
           <a:lstStyle/>
           <a:p>
             <a:pPr algn="ctr"/>
+            <a:endParaRPr/>
           </a:p>
         </p:txBody>
       </p:sp>
@@ -8368,7 +8470,7 @@
           <a:noFill/>
         </p:spPr>
         <p:txBody>
-          <a:bodyPr wrap="square" anchor="t" lIns="0" rIns="0" tIns="0" bIns="0">
+          <a:bodyPr wrap="square" lIns="0" tIns="0" rIns="0" bIns="0" anchor="t">
             <a:spAutoFit/>
           </a:bodyPr>
           <a:lstStyle/>
@@ -8410,7 +8512,7 @@
           <a:noFill/>
         </p:spPr>
         <p:txBody>
-          <a:bodyPr wrap="square" anchor="t" lIns="0" rIns="0" tIns="0" bIns="0">
+          <a:bodyPr wrap="square" lIns="0" tIns="0" rIns="0" bIns="0" anchor="t">
             <a:spAutoFit/>
           </a:bodyPr>
           <a:lstStyle/>
@@ -8452,7 +8554,7 @@
           <a:noFill/>
         </p:spPr>
         <p:txBody>
-          <a:bodyPr wrap="square" anchor="t" lIns="0" rIns="0" tIns="0" bIns="0">
+          <a:bodyPr wrap="square" lIns="0" tIns="0" rIns="0" bIns="0" anchor="t">
             <a:spAutoFit/>
           </a:bodyPr>
           <a:lstStyle/>
@@ -8494,7 +8596,7 @@
           <a:noFill/>
         </p:spPr>
         <p:txBody>
-          <a:bodyPr wrap="square" anchor="t" lIns="0" rIns="0" tIns="0" bIns="0">
+          <a:bodyPr wrap="square" lIns="0" tIns="0" rIns="0" bIns="0" anchor="t">
             <a:spAutoFit/>
           </a:bodyPr>
           <a:lstStyle/>
@@ -8528,7 +8630,7 @@
 </file>
 
 <file path=ppt/slides/slide14.xml><?xml version="1.0" encoding="utf-8"?>
-<p:sld xmlns:a="http://schemas.openxmlformats.org/drawingml/2006/main" xmlns:p="http://schemas.openxmlformats.org/presentationml/2006/main" xmlns:r="http://schemas.openxmlformats.org/officeDocument/2006/relationships">
+<p:sld xmlns:a="http://schemas.openxmlformats.org/drawingml/2006/main" xmlns:r="http://schemas.openxmlformats.org/officeDocument/2006/relationships" xmlns:p="http://schemas.openxmlformats.org/presentationml/2006/main">
   <p:cSld>
     <p:bg>
       <p:bgPr>
@@ -8544,7 +8646,14 @@
         <p:cNvGrpSpPr/>
         <p:nvPr/>
       </p:nvGrpSpPr>
-      <p:grpSpPr/>
+      <p:grpSpPr>
+        <a:xfrm>
+          <a:off x="0" y="0"/>
+          <a:ext cx="0" cy="0"/>
+          <a:chOff x="0" y="0"/>
+          <a:chExt cx="0" cy="0"/>
+        </a:xfrm>
+      </p:grpSpPr>
       <p:sp>
         <p:nvSpPr>
           <p:cNvPr id="2" name="Rectangle 1"/>
@@ -8586,6 +8695,7 @@
           <a:lstStyle/>
           <a:p>
             <a:pPr algn="ctr"/>
+            <a:endParaRPr/>
           </a:p>
         </p:txBody>
       </p:sp>
@@ -8606,7 +8716,7 @@
           <a:noFill/>
         </p:spPr>
         <p:txBody>
-          <a:bodyPr wrap="square" anchor="t" lIns="0" rIns="0" tIns="0" bIns="0">
+          <a:bodyPr wrap="square" lIns="0" tIns="0" rIns="0" bIns="0" anchor="t">
             <a:spAutoFit/>
           </a:bodyPr>
           <a:lstStyle/>
@@ -8648,7 +8758,7 @@
           <a:noFill/>
         </p:spPr>
         <p:txBody>
-          <a:bodyPr wrap="square" anchor="t" lIns="0" rIns="0" tIns="0" bIns="0">
+          <a:bodyPr wrap="square" lIns="0" tIns="0" rIns="0" bIns="0" anchor="t">
             <a:spAutoFit/>
           </a:bodyPr>
           <a:lstStyle/>
@@ -8714,6 +8824,7 @@
           <a:lstStyle/>
           <a:p>
             <a:pPr algn="ctr"/>
+            <a:endParaRPr/>
           </a:p>
         </p:txBody>
       </p:sp>
@@ -8734,7 +8845,7 @@
           <a:noFill/>
         </p:spPr>
         <p:txBody>
-          <a:bodyPr wrap="square" anchor="ctr" lIns="0" rIns="0" tIns="0" bIns="0">
+          <a:bodyPr wrap="square" lIns="0" tIns="0" rIns="0" bIns="0" anchor="ctr">
             <a:spAutoFit/>
           </a:bodyPr>
           <a:lstStyle/>
@@ -8776,7 +8887,7 @@
           <a:noFill/>
         </p:spPr>
         <p:txBody>
-          <a:bodyPr wrap="square" anchor="t" lIns="0" rIns="0" tIns="0" bIns="0">
+          <a:bodyPr wrap="square" lIns="0" tIns="0" rIns="0" bIns="0" anchor="t">
             <a:spAutoFit/>
           </a:bodyPr>
           <a:lstStyle/>
@@ -8818,7 +8929,7 @@
           <a:noFill/>
         </p:spPr>
         <p:txBody>
-          <a:bodyPr wrap="square" anchor="t" lIns="0" rIns="0" tIns="0" bIns="0">
+          <a:bodyPr wrap="square" lIns="0" tIns="0" rIns="0" bIns="0" anchor="t">
             <a:spAutoFit/>
           </a:bodyPr>
           <a:lstStyle/>
@@ -8884,6 +8995,7 @@
           <a:lstStyle/>
           <a:p>
             <a:pPr algn="ctr"/>
+            <a:endParaRPr/>
           </a:p>
         </p:txBody>
       </p:sp>
@@ -8904,7 +9016,7 @@
           <a:noFill/>
         </p:spPr>
         <p:txBody>
-          <a:bodyPr wrap="square" anchor="ctr" lIns="0" rIns="0" tIns="0" bIns="0">
+          <a:bodyPr wrap="square" lIns="0" tIns="0" rIns="0" bIns="0" anchor="ctr">
             <a:spAutoFit/>
           </a:bodyPr>
           <a:lstStyle/>
@@ -8946,7 +9058,7 @@
           <a:noFill/>
         </p:spPr>
         <p:txBody>
-          <a:bodyPr wrap="square" anchor="t" lIns="0" rIns="0" tIns="0" bIns="0">
+          <a:bodyPr wrap="square" lIns="0" tIns="0" rIns="0" bIns="0" anchor="t">
             <a:spAutoFit/>
           </a:bodyPr>
           <a:lstStyle/>
@@ -8988,7 +9100,7 @@
           <a:noFill/>
         </p:spPr>
         <p:txBody>
-          <a:bodyPr wrap="square" anchor="t" lIns="0" rIns="0" tIns="0" bIns="0">
+          <a:bodyPr wrap="square" lIns="0" tIns="0" rIns="0" bIns="0" anchor="t">
             <a:spAutoFit/>
           </a:bodyPr>
           <a:lstStyle/>
@@ -9054,6 +9166,7 @@
           <a:lstStyle/>
           <a:p>
             <a:pPr algn="ctr"/>
+            <a:endParaRPr/>
           </a:p>
         </p:txBody>
       </p:sp>
@@ -9074,7 +9187,7 @@
           <a:noFill/>
         </p:spPr>
         <p:txBody>
-          <a:bodyPr wrap="square" anchor="ctr" lIns="0" rIns="0" tIns="0" bIns="0">
+          <a:bodyPr wrap="square" lIns="0" tIns="0" rIns="0" bIns="0" anchor="ctr">
             <a:spAutoFit/>
           </a:bodyPr>
           <a:lstStyle/>
@@ -9116,7 +9229,7 @@
           <a:noFill/>
         </p:spPr>
         <p:txBody>
-          <a:bodyPr wrap="square" anchor="t" lIns="0" rIns="0" tIns="0" bIns="0">
+          <a:bodyPr wrap="square" lIns="0" tIns="0" rIns="0" bIns="0" anchor="t">
             <a:spAutoFit/>
           </a:bodyPr>
           <a:lstStyle/>
@@ -9158,7 +9271,7 @@
           <a:noFill/>
         </p:spPr>
         <p:txBody>
-          <a:bodyPr wrap="square" anchor="t" lIns="0" rIns="0" tIns="0" bIns="0">
+          <a:bodyPr wrap="square" lIns="0" tIns="0" rIns="0" bIns="0" anchor="t">
             <a:spAutoFit/>
           </a:bodyPr>
           <a:lstStyle/>
@@ -9200,7 +9313,7 @@
           <a:noFill/>
         </p:spPr>
         <p:txBody>
-          <a:bodyPr wrap="square" anchor="t" lIns="0" rIns="0" tIns="0" bIns="0">
+          <a:bodyPr wrap="square" lIns="0" tIns="0" rIns="0" bIns="0" anchor="t">
             <a:spAutoFit/>
           </a:bodyPr>
           <a:lstStyle/>
@@ -9242,7 +9355,7 @@
           <a:noFill/>
         </p:spPr>
         <p:txBody>
-          <a:bodyPr wrap="square" anchor="t" lIns="0" rIns="0" tIns="0" bIns="0">
+          <a:bodyPr wrap="square" lIns="0" tIns="0" rIns="0" bIns="0" anchor="t">
             <a:spAutoFit/>
           </a:bodyPr>
           <a:lstStyle/>
@@ -9284,7 +9397,7 @@
           <a:noFill/>
         </p:spPr>
         <p:txBody>
-          <a:bodyPr wrap="square" anchor="t" lIns="0" rIns="0" tIns="0" bIns="0">
+          <a:bodyPr wrap="square" lIns="0" tIns="0" rIns="0" bIns="0" anchor="t">
             <a:spAutoFit/>
           </a:bodyPr>
           <a:lstStyle/>
@@ -9318,7 +9431,7 @@
 </file>
 
 <file path=ppt/slides/slide15.xml><?xml version="1.0" encoding="utf-8"?>
-<p:sld xmlns:a="http://schemas.openxmlformats.org/drawingml/2006/main" xmlns:p="http://schemas.openxmlformats.org/presentationml/2006/main" xmlns:r="http://schemas.openxmlformats.org/officeDocument/2006/relationships">
+<p:sld xmlns:a="http://schemas.openxmlformats.org/drawingml/2006/main" xmlns:r="http://schemas.openxmlformats.org/officeDocument/2006/relationships" xmlns:p="http://schemas.openxmlformats.org/presentationml/2006/main">
   <p:cSld>
     <p:bg>
       <p:bgPr>
@@ -9334,7 +9447,14 @@
         <p:cNvGrpSpPr/>
         <p:nvPr/>
       </p:nvGrpSpPr>
-      <p:grpSpPr/>
+      <p:grpSpPr>
+        <a:xfrm>
+          <a:off x="0" y="0"/>
+          <a:ext cx="0" cy="0"/>
+          <a:chOff x="0" y="0"/>
+          <a:chExt cx="0" cy="0"/>
+        </a:xfrm>
+      </p:grpSpPr>
       <p:sp>
         <p:nvSpPr>
           <p:cNvPr id="2" name="Rectangle 1"/>
@@ -9376,6 +9496,7 @@
           <a:lstStyle/>
           <a:p>
             <a:pPr algn="ctr"/>
+            <a:endParaRPr/>
           </a:p>
         </p:txBody>
       </p:sp>
@@ -9396,7 +9517,7 @@
           <a:noFill/>
         </p:spPr>
         <p:txBody>
-          <a:bodyPr wrap="square" anchor="t" lIns="0" rIns="0" tIns="0" bIns="0">
+          <a:bodyPr wrap="square" lIns="0" tIns="0" rIns="0" bIns="0" anchor="t">
             <a:spAutoFit/>
           </a:bodyPr>
           <a:lstStyle/>
@@ -9438,7 +9559,7 @@
           <a:noFill/>
         </p:spPr>
         <p:txBody>
-          <a:bodyPr wrap="square" anchor="t" lIns="0" rIns="0" tIns="0" bIns="0">
+          <a:bodyPr wrap="square" lIns="0" tIns="0" rIns="0" bIns="0" anchor="t">
             <a:spAutoFit/>
           </a:bodyPr>
           <a:lstStyle/>
@@ -9504,6 +9625,7 @@
           <a:lstStyle/>
           <a:p>
             <a:pPr algn="ctr"/>
+            <a:endParaRPr/>
           </a:p>
         </p:txBody>
       </p:sp>
@@ -9548,7 +9670,7 @@
           <a:noFill/>
         </p:spPr>
         <p:txBody>
-          <a:bodyPr wrap="square" anchor="t" lIns="0" rIns="0" tIns="0" bIns="0">
+          <a:bodyPr wrap="square" lIns="0" tIns="0" rIns="0" bIns="0" anchor="t">
             <a:spAutoFit/>
           </a:bodyPr>
           <a:lstStyle/>
@@ -9590,7 +9712,7 @@
           <a:noFill/>
         </p:spPr>
         <p:txBody>
-          <a:bodyPr wrap="square" anchor="t" lIns="0" rIns="0" tIns="0" bIns="0">
+          <a:bodyPr wrap="square" lIns="0" tIns="0" rIns="0" bIns="0" anchor="t">
             <a:spAutoFit/>
           </a:bodyPr>
           <a:lstStyle/>
@@ -9632,7 +9754,7 @@
           <a:noFill/>
         </p:spPr>
         <p:txBody>
-          <a:bodyPr wrap="square" anchor="t" lIns="0" rIns="0" tIns="0" bIns="0">
+          <a:bodyPr wrap="square" lIns="0" tIns="0" rIns="0" bIns="0" anchor="t">
             <a:spAutoFit/>
           </a:bodyPr>
           <a:lstStyle/>
@@ -9666,7 +9788,7 @@
 </file>
 
 <file path=ppt/slides/slide16.xml><?xml version="1.0" encoding="utf-8"?>
-<p:sld xmlns:a="http://schemas.openxmlformats.org/drawingml/2006/main" xmlns:p="http://schemas.openxmlformats.org/presentationml/2006/main" xmlns:r="http://schemas.openxmlformats.org/officeDocument/2006/relationships">
+<p:sld xmlns:a="http://schemas.openxmlformats.org/drawingml/2006/main" xmlns:r="http://schemas.openxmlformats.org/officeDocument/2006/relationships" xmlns:p="http://schemas.openxmlformats.org/presentationml/2006/main">
   <p:cSld>
     <p:bg>
       <p:bgPr>
@@ -9682,7 +9804,14 @@
         <p:cNvGrpSpPr/>
         <p:nvPr/>
       </p:nvGrpSpPr>
-      <p:grpSpPr/>
+      <p:grpSpPr>
+        <a:xfrm>
+          <a:off x="0" y="0"/>
+          <a:ext cx="0" cy="0"/>
+          <a:chOff x="0" y="0"/>
+          <a:chExt cx="0" cy="0"/>
+        </a:xfrm>
+      </p:grpSpPr>
       <p:sp>
         <p:nvSpPr>
           <p:cNvPr id="2" name="Rectangle 1"/>
@@ -9724,6 +9853,7 @@
           <a:lstStyle/>
           <a:p>
             <a:pPr algn="ctr"/>
+            <a:endParaRPr/>
           </a:p>
         </p:txBody>
       </p:sp>
@@ -9744,7 +9874,7 @@
           <a:noFill/>
         </p:spPr>
         <p:txBody>
-          <a:bodyPr wrap="square" anchor="t" lIns="0" rIns="0" tIns="0" bIns="0">
+          <a:bodyPr wrap="square" lIns="0" tIns="0" rIns="0" bIns="0" anchor="t">
             <a:spAutoFit/>
           </a:bodyPr>
           <a:lstStyle/>
@@ -9786,7 +9916,7 @@
           <a:noFill/>
         </p:spPr>
         <p:txBody>
-          <a:bodyPr wrap="square" anchor="t" lIns="0" rIns="0" tIns="0" bIns="0">
+          <a:bodyPr wrap="square" lIns="0" tIns="0" rIns="0" bIns="0" anchor="t">
             <a:spAutoFit/>
           </a:bodyPr>
           <a:lstStyle/>
@@ -9852,6 +9982,7 @@
           <a:lstStyle/>
           <a:p>
             <a:pPr algn="ctr"/>
+            <a:endParaRPr/>
           </a:p>
         </p:txBody>
       </p:sp>
@@ -9896,7 +10027,7 @@
           <a:noFill/>
         </p:spPr>
         <p:txBody>
-          <a:bodyPr wrap="square" anchor="t" lIns="0" rIns="0" tIns="0" bIns="0">
+          <a:bodyPr wrap="square" lIns="0" tIns="0" rIns="0" bIns="0" anchor="t">
             <a:spAutoFit/>
           </a:bodyPr>
           <a:lstStyle/>
@@ -9938,7 +10069,7 @@
           <a:noFill/>
         </p:spPr>
         <p:txBody>
-          <a:bodyPr wrap="square" anchor="t" lIns="0" rIns="0" tIns="0" bIns="0">
+          <a:bodyPr wrap="square" lIns="0" tIns="0" rIns="0" bIns="0" anchor="t">
             <a:spAutoFit/>
           </a:bodyPr>
           <a:lstStyle/>
@@ -9972,7 +10103,7 @@
 </file>
 
 <file path=ppt/slides/slide17.xml><?xml version="1.0" encoding="utf-8"?>
-<p:sld xmlns:a="http://schemas.openxmlformats.org/drawingml/2006/main" xmlns:p="http://schemas.openxmlformats.org/presentationml/2006/main" xmlns:r="http://schemas.openxmlformats.org/officeDocument/2006/relationships">
+<p:sld xmlns:a="http://schemas.openxmlformats.org/drawingml/2006/main" xmlns:r="http://schemas.openxmlformats.org/officeDocument/2006/relationships" xmlns:p="http://schemas.openxmlformats.org/presentationml/2006/main">
   <p:cSld>
     <p:bg>
       <p:bgPr>
@@ -9988,7 +10119,14 @@
         <p:cNvGrpSpPr/>
         <p:nvPr/>
       </p:nvGrpSpPr>
-      <p:grpSpPr/>
+      <p:grpSpPr>
+        <a:xfrm>
+          <a:off x="0" y="0"/>
+          <a:ext cx="0" cy="0"/>
+          <a:chOff x="0" y="0"/>
+          <a:chExt cx="0" cy="0"/>
+        </a:xfrm>
+      </p:grpSpPr>
       <p:sp>
         <p:nvSpPr>
           <p:cNvPr id="2" name="Rectangle 1"/>
@@ -10030,6 +10168,7 @@
           <a:lstStyle/>
           <a:p>
             <a:pPr algn="ctr"/>
+            <a:endParaRPr/>
           </a:p>
         </p:txBody>
       </p:sp>
@@ -10050,7 +10189,7 @@
           <a:noFill/>
         </p:spPr>
         <p:txBody>
-          <a:bodyPr wrap="square" anchor="t" lIns="0" rIns="0" tIns="0" bIns="0">
+          <a:bodyPr wrap="square" lIns="0" tIns="0" rIns="0" bIns="0" anchor="t">
             <a:spAutoFit/>
           </a:bodyPr>
           <a:lstStyle/>
@@ -10092,7 +10231,7 @@
           <a:noFill/>
         </p:spPr>
         <p:txBody>
-          <a:bodyPr wrap="square" anchor="t" lIns="0" rIns="0" tIns="0" bIns="0">
+          <a:bodyPr wrap="square" lIns="0" tIns="0" rIns="0" bIns="0" anchor="t">
             <a:spAutoFit/>
           </a:bodyPr>
           <a:lstStyle/>
@@ -10134,7 +10273,7 @@
           <a:noFill/>
         </p:spPr>
         <p:txBody>
-          <a:bodyPr wrap="square" anchor="t" lIns="0" rIns="0" tIns="0" bIns="0">
+          <a:bodyPr wrap="square" lIns="0" tIns="0" rIns="0" bIns="0" anchor="t">
             <a:spAutoFit/>
           </a:bodyPr>
           <a:lstStyle/>
@@ -10200,6 +10339,7 @@
           <a:lstStyle/>
           <a:p>
             <a:pPr algn="ctr"/>
+            <a:endParaRPr/>
           </a:p>
         </p:txBody>
       </p:sp>
@@ -10220,7 +10360,7 @@
           <a:noFill/>
         </p:spPr>
         <p:txBody>
-          <a:bodyPr wrap="square" anchor="t" lIns="0" rIns="0" tIns="0" bIns="0">
+          <a:bodyPr wrap="square" lIns="0" tIns="0" rIns="0" bIns="0" anchor="t">
             <a:spAutoFit/>
           </a:bodyPr>
           <a:lstStyle/>
@@ -10286,6 +10426,7 @@
           <a:lstStyle/>
           <a:p>
             <a:pPr algn="ctr"/>
+            <a:endParaRPr/>
           </a:p>
         </p:txBody>
       </p:sp>
@@ -10306,7 +10447,7 @@
           <a:noFill/>
         </p:spPr>
         <p:txBody>
-          <a:bodyPr wrap="square" anchor="t" lIns="0" rIns="0" tIns="0" bIns="0">
+          <a:bodyPr wrap="square" lIns="0" tIns="0" rIns="0" bIns="0" anchor="t">
             <a:spAutoFit/>
           </a:bodyPr>
           <a:lstStyle/>
@@ -10348,7 +10489,7 @@
           <a:noFill/>
         </p:spPr>
         <p:txBody>
-          <a:bodyPr wrap="square" anchor="t" lIns="0" rIns="0" tIns="0" bIns="0">
+          <a:bodyPr wrap="square" lIns="0" tIns="0" rIns="0" bIns="0" anchor="t">
             <a:spAutoFit/>
           </a:bodyPr>
           <a:lstStyle/>
@@ -10414,6 +10555,7 @@
           <a:lstStyle/>
           <a:p>
             <a:pPr algn="ctr"/>
+            <a:endParaRPr/>
           </a:p>
         </p:txBody>
       </p:sp>
@@ -10458,6 +10600,7 @@
           <a:lstStyle/>
           <a:p>
             <a:pPr algn="ctr"/>
+            <a:endParaRPr/>
           </a:p>
         </p:txBody>
       </p:sp>
@@ -10478,7 +10621,7 @@
           <a:noFill/>
         </p:spPr>
         <p:txBody>
-          <a:bodyPr wrap="square" anchor="t" lIns="0" rIns="0" tIns="0" bIns="0">
+          <a:bodyPr wrap="square" lIns="0" tIns="0" rIns="0" bIns="0" anchor="t">
             <a:spAutoFit/>
           </a:bodyPr>
           <a:lstStyle/>
@@ -10544,6 +10687,7 @@
           <a:lstStyle/>
           <a:p>
             <a:pPr algn="ctr"/>
+            <a:endParaRPr/>
           </a:p>
         </p:txBody>
       </p:sp>
@@ -10588,6 +10732,7 @@
           <a:lstStyle/>
           <a:p>
             <a:pPr algn="ctr"/>
+            <a:endParaRPr/>
           </a:p>
         </p:txBody>
       </p:sp>
@@ -10608,7 +10753,7 @@
           <a:noFill/>
         </p:spPr>
         <p:txBody>
-          <a:bodyPr wrap="square" anchor="t" lIns="0" rIns="0" tIns="0" bIns="0">
+          <a:bodyPr wrap="square" lIns="0" tIns="0" rIns="0" bIns="0" anchor="t">
             <a:spAutoFit/>
           </a:bodyPr>
           <a:lstStyle/>
@@ -10650,7 +10795,7 @@
           <a:noFill/>
         </p:spPr>
         <p:txBody>
-          <a:bodyPr wrap="square" anchor="t" lIns="0" rIns="0" tIns="0" bIns="0">
+          <a:bodyPr wrap="square" lIns="0" tIns="0" rIns="0" bIns="0" anchor="t">
             <a:spAutoFit/>
           </a:bodyPr>
           <a:lstStyle/>
@@ -10716,6 +10861,7 @@
           <a:lstStyle/>
           <a:p>
             <a:pPr algn="ctr"/>
+            <a:endParaRPr/>
           </a:p>
         </p:txBody>
       </p:sp>
@@ -10760,6 +10906,7 @@
           <a:lstStyle/>
           <a:p>
             <a:pPr algn="ctr"/>
+            <a:endParaRPr/>
           </a:p>
         </p:txBody>
       </p:sp>
@@ -10780,7 +10927,7 @@
           <a:noFill/>
         </p:spPr>
         <p:txBody>
-          <a:bodyPr wrap="square" anchor="t" lIns="0" rIns="0" tIns="0" bIns="0">
+          <a:bodyPr wrap="square" lIns="0" tIns="0" rIns="0" bIns="0" anchor="t">
             <a:spAutoFit/>
           </a:bodyPr>
           <a:lstStyle/>
@@ -10846,6 +10993,7 @@
           <a:lstStyle/>
           <a:p>
             <a:pPr algn="ctr"/>
+            <a:endParaRPr/>
           </a:p>
         </p:txBody>
       </p:sp>
@@ -10890,6 +11038,7 @@
           <a:lstStyle/>
           <a:p>
             <a:pPr algn="ctr"/>
+            <a:endParaRPr/>
           </a:p>
         </p:txBody>
       </p:sp>
@@ -10910,7 +11059,7 @@
           <a:noFill/>
         </p:spPr>
         <p:txBody>
-          <a:bodyPr wrap="square" anchor="t" lIns="0" rIns="0" tIns="0" bIns="0">
+          <a:bodyPr wrap="square" lIns="0" tIns="0" rIns="0" bIns="0" anchor="t">
             <a:spAutoFit/>
           </a:bodyPr>
           <a:lstStyle/>
@@ -10952,7 +11101,7 @@
           <a:noFill/>
         </p:spPr>
         <p:txBody>
-          <a:bodyPr wrap="square" anchor="t" lIns="0" rIns="0" tIns="0" bIns="0">
+          <a:bodyPr wrap="square" lIns="0" tIns="0" rIns="0" bIns="0" anchor="t">
             <a:spAutoFit/>
           </a:bodyPr>
           <a:lstStyle/>
@@ -11018,6 +11167,7 @@
           <a:lstStyle/>
           <a:p>
             <a:pPr algn="ctr"/>
+            <a:endParaRPr/>
           </a:p>
         </p:txBody>
       </p:sp>
@@ -11062,6 +11212,7 @@
           <a:lstStyle/>
           <a:p>
             <a:pPr algn="ctr"/>
+            <a:endParaRPr/>
           </a:p>
         </p:txBody>
       </p:sp>
@@ -11082,7 +11233,7 @@
           <a:noFill/>
         </p:spPr>
         <p:txBody>
-          <a:bodyPr wrap="square" anchor="t" lIns="0" rIns="0" tIns="0" bIns="0">
+          <a:bodyPr wrap="square" lIns="0" tIns="0" rIns="0" bIns="0" anchor="t">
             <a:spAutoFit/>
           </a:bodyPr>
           <a:lstStyle/>
@@ -11148,6 +11299,7 @@
           <a:lstStyle/>
           <a:p>
             <a:pPr algn="ctr"/>
+            <a:endParaRPr/>
           </a:p>
         </p:txBody>
       </p:sp>
@@ -11192,6 +11344,7 @@
           <a:lstStyle/>
           <a:p>
             <a:pPr algn="ctr"/>
+            <a:endParaRPr/>
           </a:p>
         </p:txBody>
       </p:sp>
@@ -11212,7 +11365,7 @@
           <a:noFill/>
         </p:spPr>
         <p:txBody>
-          <a:bodyPr wrap="square" anchor="t" lIns="0" rIns="0" tIns="0" bIns="0">
+          <a:bodyPr wrap="square" lIns="0" tIns="0" rIns="0" bIns="0" anchor="t">
             <a:spAutoFit/>
           </a:bodyPr>
           <a:lstStyle/>
@@ -11254,7 +11407,7 @@
           <a:noFill/>
         </p:spPr>
         <p:txBody>
-          <a:bodyPr wrap="square" anchor="t" lIns="0" rIns="0" tIns="0" bIns="0">
+          <a:bodyPr wrap="square" lIns="0" tIns="0" rIns="0" bIns="0" anchor="t">
             <a:spAutoFit/>
           </a:bodyPr>
           <a:lstStyle/>
@@ -11320,6 +11473,7 @@
           <a:lstStyle/>
           <a:p>
             <a:pPr algn="ctr"/>
+            <a:endParaRPr/>
           </a:p>
         </p:txBody>
       </p:sp>
@@ -11364,6 +11518,7 @@
           <a:lstStyle/>
           <a:p>
             <a:pPr algn="ctr"/>
+            <a:endParaRPr/>
           </a:p>
         </p:txBody>
       </p:sp>
@@ -11384,7 +11539,7 @@
           <a:noFill/>
         </p:spPr>
         <p:txBody>
-          <a:bodyPr wrap="square" anchor="t" lIns="0" rIns="0" tIns="0" bIns="0">
+          <a:bodyPr wrap="square" lIns="0" tIns="0" rIns="0" bIns="0" anchor="t">
             <a:spAutoFit/>
           </a:bodyPr>
           <a:lstStyle/>
@@ -11450,6 +11605,7 @@
           <a:lstStyle/>
           <a:p>
             <a:pPr algn="ctr"/>
+            <a:endParaRPr/>
           </a:p>
         </p:txBody>
       </p:sp>
@@ -11494,6 +11650,7 @@
           <a:lstStyle/>
           <a:p>
             <a:pPr algn="ctr"/>
+            <a:endParaRPr/>
           </a:p>
         </p:txBody>
       </p:sp>
@@ -11514,7 +11671,7 @@
           <a:noFill/>
         </p:spPr>
         <p:txBody>
-          <a:bodyPr wrap="square" anchor="t" lIns="0" rIns="0" tIns="0" bIns="0">
+          <a:bodyPr wrap="square" lIns="0" tIns="0" rIns="0" bIns="0" anchor="t">
             <a:spAutoFit/>
           </a:bodyPr>
           <a:lstStyle/>
@@ -11556,7 +11713,7 @@
           <a:noFill/>
         </p:spPr>
         <p:txBody>
-          <a:bodyPr wrap="square" anchor="t" lIns="0" rIns="0" tIns="0" bIns="0">
+          <a:bodyPr wrap="square" lIns="0" tIns="0" rIns="0" bIns="0" anchor="t">
             <a:spAutoFit/>
           </a:bodyPr>
           <a:lstStyle/>
@@ -11622,6 +11779,7 @@
           <a:lstStyle/>
           <a:p>
             <a:pPr algn="ctr"/>
+            <a:endParaRPr/>
           </a:p>
         </p:txBody>
       </p:sp>
@@ -11666,6 +11824,7 @@
           <a:lstStyle/>
           <a:p>
             <a:pPr algn="ctr"/>
+            <a:endParaRPr/>
           </a:p>
         </p:txBody>
       </p:sp>
@@ -11686,7 +11845,7 @@
           <a:noFill/>
         </p:spPr>
         <p:txBody>
-          <a:bodyPr wrap="square" anchor="t" lIns="0" rIns="0" tIns="0" bIns="0">
+          <a:bodyPr wrap="square" lIns="0" tIns="0" rIns="0" bIns="0" anchor="t">
             <a:spAutoFit/>
           </a:bodyPr>
           <a:lstStyle/>
@@ -11752,6 +11911,7 @@
           <a:lstStyle/>
           <a:p>
             <a:pPr algn="ctr"/>
+            <a:endParaRPr/>
           </a:p>
         </p:txBody>
       </p:sp>
@@ -11796,6 +11956,7 @@
           <a:lstStyle/>
           <a:p>
             <a:pPr algn="ctr"/>
+            <a:endParaRPr/>
           </a:p>
         </p:txBody>
       </p:sp>
@@ -11816,7 +11977,7 @@
           <a:noFill/>
         </p:spPr>
         <p:txBody>
-          <a:bodyPr wrap="square" anchor="t" lIns="0" rIns="0" tIns="0" bIns="0">
+          <a:bodyPr wrap="square" lIns="0" tIns="0" rIns="0" bIns="0" anchor="t">
             <a:spAutoFit/>
           </a:bodyPr>
           <a:lstStyle/>
@@ -11858,7 +12019,7 @@
           <a:noFill/>
         </p:spPr>
         <p:txBody>
-          <a:bodyPr wrap="square" anchor="t" lIns="0" rIns="0" tIns="0" bIns="0">
+          <a:bodyPr wrap="square" lIns="0" tIns="0" rIns="0" bIns="0" anchor="t">
             <a:spAutoFit/>
           </a:bodyPr>
           <a:lstStyle/>
@@ -11924,6 +12085,7 @@
           <a:lstStyle/>
           <a:p>
             <a:pPr algn="ctr"/>
+            <a:endParaRPr/>
           </a:p>
         </p:txBody>
       </p:sp>
@@ -11968,6 +12130,7 @@
           <a:lstStyle/>
           <a:p>
             <a:pPr algn="ctr"/>
+            <a:endParaRPr/>
           </a:p>
         </p:txBody>
       </p:sp>
@@ -11988,7 +12151,7 @@
           <a:noFill/>
         </p:spPr>
         <p:txBody>
-          <a:bodyPr wrap="square" anchor="t" lIns="0" rIns="0" tIns="0" bIns="0">
+          <a:bodyPr wrap="square" lIns="0" tIns="0" rIns="0" bIns="0" anchor="t">
             <a:spAutoFit/>
           </a:bodyPr>
           <a:lstStyle/>
@@ -12054,6 +12217,7 @@
           <a:lstStyle/>
           <a:p>
             <a:pPr algn="ctr"/>
+            <a:endParaRPr/>
           </a:p>
         </p:txBody>
       </p:sp>
@@ -12098,6 +12262,7 @@
           <a:lstStyle/>
           <a:p>
             <a:pPr algn="ctr"/>
+            <a:endParaRPr/>
           </a:p>
         </p:txBody>
       </p:sp>
@@ -12118,7 +12283,7 @@
           <a:noFill/>
         </p:spPr>
         <p:txBody>
-          <a:bodyPr wrap="square" anchor="t" lIns="0" rIns="0" tIns="0" bIns="0">
+          <a:bodyPr wrap="square" lIns="0" tIns="0" rIns="0" bIns="0" anchor="t">
             <a:spAutoFit/>
           </a:bodyPr>
           <a:lstStyle/>
@@ -12160,7 +12325,7 @@
           <a:noFill/>
         </p:spPr>
         <p:txBody>
-          <a:bodyPr wrap="square" anchor="t" lIns="0" rIns="0" tIns="0" bIns="0">
+          <a:bodyPr wrap="square" lIns="0" tIns="0" rIns="0" bIns="0" anchor="t">
             <a:spAutoFit/>
           </a:bodyPr>
           <a:lstStyle/>
@@ -12202,7 +12367,7 @@
           <a:noFill/>
         </p:spPr>
         <p:txBody>
-          <a:bodyPr wrap="square" anchor="t" lIns="0" rIns="0" tIns="0" bIns="0">
+          <a:bodyPr wrap="square" lIns="0" tIns="0" rIns="0" bIns="0" anchor="t">
             <a:spAutoFit/>
           </a:bodyPr>
           <a:lstStyle/>
@@ -12244,7 +12409,7 @@
           <a:noFill/>
         </p:spPr>
         <p:txBody>
-          <a:bodyPr wrap="square" anchor="t" lIns="0" rIns="0" tIns="0" bIns="0">
+          <a:bodyPr wrap="square" lIns="0" tIns="0" rIns="0" bIns="0" anchor="t">
             <a:spAutoFit/>
           </a:bodyPr>
           <a:lstStyle/>
@@ -12278,7 +12443,7 @@
 </file>
 
 <file path=ppt/slides/slide18.xml><?xml version="1.0" encoding="utf-8"?>
-<p:sld xmlns:a="http://schemas.openxmlformats.org/drawingml/2006/main" xmlns:p="http://schemas.openxmlformats.org/presentationml/2006/main" xmlns:r="http://schemas.openxmlformats.org/officeDocument/2006/relationships">
+<p:sld xmlns:a="http://schemas.openxmlformats.org/drawingml/2006/main" xmlns:r="http://schemas.openxmlformats.org/officeDocument/2006/relationships" xmlns:p="http://schemas.openxmlformats.org/presentationml/2006/main">
   <p:cSld>
     <p:bg>
       <p:bgPr>
@@ -12294,7 +12459,14 @@
         <p:cNvGrpSpPr/>
         <p:nvPr/>
       </p:nvGrpSpPr>
-      <p:grpSpPr/>
+      <p:grpSpPr>
+        <a:xfrm>
+          <a:off x="0" y="0"/>
+          <a:ext cx="0" cy="0"/>
+          <a:chOff x="0" y="0"/>
+          <a:chExt cx="0" cy="0"/>
+        </a:xfrm>
+      </p:grpSpPr>
       <p:sp>
         <p:nvSpPr>
           <p:cNvPr id="2" name="TextBox 1"/>
@@ -12312,7 +12484,7 @@
           <a:noFill/>
         </p:spPr>
         <p:txBody>
-          <a:bodyPr wrap="square" anchor="t" lIns="0" rIns="0" tIns="0" bIns="0">
+          <a:bodyPr wrap="square" lIns="0" tIns="0" rIns="0" bIns="0" anchor="t">
             <a:spAutoFit/>
           </a:bodyPr>
           <a:lstStyle/>
@@ -12354,7 +12526,7 @@
           <a:noFill/>
         </p:spPr>
         <p:txBody>
-          <a:bodyPr wrap="square" anchor="t" lIns="0" rIns="0" tIns="0" bIns="0">
+          <a:bodyPr wrap="square" lIns="0" tIns="0" rIns="0" bIns="0" anchor="t">
             <a:spAutoFit/>
           </a:bodyPr>
           <a:lstStyle/>
@@ -12420,6 +12592,7 @@
           <a:lstStyle/>
           <a:p>
             <a:pPr algn="ctr"/>
+            <a:endParaRPr/>
           </a:p>
         </p:txBody>
       </p:sp>
@@ -12464,7 +12637,7 @@
           <a:noFill/>
         </p:spPr>
         <p:txBody>
-          <a:bodyPr wrap="square" anchor="t" lIns="0" rIns="0" tIns="0" bIns="0">
+          <a:bodyPr wrap="square" lIns="0" tIns="0" rIns="0" bIns="0" anchor="t">
             <a:spAutoFit/>
           </a:bodyPr>
           <a:lstStyle/>
@@ -12506,7 +12679,7 @@
           <a:noFill/>
         </p:spPr>
         <p:txBody>
-          <a:bodyPr wrap="square" anchor="t" lIns="0" rIns="0" tIns="0" bIns="0">
+          <a:bodyPr wrap="square" lIns="0" tIns="0" rIns="0" bIns="0" anchor="t">
             <a:spAutoFit/>
           </a:bodyPr>
           <a:lstStyle/>
@@ -12540,7 +12713,7 @@
 </file>
 
 <file path=ppt/slides/slide19.xml><?xml version="1.0" encoding="utf-8"?>
-<p:sld xmlns:a="http://schemas.openxmlformats.org/drawingml/2006/main" xmlns:p="http://schemas.openxmlformats.org/presentationml/2006/main" xmlns:r="http://schemas.openxmlformats.org/officeDocument/2006/relationships">
+<p:sld xmlns:a="http://schemas.openxmlformats.org/drawingml/2006/main" xmlns:r="http://schemas.openxmlformats.org/officeDocument/2006/relationships" xmlns:p="http://schemas.openxmlformats.org/presentationml/2006/main">
   <p:cSld>
     <p:bg>
       <p:bgPr>
@@ -12556,7 +12729,14 @@
         <p:cNvGrpSpPr/>
         <p:nvPr/>
       </p:nvGrpSpPr>
-      <p:grpSpPr/>
+      <p:grpSpPr>
+        <a:xfrm>
+          <a:off x="0" y="0"/>
+          <a:ext cx="0" cy="0"/>
+          <a:chOff x="0" y="0"/>
+          <a:chExt cx="0" cy="0"/>
+        </a:xfrm>
+      </p:grpSpPr>
       <p:sp>
         <p:nvSpPr>
           <p:cNvPr id="2" name="Rectangle 1"/>
@@ -12598,6 +12778,7 @@
           <a:lstStyle/>
           <a:p>
             <a:pPr algn="ctr"/>
+            <a:endParaRPr/>
           </a:p>
         </p:txBody>
       </p:sp>
@@ -12618,7 +12799,7 @@
           <a:noFill/>
         </p:spPr>
         <p:txBody>
-          <a:bodyPr wrap="square" anchor="t" lIns="0" rIns="0" tIns="0" bIns="0">
+          <a:bodyPr wrap="square" lIns="0" tIns="0" rIns="0" bIns="0" anchor="t">
             <a:spAutoFit/>
           </a:bodyPr>
           <a:lstStyle/>
@@ -12660,7 +12841,7 @@
           <a:noFill/>
         </p:spPr>
         <p:txBody>
-          <a:bodyPr wrap="square" anchor="t" lIns="0" rIns="0" tIns="0" bIns="0">
+          <a:bodyPr wrap="square" lIns="0" tIns="0" rIns="0" bIns="0" anchor="t">
             <a:spAutoFit/>
           </a:bodyPr>
           <a:lstStyle/>
@@ -12726,6 +12907,7 @@
           <a:lstStyle/>
           <a:p>
             <a:pPr algn="ctr"/>
+            <a:endParaRPr/>
           </a:p>
         </p:txBody>
       </p:sp>
@@ -12746,7 +12928,7 @@
           <a:noFill/>
         </p:spPr>
         <p:txBody>
-          <a:bodyPr wrap="square" anchor="ctr" lIns="0" rIns="0" tIns="0" bIns="0">
+          <a:bodyPr wrap="square" lIns="0" tIns="0" rIns="0" bIns="0" anchor="ctr">
             <a:spAutoFit/>
           </a:bodyPr>
           <a:lstStyle/>
@@ -12788,7 +12970,7 @@
           <a:noFill/>
         </p:spPr>
         <p:txBody>
-          <a:bodyPr wrap="square" anchor="t" lIns="0" rIns="0" tIns="0" bIns="0">
+          <a:bodyPr wrap="square" lIns="0" tIns="0" rIns="0" bIns="0" anchor="t">
             <a:spAutoFit/>
           </a:bodyPr>
           <a:lstStyle/>
@@ -12830,7 +13012,7 @@
           <a:noFill/>
         </p:spPr>
         <p:txBody>
-          <a:bodyPr wrap="square" anchor="t" lIns="0" rIns="0" tIns="0" bIns="0">
+          <a:bodyPr wrap="square" lIns="0" tIns="0" rIns="0" bIns="0" anchor="t">
             <a:spAutoFit/>
           </a:bodyPr>
           <a:lstStyle/>
@@ -12896,6 +13078,7 @@
           <a:lstStyle/>
           <a:p>
             <a:pPr algn="ctr"/>
+            <a:endParaRPr/>
           </a:p>
         </p:txBody>
       </p:sp>
@@ -12916,7 +13099,7 @@
           <a:noFill/>
         </p:spPr>
         <p:txBody>
-          <a:bodyPr wrap="square" anchor="ctr" lIns="0" rIns="0" tIns="0" bIns="0">
+          <a:bodyPr wrap="square" lIns="0" tIns="0" rIns="0" bIns="0" anchor="ctr">
             <a:spAutoFit/>
           </a:bodyPr>
           <a:lstStyle/>
@@ -12958,7 +13141,7 @@
           <a:noFill/>
         </p:spPr>
         <p:txBody>
-          <a:bodyPr wrap="square" anchor="t" lIns="0" rIns="0" tIns="0" bIns="0">
+          <a:bodyPr wrap="square" lIns="0" tIns="0" rIns="0" bIns="0" anchor="t">
             <a:spAutoFit/>
           </a:bodyPr>
           <a:lstStyle/>
@@ -13000,7 +13183,7 @@
           <a:noFill/>
         </p:spPr>
         <p:txBody>
-          <a:bodyPr wrap="square" anchor="t" lIns="0" rIns="0" tIns="0" bIns="0">
+          <a:bodyPr wrap="square" lIns="0" tIns="0" rIns="0" bIns="0" anchor="t">
             <a:spAutoFit/>
           </a:bodyPr>
           <a:lstStyle/>
@@ -13066,6 +13249,7 @@
           <a:lstStyle/>
           <a:p>
             <a:pPr algn="ctr"/>
+            <a:endParaRPr/>
           </a:p>
         </p:txBody>
       </p:sp>
@@ -13086,7 +13270,7 @@
           <a:noFill/>
         </p:spPr>
         <p:txBody>
-          <a:bodyPr wrap="square" anchor="ctr" lIns="0" rIns="0" tIns="0" bIns="0">
+          <a:bodyPr wrap="square" lIns="0" tIns="0" rIns="0" bIns="0" anchor="ctr">
             <a:spAutoFit/>
           </a:bodyPr>
           <a:lstStyle/>
@@ -13128,7 +13312,7 @@
           <a:noFill/>
         </p:spPr>
         <p:txBody>
-          <a:bodyPr wrap="square" anchor="t" lIns="0" rIns="0" tIns="0" bIns="0">
+          <a:bodyPr wrap="square" lIns="0" tIns="0" rIns="0" bIns="0" anchor="t">
             <a:spAutoFit/>
           </a:bodyPr>
           <a:lstStyle/>
@@ -13170,7 +13354,7 @@
           <a:noFill/>
         </p:spPr>
         <p:txBody>
-          <a:bodyPr wrap="square" anchor="t" lIns="0" rIns="0" tIns="0" bIns="0">
+          <a:bodyPr wrap="square" lIns="0" tIns="0" rIns="0" bIns="0" anchor="t">
             <a:spAutoFit/>
           </a:bodyPr>
           <a:lstStyle/>
@@ -13212,7 +13396,7 @@
           <a:noFill/>
         </p:spPr>
         <p:txBody>
-          <a:bodyPr wrap="square" anchor="t" lIns="0" rIns="0" tIns="0" bIns="0">
+          <a:bodyPr wrap="square" lIns="0" tIns="0" rIns="0" bIns="0" anchor="t">
             <a:spAutoFit/>
           </a:bodyPr>
           <a:lstStyle/>
@@ -13254,7 +13438,7 @@
           <a:noFill/>
         </p:spPr>
         <p:txBody>
-          <a:bodyPr wrap="square" anchor="t" lIns="0" rIns="0" tIns="0" bIns="0">
+          <a:bodyPr wrap="square" lIns="0" tIns="0" rIns="0" bIns="0" anchor="t">
             <a:spAutoFit/>
           </a:bodyPr>
           <a:lstStyle/>
@@ -13288,7 +13472,7 @@
 </file>
 
 <file path=ppt/slides/slide2.xml><?xml version="1.0" encoding="utf-8"?>
-<p:sld xmlns:a="http://schemas.openxmlformats.org/drawingml/2006/main" xmlns:p="http://schemas.openxmlformats.org/presentationml/2006/main" xmlns:r="http://schemas.openxmlformats.org/officeDocument/2006/relationships">
+<p:sld xmlns:a="http://schemas.openxmlformats.org/drawingml/2006/main" xmlns:r="http://schemas.openxmlformats.org/officeDocument/2006/relationships" xmlns:p="http://schemas.openxmlformats.org/presentationml/2006/main">
   <p:cSld>
     <p:bg>
       <p:bgPr>
@@ -13304,7 +13488,14 @@
         <p:cNvGrpSpPr/>
         <p:nvPr/>
       </p:nvGrpSpPr>
-      <p:grpSpPr/>
+      <p:grpSpPr>
+        <a:xfrm>
+          <a:off x="0" y="0"/>
+          <a:ext cx="0" cy="0"/>
+          <a:chOff x="0" y="0"/>
+          <a:chExt cx="0" cy="0"/>
+        </a:xfrm>
+      </p:grpSpPr>
       <p:sp>
         <p:nvSpPr>
           <p:cNvPr id="2" name="Rectangle 1"/>
@@ -13346,6 +13537,7 @@
           <a:lstStyle/>
           <a:p>
             <a:pPr algn="ctr"/>
+            <a:endParaRPr/>
           </a:p>
         </p:txBody>
       </p:sp>
@@ -13366,7 +13558,7 @@
           <a:noFill/>
         </p:spPr>
         <p:txBody>
-          <a:bodyPr wrap="square" anchor="t" lIns="0" rIns="0" tIns="0" bIns="0">
+          <a:bodyPr wrap="square" lIns="0" tIns="0" rIns="0" bIns="0" anchor="t">
             <a:spAutoFit/>
           </a:bodyPr>
           <a:lstStyle/>
@@ -13408,7 +13600,7 @@
           <a:noFill/>
         </p:spPr>
         <p:txBody>
-          <a:bodyPr wrap="square" anchor="t" lIns="0" rIns="0" tIns="0" bIns="0">
+          <a:bodyPr wrap="square" lIns="0" tIns="0" rIns="0" bIns="0" anchor="t">
             <a:spAutoFit/>
           </a:bodyPr>
           <a:lstStyle/>
@@ -13474,6 +13666,7 @@
           <a:lstStyle/>
           <a:p>
             <a:pPr algn="ctr"/>
+            <a:endParaRPr/>
           </a:p>
         </p:txBody>
       </p:sp>
@@ -13518,6 +13711,7 @@
           <a:lstStyle/>
           <a:p>
             <a:pPr algn="ctr"/>
+            <a:endParaRPr/>
           </a:p>
         </p:txBody>
       </p:sp>
@@ -13538,7 +13732,7 @@
           <a:noFill/>
         </p:spPr>
         <p:txBody>
-          <a:bodyPr wrap="square" anchor="t" lIns="0" rIns="0" tIns="0" bIns="0">
+          <a:bodyPr wrap="square" lIns="0" tIns="0" rIns="0" bIns="0" anchor="t">
             <a:spAutoFit/>
           </a:bodyPr>
           <a:lstStyle/>
@@ -13580,7 +13774,7 @@
           <a:noFill/>
         </p:spPr>
         <p:txBody>
-          <a:bodyPr wrap="square" anchor="t" lIns="0" rIns="0" tIns="0" bIns="0">
+          <a:bodyPr wrap="square" lIns="0" tIns="0" rIns="0" bIns="0" anchor="t">
             <a:spAutoFit/>
           </a:bodyPr>
           <a:lstStyle/>
@@ -13646,6 +13840,7 @@
           <a:lstStyle/>
           <a:p>
             <a:pPr algn="ctr"/>
+            <a:endParaRPr/>
           </a:p>
         </p:txBody>
       </p:sp>
@@ -13690,6 +13885,7 @@
           <a:lstStyle/>
           <a:p>
             <a:pPr algn="ctr"/>
+            <a:endParaRPr/>
           </a:p>
         </p:txBody>
       </p:sp>
@@ -13710,7 +13906,7 @@
           <a:noFill/>
         </p:spPr>
         <p:txBody>
-          <a:bodyPr wrap="square" anchor="t" lIns="0" rIns="0" tIns="0" bIns="0">
+          <a:bodyPr wrap="square" lIns="0" tIns="0" rIns="0" bIns="0" anchor="t">
             <a:spAutoFit/>
           </a:bodyPr>
           <a:lstStyle/>
@@ -13752,7 +13948,7 @@
           <a:noFill/>
         </p:spPr>
         <p:txBody>
-          <a:bodyPr wrap="square" anchor="t" lIns="0" rIns="0" tIns="0" bIns="0">
+          <a:bodyPr wrap="square" lIns="0" tIns="0" rIns="0" bIns="0" anchor="t">
             <a:spAutoFit/>
           </a:bodyPr>
           <a:lstStyle/>
@@ -13818,6 +14014,7 @@
           <a:lstStyle/>
           <a:p>
             <a:pPr algn="ctr"/>
+            <a:endParaRPr/>
           </a:p>
         </p:txBody>
       </p:sp>
@@ -13862,6 +14059,7 @@
           <a:lstStyle/>
           <a:p>
             <a:pPr algn="ctr"/>
+            <a:endParaRPr/>
           </a:p>
         </p:txBody>
       </p:sp>
@@ -13882,7 +14080,7 @@
           <a:noFill/>
         </p:spPr>
         <p:txBody>
-          <a:bodyPr wrap="square" anchor="t" lIns="0" rIns="0" tIns="0" bIns="0">
+          <a:bodyPr wrap="square" lIns="0" tIns="0" rIns="0" bIns="0" anchor="t">
             <a:spAutoFit/>
           </a:bodyPr>
           <a:lstStyle/>
@@ -13924,7 +14122,7 @@
           <a:noFill/>
         </p:spPr>
         <p:txBody>
-          <a:bodyPr wrap="square" anchor="t" lIns="0" rIns="0" tIns="0" bIns="0">
+          <a:bodyPr wrap="square" lIns="0" tIns="0" rIns="0" bIns="0" anchor="t">
             <a:spAutoFit/>
           </a:bodyPr>
           <a:lstStyle/>
@@ -13966,7 +14164,7 @@
           <a:noFill/>
         </p:spPr>
         <p:txBody>
-          <a:bodyPr wrap="square" anchor="t" lIns="0" rIns="0" tIns="0" bIns="0">
+          <a:bodyPr wrap="square" lIns="0" tIns="0" rIns="0" bIns="0" anchor="t">
             <a:spAutoFit/>
           </a:bodyPr>
           <a:lstStyle/>
@@ -14008,7 +14206,7 @@
           <a:noFill/>
         </p:spPr>
         <p:txBody>
-          <a:bodyPr wrap="square" anchor="t" lIns="0" rIns="0" tIns="0" bIns="0">
+          <a:bodyPr wrap="square" lIns="0" tIns="0" rIns="0" bIns="0" anchor="t">
             <a:spAutoFit/>
           </a:bodyPr>
           <a:lstStyle/>
@@ -14050,7 +14248,7 @@
           <a:noFill/>
         </p:spPr>
         <p:txBody>
-          <a:bodyPr wrap="square" anchor="t" lIns="0" rIns="0" tIns="0" bIns="0">
+          <a:bodyPr wrap="square" lIns="0" tIns="0" rIns="0" bIns="0" anchor="t">
             <a:spAutoFit/>
           </a:bodyPr>
           <a:lstStyle/>
@@ -14084,7 +14282,7 @@
 </file>
 
 <file path=ppt/slides/slide20.xml><?xml version="1.0" encoding="utf-8"?>
-<p:sld xmlns:a="http://schemas.openxmlformats.org/drawingml/2006/main" xmlns:p="http://schemas.openxmlformats.org/presentationml/2006/main" xmlns:r="http://schemas.openxmlformats.org/officeDocument/2006/relationships">
+<p:sld xmlns:a="http://schemas.openxmlformats.org/drawingml/2006/main" xmlns:r="http://schemas.openxmlformats.org/officeDocument/2006/relationships" xmlns:p="http://schemas.openxmlformats.org/presentationml/2006/main">
   <p:cSld>
     <p:bg>
       <p:bgPr>
@@ -14100,7 +14298,14 @@
         <p:cNvGrpSpPr/>
         <p:nvPr/>
       </p:nvGrpSpPr>
-      <p:grpSpPr/>
+      <p:grpSpPr>
+        <a:xfrm>
+          <a:off x="0" y="0"/>
+          <a:ext cx="0" cy="0"/>
+          <a:chOff x="0" y="0"/>
+          <a:chExt cx="0" cy="0"/>
+        </a:xfrm>
+      </p:grpSpPr>
       <p:sp>
         <p:nvSpPr>
           <p:cNvPr id="2" name="TextBox 1"/>
@@ -14118,7 +14323,7 @@
           <a:noFill/>
         </p:spPr>
         <p:txBody>
-          <a:bodyPr wrap="square" anchor="t" lIns="0" rIns="0" tIns="0" bIns="0">
+          <a:bodyPr wrap="square" lIns="0" tIns="0" rIns="0" bIns="0" anchor="t">
             <a:spAutoFit/>
           </a:bodyPr>
           <a:lstStyle/>
@@ -14160,7 +14365,7 @@
           <a:noFill/>
         </p:spPr>
         <p:txBody>
-          <a:bodyPr wrap="square" anchor="t" lIns="0" rIns="0" tIns="0" bIns="0">
+          <a:bodyPr wrap="square" lIns="0" tIns="0" rIns="0" bIns="0" anchor="t">
             <a:spAutoFit/>
           </a:bodyPr>
           <a:lstStyle/>
@@ -14202,7 +14407,7 @@
           <a:noFill/>
         </p:spPr>
         <p:txBody>
-          <a:bodyPr wrap="square" anchor="t" lIns="0" rIns="0" tIns="0" bIns="0">
+          <a:bodyPr wrap="square" lIns="0" tIns="0" rIns="0" bIns="0" anchor="t">
             <a:spAutoFit/>
           </a:bodyPr>
           <a:lstStyle/>
@@ -14268,6 +14473,7 @@
           <a:lstStyle/>
           <a:p>
             <a:pPr algn="ctr"/>
+            <a:endParaRPr/>
           </a:p>
         </p:txBody>
       </p:sp>
@@ -14312,6 +14518,7 @@
           <a:lstStyle/>
           <a:p>
             <a:pPr algn="ctr"/>
+            <a:endParaRPr/>
           </a:p>
         </p:txBody>
       </p:sp>
@@ -14332,7 +14539,7 @@
           <a:noFill/>
         </p:spPr>
         <p:txBody>
-          <a:bodyPr wrap="square" anchor="t" lIns="0" rIns="0" tIns="0" bIns="0">
+          <a:bodyPr wrap="square" lIns="0" tIns="0" rIns="0" bIns="0" anchor="t">
             <a:spAutoFit/>
           </a:bodyPr>
           <a:lstStyle/>
@@ -14374,7 +14581,7 @@
           <a:noFill/>
         </p:spPr>
         <p:txBody>
-          <a:bodyPr wrap="square" anchor="t" lIns="0" rIns="0" tIns="0" bIns="0">
+          <a:bodyPr wrap="square" lIns="0" tIns="0" rIns="0" bIns="0" anchor="t">
             <a:spAutoFit/>
           </a:bodyPr>
           <a:lstStyle/>
@@ -14440,6 +14647,7 @@
           <a:lstStyle/>
           <a:p>
             <a:pPr algn="ctr"/>
+            <a:endParaRPr/>
           </a:p>
         </p:txBody>
       </p:sp>
@@ -14484,6 +14692,7 @@
           <a:lstStyle/>
           <a:p>
             <a:pPr algn="ctr"/>
+            <a:endParaRPr/>
           </a:p>
         </p:txBody>
       </p:sp>
@@ -14504,7 +14713,7 @@
           <a:noFill/>
         </p:spPr>
         <p:txBody>
-          <a:bodyPr wrap="square" anchor="t" lIns="0" rIns="0" tIns="0" bIns="0">
+          <a:bodyPr wrap="square" lIns="0" tIns="0" rIns="0" bIns="0" anchor="t">
             <a:spAutoFit/>
           </a:bodyPr>
           <a:lstStyle/>
@@ -14546,7 +14755,7 @@
           <a:noFill/>
         </p:spPr>
         <p:txBody>
-          <a:bodyPr wrap="square" anchor="t" lIns="0" rIns="0" tIns="0" bIns="0">
+          <a:bodyPr wrap="square" lIns="0" tIns="0" rIns="0" bIns="0" anchor="t">
             <a:spAutoFit/>
           </a:bodyPr>
           <a:lstStyle/>
@@ -14612,6 +14821,7 @@
           <a:lstStyle/>
           <a:p>
             <a:pPr algn="ctr"/>
+            <a:endParaRPr/>
           </a:p>
         </p:txBody>
       </p:sp>
@@ -14656,6 +14866,7 @@
           <a:lstStyle/>
           <a:p>
             <a:pPr algn="ctr"/>
+            <a:endParaRPr/>
           </a:p>
         </p:txBody>
       </p:sp>
@@ -14676,7 +14887,7 @@
           <a:noFill/>
         </p:spPr>
         <p:txBody>
-          <a:bodyPr wrap="square" anchor="t" lIns="0" rIns="0" tIns="0" bIns="0">
+          <a:bodyPr wrap="square" lIns="0" tIns="0" rIns="0" bIns="0" anchor="t">
             <a:spAutoFit/>
           </a:bodyPr>
           <a:lstStyle/>
@@ -14718,7 +14929,7 @@
           <a:noFill/>
         </p:spPr>
         <p:txBody>
-          <a:bodyPr wrap="square" anchor="t" lIns="0" rIns="0" tIns="0" bIns="0">
+          <a:bodyPr wrap="square" lIns="0" tIns="0" rIns="0" bIns="0" anchor="t">
             <a:spAutoFit/>
           </a:bodyPr>
           <a:lstStyle/>
@@ -14760,7 +14971,7 @@
           <a:noFill/>
         </p:spPr>
         <p:txBody>
-          <a:bodyPr wrap="square" anchor="t" lIns="0" rIns="0" tIns="0" bIns="0">
+          <a:bodyPr wrap="square" lIns="0" tIns="0" rIns="0" bIns="0" anchor="t">
             <a:spAutoFit/>
           </a:bodyPr>
           <a:lstStyle/>
@@ -14826,6 +15037,7 @@
           <a:lstStyle/>
           <a:p>
             <a:pPr algn="ctr"/>
+            <a:endParaRPr/>
           </a:p>
         </p:txBody>
       </p:sp>
@@ -14846,7 +15058,7 @@
           <a:noFill/>
         </p:spPr>
         <p:txBody>
-          <a:bodyPr wrap="square" anchor="t" lIns="0" rIns="0" tIns="0" bIns="0">
+          <a:bodyPr wrap="square" lIns="0" tIns="0" rIns="0" bIns="0" anchor="t">
             <a:spAutoFit/>
           </a:bodyPr>
           <a:lstStyle/>
@@ -14907,7 +15119,7 @@
           <a:noFill/>
         </p:spPr>
         <p:txBody>
-          <a:bodyPr wrap="square" anchor="t" lIns="0" rIns="0" tIns="0" bIns="0">
+          <a:bodyPr wrap="square" lIns="0" tIns="0" rIns="0" bIns="0" anchor="t">
             <a:spAutoFit/>
           </a:bodyPr>
           <a:lstStyle/>
@@ -14949,7 +15161,7 @@
           <a:noFill/>
         </p:spPr>
         <p:txBody>
-          <a:bodyPr wrap="square" anchor="t" lIns="0" rIns="0" tIns="0" bIns="0">
+          <a:bodyPr wrap="square" lIns="0" tIns="0" rIns="0" bIns="0" anchor="t">
             <a:spAutoFit/>
           </a:bodyPr>
           <a:lstStyle/>
@@ -14991,7 +15203,7 @@
           <a:noFill/>
         </p:spPr>
         <p:txBody>
-          <a:bodyPr wrap="square" anchor="t" lIns="0" rIns="0" tIns="0" bIns="0">
+          <a:bodyPr wrap="square" lIns="0" tIns="0" rIns="0" bIns="0" anchor="t">
             <a:spAutoFit/>
           </a:bodyPr>
           <a:lstStyle/>
@@ -15025,7 +15237,7 @@
 </file>
 
 <file path=ppt/slides/slide21.xml><?xml version="1.0" encoding="utf-8"?>
-<p:sld xmlns:a="http://schemas.openxmlformats.org/drawingml/2006/main" xmlns:p="http://schemas.openxmlformats.org/presentationml/2006/main" xmlns:r="http://schemas.openxmlformats.org/officeDocument/2006/relationships">
+<p:sld xmlns:a="http://schemas.openxmlformats.org/drawingml/2006/main" xmlns:r="http://schemas.openxmlformats.org/officeDocument/2006/relationships" xmlns:p="http://schemas.openxmlformats.org/presentationml/2006/main">
   <p:cSld>
     <p:bg>
       <p:bgPr>
@@ -15041,7 +15253,14 @@
         <p:cNvGrpSpPr/>
         <p:nvPr/>
       </p:nvGrpSpPr>
-      <p:grpSpPr/>
+      <p:grpSpPr>
+        <a:xfrm>
+          <a:off x="0" y="0"/>
+          <a:ext cx="0" cy="0"/>
+          <a:chOff x="0" y="0"/>
+          <a:chExt cx="0" cy="0"/>
+        </a:xfrm>
+      </p:grpSpPr>
       <p:sp>
         <p:nvSpPr>
           <p:cNvPr id="2" name="Rectangle 1"/>
@@ -15083,6 +15302,7 @@
           <a:lstStyle/>
           <a:p>
             <a:pPr algn="ctr"/>
+            <a:endParaRPr/>
           </a:p>
         </p:txBody>
       </p:sp>
@@ -15103,7 +15323,7 @@
           <a:noFill/>
         </p:spPr>
         <p:txBody>
-          <a:bodyPr wrap="square" anchor="t" lIns="0" rIns="0" tIns="0" bIns="0">
+          <a:bodyPr wrap="square" lIns="0" tIns="0" rIns="0" bIns="0" anchor="t">
             <a:spAutoFit/>
           </a:bodyPr>
           <a:lstStyle/>
@@ -15145,7 +15365,7 @@
           <a:noFill/>
         </p:spPr>
         <p:txBody>
-          <a:bodyPr wrap="square" anchor="t" lIns="0" rIns="0" tIns="0" bIns="0">
+          <a:bodyPr wrap="square" lIns="0" tIns="0" rIns="0" bIns="0" anchor="t">
             <a:spAutoFit/>
           </a:bodyPr>
           <a:lstStyle/>
@@ -15211,6 +15431,7 @@
           <a:lstStyle/>
           <a:p>
             <a:pPr algn="ctr"/>
+            <a:endParaRPr/>
           </a:p>
         </p:txBody>
       </p:sp>
@@ -15255,7 +15476,7 @@
           <a:noFill/>
         </p:spPr>
         <p:txBody>
-          <a:bodyPr wrap="square" anchor="t" lIns="0" rIns="0" tIns="0" bIns="0">
+          <a:bodyPr wrap="square" lIns="0" tIns="0" rIns="0" bIns="0" anchor="t">
             <a:spAutoFit/>
           </a:bodyPr>
           <a:lstStyle/>
@@ -15297,7 +15518,7 @@
           <a:noFill/>
         </p:spPr>
         <p:txBody>
-          <a:bodyPr wrap="square" anchor="t" lIns="0" rIns="0" tIns="0" bIns="0">
+          <a:bodyPr wrap="square" lIns="0" tIns="0" rIns="0" bIns="0" anchor="t">
             <a:spAutoFit/>
           </a:bodyPr>
           <a:lstStyle/>
@@ -15331,7 +15552,7 @@
 </file>
 
 <file path=ppt/slides/slide22.xml><?xml version="1.0" encoding="utf-8"?>
-<p:sld xmlns:a="http://schemas.openxmlformats.org/drawingml/2006/main" xmlns:p="http://schemas.openxmlformats.org/presentationml/2006/main" xmlns:r="http://schemas.openxmlformats.org/officeDocument/2006/relationships">
+<p:sld xmlns:a="http://schemas.openxmlformats.org/drawingml/2006/main" xmlns:r="http://schemas.openxmlformats.org/officeDocument/2006/relationships" xmlns:p="http://schemas.openxmlformats.org/presentationml/2006/main">
   <p:cSld>
     <p:bg>
       <p:bgPr>
@@ -15347,7 +15568,14 @@
         <p:cNvGrpSpPr/>
         <p:nvPr/>
       </p:nvGrpSpPr>
-      <p:grpSpPr/>
+      <p:grpSpPr>
+        <a:xfrm>
+          <a:off x="0" y="0"/>
+          <a:ext cx="0" cy="0"/>
+          <a:chOff x="0" y="0"/>
+          <a:chExt cx="0" cy="0"/>
+        </a:xfrm>
+      </p:grpSpPr>
       <p:sp>
         <p:nvSpPr>
           <p:cNvPr id="2" name="Rectangle 1"/>
@@ -15389,6 +15617,7 @@
           <a:lstStyle/>
           <a:p>
             <a:pPr algn="ctr"/>
+            <a:endParaRPr/>
           </a:p>
         </p:txBody>
       </p:sp>
@@ -15409,7 +15638,7 @@
           <a:noFill/>
         </p:spPr>
         <p:txBody>
-          <a:bodyPr wrap="square" anchor="t" lIns="0" rIns="0" tIns="0" bIns="0">
+          <a:bodyPr wrap="square" lIns="0" tIns="0" rIns="0" bIns="0" anchor="t">
             <a:spAutoFit/>
           </a:bodyPr>
           <a:lstStyle/>
@@ -15451,7 +15680,7 @@
           <a:noFill/>
         </p:spPr>
         <p:txBody>
-          <a:bodyPr wrap="square" anchor="t" lIns="0" rIns="0" tIns="0" bIns="0">
+          <a:bodyPr wrap="square" lIns="0" tIns="0" rIns="0" bIns="0" anchor="t">
             <a:spAutoFit/>
           </a:bodyPr>
           <a:lstStyle/>
@@ -15517,6 +15746,7 @@
           <a:lstStyle/>
           <a:p>
             <a:pPr algn="ctr"/>
+            <a:endParaRPr/>
           </a:p>
         </p:txBody>
       </p:sp>
@@ -15561,7 +15791,7 @@
           <a:noFill/>
         </p:spPr>
         <p:txBody>
-          <a:bodyPr wrap="square" anchor="t" lIns="0" rIns="0" tIns="0" bIns="0">
+          <a:bodyPr wrap="square" lIns="0" tIns="0" rIns="0" bIns="0" anchor="t">
             <a:spAutoFit/>
           </a:bodyPr>
           <a:lstStyle/>
@@ -15603,7 +15833,7 @@
           <a:noFill/>
         </p:spPr>
         <p:txBody>
-          <a:bodyPr wrap="square" anchor="t" lIns="0" rIns="0" tIns="0" bIns="0">
+          <a:bodyPr wrap="square" lIns="0" tIns="0" rIns="0" bIns="0" anchor="t">
             <a:spAutoFit/>
           </a:bodyPr>
           <a:lstStyle/>
@@ -15637,7 +15867,7 @@
 </file>
 
 <file path=ppt/slides/slide23.xml><?xml version="1.0" encoding="utf-8"?>
-<p:sld xmlns:a="http://schemas.openxmlformats.org/drawingml/2006/main" xmlns:p="http://schemas.openxmlformats.org/presentationml/2006/main" xmlns:r="http://schemas.openxmlformats.org/officeDocument/2006/relationships">
+<p:sld xmlns:a="http://schemas.openxmlformats.org/drawingml/2006/main" xmlns:r="http://schemas.openxmlformats.org/officeDocument/2006/relationships" xmlns:p="http://schemas.openxmlformats.org/presentationml/2006/main">
   <p:cSld>
     <p:bg>
       <p:bgPr>
@@ -15653,7 +15883,14 @@
         <p:cNvGrpSpPr/>
         <p:nvPr/>
       </p:nvGrpSpPr>
-      <p:grpSpPr/>
+      <p:grpSpPr>
+        <a:xfrm>
+          <a:off x="0" y="0"/>
+          <a:ext cx="0" cy="0"/>
+          <a:chOff x="0" y="0"/>
+          <a:chExt cx="0" cy="0"/>
+        </a:xfrm>
+      </p:grpSpPr>
       <p:sp>
         <p:nvSpPr>
           <p:cNvPr id="2" name="Rectangle 1"/>
@@ -15695,6 +15932,7 @@
           <a:lstStyle/>
           <a:p>
             <a:pPr algn="ctr"/>
+            <a:endParaRPr/>
           </a:p>
         </p:txBody>
       </p:sp>
@@ -15715,7 +15953,7 @@
           <a:noFill/>
         </p:spPr>
         <p:txBody>
-          <a:bodyPr wrap="square" anchor="t" lIns="0" rIns="0" tIns="0" bIns="0">
+          <a:bodyPr wrap="square" lIns="0" tIns="0" rIns="0" bIns="0" anchor="t">
             <a:spAutoFit/>
           </a:bodyPr>
           <a:lstStyle/>
@@ -15757,7 +15995,7 @@
           <a:noFill/>
         </p:spPr>
         <p:txBody>
-          <a:bodyPr wrap="square" anchor="t" lIns="0" rIns="0" tIns="0" bIns="0">
+          <a:bodyPr wrap="square" lIns="0" tIns="0" rIns="0" bIns="0" anchor="t">
             <a:spAutoFit/>
           </a:bodyPr>
           <a:lstStyle/>
@@ -15823,6 +16061,7 @@
           <a:lstStyle/>
           <a:p>
             <a:pPr algn="ctr"/>
+            <a:endParaRPr/>
           </a:p>
         </p:txBody>
       </p:sp>
@@ -15867,7 +16106,7 @@
           <a:noFill/>
         </p:spPr>
         <p:txBody>
-          <a:bodyPr wrap="square" anchor="t" lIns="0" rIns="0" tIns="0" bIns="0">
+          <a:bodyPr wrap="square" lIns="0" tIns="0" rIns="0" bIns="0" anchor="t">
             <a:spAutoFit/>
           </a:bodyPr>
           <a:lstStyle/>
@@ -15909,7 +16148,7 @@
           <a:noFill/>
         </p:spPr>
         <p:txBody>
-          <a:bodyPr wrap="square" anchor="t" lIns="0" rIns="0" tIns="0" bIns="0">
+          <a:bodyPr wrap="square" lIns="0" tIns="0" rIns="0" bIns="0" anchor="t">
             <a:spAutoFit/>
           </a:bodyPr>
           <a:lstStyle/>
@@ -15943,7 +16182,7 @@
 </file>
 
 <file path=ppt/slides/slide24.xml><?xml version="1.0" encoding="utf-8"?>
-<p:sld xmlns:a="http://schemas.openxmlformats.org/drawingml/2006/main" xmlns:p="http://schemas.openxmlformats.org/presentationml/2006/main" xmlns:r="http://schemas.openxmlformats.org/officeDocument/2006/relationships">
+<p:sld xmlns:a="http://schemas.openxmlformats.org/drawingml/2006/main" xmlns:r="http://schemas.openxmlformats.org/officeDocument/2006/relationships" xmlns:p="http://schemas.openxmlformats.org/presentationml/2006/main">
   <p:cSld>
     <p:bg>
       <p:bgPr>
@@ -15959,7 +16198,14 @@
         <p:cNvGrpSpPr/>
         <p:nvPr/>
       </p:nvGrpSpPr>
-      <p:grpSpPr/>
+      <p:grpSpPr>
+        <a:xfrm>
+          <a:off x="0" y="0"/>
+          <a:ext cx="0" cy="0"/>
+          <a:chOff x="0" y="0"/>
+          <a:chExt cx="0" cy="0"/>
+        </a:xfrm>
+      </p:grpSpPr>
       <p:sp>
         <p:nvSpPr>
           <p:cNvPr id="2" name="Rectangle 1"/>
@@ -16001,6 +16247,7 @@
           <a:lstStyle/>
           <a:p>
             <a:pPr algn="ctr"/>
+            <a:endParaRPr/>
           </a:p>
         </p:txBody>
       </p:sp>
@@ -16021,7 +16268,7 @@
           <a:noFill/>
         </p:spPr>
         <p:txBody>
-          <a:bodyPr wrap="square" anchor="t" lIns="0" rIns="0" tIns="0" bIns="0">
+          <a:bodyPr wrap="square" lIns="0" tIns="0" rIns="0" bIns="0" anchor="t">
             <a:spAutoFit/>
           </a:bodyPr>
           <a:lstStyle/>
@@ -16063,7 +16310,7 @@
           <a:noFill/>
         </p:spPr>
         <p:txBody>
-          <a:bodyPr wrap="square" anchor="t" lIns="0" rIns="0" tIns="0" bIns="0">
+          <a:bodyPr wrap="square" lIns="0" tIns="0" rIns="0" bIns="0" anchor="t">
             <a:spAutoFit/>
           </a:bodyPr>
           <a:lstStyle/>
@@ -16105,7 +16352,7 @@
           <a:noFill/>
         </p:spPr>
         <p:txBody>
-          <a:bodyPr wrap="square" anchor="t" lIns="0" rIns="0" tIns="0" bIns="0">
+          <a:bodyPr wrap="square" lIns="0" tIns="0" rIns="0" bIns="0" anchor="t">
             <a:spAutoFit/>
           </a:bodyPr>
           <a:lstStyle/>
@@ -16147,7 +16394,7 @@
           <a:noFill/>
         </p:spPr>
         <p:txBody>
-          <a:bodyPr wrap="square" anchor="t" lIns="0" rIns="0" tIns="0" bIns="0">
+          <a:bodyPr wrap="square" lIns="0" tIns="0" rIns="0" bIns="0" anchor="t">
             <a:spAutoFit/>
           </a:bodyPr>
           <a:lstStyle/>
@@ -16189,7 +16436,7 @@
           <a:noFill/>
         </p:spPr>
         <p:txBody>
-          <a:bodyPr wrap="square" anchor="t" lIns="0" rIns="0" tIns="0" bIns="0">
+          <a:bodyPr wrap="square" lIns="0" tIns="0" rIns="0" bIns="0" anchor="t">
             <a:spAutoFit/>
           </a:bodyPr>
           <a:lstStyle/>
@@ -16231,7 +16478,7 @@
           <a:noFill/>
         </p:spPr>
         <p:txBody>
-          <a:bodyPr wrap="square" anchor="t" lIns="0" rIns="0" tIns="0" bIns="0">
+          <a:bodyPr wrap="square" lIns="0" tIns="0" rIns="0" bIns="0" anchor="t">
             <a:spAutoFit/>
           </a:bodyPr>
           <a:lstStyle/>
@@ -16273,7 +16520,7 @@
           <a:noFill/>
         </p:spPr>
         <p:txBody>
-          <a:bodyPr wrap="square" anchor="t" lIns="0" rIns="0" tIns="0" bIns="0">
+          <a:bodyPr wrap="square" lIns="0" tIns="0" rIns="0" bIns="0" anchor="t">
             <a:spAutoFit/>
           </a:bodyPr>
           <a:lstStyle/>
@@ -16315,7 +16562,7 @@
           <a:noFill/>
         </p:spPr>
         <p:txBody>
-          <a:bodyPr wrap="square" anchor="t" lIns="0" rIns="0" tIns="0" bIns="0">
+          <a:bodyPr wrap="square" lIns="0" tIns="0" rIns="0" bIns="0" anchor="t">
             <a:spAutoFit/>
           </a:bodyPr>
           <a:lstStyle/>
@@ -16357,7 +16604,7 @@
           <a:noFill/>
         </p:spPr>
         <p:txBody>
-          <a:bodyPr wrap="square" anchor="t" lIns="0" rIns="0" tIns="0" bIns="0">
+          <a:bodyPr wrap="square" lIns="0" tIns="0" rIns="0" bIns="0" anchor="t">
             <a:spAutoFit/>
           </a:bodyPr>
           <a:lstStyle/>
@@ -16399,7 +16646,7 @@
           <a:noFill/>
         </p:spPr>
         <p:txBody>
-          <a:bodyPr wrap="square" anchor="t" lIns="0" rIns="0" tIns="0" bIns="0">
+          <a:bodyPr wrap="square" lIns="0" tIns="0" rIns="0" bIns="0" anchor="t">
             <a:spAutoFit/>
           </a:bodyPr>
           <a:lstStyle/>
@@ -16441,7 +16688,7 @@
           <a:noFill/>
         </p:spPr>
         <p:txBody>
-          <a:bodyPr wrap="square" anchor="t" lIns="0" rIns="0" tIns="0" bIns="0">
+          <a:bodyPr wrap="square" lIns="0" tIns="0" rIns="0" bIns="0" anchor="t">
             <a:spAutoFit/>
           </a:bodyPr>
           <a:lstStyle/>
@@ -16483,7 +16730,7 @@
           <a:noFill/>
         </p:spPr>
         <p:txBody>
-          <a:bodyPr wrap="square" anchor="t" lIns="0" rIns="0" tIns="0" bIns="0">
+          <a:bodyPr wrap="square" lIns="0" tIns="0" rIns="0" bIns="0" anchor="t">
             <a:spAutoFit/>
           </a:bodyPr>
           <a:lstStyle/>
@@ -16525,7 +16772,7 @@
           <a:noFill/>
         </p:spPr>
         <p:txBody>
-          <a:bodyPr wrap="square" anchor="t" lIns="0" rIns="0" tIns="0" bIns="0">
+          <a:bodyPr wrap="square" lIns="0" tIns="0" rIns="0" bIns="0" anchor="t">
             <a:spAutoFit/>
           </a:bodyPr>
           <a:lstStyle/>
@@ -16567,7 +16814,7 @@
           <a:noFill/>
         </p:spPr>
         <p:txBody>
-          <a:bodyPr wrap="square" anchor="t" lIns="0" rIns="0" tIns="0" bIns="0">
+          <a:bodyPr wrap="square" lIns="0" tIns="0" rIns="0" bIns="0" anchor="t">
             <a:spAutoFit/>
           </a:bodyPr>
           <a:lstStyle/>
@@ -16609,7 +16856,7 @@
           <a:noFill/>
         </p:spPr>
         <p:txBody>
-          <a:bodyPr wrap="square" anchor="t" lIns="0" rIns="0" tIns="0" bIns="0">
+          <a:bodyPr wrap="square" lIns="0" tIns="0" rIns="0" bIns="0" anchor="t">
             <a:spAutoFit/>
           </a:bodyPr>
           <a:lstStyle/>
@@ -16643,7 +16890,7 @@
 </file>
 
 <file path=ppt/slides/slide25.xml><?xml version="1.0" encoding="utf-8"?>
-<p:sld xmlns:a="http://schemas.openxmlformats.org/drawingml/2006/main" xmlns:p="http://schemas.openxmlformats.org/presentationml/2006/main" xmlns:r="http://schemas.openxmlformats.org/officeDocument/2006/relationships">
+<p:sld xmlns:a="http://schemas.openxmlformats.org/drawingml/2006/main" xmlns:r="http://schemas.openxmlformats.org/officeDocument/2006/relationships" xmlns:p="http://schemas.openxmlformats.org/presentationml/2006/main">
   <p:cSld>
     <p:bg>
       <p:bgPr>
@@ -16659,7 +16906,14 @@
         <p:cNvGrpSpPr/>
         <p:nvPr/>
       </p:nvGrpSpPr>
-      <p:grpSpPr/>
+      <p:grpSpPr>
+        <a:xfrm>
+          <a:off x="0" y="0"/>
+          <a:ext cx="0" cy="0"/>
+          <a:chOff x="0" y="0"/>
+          <a:chExt cx="0" cy="0"/>
+        </a:xfrm>
+      </p:grpSpPr>
       <p:sp>
         <p:nvSpPr>
           <p:cNvPr id="2" name="TextBox 1"/>
@@ -16677,7 +16931,7 @@
           <a:noFill/>
         </p:spPr>
         <p:txBody>
-          <a:bodyPr wrap="square" anchor="t" lIns="0" rIns="0" tIns="0" bIns="0">
+          <a:bodyPr wrap="square" lIns="0" tIns="0" rIns="0" bIns="0" anchor="t">
             <a:spAutoFit/>
           </a:bodyPr>
           <a:lstStyle/>
@@ -16719,7 +16973,7 @@
           <a:noFill/>
         </p:spPr>
         <p:txBody>
-          <a:bodyPr wrap="square" anchor="t" lIns="0" rIns="0" tIns="0" bIns="0">
+          <a:bodyPr wrap="square" lIns="0" tIns="0" rIns="0" bIns="0" anchor="t">
             <a:spAutoFit/>
           </a:bodyPr>
           <a:lstStyle/>
@@ -16785,6 +17039,7 @@
           <a:lstStyle/>
           <a:p>
             <a:pPr algn="ctr"/>
+            <a:endParaRPr/>
           </a:p>
         </p:txBody>
       </p:sp>
@@ -16829,6 +17084,7 @@
           <a:lstStyle/>
           <a:p>
             <a:pPr algn="ctr"/>
+            <a:endParaRPr/>
           </a:p>
         </p:txBody>
       </p:sp>
@@ -16849,7 +17105,7 @@
           <a:noFill/>
         </p:spPr>
         <p:txBody>
-          <a:bodyPr wrap="square" anchor="t" lIns="0" rIns="0" tIns="0" bIns="0">
+          <a:bodyPr wrap="square" lIns="0" tIns="0" rIns="0" bIns="0" anchor="t">
             <a:spAutoFit/>
           </a:bodyPr>
           <a:lstStyle/>
@@ -16891,7 +17147,7 @@
           <a:noFill/>
         </p:spPr>
         <p:txBody>
-          <a:bodyPr wrap="square" anchor="t" lIns="0" rIns="0" tIns="0" bIns="0">
+          <a:bodyPr wrap="square" lIns="0" tIns="0" rIns="0" bIns="0" anchor="t">
             <a:spAutoFit/>
           </a:bodyPr>
           <a:lstStyle/>
@@ -16957,6 +17213,7 @@
           <a:lstStyle/>
           <a:p>
             <a:pPr algn="ctr"/>
+            <a:endParaRPr/>
           </a:p>
         </p:txBody>
       </p:sp>
@@ -17001,6 +17258,7 @@
           <a:lstStyle/>
           <a:p>
             <a:pPr algn="ctr"/>
+            <a:endParaRPr/>
           </a:p>
         </p:txBody>
       </p:sp>
@@ -17021,7 +17279,7 @@
           <a:noFill/>
         </p:spPr>
         <p:txBody>
-          <a:bodyPr wrap="square" anchor="t" lIns="0" rIns="0" tIns="0" bIns="0">
+          <a:bodyPr wrap="square" lIns="0" tIns="0" rIns="0" bIns="0" anchor="t">
             <a:spAutoFit/>
           </a:bodyPr>
           <a:lstStyle/>
@@ -17063,7 +17321,7 @@
           <a:noFill/>
         </p:spPr>
         <p:txBody>
-          <a:bodyPr wrap="square" anchor="t" lIns="0" rIns="0" tIns="0" bIns="0">
+          <a:bodyPr wrap="square" lIns="0" tIns="0" rIns="0" bIns="0" anchor="t">
             <a:spAutoFit/>
           </a:bodyPr>
           <a:lstStyle/>
@@ -17105,7 +17363,7 @@
           <a:noFill/>
         </p:spPr>
         <p:txBody>
-          <a:bodyPr wrap="square" anchor="t" lIns="0" rIns="0" tIns="0" bIns="0">
+          <a:bodyPr wrap="square" lIns="0" tIns="0" rIns="0" bIns="0" anchor="t">
             <a:spAutoFit/>
           </a:bodyPr>
           <a:lstStyle/>
@@ -17147,7 +17405,7 @@
           <a:noFill/>
         </p:spPr>
         <p:txBody>
-          <a:bodyPr wrap="square" anchor="t" lIns="0" rIns="0" tIns="0" bIns="0">
+          <a:bodyPr wrap="square" lIns="0" tIns="0" rIns="0" bIns="0" anchor="t">
             <a:spAutoFit/>
           </a:bodyPr>
           <a:lstStyle/>
@@ -17189,7 +17447,7 @@
           <a:noFill/>
         </p:spPr>
         <p:txBody>
-          <a:bodyPr wrap="square" anchor="t" lIns="0" rIns="0" tIns="0" bIns="0">
+          <a:bodyPr wrap="square" lIns="0" tIns="0" rIns="0" bIns="0" anchor="t">
             <a:spAutoFit/>
           </a:bodyPr>
           <a:lstStyle/>
@@ -17223,7 +17481,7 @@
 </file>
 
 <file path=ppt/slides/slide26.xml><?xml version="1.0" encoding="utf-8"?>
-<p:sld xmlns:a="http://schemas.openxmlformats.org/drawingml/2006/main" xmlns:p="http://schemas.openxmlformats.org/presentationml/2006/main" xmlns:r="http://schemas.openxmlformats.org/officeDocument/2006/relationships">
+<p:sld xmlns:a="http://schemas.openxmlformats.org/drawingml/2006/main" xmlns:r="http://schemas.openxmlformats.org/officeDocument/2006/relationships" xmlns:p="http://schemas.openxmlformats.org/presentationml/2006/main">
   <p:cSld>
     <p:bg>
       <p:bgPr>
@@ -17239,7 +17497,14 @@
         <p:cNvGrpSpPr/>
         <p:nvPr/>
       </p:nvGrpSpPr>
-      <p:grpSpPr/>
+      <p:grpSpPr>
+        <a:xfrm>
+          <a:off x="0" y="0"/>
+          <a:ext cx="0" cy="0"/>
+          <a:chOff x="0" y="0"/>
+          <a:chExt cx="0" cy="0"/>
+        </a:xfrm>
+      </p:grpSpPr>
       <p:sp>
         <p:nvSpPr>
           <p:cNvPr id="2" name="TextBox 1"/>
@@ -17257,7 +17522,7 @@
           <a:noFill/>
         </p:spPr>
         <p:txBody>
-          <a:bodyPr wrap="square" anchor="t" lIns="0" rIns="0" tIns="0" bIns="0">
+          <a:bodyPr wrap="square" lIns="0" tIns="0" rIns="0" bIns="0" anchor="t">
             <a:spAutoFit/>
           </a:bodyPr>
           <a:lstStyle/>
@@ -17299,7 +17564,7 @@
           <a:noFill/>
         </p:spPr>
         <p:txBody>
-          <a:bodyPr wrap="square" anchor="t" lIns="0" rIns="0" tIns="0" bIns="0">
+          <a:bodyPr wrap="square" lIns="0" tIns="0" rIns="0" bIns="0" anchor="t">
             <a:spAutoFit/>
           </a:bodyPr>
           <a:lstStyle/>
@@ -17341,7 +17606,7 @@
           <a:noFill/>
         </p:spPr>
         <p:txBody>
-          <a:bodyPr wrap="square" anchor="t" lIns="0" rIns="0" tIns="0" bIns="0">
+          <a:bodyPr wrap="square" lIns="0" tIns="0" rIns="0" bIns="0" anchor="t">
             <a:spAutoFit/>
           </a:bodyPr>
           <a:lstStyle/>
@@ -17383,7 +17648,7 @@
           <a:noFill/>
         </p:spPr>
         <p:txBody>
-          <a:bodyPr wrap="square" anchor="t" lIns="0" rIns="0" tIns="0" bIns="0">
+          <a:bodyPr wrap="square" lIns="0" tIns="0" rIns="0" bIns="0" anchor="t">
             <a:spAutoFit/>
           </a:bodyPr>
           <a:lstStyle/>
@@ -17425,7 +17690,7 @@
           <a:noFill/>
         </p:spPr>
         <p:txBody>
-          <a:bodyPr wrap="square" anchor="t" lIns="0" rIns="0" tIns="0" bIns="0">
+          <a:bodyPr wrap="square" lIns="0" tIns="0" rIns="0" bIns="0" anchor="t">
             <a:spAutoFit/>
           </a:bodyPr>
           <a:lstStyle/>
@@ -17467,7 +17732,7 @@
           <a:noFill/>
         </p:spPr>
         <p:txBody>
-          <a:bodyPr wrap="square" anchor="t" lIns="0" rIns="0" tIns="0" bIns="0">
+          <a:bodyPr wrap="square" lIns="0" tIns="0" rIns="0" bIns="0" anchor="t">
             <a:spAutoFit/>
           </a:bodyPr>
           <a:lstStyle/>
@@ -17509,7 +17774,7 @@
           <a:noFill/>
         </p:spPr>
         <p:txBody>
-          <a:bodyPr wrap="square" anchor="t" lIns="0" rIns="0" tIns="0" bIns="0">
+          <a:bodyPr wrap="square" lIns="0" tIns="0" rIns="0" bIns="0" anchor="t">
             <a:spAutoFit/>
           </a:bodyPr>
           <a:lstStyle/>
@@ -17551,7 +17816,7 @@
           <a:noFill/>
         </p:spPr>
         <p:txBody>
-          <a:bodyPr wrap="square" anchor="t" lIns="0" rIns="0" tIns="0" bIns="0">
+          <a:bodyPr wrap="square" lIns="0" tIns="0" rIns="0" bIns="0" anchor="t">
             <a:spAutoFit/>
           </a:bodyPr>
           <a:lstStyle/>
@@ -17593,7 +17858,7 @@
           <a:noFill/>
         </p:spPr>
         <p:txBody>
-          <a:bodyPr wrap="square" anchor="t" lIns="0" rIns="0" tIns="0" bIns="0">
+          <a:bodyPr wrap="square" lIns="0" tIns="0" rIns="0" bIns="0" anchor="t">
             <a:spAutoFit/>
           </a:bodyPr>
           <a:lstStyle/>
@@ -17635,7 +17900,7 @@
           <a:noFill/>
         </p:spPr>
         <p:txBody>
-          <a:bodyPr wrap="square" anchor="t" lIns="0" rIns="0" tIns="0" bIns="0">
+          <a:bodyPr wrap="square" lIns="0" tIns="0" rIns="0" bIns="0" anchor="t">
             <a:spAutoFit/>
           </a:bodyPr>
           <a:lstStyle/>
@@ -17677,7 +17942,7 @@
           <a:noFill/>
         </p:spPr>
         <p:txBody>
-          <a:bodyPr wrap="square" anchor="t" lIns="0" rIns="0" tIns="0" bIns="0">
+          <a:bodyPr wrap="square" lIns="0" tIns="0" rIns="0" bIns="0" anchor="t">
             <a:spAutoFit/>
           </a:bodyPr>
           <a:lstStyle/>
@@ -17719,7 +17984,7 @@
           <a:noFill/>
         </p:spPr>
         <p:txBody>
-          <a:bodyPr wrap="square" anchor="t" lIns="0" rIns="0" tIns="0" bIns="0">
+          <a:bodyPr wrap="square" lIns="0" tIns="0" rIns="0" bIns="0" anchor="t">
             <a:spAutoFit/>
           </a:bodyPr>
           <a:lstStyle/>
@@ -17761,7 +18026,7 @@
           <a:noFill/>
         </p:spPr>
         <p:txBody>
-          <a:bodyPr wrap="square" anchor="t" lIns="0" rIns="0" tIns="0" bIns="0">
+          <a:bodyPr wrap="square" lIns="0" tIns="0" rIns="0" bIns="0" anchor="t">
             <a:spAutoFit/>
           </a:bodyPr>
           <a:lstStyle/>
@@ -17803,7 +18068,7 @@
           <a:noFill/>
         </p:spPr>
         <p:txBody>
-          <a:bodyPr wrap="square" anchor="t" lIns="0" rIns="0" tIns="0" bIns="0">
+          <a:bodyPr wrap="square" lIns="0" tIns="0" rIns="0" bIns="0" anchor="t">
             <a:spAutoFit/>
           </a:bodyPr>
           <a:lstStyle/>
@@ -17845,7 +18110,7 @@
           <a:noFill/>
         </p:spPr>
         <p:txBody>
-          <a:bodyPr wrap="square" anchor="t" lIns="0" rIns="0" tIns="0" bIns="0">
+          <a:bodyPr wrap="square" lIns="0" tIns="0" rIns="0" bIns="0" anchor="t">
             <a:spAutoFit/>
           </a:bodyPr>
           <a:lstStyle/>
@@ -17887,7 +18152,7 @@
           <a:noFill/>
         </p:spPr>
         <p:txBody>
-          <a:bodyPr wrap="square" anchor="t" lIns="0" rIns="0" tIns="0" bIns="0">
+          <a:bodyPr wrap="square" lIns="0" tIns="0" rIns="0" bIns="0" anchor="t">
             <a:spAutoFit/>
           </a:bodyPr>
           <a:lstStyle/>
@@ -17921,7 +18186,7 @@
 </file>
 
 <file path=ppt/slides/slide27.xml><?xml version="1.0" encoding="utf-8"?>
-<p:sld xmlns:a="http://schemas.openxmlformats.org/drawingml/2006/main" xmlns:p="http://schemas.openxmlformats.org/presentationml/2006/main" xmlns:r="http://schemas.openxmlformats.org/officeDocument/2006/relationships">
+<p:sld xmlns:a="http://schemas.openxmlformats.org/drawingml/2006/main" xmlns:r="http://schemas.openxmlformats.org/officeDocument/2006/relationships" xmlns:p="http://schemas.openxmlformats.org/presentationml/2006/main">
   <p:cSld>
     <p:bg>
       <p:bgPr>
@@ -17937,7 +18202,14 @@
         <p:cNvGrpSpPr/>
         <p:nvPr/>
       </p:nvGrpSpPr>
-      <p:grpSpPr/>
+      <p:grpSpPr>
+        <a:xfrm>
+          <a:off x="0" y="0"/>
+          <a:ext cx="0" cy="0"/>
+          <a:chOff x="0" y="0"/>
+          <a:chExt cx="0" cy="0"/>
+        </a:xfrm>
+      </p:grpSpPr>
       <p:sp>
         <p:nvSpPr>
           <p:cNvPr id="2" name="Rectangle 1"/>
@@ -17979,6 +18251,7 @@
           <a:lstStyle/>
           <a:p>
             <a:pPr algn="ctr"/>
+            <a:endParaRPr/>
           </a:p>
         </p:txBody>
       </p:sp>
@@ -17999,7 +18272,7 @@
           <a:noFill/>
         </p:spPr>
         <p:txBody>
-          <a:bodyPr wrap="square" anchor="t" lIns="0" rIns="0" tIns="0" bIns="0">
+          <a:bodyPr wrap="square" lIns="0" tIns="0" rIns="0" bIns="0" anchor="t">
             <a:spAutoFit/>
           </a:bodyPr>
           <a:lstStyle/>
@@ -18041,7 +18314,7 @@
           <a:noFill/>
         </p:spPr>
         <p:txBody>
-          <a:bodyPr wrap="square" anchor="t" lIns="0" rIns="0" tIns="0" bIns="0">
+          <a:bodyPr wrap="square" lIns="0" tIns="0" rIns="0" bIns="0" anchor="t">
             <a:spAutoFit/>
           </a:bodyPr>
           <a:lstStyle/>
@@ -18107,6 +18380,7 @@
           <a:lstStyle/>
           <a:p>
             <a:pPr algn="ctr"/>
+            <a:endParaRPr/>
           </a:p>
         </p:txBody>
       </p:sp>
@@ -18127,7 +18401,7 @@
           <a:noFill/>
         </p:spPr>
         <p:txBody>
-          <a:bodyPr wrap="square" anchor="t" lIns="0" rIns="0" tIns="0" bIns="0">
+          <a:bodyPr wrap="square" lIns="0" tIns="0" rIns="0" bIns="0" anchor="t">
             <a:spAutoFit/>
           </a:bodyPr>
           <a:lstStyle/>
@@ -18169,7 +18443,7 @@
           <a:noFill/>
         </p:spPr>
         <p:txBody>
-          <a:bodyPr wrap="square" anchor="t" lIns="0" rIns="0" tIns="0" bIns="0">
+          <a:bodyPr wrap="square" lIns="0" tIns="0" rIns="0" bIns="0" anchor="t">
             <a:spAutoFit/>
           </a:bodyPr>
           <a:lstStyle/>
@@ -18189,7 +18463,7 @@
                 </a:solidFill>
                 <a:latin typeface="Consolas"/>
               </a:rPr>
-              <a:t>github.com/&lt;ton-repo&gt; — code, scripts, CLAUDE.md, PROMPT.md</a:t>
+              <a:t>github.com/sidevconcept/couverture-junit-cucumber-jacoco</a:t>
             </a:r>
           </a:p>
         </p:txBody>
@@ -18235,6 +18509,7 @@
           <a:lstStyle/>
           <a:p>
             <a:pPr algn="ctr"/>
+            <a:endParaRPr/>
           </a:p>
         </p:txBody>
       </p:sp>
@@ -18255,7 +18530,7 @@
           <a:noFill/>
         </p:spPr>
         <p:txBody>
-          <a:bodyPr wrap="square" anchor="t" lIns="0" rIns="0" tIns="0" bIns="0">
+          <a:bodyPr wrap="square" lIns="0" tIns="0" rIns="0" bIns="0" anchor="t">
             <a:spAutoFit/>
           </a:bodyPr>
           <a:lstStyle/>
@@ -18297,7 +18572,7 @@
           <a:noFill/>
         </p:spPr>
         <p:txBody>
-          <a:bodyPr wrap="square" anchor="t" lIns="0" rIns="0" tIns="0" bIns="0">
+          <a:bodyPr wrap="square" lIns="0" tIns="0" rIns="0" bIns="0" anchor="t">
             <a:spAutoFit/>
           </a:bodyPr>
           <a:lstStyle/>
@@ -18363,6 +18638,7 @@
           <a:lstStyle/>
           <a:p>
             <a:pPr algn="ctr"/>
+            <a:endParaRPr/>
           </a:p>
         </p:txBody>
       </p:sp>
@@ -18383,7 +18659,7 @@
           <a:noFill/>
         </p:spPr>
         <p:txBody>
-          <a:bodyPr wrap="square" anchor="t" lIns="0" rIns="0" tIns="0" bIns="0">
+          <a:bodyPr wrap="square" lIns="0" tIns="0" rIns="0" bIns="0" anchor="t">
             <a:spAutoFit/>
           </a:bodyPr>
           <a:lstStyle/>
@@ -18425,7 +18701,7 @@
           <a:noFill/>
         </p:spPr>
         <p:txBody>
-          <a:bodyPr wrap="square" anchor="t" lIns="0" rIns="0" tIns="0" bIns="0">
+          <a:bodyPr wrap="square" lIns="0" tIns="0" rIns="0" bIns="0" anchor="t">
             <a:spAutoFit/>
           </a:bodyPr>
           <a:lstStyle/>
@@ -18491,6 +18767,7 @@
           <a:lstStyle/>
           <a:p>
             <a:pPr algn="ctr"/>
+            <a:endParaRPr/>
           </a:p>
         </p:txBody>
       </p:sp>
@@ -18511,7 +18788,7 @@
           <a:noFill/>
         </p:spPr>
         <p:txBody>
-          <a:bodyPr wrap="square" anchor="t" lIns="0" rIns="0" tIns="0" bIns="0">
+          <a:bodyPr wrap="square" lIns="0" tIns="0" rIns="0" bIns="0" anchor="t">
             <a:spAutoFit/>
           </a:bodyPr>
           <a:lstStyle/>
@@ -18553,7 +18830,7 @@
           <a:noFill/>
         </p:spPr>
         <p:txBody>
-          <a:bodyPr wrap="square" anchor="t" lIns="0" rIns="0" tIns="0" bIns="0">
+          <a:bodyPr wrap="square" lIns="0" tIns="0" rIns="0" bIns="0" anchor="t">
             <a:spAutoFit/>
           </a:bodyPr>
           <a:lstStyle/>
@@ -18595,7 +18872,7 @@
           <a:noFill/>
         </p:spPr>
         <p:txBody>
-          <a:bodyPr wrap="square" anchor="t" lIns="0" rIns="0" tIns="0" bIns="0">
+          <a:bodyPr wrap="square" lIns="0" tIns="0" rIns="0" bIns="0" anchor="t">
             <a:spAutoFit/>
           </a:bodyPr>
           <a:lstStyle/>
@@ -18637,7 +18914,7 @@
           <a:noFill/>
         </p:spPr>
         <p:txBody>
-          <a:bodyPr wrap="square" anchor="t" lIns="0" rIns="0" tIns="0" bIns="0">
+          <a:bodyPr wrap="square" lIns="0" tIns="0" rIns="0" bIns="0" anchor="t">
             <a:spAutoFit/>
           </a:bodyPr>
           <a:lstStyle/>
@@ -18671,7 +18948,7 @@
 </file>
 
 <file path=ppt/slides/slide28.xml><?xml version="1.0" encoding="utf-8"?>
-<p:sld xmlns:a="http://schemas.openxmlformats.org/drawingml/2006/main" xmlns:p="http://schemas.openxmlformats.org/presentationml/2006/main" xmlns:r="http://schemas.openxmlformats.org/officeDocument/2006/relationships">
+<p:sld xmlns:a="http://schemas.openxmlformats.org/drawingml/2006/main" xmlns:r="http://schemas.openxmlformats.org/officeDocument/2006/relationships" xmlns:p="http://schemas.openxmlformats.org/presentationml/2006/main">
   <p:cSld>
     <p:bg>
       <p:bgPr>
@@ -18687,7 +18964,14 @@
         <p:cNvGrpSpPr/>
         <p:nvPr/>
       </p:nvGrpSpPr>
-      <p:grpSpPr/>
+      <p:grpSpPr>
+        <a:xfrm>
+          <a:off x="0" y="0"/>
+          <a:ext cx="0" cy="0"/>
+          <a:chOff x="0" y="0"/>
+          <a:chExt cx="0" cy="0"/>
+        </a:xfrm>
+      </p:grpSpPr>
       <p:sp>
         <p:nvSpPr>
           <p:cNvPr id="2" name="Oval 1"/>
@@ -18729,6 +19013,7 @@
           <a:lstStyle/>
           <a:p>
             <a:pPr algn="ctr"/>
+            <a:endParaRPr/>
           </a:p>
         </p:txBody>
       </p:sp>
@@ -18773,6 +19058,7 @@
           <a:lstStyle/>
           <a:p>
             <a:pPr algn="ctr"/>
+            <a:endParaRPr/>
           </a:p>
         </p:txBody>
       </p:sp>
@@ -18817,6 +19103,7 @@
           <a:lstStyle/>
           <a:p>
             <a:pPr algn="ctr"/>
+            <a:endParaRPr/>
           </a:p>
         </p:txBody>
       </p:sp>
@@ -18861,6 +19148,7 @@
           <a:lstStyle/>
           <a:p>
             <a:pPr algn="ctr"/>
+            <a:endParaRPr/>
           </a:p>
         </p:txBody>
       </p:sp>
@@ -18905,6 +19193,7 @@
           <a:lstStyle/>
           <a:p>
             <a:pPr algn="ctr"/>
+            <a:endParaRPr/>
           </a:p>
         </p:txBody>
       </p:sp>
@@ -18949,6 +19238,7 @@
           <a:lstStyle/>
           <a:p>
             <a:pPr algn="ctr"/>
+            <a:endParaRPr/>
           </a:p>
         </p:txBody>
       </p:sp>
@@ -18993,6 +19283,7 @@
           <a:lstStyle/>
           <a:p>
             <a:pPr algn="ctr"/>
+            <a:endParaRPr/>
           </a:p>
         </p:txBody>
       </p:sp>
@@ -19037,6 +19328,7 @@
           <a:lstStyle/>
           <a:p>
             <a:pPr algn="ctr"/>
+            <a:endParaRPr/>
           </a:p>
         </p:txBody>
       </p:sp>
@@ -19081,6 +19373,7 @@
           <a:lstStyle/>
           <a:p>
             <a:pPr algn="ctr"/>
+            <a:endParaRPr/>
           </a:p>
         </p:txBody>
       </p:sp>
@@ -19125,6 +19418,7 @@
           <a:lstStyle/>
           <a:p>
             <a:pPr algn="ctr"/>
+            <a:endParaRPr/>
           </a:p>
         </p:txBody>
       </p:sp>
@@ -19169,6 +19463,7 @@
           <a:lstStyle/>
           <a:p>
             <a:pPr algn="ctr"/>
+            <a:endParaRPr/>
           </a:p>
         </p:txBody>
       </p:sp>
@@ -19213,6 +19508,7 @@
           <a:lstStyle/>
           <a:p>
             <a:pPr algn="ctr"/>
+            <a:endParaRPr/>
           </a:p>
         </p:txBody>
       </p:sp>
@@ -19257,6 +19553,7 @@
           <a:lstStyle/>
           <a:p>
             <a:pPr algn="ctr"/>
+            <a:endParaRPr/>
           </a:p>
         </p:txBody>
       </p:sp>
@@ -19301,6 +19598,7 @@
           <a:lstStyle/>
           <a:p>
             <a:pPr algn="ctr"/>
+            <a:endParaRPr/>
           </a:p>
         </p:txBody>
       </p:sp>
@@ -19345,6 +19643,7 @@
           <a:lstStyle/>
           <a:p>
             <a:pPr algn="ctr"/>
+            <a:endParaRPr/>
           </a:p>
         </p:txBody>
       </p:sp>
@@ -19389,6 +19688,7 @@
           <a:lstStyle/>
           <a:p>
             <a:pPr algn="ctr"/>
+            <a:endParaRPr/>
           </a:p>
         </p:txBody>
       </p:sp>
@@ -19433,6 +19733,7 @@
           <a:lstStyle/>
           <a:p>
             <a:pPr algn="ctr"/>
+            <a:endParaRPr/>
           </a:p>
         </p:txBody>
       </p:sp>
@@ -19477,6 +19778,7 @@
           <a:lstStyle/>
           <a:p>
             <a:pPr algn="ctr"/>
+            <a:endParaRPr/>
           </a:p>
         </p:txBody>
       </p:sp>
@@ -19521,6 +19823,7 @@
           <a:lstStyle/>
           <a:p>
             <a:pPr algn="ctr"/>
+            <a:endParaRPr/>
           </a:p>
         </p:txBody>
       </p:sp>
@@ -19565,6 +19868,7 @@
           <a:lstStyle/>
           <a:p>
             <a:pPr algn="ctr"/>
+            <a:endParaRPr/>
           </a:p>
         </p:txBody>
       </p:sp>
@@ -19609,6 +19913,7 @@
           <a:lstStyle/>
           <a:p>
             <a:pPr algn="ctr"/>
+            <a:endParaRPr/>
           </a:p>
         </p:txBody>
       </p:sp>
@@ -19653,6 +19958,7 @@
           <a:lstStyle/>
           <a:p>
             <a:pPr algn="ctr"/>
+            <a:endParaRPr/>
           </a:p>
         </p:txBody>
       </p:sp>
@@ -19697,6 +20003,7 @@
           <a:lstStyle/>
           <a:p>
             <a:pPr algn="ctr"/>
+            <a:endParaRPr/>
           </a:p>
         </p:txBody>
       </p:sp>
@@ -19741,6 +20048,7 @@
           <a:lstStyle/>
           <a:p>
             <a:pPr algn="ctr"/>
+            <a:endParaRPr/>
           </a:p>
         </p:txBody>
       </p:sp>
@@ -19785,6 +20093,7 @@
           <a:lstStyle/>
           <a:p>
             <a:pPr algn="ctr"/>
+            <a:endParaRPr/>
           </a:p>
         </p:txBody>
       </p:sp>
@@ -19829,6 +20138,7 @@
           <a:lstStyle/>
           <a:p>
             <a:pPr algn="ctr"/>
+            <a:endParaRPr/>
           </a:p>
         </p:txBody>
       </p:sp>
@@ -19873,6 +20183,7 @@
           <a:lstStyle/>
           <a:p>
             <a:pPr algn="ctr"/>
+            <a:endParaRPr/>
           </a:p>
         </p:txBody>
       </p:sp>
@@ -19917,6 +20228,7 @@
           <a:lstStyle/>
           <a:p>
             <a:pPr algn="ctr"/>
+            <a:endParaRPr/>
           </a:p>
         </p:txBody>
       </p:sp>
@@ -19961,6 +20273,7 @@
           <a:lstStyle/>
           <a:p>
             <a:pPr algn="ctr"/>
+            <a:endParaRPr/>
           </a:p>
         </p:txBody>
       </p:sp>
@@ -20005,6 +20318,7 @@
           <a:lstStyle/>
           <a:p>
             <a:pPr algn="ctr"/>
+            <a:endParaRPr/>
           </a:p>
         </p:txBody>
       </p:sp>
@@ -20016,16 +20330,16 @@
         </p:nvSpPr>
         <p:spPr>
           <a:xfrm>
-            <a:off x="822960" y="2377440"/>
-            <a:ext cx="9144000" cy="1280160"/>
-          </a:xfrm>
-          <a:prstGeom prst="rect">
-            <a:avLst/>
-          </a:prstGeom>
-          <a:noFill/>
-        </p:spPr>
-        <p:txBody>
-          <a:bodyPr wrap="square" anchor="t" lIns="0" rIns="0" tIns="0" bIns="0">
+            <a:off x="868680" y="882396"/>
+            <a:ext cx="7589520" cy="1280160"/>
+          </a:xfrm>
+          <a:prstGeom prst="rect">
+            <a:avLst/>
+          </a:prstGeom>
+          <a:noFill/>
+        </p:spPr>
+        <p:txBody>
+          <a:bodyPr wrap="square" lIns="0" tIns="0" rIns="0" bIns="0" anchor="t">
             <a:spAutoFit/>
           </a:bodyPr>
           <a:lstStyle/>
@@ -20039,7 +20353,7 @@
               </a:spcAft>
             </a:pPr>
             <a:r>
-              <a:rPr sz="5200" b="1" i="0">
+              <a:rPr sz="5200" b="1" i="0" dirty="0">
                 <a:solidFill>
                   <a:srgbClr val="EFECE3"/>
                 </a:solidFill>
@@ -20058,16 +20372,16 @@
         </p:nvSpPr>
         <p:spPr>
           <a:xfrm>
-            <a:off x="868680" y="3429000"/>
-            <a:ext cx="9144000" cy="640080"/>
-          </a:xfrm>
-          <a:prstGeom prst="rect">
-            <a:avLst/>
-          </a:prstGeom>
-          <a:noFill/>
-        </p:spPr>
-        <p:txBody>
-          <a:bodyPr wrap="square" anchor="t" lIns="0" rIns="0" tIns="0" bIns="0">
+            <a:off x="868680" y="1732788"/>
+            <a:ext cx="7589520" cy="640080"/>
+          </a:xfrm>
+          <a:prstGeom prst="rect">
+            <a:avLst/>
+          </a:prstGeom>
+          <a:noFill/>
+        </p:spPr>
+        <p:txBody>
+          <a:bodyPr wrap="square" lIns="0" tIns="0" rIns="0" bIns="0" anchor="t">
             <a:spAutoFit/>
           </a:bodyPr>
           <a:lstStyle/>
@@ -20081,7 +20395,7 @@
               </a:spcAft>
             </a:pPr>
             <a:r>
-              <a:rPr sz="2200" b="0" i="0">
+              <a:rPr sz="2200" b="0" i="0" dirty="0">
                 <a:solidFill>
                   <a:srgbClr val="C79A52"/>
                 </a:solidFill>
@@ -20100,16 +20414,16 @@
         </p:nvSpPr>
         <p:spPr>
           <a:xfrm>
-            <a:off x="868680" y="5989320"/>
-            <a:ext cx="9144000" cy="457200"/>
-          </a:xfrm>
-          <a:prstGeom prst="rect">
-            <a:avLst/>
-          </a:prstGeom>
-          <a:noFill/>
-        </p:spPr>
-        <p:txBody>
-          <a:bodyPr wrap="square" anchor="t" lIns="0" rIns="0" tIns="0" bIns="0">
+            <a:off x="1098395" y="2936557"/>
+            <a:ext cx="7359805" cy="984885"/>
+          </a:xfrm>
+          <a:prstGeom prst="rect">
+            <a:avLst/>
+          </a:prstGeom>
+          <a:noFill/>
+        </p:spPr>
+        <p:txBody>
+          <a:bodyPr wrap="square" lIns="0" tIns="0" rIns="0" bIns="0" anchor="t">
             <a:spAutoFit/>
           </a:bodyPr>
           <a:lstStyle/>
@@ -20123,17 +20437,241 @@
               </a:spcAft>
             </a:pPr>
             <a:r>
-              <a:rPr sz="1300" b="0" i="0">
+              <a:rPr sz="2000" b="0" i="0" dirty="0">
                 <a:solidFill>
                   <a:srgbClr val="8B93A1"/>
                 </a:solidFill>
                 <a:latin typeface="Calibri"/>
               </a:rPr>
-              <a:t>github.com/&lt;ton-repo&gt;  —  &lt;ton-email&gt;</a:t>
-            </a:r>
-          </a:p>
-        </p:txBody>
-      </p:sp>
+              <a:t>https://</a:t>
+            </a:r>
+            <a:r>
+              <a:rPr sz="2000" b="0" i="0" dirty="0" err="1">
+                <a:solidFill>
+                  <a:srgbClr val="8B93A1"/>
+                </a:solidFill>
+                <a:latin typeface="Calibri"/>
+              </a:rPr>
+              <a:t>github.com</a:t>
+            </a:r>
+            <a:r>
+              <a:rPr sz="2000" b="0" i="0" dirty="0">
+                <a:solidFill>
+                  <a:srgbClr val="8B93A1"/>
+                </a:solidFill>
+                <a:latin typeface="Calibri"/>
+              </a:rPr>
+              <a:t>/</a:t>
+            </a:r>
+            <a:r>
+              <a:rPr sz="2000" b="0" i="0" dirty="0" err="1">
+                <a:solidFill>
+                  <a:srgbClr val="8B93A1"/>
+                </a:solidFill>
+                <a:latin typeface="Calibri"/>
+              </a:rPr>
+              <a:t>sidevconcept</a:t>
+            </a:r>
+            <a:r>
+              <a:rPr sz="2000" b="0" i="0" dirty="0">
+                <a:solidFill>
+                  <a:srgbClr val="8B93A1"/>
+                </a:solidFill>
+                <a:latin typeface="Calibri"/>
+              </a:rPr>
+              <a:t>/couverture-</a:t>
+            </a:r>
+            <a:r>
+              <a:rPr sz="2000" b="0" i="0" dirty="0" err="1">
+                <a:solidFill>
+                  <a:srgbClr val="8B93A1"/>
+                </a:solidFill>
+                <a:latin typeface="Calibri"/>
+              </a:rPr>
+              <a:t>junit</a:t>
+            </a:r>
+            <a:r>
+              <a:rPr sz="2000" b="0" i="0" dirty="0">
+                <a:solidFill>
+                  <a:srgbClr val="8B93A1"/>
+                </a:solidFill>
+                <a:latin typeface="Calibri"/>
+              </a:rPr>
+              <a:t>-cucumber-</a:t>
+            </a:r>
+            <a:r>
+              <a:rPr sz="2000" b="0" i="0" dirty="0" err="1">
+                <a:solidFill>
+                  <a:srgbClr val="8B93A1"/>
+                </a:solidFill>
+                <a:latin typeface="Calibri"/>
+              </a:rPr>
+              <a:t>jacoco</a:t>
+            </a:r>
+            <a:endParaRPr lang="fr-FR" sz="2000" b="0" i="0" dirty="0">
+              <a:solidFill>
+                <a:srgbClr val="8B93A1"/>
+              </a:solidFill>
+              <a:latin typeface="Calibri"/>
+            </a:endParaRPr>
+          </a:p>
+          <a:p>
+            <a:pPr algn="l">
+              <a:lnSpc>
+                <a:spcPct val="100000"/>
+              </a:lnSpc>
+              <a:spcAft>
+                <a:spcPts val="0"/>
+              </a:spcAft>
+            </a:pPr>
+            <a:endParaRPr lang="fr-FR" sz="2400" dirty="0">
+              <a:solidFill>
+                <a:srgbClr val="8B93A1"/>
+              </a:solidFill>
+              <a:latin typeface="Calibri"/>
+            </a:endParaRPr>
+          </a:p>
+          <a:p>
+            <a:pPr algn="l">
+              <a:lnSpc>
+                <a:spcPct val="100000"/>
+              </a:lnSpc>
+              <a:spcAft>
+                <a:spcPts val="0"/>
+              </a:spcAft>
+            </a:pPr>
+            <a:r>
+              <a:rPr sz="2000" b="0" i="0" dirty="0">
+                <a:solidFill>
+                  <a:srgbClr val="8B93A1"/>
+                </a:solidFill>
+                <a:latin typeface="Calibri"/>
+              </a:rPr>
+              <a:t>sidev.concept06@gmail.com</a:t>
+            </a:r>
+          </a:p>
+        </p:txBody>
+      </p:sp>
+      <p:sp>
+        <p:nvSpPr>
+          <p:cNvPr id="35" name="TextBox 34"/>
+          <p:cNvSpPr txBox="1"/>
+          <p:nvPr/>
+        </p:nvSpPr>
+        <p:spPr>
+          <a:xfrm>
+            <a:off x="9052560" y="2011680"/>
+            <a:ext cx="1920240" cy="320040"/>
+          </a:xfrm>
+          <a:prstGeom prst="rect">
+            <a:avLst/>
+          </a:prstGeom>
+          <a:noFill/>
+        </p:spPr>
+        <p:txBody>
+          <a:bodyPr wrap="square" lIns="0" tIns="0" rIns="0" bIns="0" anchor="t">
+            <a:spAutoFit/>
+          </a:bodyPr>
+          <a:lstStyle/>
+          <a:p>
+            <a:pPr algn="ctr">
+              <a:lnSpc>
+                <a:spcPct val="100000"/>
+              </a:lnSpc>
+              <a:spcAft>
+                <a:spcPts val="0"/>
+              </a:spcAft>
+            </a:pPr>
+            <a:r>
+              <a:rPr sz="1300" b="1" i="0" dirty="0" err="1">
+                <a:solidFill>
+                  <a:srgbClr val="C79A52"/>
+                </a:solidFill>
+                <a:latin typeface="Calibri"/>
+              </a:rPr>
+              <a:t>Scanne</a:t>
+            </a:r>
+            <a:r>
+              <a:rPr sz="1300" b="1" i="0" dirty="0">
+                <a:solidFill>
+                  <a:srgbClr val="C79A52"/>
+                </a:solidFill>
+                <a:latin typeface="Calibri"/>
+              </a:rPr>
+              <a:t>-moi</a:t>
+            </a:r>
+          </a:p>
+        </p:txBody>
+      </p:sp>
+      <p:sp>
+        <p:nvSpPr>
+          <p:cNvPr id="36" name="Rectangle 35"/>
+          <p:cNvSpPr/>
+          <p:nvPr/>
+        </p:nvSpPr>
+        <p:spPr>
+          <a:xfrm>
+            <a:off x="8823960" y="2331720"/>
+            <a:ext cx="2377440" cy="2377440"/>
+          </a:xfrm>
+          <a:prstGeom prst="rect">
+            <a:avLst/>
+          </a:prstGeom>
+          <a:solidFill>
+            <a:srgbClr val="F4F1E9"/>
+          </a:solidFill>
+          <a:ln>
+            <a:noFill/>
+          </a:ln>
+          <a:effectLst/>
+        </p:spPr>
+        <p:style>
+          <a:lnRef idx="1">
+            <a:schemeClr val="accent1"/>
+          </a:lnRef>
+          <a:fillRef idx="3">
+            <a:schemeClr val="accent1"/>
+          </a:fillRef>
+          <a:effectRef idx="2">
+            <a:schemeClr val="accent1"/>
+          </a:effectRef>
+          <a:fontRef idx="minor">
+            <a:schemeClr val="lt1"/>
+          </a:fontRef>
+        </p:style>
+        <p:txBody>
+          <a:bodyPr rtlCol="0" anchor="ctr"/>
+          <a:lstStyle/>
+          <a:p>
+            <a:pPr algn="ctr"/>
+            <a:endParaRPr/>
+          </a:p>
+        </p:txBody>
+      </p:sp>
+      <p:pic>
+        <p:nvPicPr>
+          <p:cNvPr id="37" name="Picture 36" descr="qr-github.png"/>
+          <p:cNvPicPr>
+            <a:picLocks noChangeAspect="1"/>
+          </p:cNvPicPr>
+          <p:nvPr/>
+        </p:nvPicPr>
+        <p:blipFill>
+          <a:blip r:embed="rId2"/>
+          <a:stretch>
+            <a:fillRect/>
+          </a:stretch>
+        </p:blipFill>
+        <p:spPr>
+          <a:xfrm>
+            <a:off x="8869680" y="2377440"/>
+            <a:ext cx="2286000" cy="2286000"/>
+          </a:xfrm>
+          <a:prstGeom prst="rect">
+            <a:avLst/>
+          </a:prstGeom>
+        </p:spPr>
+      </p:pic>
     </p:spTree>
   </p:cSld>
   <p:clrMapOvr>
@@ -20143,7 +20681,7 @@
 </file>
 
 <file path=ppt/slides/slide3.xml><?xml version="1.0" encoding="utf-8"?>
-<p:sld xmlns:a="http://schemas.openxmlformats.org/drawingml/2006/main" xmlns:p="http://schemas.openxmlformats.org/presentationml/2006/main" xmlns:r="http://schemas.openxmlformats.org/officeDocument/2006/relationships">
+<p:sld xmlns:a="http://schemas.openxmlformats.org/drawingml/2006/main" xmlns:r="http://schemas.openxmlformats.org/officeDocument/2006/relationships" xmlns:p="http://schemas.openxmlformats.org/presentationml/2006/main">
   <p:cSld>
     <p:bg>
       <p:bgPr>
@@ -20159,7 +20697,14 @@
         <p:cNvGrpSpPr/>
         <p:nvPr/>
       </p:nvGrpSpPr>
-      <p:grpSpPr/>
+      <p:grpSpPr>
+        <a:xfrm>
+          <a:off x="0" y="0"/>
+          <a:ext cx="0" cy="0"/>
+          <a:chOff x="0" y="0"/>
+          <a:chExt cx="0" cy="0"/>
+        </a:xfrm>
+      </p:grpSpPr>
       <p:sp>
         <p:nvSpPr>
           <p:cNvPr id="2" name="TextBox 1"/>
@@ -20177,7 +20722,7 @@
           <a:noFill/>
         </p:spPr>
         <p:txBody>
-          <a:bodyPr wrap="square" anchor="t" lIns="0" rIns="0" tIns="0" bIns="0">
+          <a:bodyPr wrap="square" lIns="0" tIns="0" rIns="0" bIns="0" anchor="t">
             <a:spAutoFit/>
           </a:bodyPr>
           <a:lstStyle/>
@@ -20219,7 +20764,7 @@
           <a:noFill/>
         </p:spPr>
         <p:txBody>
-          <a:bodyPr wrap="square" anchor="t" lIns="0" rIns="0" tIns="0" bIns="0">
+          <a:bodyPr wrap="square" lIns="0" tIns="0" rIns="0" bIns="0" anchor="t">
             <a:spAutoFit/>
           </a:bodyPr>
           <a:lstStyle/>
@@ -20285,6 +20830,7 @@
           <a:lstStyle/>
           <a:p>
             <a:pPr algn="ctr"/>
+            <a:endParaRPr/>
           </a:p>
         </p:txBody>
       </p:sp>
@@ -20305,7 +20851,7 @@
           <a:noFill/>
         </p:spPr>
         <p:txBody>
-          <a:bodyPr wrap="square" anchor="t" lIns="0" rIns="0" tIns="0" bIns="0">
+          <a:bodyPr wrap="square" lIns="0" tIns="0" rIns="0" bIns="0" anchor="t">
             <a:spAutoFit/>
           </a:bodyPr>
           <a:lstStyle/>
@@ -20371,6 +20917,7 @@
           <a:lstStyle/>
           <a:p>
             <a:pPr algn="ctr"/>
+            <a:endParaRPr/>
           </a:p>
         </p:txBody>
       </p:sp>
@@ -20391,7 +20938,7 @@
           <a:noFill/>
         </p:spPr>
         <p:txBody>
-          <a:bodyPr wrap="square" anchor="t" lIns="0" rIns="0" tIns="0" bIns="0">
+          <a:bodyPr wrap="square" lIns="0" tIns="0" rIns="0" bIns="0" anchor="t">
             <a:spAutoFit/>
           </a:bodyPr>
           <a:lstStyle/>
@@ -20457,6 +21004,7 @@
           <a:lstStyle/>
           <a:p>
             <a:pPr algn="ctr"/>
+            <a:endParaRPr/>
           </a:p>
         </p:txBody>
       </p:sp>
@@ -20477,7 +21025,7 @@
           <a:noFill/>
         </p:spPr>
         <p:txBody>
-          <a:bodyPr wrap="square" anchor="t" lIns="0" rIns="0" tIns="0" bIns="0">
+          <a:bodyPr wrap="square" lIns="0" tIns="0" rIns="0" bIns="0" anchor="t">
             <a:spAutoFit/>
           </a:bodyPr>
           <a:lstStyle/>
@@ -20519,7 +21067,7 @@
           <a:noFill/>
         </p:spPr>
         <p:txBody>
-          <a:bodyPr wrap="square" anchor="t" lIns="0" rIns="0" tIns="0" bIns="0">
+          <a:bodyPr wrap="square" lIns="0" tIns="0" rIns="0" bIns="0" anchor="t">
             <a:spAutoFit/>
           </a:bodyPr>
           <a:lstStyle/>
@@ -20561,7 +21109,7 @@
           <a:noFill/>
         </p:spPr>
         <p:txBody>
-          <a:bodyPr wrap="square" anchor="t" lIns="0" rIns="0" tIns="0" bIns="0">
+          <a:bodyPr wrap="square" lIns="0" tIns="0" rIns="0" bIns="0" anchor="t">
             <a:spAutoFit/>
           </a:bodyPr>
           <a:lstStyle/>
@@ -20603,7 +21151,7 @@
           <a:noFill/>
         </p:spPr>
         <p:txBody>
-          <a:bodyPr wrap="square" anchor="t" lIns="0" rIns="0" tIns="0" bIns="0">
+          <a:bodyPr wrap="square" lIns="0" tIns="0" rIns="0" bIns="0" anchor="t">
             <a:spAutoFit/>
           </a:bodyPr>
           <a:lstStyle/>
@@ -20637,7 +21185,7 @@
 </file>
 
 <file path=ppt/slides/slide4.xml><?xml version="1.0" encoding="utf-8"?>
-<p:sld xmlns:a="http://schemas.openxmlformats.org/drawingml/2006/main" xmlns:p="http://schemas.openxmlformats.org/presentationml/2006/main" xmlns:r="http://schemas.openxmlformats.org/officeDocument/2006/relationships">
+<p:sld xmlns:a="http://schemas.openxmlformats.org/drawingml/2006/main" xmlns:r="http://schemas.openxmlformats.org/officeDocument/2006/relationships" xmlns:p="http://schemas.openxmlformats.org/presentationml/2006/main">
   <p:cSld>
     <p:bg>
       <p:bgPr>
@@ -20653,7 +21201,14 @@
         <p:cNvGrpSpPr/>
         <p:nvPr/>
       </p:nvGrpSpPr>
-      <p:grpSpPr/>
+      <p:grpSpPr>
+        <a:xfrm>
+          <a:off x="0" y="0"/>
+          <a:ext cx="0" cy="0"/>
+          <a:chOff x="0" y="0"/>
+          <a:chExt cx="0" cy="0"/>
+        </a:xfrm>
+      </p:grpSpPr>
       <p:sp>
         <p:nvSpPr>
           <p:cNvPr id="2" name="Rectangle 1"/>
@@ -20695,6 +21250,7 @@
           <a:lstStyle/>
           <a:p>
             <a:pPr algn="ctr"/>
+            <a:endParaRPr/>
           </a:p>
         </p:txBody>
       </p:sp>
@@ -20715,7 +21271,7 @@
           <a:noFill/>
         </p:spPr>
         <p:txBody>
-          <a:bodyPr wrap="square" anchor="t" lIns="0" rIns="0" tIns="0" bIns="0">
+          <a:bodyPr wrap="square" lIns="0" tIns="0" rIns="0" bIns="0" anchor="t">
             <a:spAutoFit/>
           </a:bodyPr>
           <a:lstStyle/>
@@ -20757,7 +21313,7 @@
           <a:noFill/>
         </p:spPr>
         <p:txBody>
-          <a:bodyPr wrap="square" anchor="t" lIns="0" rIns="0" tIns="0" bIns="0">
+          <a:bodyPr wrap="square" lIns="0" tIns="0" rIns="0" bIns="0" anchor="t">
             <a:spAutoFit/>
           </a:bodyPr>
           <a:lstStyle/>
@@ -20799,7 +21355,7 @@
           <a:noFill/>
         </p:spPr>
         <p:txBody>
-          <a:bodyPr wrap="square" anchor="t" lIns="0" rIns="0" tIns="0" bIns="0">
+          <a:bodyPr wrap="square" lIns="0" tIns="0" rIns="0" bIns="0" anchor="t">
             <a:spAutoFit/>
           </a:bodyPr>
           <a:lstStyle/>
@@ -20841,7 +21397,7 @@
           <a:noFill/>
         </p:spPr>
         <p:txBody>
-          <a:bodyPr wrap="square" anchor="t" lIns="0" rIns="0" tIns="0" bIns="0">
+          <a:bodyPr wrap="square" lIns="0" tIns="0" rIns="0" bIns="0" anchor="t">
             <a:spAutoFit/>
           </a:bodyPr>
           <a:lstStyle/>
@@ -20883,7 +21439,7 @@
           <a:noFill/>
         </p:spPr>
         <p:txBody>
-          <a:bodyPr wrap="square" anchor="t" lIns="0" rIns="0" tIns="0" bIns="0">
+          <a:bodyPr wrap="square" lIns="0" tIns="0" rIns="0" bIns="0" anchor="t">
             <a:spAutoFit/>
           </a:bodyPr>
           <a:lstStyle/>
@@ -20925,7 +21481,7 @@
           <a:noFill/>
         </p:spPr>
         <p:txBody>
-          <a:bodyPr wrap="square" anchor="t" lIns="0" rIns="0" tIns="0" bIns="0">
+          <a:bodyPr wrap="square" lIns="0" tIns="0" rIns="0" bIns="0" anchor="t">
             <a:spAutoFit/>
           </a:bodyPr>
           <a:lstStyle/>
@@ -20967,7 +21523,7 @@
           <a:noFill/>
         </p:spPr>
         <p:txBody>
-          <a:bodyPr wrap="square" anchor="t" lIns="0" rIns="0" tIns="0" bIns="0">
+          <a:bodyPr wrap="square" lIns="0" tIns="0" rIns="0" bIns="0" anchor="t">
             <a:spAutoFit/>
           </a:bodyPr>
           <a:lstStyle/>
@@ -21009,7 +21565,7 @@
           <a:noFill/>
         </p:spPr>
         <p:txBody>
-          <a:bodyPr wrap="square" anchor="t" lIns="0" rIns="0" tIns="0" bIns="0">
+          <a:bodyPr wrap="square" lIns="0" tIns="0" rIns="0" bIns="0" anchor="t">
             <a:spAutoFit/>
           </a:bodyPr>
           <a:lstStyle/>
@@ -21051,7 +21607,7 @@
           <a:noFill/>
         </p:spPr>
         <p:txBody>
-          <a:bodyPr wrap="square" anchor="t" lIns="0" rIns="0" tIns="0" bIns="0">
+          <a:bodyPr wrap="square" lIns="0" tIns="0" rIns="0" bIns="0" anchor="t">
             <a:spAutoFit/>
           </a:bodyPr>
           <a:lstStyle/>
@@ -21093,7 +21649,7 @@
           <a:noFill/>
         </p:spPr>
         <p:txBody>
-          <a:bodyPr wrap="square" anchor="t" lIns="0" rIns="0" tIns="0" bIns="0">
+          <a:bodyPr wrap="square" lIns="0" tIns="0" rIns="0" bIns="0" anchor="t">
             <a:spAutoFit/>
           </a:bodyPr>
           <a:lstStyle/>
@@ -21135,7 +21691,7 @@
           <a:noFill/>
         </p:spPr>
         <p:txBody>
-          <a:bodyPr wrap="square" anchor="t" lIns="0" rIns="0" tIns="0" bIns="0">
+          <a:bodyPr wrap="square" lIns="0" tIns="0" rIns="0" bIns="0" anchor="t">
             <a:spAutoFit/>
           </a:bodyPr>
           <a:lstStyle/>
@@ -21177,7 +21733,7 @@
           <a:noFill/>
         </p:spPr>
         <p:txBody>
-          <a:bodyPr wrap="square" anchor="t" lIns="0" rIns="0" tIns="0" bIns="0">
+          <a:bodyPr wrap="square" lIns="0" tIns="0" rIns="0" bIns="0" anchor="t">
             <a:spAutoFit/>
           </a:bodyPr>
           <a:lstStyle/>
@@ -21219,7 +21775,7 @@
           <a:noFill/>
         </p:spPr>
         <p:txBody>
-          <a:bodyPr wrap="square" anchor="t" lIns="0" rIns="0" tIns="0" bIns="0">
+          <a:bodyPr wrap="square" lIns="0" tIns="0" rIns="0" bIns="0" anchor="t">
             <a:spAutoFit/>
           </a:bodyPr>
           <a:lstStyle/>
@@ -21261,7 +21817,7 @@
           <a:noFill/>
         </p:spPr>
         <p:txBody>
-          <a:bodyPr wrap="square" anchor="t" lIns="0" rIns="0" tIns="0" bIns="0">
+          <a:bodyPr wrap="square" lIns="0" tIns="0" rIns="0" bIns="0" anchor="t">
             <a:spAutoFit/>
           </a:bodyPr>
           <a:lstStyle/>
@@ -21303,7 +21859,7 @@
           <a:noFill/>
         </p:spPr>
         <p:txBody>
-          <a:bodyPr wrap="square" anchor="t" lIns="0" rIns="0" tIns="0" bIns="0">
+          <a:bodyPr wrap="square" lIns="0" tIns="0" rIns="0" bIns="0" anchor="t">
             <a:spAutoFit/>
           </a:bodyPr>
           <a:lstStyle/>
@@ -21345,7 +21901,7 @@
           <a:noFill/>
         </p:spPr>
         <p:txBody>
-          <a:bodyPr wrap="square" anchor="t" lIns="0" rIns="0" tIns="0" bIns="0">
+          <a:bodyPr wrap="square" lIns="0" tIns="0" rIns="0" bIns="0" anchor="t">
             <a:spAutoFit/>
           </a:bodyPr>
           <a:lstStyle/>
@@ -21387,7 +21943,7 @@
           <a:noFill/>
         </p:spPr>
         <p:txBody>
-          <a:bodyPr wrap="square" anchor="t" lIns="0" rIns="0" tIns="0" bIns="0">
+          <a:bodyPr wrap="square" lIns="0" tIns="0" rIns="0" bIns="0" anchor="t">
             <a:spAutoFit/>
           </a:bodyPr>
           <a:lstStyle/>
@@ -21429,7 +21985,7 @@
           <a:noFill/>
         </p:spPr>
         <p:txBody>
-          <a:bodyPr wrap="square" anchor="t" lIns="0" rIns="0" tIns="0" bIns="0">
+          <a:bodyPr wrap="square" lIns="0" tIns="0" rIns="0" bIns="0" anchor="t">
             <a:spAutoFit/>
           </a:bodyPr>
           <a:lstStyle/>
@@ -21471,7 +22027,7 @@
           <a:noFill/>
         </p:spPr>
         <p:txBody>
-          <a:bodyPr wrap="square" anchor="t" lIns="0" rIns="0" tIns="0" bIns="0">
+          <a:bodyPr wrap="square" lIns="0" tIns="0" rIns="0" bIns="0" anchor="t">
             <a:spAutoFit/>
           </a:bodyPr>
           <a:lstStyle/>
@@ -21513,7 +22069,7 @@
           <a:noFill/>
         </p:spPr>
         <p:txBody>
-          <a:bodyPr wrap="square" anchor="t" lIns="0" rIns="0" tIns="0" bIns="0">
+          <a:bodyPr wrap="square" lIns="0" tIns="0" rIns="0" bIns="0" anchor="t">
             <a:spAutoFit/>
           </a:bodyPr>
           <a:lstStyle/>
@@ -21555,7 +22111,7 @@
           <a:noFill/>
         </p:spPr>
         <p:txBody>
-          <a:bodyPr wrap="square" anchor="t" lIns="0" rIns="0" tIns="0" bIns="0">
+          <a:bodyPr wrap="square" lIns="0" tIns="0" rIns="0" bIns="0" anchor="t">
             <a:spAutoFit/>
           </a:bodyPr>
           <a:lstStyle/>
@@ -21597,7 +22153,7 @@
           <a:noFill/>
         </p:spPr>
         <p:txBody>
-          <a:bodyPr wrap="square" anchor="t" lIns="0" rIns="0" tIns="0" bIns="0">
+          <a:bodyPr wrap="square" lIns="0" tIns="0" rIns="0" bIns="0" anchor="t">
             <a:spAutoFit/>
           </a:bodyPr>
           <a:lstStyle/>
@@ -21639,7 +22195,7 @@
           <a:noFill/>
         </p:spPr>
         <p:txBody>
-          <a:bodyPr wrap="square" anchor="t" lIns="0" rIns="0" tIns="0" bIns="0">
+          <a:bodyPr wrap="square" lIns="0" tIns="0" rIns="0" bIns="0" anchor="t">
             <a:spAutoFit/>
           </a:bodyPr>
           <a:lstStyle/>
@@ -21681,7 +22237,7 @@
           <a:noFill/>
         </p:spPr>
         <p:txBody>
-          <a:bodyPr wrap="square" anchor="t" lIns="0" rIns="0" tIns="0" bIns="0">
+          <a:bodyPr wrap="square" lIns="0" tIns="0" rIns="0" bIns="0" anchor="t">
             <a:spAutoFit/>
           </a:bodyPr>
           <a:lstStyle/>
@@ -21723,7 +22279,7 @@
           <a:noFill/>
         </p:spPr>
         <p:txBody>
-          <a:bodyPr wrap="square" anchor="t" lIns="0" rIns="0" tIns="0" bIns="0">
+          <a:bodyPr wrap="square" lIns="0" tIns="0" rIns="0" bIns="0" anchor="t">
             <a:spAutoFit/>
           </a:bodyPr>
           <a:lstStyle/>
@@ -21765,7 +22321,7 @@
           <a:noFill/>
         </p:spPr>
         <p:txBody>
-          <a:bodyPr wrap="square" anchor="t" lIns="0" rIns="0" tIns="0" bIns="0">
+          <a:bodyPr wrap="square" lIns="0" tIns="0" rIns="0" bIns="0" anchor="t">
             <a:spAutoFit/>
           </a:bodyPr>
           <a:lstStyle/>
@@ -21807,7 +22363,7 @@
           <a:noFill/>
         </p:spPr>
         <p:txBody>
-          <a:bodyPr wrap="square" anchor="t" lIns="0" rIns="0" tIns="0" bIns="0">
+          <a:bodyPr wrap="square" lIns="0" tIns="0" rIns="0" bIns="0" anchor="t">
             <a:spAutoFit/>
           </a:bodyPr>
           <a:lstStyle/>
@@ -21849,7 +22405,7 @@
           <a:noFill/>
         </p:spPr>
         <p:txBody>
-          <a:bodyPr wrap="square" anchor="t" lIns="0" rIns="0" tIns="0" bIns="0">
+          <a:bodyPr wrap="square" lIns="0" tIns="0" rIns="0" bIns="0" anchor="t">
             <a:spAutoFit/>
           </a:bodyPr>
           <a:lstStyle/>
@@ -21883,7 +22439,7 @@
 </file>
 
 <file path=ppt/slides/slide5.xml><?xml version="1.0" encoding="utf-8"?>
-<p:sld xmlns:a="http://schemas.openxmlformats.org/drawingml/2006/main" xmlns:p="http://schemas.openxmlformats.org/presentationml/2006/main" xmlns:r="http://schemas.openxmlformats.org/officeDocument/2006/relationships">
+<p:sld xmlns:a="http://schemas.openxmlformats.org/drawingml/2006/main" xmlns:r="http://schemas.openxmlformats.org/officeDocument/2006/relationships" xmlns:p="http://schemas.openxmlformats.org/presentationml/2006/main">
   <p:cSld>
     <p:bg>
       <p:bgPr>
@@ -21899,7 +22455,14 @@
         <p:cNvGrpSpPr/>
         <p:nvPr/>
       </p:nvGrpSpPr>
-      <p:grpSpPr/>
+      <p:grpSpPr>
+        <a:xfrm>
+          <a:off x="0" y="0"/>
+          <a:ext cx="0" cy="0"/>
+          <a:chOff x="0" y="0"/>
+          <a:chExt cx="0" cy="0"/>
+        </a:xfrm>
+      </p:grpSpPr>
       <p:sp>
         <p:nvSpPr>
           <p:cNvPr id="2" name="Rectangle 1"/>
@@ -21941,6 +22504,7 @@
           <a:lstStyle/>
           <a:p>
             <a:pPr algn="ctr"/>
+            <a:endParaRPr/>
           </a:p>
         </p:txBody>
       </p:sp>
@@ -21961,7 +22525,7 @@
           <a:noFill/>
         </p:spPr>
         <p:txBody>
-          <a:bodyPr wrap="square" anchor="t" lIns="0" rIns="0" tIns="0" bIns="0">
+          <a:bodyPr wrap="square" lIns="0" tIns="0" rIns="0" bIns="0" anchor="t">
             <a:spAutoFit/>
           </a:bodyPr>
           <a:lstStyle/>
@@ -22003,7 +22567,7 @@
           <a:noFill/>
         </p:spPr>
         <p:txBody>
-          <a:bodyPr wrap="square" anchor="t" lIns="0" rIns="0" tIns="0" bIns="0">
+          <a:bodyPr wrap="square" lIns="0" tIns="0" rIns="0" bIns="0" anchor="t">
             <a:spAutoFit/>
           </a:bodyPr>
           <a:lstStyle/>
@@ -22069,6 +22633,7 @@
           <a:lstStyle/>
           <a:p>
             <a:pPr algn="ctr"/>
+            <a:endParaRPr/>
           </a:p>
         </p:txBody>
       </p:sp>
@@ -22113,6 +22678,7 @@
           <a:lstStyle/>
           <a:p>
             <a:pPr algn="ctr"/>
+            <a:endParaRPr/>
           </a:p>
         </p:txBody>
       </p:sp>
@@ -22133,7 +22699,7 @@
           <a:noFill/>
         </p:spPr>
         <p:txBody>
-          <a:bodyPr wrap="square" anchor="t" lIns="0" rIns="0" tIns="0" bIns="0">
+          <a:bodyPr wrap="square" lIns="0" tIns="0" rIns="0" bIns="0" anchor="t">
             <a:spAutoFit/>
           </a:bodyPr>
           <a:lstStyle/>
@@ -22175,7 +22741,7 @@
           <a:noFill/>
         </p:spPr>
         <p:txBody>
-          <a:bodyPr wrap="square" anchor="t" lIns="0" rIns="0" tIns="0" bIns="0">
+          <a:bodyPr wrap="square" lIns="0" tIns="0" rIns="0" bIns="0" anchor="t">
             <a:spAutoFit/>
           </a:bodyPr>
           <a:lstStyle/>
@@ -22217,7 +22783,7 @@
           <a:noFill/>
         </p:spPr>
         <p:txBody>
-          <a:bodyPr wrap="square" anchor="t" lIns="0" rIns="0" tIns="0" bIns="0">
+          <a:bodyPr wrap="square" lIns="0" tIns="0" rIns="0" bIns="0" anchor="t">
             <a:spAutoFit/>
           </a:bodyPr>
           <a:lstStyle/>
@@ -22283,6 +22849,7 @@
           <a:lstStyle/>
           <a:p>
             <a:pPr algn="ctr"/>
+            <a:endParaRPr/>
           </a:p>
         </p:txBody>
       </p:sp>
@@ -22327,6 +22894,7 @@
           <a:lstStyle/>
           <a:p>
             <a:pPr algn="ctr"/>
+            <a:endParaRPr/>
           </a:p>
         </p:txBody>
       </p:sp>
@@ -22347,7 +22915,7 @@
           <a:noFill/>
         </p:spPr>
         <p:txBody>
-          <a:bodyPr wrap="square" anchor="t" lIns="0" rIns="0" tIns="0" bIns="0">
+          <a:bodyPr wrap="square" lIns="0" tIns="0" rIns="0" bIns="0" anchor="t">
             <a:spAutoFit/>
           </a:bodyPr>
           <a:lstStyle/>
@@ -22389,7 +22957,7 @@
           <a:noFill/>
         </p:spPr>
         <p:txBody>
-          <a:bodyPr wrap="square" anchor="t" lIns="0" rIns="0" tIns="0" bIns="0">
+          <a:bodyPr wrap="square" lIns="0" tIns="0" rIns="0" bIns="0" anchor="t">
             <a:spAutoFit/>
           </a:bodyPr>
           <a:lstStyle/>
@@ -22431,7 +22999,7 @@
           <a:noFill/>
         </p:spPr>
         <p:txBody>
-          <a:bodyPr wrap="square" anchor="t" lIns="0" rIns="0" tIns="0" bIns="0">
+          <a:bodyPr wrap="square" lIns="0" tIns="0" rIns="0" bIns="0" anchor="t">
             <a:spAutoFit/>
           </a:bodyPr>
           <a:lstStyle/>
@@ -22497,6 +23065,7 @@
           <a:lstStyle/>
           <a:p>
             <a:pPr algn="ctr"/>
+            <a:endParaRPr/>
           </a:p>
         </p:txBody>
       </p:sp>
@@ -22541,6 +23110,7 @@
           <a:lstStyle/>
           <a:p>
             <a:pPr algn="ctr"/>
+            <a:endParaRPr/>
           </a:p>
         </p:txBody>
       </p:sp>
@@ -22561,7 +23131,7 @@
           <a:noFill/>
         </p:spPr>
         <p:txBody>
-          <a:bodyPr wrap="square" anchor="t" lIns="0" rIns="0" tIns="0" bIns="0">
+          <a:bodyPr wrap="square" lIns="0" tIns="0" rIns="0" bIns="0" anchor="t">
             <a:spAutoFit/>
           </a:bodyPr>
           <a:lstStyle/>
@@ -22603,7 +23173,7 @@
           <a:noFill/>
         </p:spPr>
         <p:txBody>
-          <a:bodyPr wrap="square" anchor="t" lIns="0" rIns="0" tIns="0" bIns="0">
+          <a:bodyPr wrap="square" lIns="0" tIns="0" rIns="0" bIns="0" anchor="t">
             <a:spAutoFit/>
           </a:bodyPr>
           <a:lstStyle/>
@@ -22645,7 +23215,7 @@
           <a:noFill/>
         </p:spPr>
         <p:txBody>
-          <a:bodyPr wrap="square" anchor="t" lIns="0" rIns="0" tIns="0" bIns="0">
+          <a:bodyPr wrap="square" lIns="0" tIns="0" rIns="0" bIns="0" anchor="t">
             <a:spAutoFit/>
           </a:bodyPr>
           <a:lstStyle/>
@@ -22687,7 +23257,7 @@
           <a:noFill/>
         </p:spPr>
         <p:txBody>
-          <a:bodyPr wrap="square" anchor="t" lIns="0" rIns="0" tIns="0" bIns="0">
+          <a:bodyPr wrap="square" lIns="0" tIns="0" rIns="0" bIns="0" anchor="t">
             <a:spAutoFit/>
           </a:bodyPr>
           <a:lstStyle/>
@@ -22729,7 +23299,7 @@
           <a:noFill/>
         </p:spPr>
         <p:txBody>
-          <a:bodyPr wrap="square" anchor="t" lIns="0" rIns="0" tIns="0" bIns="0">
+          <a:bodyPr wrap="square" lIns="0" tIns="0" rIns="0" bIns="0" anchor="t">
             <a:spAutoFit/>
           </a:bodyPr>
           <a:lstStyle/>
@@ -22763,7 +23333,7 @@
 </file>
 
 <file path=ppt/slides/slide6.xml><?xml version="1.0" encoding="utf-8"?>
-<p:sld xmlns:a="http://schemas.openxmlformats.org/drawingml/2006/main" xmlns:p="http://schemas.openxmlformats.org/presentationml/2006/main" xmlns:r="http://schemas.openxmlformats.org/officeDocument/2006/relationships">
+<p:sld xmlns:a="http://schemas.openxmlformats.org/drawingml/2006/main" xmlns:r="http://schemas.openxmlformats.org/officeDocument/2006/relationships" xmlns:p="http://schemas.openxmlformats.org/presentationml/2006/main">
   <p:cSld>
     <p:bg>
       <p:bgPr>
@@ -22779,7 +23349,14 @@
         <p:cNvGrpSpPr/>
         <p:nvPr/>
       </p:nvGrpSpPr>
-      <p:grpSpPr/>
+      <p:grpSpPr>
+        <a:xfrm>
+          <a:off x="0" y="0"/>
+          <a:ext cx="0" cy="0"/>
+          <a:chOff x="0" y="0"/>
+          <a:chExt cx="0" cy="0"/>
+        </a:xfrm>
+      </p:grpSpPr>
       <p:sp>
         <p:nvSpPr>
           <p:cNvPr id="2" name="Rectangle 1"/>
@@ -22821,6 +23398,7 @@
           <a:lstStyle/>
           <a:p>
             <a:pPr algn="ctr"/>
+            <a:endParaRPr/>
           </a:p>
         </p:txBody>
       </p:sp>
@@ -22841,7 +23419,7 @@
           <a:noFill/>
         </p:spPr>
         <p:txBody>
-          <a:bodyPr wrap="square" anchor="t" lIns="0" rIns="0" tIns="0" bIns="0">
+          <a:bodyPr wrap="square" lIns="0" tIns="0" rIns="0" bIns="0" anchor="t">
             <a:spAutoFit/>
           </a:bodyPr>
           <a:lstStyle/>
@@ -22883,7 +23461,7 @@
           <a:noFill/>
         </p:spPr>
         <p:txBody>
-          <a:bodyPr wrap="square" anchor="t" lIns="0" rIns="0" tIns="0" bIns="0">
+          <a:bodyPr wrap="square" lIns="0" tIns="0" rIns="0" bIns="0" anchor="t">
             <a:spAutoFit/>
           </a:bodyPr>
           <a:lstStyle/>
@@ -22949,6 +23527,7 @@
           <a:lstStyle/>
           <a:p>
             <a:pPr algn="ctr"/>
+            <a:endParaRPr/>
           </a:p>
         </p:txBody>
       </p:sp>
@@ -22993,6 +23572,7 @@
           <a:lstStyle/>
           <a:p>
             <a:pPr algn="ctr"/>
+            <a:endParaRPr/>
           </a:p>
         </p:txBody>
       </p:sp>
@@ -23013,7 +23593,7 @@
           <a:noFill/>
         </p:spPr>
         <p:txBody>
-          <a:bodyPr wrap="square" anchor="t" lIns="0" rIns="0" tIns="0" bIns="0">
+          <a:bodyPr wrap="square" lIns="0" tIns="0" rIns="0" bIns="0" anchor="t">
             <a:spAutoFit/>
           </a:bodyPr>
           <a:lstStyle/>
@@ -23055,7 +23635,7 @@
           <a:noFill/>
         </p:spPr>
         <p:txBody>
-          <a:bodyPr wrap="square" anchor="t" lIns="0" rIns="0" tIns="0" bIns="0">
+          <a:bodyPr wrap="square" lIns="0" tIns="0" rIns="0" bIns="0" anchor="t">
             <a:spAutoFit/>
           </a:bodyPr>
           <a:lstStyle/>
@@ -23140,6 +23720,7 @@
           <a:lstStyle/>
           <a:p>
             <a:pPr algn="ctr"/>
+            <a:endParaRPr/>
           </a:p>
         </p:txBody>
       </p:sp>
@@ -23184,6 +23765,7 @@
           <a:lstStyle/>
           <a:p>
             <a:pPr algn="ctr"/>
+            <a:endParaRPr/>
           </a:p>
         </p:txBody>
       </p:sp>
@@ -23204,7 +23786,7 @@
           <a:noFill/>
         </p:spPr>
         <p:txBody>
-          <a:bodyPr wrap="square" anchor="t" lIns="0" rIns="0" tIns="0" bIns="0">
+          <a:bodyPr wrap="square" lIns="0" tIns="0" rIns="0" bIns="0" anchor="t">
             <a:spAutoFit/>
           </a:bodyPr>
           <a:lstStyle/>
@@ -23246,7 +23828,7 @@
           <a:noFill/>
         </p:spPr>
         <p:txBody>
-          <a:bodyPr wrap="square" anchor="t" lIns="0" rIns="0" tIns="0" bIns="0">
+          <a:bodyPr wrap="square" lIns="0" tIns="0" rIns="0" bIns="0" anchor="t">
             <a:spAutoFit/>
           </a:bodyPr>
           <a:lstStyle/>
@@ -23331,6 +23913,7 @@
           <a:lstStyle/>
           <a:p>
             <a:pPr algn="ctr"/>
+            <a:endParaRPr/>
           </a:p>
         </p:txBody>
       </p:sp>
@@ -23375,6 +23958,7 @@
           <a:lstStyle/>
           <a:p>
             <a:pPr algn="ctr"/>
+            <a:endParaRPr/>
           </a:p>
         </p:txBody>
       </p:sp>
@@ -23395,7 +23979,7 @@
           <a:noFill/>
         </p:spPr>
         <p:txBody>
-          <a:bodyPr wrap="square" anchor="t" lIns="0" rIns="0" tIns="0" bIns="0">
+          <a:bodyPr wrap="square" lIns="0" tIns="0" rIns="0" bIns="0" anchor="t">
             <a:spAutoFit/>
           </a:bodyPr>
           <a:lstStyle/>
@@ -23437,7 +24021,7 @@
           <a:noFill/>
         </p:spPr>
         <p:txBody>
-          <a:bodyPr wrap="square" anchor="t" lIns="0" rIns="0" tIns="0" bIns="0">
+          <a:bodyPr wrap="square" lIns="0" tIns="0" rIns="0" bIns="0" anchor="t">
             <a:spAutoFit/>
           </a:bodyPr>
           <a:lstStyle/>
@@ -23522,6 +24106,7 @@
           <a:lstStyle/>
           <a:p>
             <a:pPr algn="ctr"/>
+            <a:endParaRPr/>
           </a:p>
         </p:txBody>
       </p:sp>
@@ -23566,6 +24151,7 @@
           <a:lstStyle/>
           <a:p>
             <a:pPr algn="ctr"/>
+            <a:endParaRPr/>
           </a:p>
         </p:txBody>
       </p:sp>
@@ -23586,7 +24172,7 @@
           <a:noFill/>
         </p:spPr>
         <p:txBody>
-          <a:bodyPr wrap="square" anchor="t" lIns="0" rIns="0" tIns="0" bIns="0">
+          <a:bodyPr wrap="square" lIns="0" tIns="0" rIns="0" bIns="0" anchor="t">
             <a:spAutoFit/>
           </a:bodyPr>
           <a:lstStyle/>
@@ -23628,7 +24214,7 @@
           <a:noFill/>
         </p:spPr>
         <p:txBody>
-          <a:bodyPr wrap="square" anchor="t" lIns="0" rIns="0" tIns="0" bIns="0">
+          <a:bodyPr wrap="square" lIns="0" tIns="0" rIns="0" bIns="0" anchor="t">
             <a:spAutoFit/>
           </a:bodyPr>
           <a:lstStyle/>
@@ -23689,7 +24275,7 @@
           <a:noFill/>
         </p:spPr>
         <p:txBody>
-          <a:bodyPr wrap="square" anchor="t" lIns="0" rIns="0" tIns="0" bIns="0">
+          <a:bodyPr wrap="square" lIns="0" tIns="0" rIns="0" bIns="0" anchor="t">
             <a:spAutoFit/>
           </a:bodyPr>
           <a:lstStyle/>
@@ -23731,7 +24317,7 @@
           <a:noFill/>
         </p:spPr>
         <p:txBody>
-          <a:bodyPr wrap="square" anchor="t" lIns="0" rIns="0" tIns="0" bIns="0">
+          <a:bodyPr wrap="square" lIns="0" tIns="0" rIns="0" bIns="0" anchor="t">
             <a:spAutoFit/>
           </a:bodyPr>
           <a:lstStyle/>
@@ -23765,7 +24351,7 @@
 </file>
 
 <file path=ppt/slides/slide7.xml><?xml version="1.0" encoding="utf-8"?>
-<p:sld xmlns:a="http://schemas.openxmlformats.org/drawingml/2006/main" xmlns:p="http://schemas.openxmlformats.org/presentationml/2006/main" xmlns:r="http://schemas.openxmlformats.org/officeDocument/2006/relationships">
+<p:sld xmlns:a="http://schemas.openxmlformats.org/drawingml/2006/main" xmlns:r="http://schemas.openxmlformats.org/officeDocument/2006/relationships" xmlns:p="http://schemas.openxmlformats.org/presentationml/2006/main">
   <p:cSld>
     <p:bg>
       <p:bgPr>
@@ -23781,7 +24367,14 @@
         <p:cNvGrpSpPr/>
         <p:nvPr/>
       </p:nvGrpSpPr>
-      <p:grpSpPr/>
+      <p:grpSpPr>
+        <a:xfrm>
+          <a:off x="0" y="0"/>
+          <a:ext cx="0" cy="0"/>
+          <a:chOff x="0" y="0"/>
+          <a:chExt cx="0" cy="0"/>
+        </a:xfrm>
+      </p:grpSpPr>
       <p:sp>
         <p:nvSpPr>
           <p:cNvPr id="2" name="TextBox 1"/>
@@ -23799,7 +24392,7 @@
           <a:noFill/>
         </p:spPr>
         <p:txBody>
-          <a:bodyPr wrap="square" anchor="t" lIns="0" rIns="0" tIns="0" bIns="0">
+          <a:bodyPr wrap="square" lIns="0" tIns="0" rIns="0" bIns="0" anchor="t">
             <a:spAutoFit/>
           </a:bodyPr>
           <a:lstStyle/>
@@ -23841,7 +24434,7 @@
           <a:noFill/>
         </p:spPr>
         <p:txBody>
-          <a:bodyPr wrap="square" anchor="t" lIns="0" rIns="0" tIns="0" bIns="0">
+          <a:bodyPr wrap="square" lIns="0" tIns="0" rIns="0" bIns="0" anchor="t">
             <a:spAutoFit/>
           </a:bodyPr>
           <a:lstStyle/>
@@ -23883,7 +24476,7 @@
           <a:noFill/>
         </p:spPr>
         <p:txBody>
-          <a:bodyPr wrap="square" anchor="t" lIns="0" rIns="0" tIns="0" bIns="0">
+          <a:bodyPr wrap="square" lIns="0" tIns="0" rIns="0" bIns="0" anchor="t">
             <a:spAutoFit/>
           </a:bodyPr>
           <a:lstStyle/>
@@ -23968,6 +24561,7 @@
           <a:lstStyle/>
           <a:p>
             <a:pPr algn="ctr"/>
+            <a:endParaRPr/>
           </a:p>
         </p:txBody>
       </p:sp>
@@ -24012,6 +24606,7 @@
           <a:lstStyle/>
           <a:p>
             <a:pPr algn="ctr"/>
+            <a:endParaRPr/>
           </a:p>
         </p:txBody>
       </p:sp>
@@ -24032,7 +24627,7 @@
           <a:noFill/>
         </p:spPr>
         <p:txBody>
-          <a:bodyPr wrap="square" anchor="t" lIns="0" rIns="0" tIns="0" bIns="0">
+          <a:bodyPr wrap="square" lIns="0" tIns="0" rIns="0" bIns="0" anchor="t">
             <a:spAutoFit/>
           </a:bodyPr>
           <a:lstStyle/>
@@ -24074,7 +24669,7 @@
           <a:noFill/>
         </p:spPr>
         <p:txBody>
-          <a:bodyPr wrap="square" anchor="t" lIns="0" rIns="0" tIns="0" bIns="0">
+          <a:bodyPr wrap="square" lIns="0" tIns="0" rIns="0" bIns="0" anchor="t">
             <a:spAutoFit/>
           </a:bodyPr>
           <a:lstStyle/>
@@ -24140,6 +24735,7 @@
           <a:lstStyle/>
           <a:p>
             <a:pPr algn="ctr"/>
+            <a:endParaRPr/>
           </a:p>
         </p:txBody>
       </p:sp>
@@ -24184,6 +24780,7 @@
           <a:lstStyle/>
           <a:p>
             <a:pPr algn="ctr"/>
+            <a:endParaRPr/>
           </a:p>
         </p:txBody>
       </p:sp>
@@ -24228,6 +24825,7 @@
           <a:lstStyle/>
           <a:p>
             <a:pPr algn="ctr"/>
+            <a:endParaRPr/>
           </a:p>
         </p:txBody>
       </p:sp>
@@ -24248,7 +24846,7 @@
           <a:noFill/>
         </p:spPr>
         <p:txBody>
-          <a:bodyPr wrap="square" anchor="t" lIns="0" rIns="0" tIns="0" bIns="0">
+          <a:bodyPr wrap="square" lIns="0" tIns="0" rIns="0" bIns="0" anchor="t">
             <a:spAutoFit/>
           </a:bodyPr>
           <a:lstStyle/>
@@ -24290,7 +24888,7 @@
           <a:noFill/>
         </p:spPr>
         <p:txBody>
-          <a:bodyPr wrap="square" anchor="t" lIns="0" rIns="0" tIns="0" bIns="0">
+          <a:bodyPr wrap="square" lIns="0" tIns="0" rIns="0" bIns="0" anchor="t">
             <a:spAutoFit/>
           </a:bodyPr>
           <a:lstStyle/>
@@ -24356,6 +24954,7 @@
           <a:lstStyle/>
           <a:p>
             <a:pPr algn="ctr"/>
+            <a:endParaRPr/>
           </a:p>
         </p:txBody>
       </p:sp>
@@ -24400,6 +24999,7 @@
           <a:lstStyle/>
           <a:p>
             <a:pPr algn="ctr"/>
+            <a:endParaRPr/>
           </a:p>
         </p:txBody>
       </p:sp>
@@ -24420,7 +25020,7 @@
           <a:noFill/>
         </p:spPr>
         <p:txBody>
-          <a:bodyPr wrap="square" anchor="t" lIns="0" rIns="0" tIns="0" bIns="0">
+          <a:bodyPr wrap="square" lIns="0" tIns="0" rIns="0" bIns="0" anchor="t">
             <a:spAutoFit/>
           </a:bodyPr>
           <a:lstStyle/>
@@ -24462,7 +25062,7 @@
           <a:noFill/>
         </p:spPr>
         <p:txBody>
-          <a:bodyPr wrap="square" anchor="t" lIns="0" rIns="0" tIns="0" bIns="0">
+          <a:bodyPr wrap="square" lIns="0" tIns="0" rIns="0" bIns="0" anchor="t">
             <a:spAutoFit/>
           </a:bodyPr>
           <a:lstStyle/>
@@ -24528,6 +25128,7 @@
           <a:lstStyle/>
           <a:p>
             <a:pPr algn="ctr"/>
+            <a:endParaRPr/>
           </a:p>
         </p:txBody>
       </p:sp>
@@ -24572,6 +25173,7 @@
           <a:lstStyle/>
           <a:p>
             <a:pPr algn="ctr"/>
+            <a:endParaRPr/>
           </a:p>
         </p:txBody>
       </p:sp>
@@ -24592,7 +25194,7 @@
           <a:noFill/>
         </p:spPr>
         <p:txBody>
-          <a:bodyPr wrap="square" anchor="t" lIns="0" rIns="0" tIns="0" bIns="0">
+          <a:bodyPr wrap="square" lIns="0" tIns="0" rIns="0" bIns="0" anchor="t">
             <a:spAutoFit/>
           </a:bodyPr>
           <a:lstStyle/>
@@ -24634,7 +25236,7 @@
           <a:noFill/>
         </p:spPr>
         <p:txBody>
-          <a:bodyPr wrap="square" anchor="t" lIns="0" rIns="0" tIns="0" bIns="0">
+          <a:bodyPr wrap="square" lIns="0" tIns="0" rIns="0" bIns="0" anchor="t">
             <a:spAutoFit/>
           </a:bodyPr>
           <a:lstStyle/>
@@ -24700,6 +25302,7 @@
           <a:lstStyle/>
           <a:p>
             <a:pPr algn="ctr"/>
+            <a:endParaRPr/>
           </a:p>
         </p:txBody>
       </p:sp>
@@ -24744,6 +25347,7 @@
           <a:lstStyle/>
           <a:p>
             <a:pPr algn="ctr"/>
+            <a:endParaRPr/>
           </a:p>
         </p:txBody>
       </p:sp>
@@ -24764,7 +25368,7 @@
           <a:noFill/>
         </p:spPr>
         <p:txBody>
-          <a:bodyPr wrap="square" anchor="t" lIns="0" rIns="0" tIns="0" bIns="0">
+          <a:bodyPr wrap="square" lIns="0" tIns="0" rIns="0" bIns="0" anchor="t">
             <a:spAutoFit/>
           </a:bodyPr>
           <a:lstStyle/>
@@ -24806,7 +25410,7 @@
           <a:noFill/>
         </p:spPr>
         <p:txBody>
-          <a:bodyPr wrap="square" anchor="t" lIns="0" rIns="0" tIns="0" bIns="0">
+          <a:bodyPr wrap="square" lIns="0" tIns="0" rIns="0" bIns="0" anchor="t">
             <a:spAutoFit/>
           </a:bodyPr>
           <a:lstStyle/>
@@ -24872,6 +25476,7 @@
           <a:lstStyle/>
           <a:p>
             <a:pPr algn="ctr"/>
+            <a:endParaRPr/>
           </a:p>
         </p:txBody>
       </p:sp>
@@ -24916,6 +25521,7 @@
           <a:lstStyle/>
           <a:p>
             <a:pPr algn="ctr"/>
+            <a:endParaRPr/>
           </a:p>
         </p:txBody>
       </p:sp>
@@ -24960,6 +25566,7 @@
           <a:lstStyle/>
           <a:p>
             <a:pPr algn="ctr"/>
+            <a:endParaRPr/>
           </a:p>
         </p:txBody>
       </p:sp>
@@ -24980,7 +25587,7 @@
           <a:noFill/>
         </p:spPr>
         <p:txBody>
-          <a:bodyPr wrap="square" anchor="t" lIns="0" rIns="0" tIns="0" bIns="0">
+          <a:bodyPr wrap="square" lIns="0" tIns="0" rIns="0" bIns="0" anchor="t">
             <a:spAutoFit/>
           </a:bodyPr>
           <a:lstStyle/>
@@ -25022,7 +25629,7 @@
           <a:noFill/>
         </p:spPr>
         <p:txBody>
-          <a:bodyPr wrap="square" anchor="t" lIns="0" rIns="0" tIns="0" bIns="0">
+          <a:bodyPr wrap="square" lIns="0" tIns="0" rIns="0" bIns="0" anchor="t">
             <a:spAutoFit/>
           </a:bodyPr>
           <a:lstStyle/>
@@ -25064,7 +25671,7 @@
           <a:noFill/>
         </p:spPr>
         <p:txBody>
-          <a:bodyPr wrap="square" anchor="t" lIns="0" rIns="0" tIns="0" bIns="0">
+          <a:bodyPr wrap="square" lIns="0" tIns="0" rIns="0" bIns="0" anchor="t">
             <a:spAutoFit/>
           </a:bodyPr>
           <a:lstStyle/>
@@ -25125,7 +25732,7 @@
           <a:noFill/>
         </p:spPr>
         <p:txBody>
-          <a:bodyPr wrap="square" anchor="t" lIns="0" rIns="0" tIns="0" bIns="0">
+          <a:bodyPr wrap="square" lIns="0" tIns="0" rIns="0" bIns="0" anchor="t">
             <a:spAutoFit/>
           </a:bodyPr>
           <a:lstStyle/>
@@ -25167,7 +25774,7 @@
           <a:noFill/>
         </p:spPr>
         <p:txBody>
-          <a:bodyPr wrap="square" anchor="t" lIns="0" rIns="0" tIns="0" bIns="0">
+          <a:bodyPr wrap="square" lIns="0" tIns="0" rIns="0" bIns="0" anchor="t">
             <a:spAutoFit/>
           </a:bodyPr>
           <a:lstStyle/>
@@ -25201,7 +25808,7 @@
 </file>
 
 <file path=ppt/slides/slide8.xml><?xml version="1.0" encoding="utf-8"?>
-<p:sld xmlns:a="http://schemas.openxmlformats.org/drawingml/2006/main" xmlns:p="http://schemas.openxmlformats.org/presentationml/2006/main" xmlns:r="http://schemas.openxmlformats.org/officeDocument/2006/relationships">
+<p:sld xmlns:a="http://schemas.openxmlformats.org/drawingml/2006/main" xmlns:r="http://schemas.openxmlformats.org/officeDocument/2006/relationships" xmlns:p="http://schemas.openxmlformats.org/presentationml/2006/main">
   <p:cSld>
     <p:bg>
       <p:bgPr>
@@ -25217,7 +25824,14 @@
         <p:cNvGrpSpPr/>
         <p:nvPr/>
       </p:nvGrpSpPr>
-      <p:grpSpPr/>
+      <p:grpSpPr>
+        <a:xfrm>
+          <a:off x="0" y="0"/>
+          <a:ext cx="0" cy="0"/>
+          <a:chOff x="0" y="0"/>
+          <a:chExt cx="0" cy="0"/>
+        </a:xfrm>
+      </p:grpSpPr>
       <p:sp>
         <p:nvSpPr>
           <p:cNvPr id="2" name="Rectangle 1"/>
@@ -25259,6 +25873,7 @@
           <a:lstStyle/>
           <a:p>
             <a:pPr algn="ctr"/>
+            <a:endParaRPr/>
           </a:p>
         </p:txBody>
       </p:sp>
@@ -25279,7 +25894,7 @@
           <a:noFill/>
         </p:spPr>
         <p:txBody>
-          <a:bodyPr wrap="square" anchor="t" lIns="0" rIns="0" tIns="0" bIns="0">
+          <a:bodyPr wrap="square" lIns="0" tIns="0" rIns="0" bIns="0" anchor="t">
             <a:spAutoFit/>
           </a:bodyPr>
           <a:lstStyle/>
@@ -25321,7 +25936,7 @@
           <a:noFill/>
         </p:spPr>
         <p:txBody>
-          <a:bodyPr wrap="square" anchor="t" lIns="0" rIns="0" tIns="0" bIns="0">
+          <a:bodyPr wrap="square" lIns="0" tIns="0" rIns="0" bIns="0" anchor="t">
             <a:spAutoFit/>
           </a:bodyPr>
           <a:lstStyle/>
@@ -25363,7 +25978,7 @@
           <a:noFill/>
         </p:spPr>
         <p:txBody>
-          <a:bodyPr wrap="square" anchor="t" lIns="0" rIns="0" tIns="0" bIns="0">
+          <a:bodyPr wrap="square" lIns="0" tIns="0" rIns="0" bIns="0" anchor="t">
             <a:spAutoFit/>
           </a:bodyPr>
           <a:lstStyle/>
@@ -25448,6 +26063,7 @@
           <a:lstStyle/>
           <a:p>
             <a:pPr algn="ctr"/>
+            <a:endParaRPr/>
           </a:p>
         </p:txBody>
       </p:sp>
@@ -25492,6 +26108,7 @@
           <a:lstStyle/>
           <a:p>
             <a:pPr algn="ctr"/>
+            <a:endParaRPr/>
           </a:p>
         </p:txBody>
       </p:sp>
@@ -25512,7 +26129,7 @@
           <a:noFill/>
         </p:spPr>
         <p:txBody>
-          <a:bodyPr wrap="square" anchor="t" lIns="0" rIns="0" tIns="0" bIns="0">
+          <a:bodyPr wrap="square" lIns="0" tIns="0" rIns="0" bIns="0" anchor="t">
             <a:spAutoFit/>
           </a:bodyPr>
           <a:lstStyle/>
@@ -25554,7 +26171,7 @@
           <a:noFill/>
         </p:spPr>
         <p:txBody>
-          <a:bodyPr wrap="square" anchor="t" lIns="0" rIns="0" tIns="0" bIns="0">
+          <a:bodyPr wrap="square" lIns="0" tIns="0" rIns="0" bIns="0" anchor="t">
             <a:spAutoFit/>
           </a:bodyPr>
           <a:lstStyle/>
@@ -25620,6 +26237,7 @@
           <a:lstStyle/>
           <a:p>
             <a:pPr algn="ctr"/>
+            <a:endParaRPr/>
           </a:p>
         </p:txBody>
       </p:sp>
@@ -25664,6 +26282,7 @@
           <a:lstStyle/>
           <a:p>
             <a:pPr algn="ctr"/>
+            <a:endParaRPr/>
           </a:p>
         </p:txBody>
       </p:sp>
@@ -25684,7 +26303,7 @@
           <a:noFill/>
         </p:spPr>
         <p:txBody>
-          <a:bodyPr wrap="square" anchor="t" lIns="0" rIns="0" tIns="0" bIns="0">
+          <a:bodyPr wrap="square" lIns="0" tIns="0" rIns="0" bIns="0" anchor="t">
             <a:spAutoFit/>
           </a:bodyPr>
           <a:lstStyle/>
@@ -25726,7 +26345,7 @@
           <a:noFill/>
         </p:spPr>
         <p:txBody>
-          <a:bodyPr wrap="square" anchor="t" lIns="0" rIns="0" tIns="0" bIns="0">
+          <a:bodyPr wrap="square" lIns="0" tIns="0" rIns="0" bIns="0" anchor="t">
             <a:spAutoFit/>
           </a:bodyPr>
           <a:lstStyle/>
@@ -25792,6 +26411,7 @@
           <a:lstStyle/>
           <a:p>
             <a:pPr algn="ctr"/>
+            <a:endParaRPr/>
           </a:p>
         </p:txBody>
       </p:sp>
@@ -25836,6 +26456,7 @@
           <a:lstStyle/>
           <a:p>
             <a:pPr algn="ctr"/>
+            <a:endParaRPr/>
           </a:p>
         </p:txBody>
       </p:sp>
@@ -25856,7 +26477,7 @@
           <a:noFill/>
         </p:spPr>
         <p:txBody>
-          <a:bodyPr wrap="square" anchor="t" lIns="0" rIns="0" tIns="0" bIns="0">
+          <a:bodyPr wrap="square" lIns="0" tIns="0" rIns="0" bIns="0" anchor="t">
             <a:spAutoFit/>
           </a:bodyPr>
           <a:lstStyle/>
@@ -25898,7 +26519,7 @@
           <a:noFill/>
         </p:spPr>
         <p:txBody>
-          <a:bodyPr wrap="square" anchor="t" lIns="0" rIns="0" tIns="0" bIns="0">
+          <a:bodyPr wrap="square" lIns="0" tIns="0" rIns="0" bIns="0" anchor="t">
             <a:spAutoFit/>
           </a:bodyPr>
           <a:lstStyle/>
@@ -25940,7 +26561,7 @@
           <a:noFill/>
         </p:spPr>
         <p:txBody>
-          <a:bodyPr wrap="square" anchor="t" lIns="0" rIns="0" tIns="0" bIns="0">
+          <a:bodyPr wrap="square" lIns="0" tIns="0" rIns="0" bIns="0" anchor="t">
             <a:spAutoFit/>
           </a:bodyPr>
           <a:lstStyle/>
@@ -26001,7 +26622,7 @@
           <a:noFill/>
         </p:spPr>
         <p:txBody>
-          <a:bodyPr wrap="square" anchor="t" lIns="0" rIns="0" tIns="0" bIns="0">
+          <a:bodyPr wrap="square" lIns="0" tIns="0" rIns="0" bIns="0" anchor="t">
             <a:spAutoFit/>
           </a:bodyPr>
           <a:lstStyle/>
@@ -26043,7 +26664,7 @@
           <a:noFill/>
         </p:spPr>
         <p:txBody>
-          <a:bodyPr wrap="square" anchor="t" lIns="0" rIns="0" tIns="0" bIns="0">
+          <a:bodyPr wrap="square" lIns="0" tIns="0" rIns="0" bIns="0" anchor="t">
             <a:spAutoFit/>
           </a:bodyPr>
           <a:lstStyle/>
@@ -26077,7 +26698,7 @@
 </file>
 
 <file path=ppt/slides/slide9.xml><?xml version="1.0" encoding="utf-8"?>
-<p:sld xmlns:a="http://schemas.openxmlformats.org/drawingml/2006/main" xmlns:p="http://schemas.openxmlformats.org/presentationml/2006/main" xmlns:r="http://schemas.openxmlformats.org/officeDocument/2006/relationships">
+<p:sld xmlns:a="http://schemas.openxmlformats.org/drawingml/2006/main" xmlns:r="http://schemas.openxmlformats.org/officeDocument/2006/relationships" xmlns:p="http://schemas.openxmlformats.org/presentationml/2006/main">
   <p:cSld>
     <p:bg>
       <p:bgPr>
@@ -26093,7 +26714,14 @@
         <p:cNvGrpSpPr/>
         <p:nvPr/>
       </p:nvGrpSpPr>
-      <p:grpSpPr/>
+      <p:grpSpPr>
+        <a:xfrm>
+          <a:off x="0" y="0"/>
+          <a:ext cx="0" cy="0"/>
+          <a:chOff x="0" y="0"/>
+          <a:chExt cx="0" cy="0"/>
+        </a:xfrm>
+      </p:grpSpPr>
       <p:sp>
         <p:nvSpPr>
           <p:cNvPr id="2" name="Rectangle 1"/>
@@ -26135,6 +26763,7 @@
           <a:lstStyle/>
           <a:p>
             <a:pPr algn="ctr"/>
+            <a:endParaRPr/>
           </a:p>
         </p:txBody>
       </p:sp>
@@ -26155,7 +26784,7 @@
           <a:noFill/>
         </p:spPr>
         <p:txBody>
-          <a:bodyPr wrap="square" anchor="t" lIns="0" rIns="0" tIns="0" bIns="0">
+          <a:bodyPr wrap="square" lIns="0" tIns="0" rIns="0" bIns="0" anchor="t">
             <a:spAutoFit/>
           </a:bodyPr>
           <a:lstStyle/>
@@ -26197,7 +26826,7 @@
           <a:noFill/>
         </p:spPr>
         <p:txBody>
-          <a:bodyPr wrap="square" anchor="t" lIns="0" rIns="0" tIns="0" bIns="0">
+          <a:bodyPr wrap="square" lIns="0" tIns="0" rIns="0" bIns="0" anchor="t">
             <a:spAutoFit/>
           </a:bodyPr>
           <a:lstStyle/>
@@ -26263,6 +26892,7 @@
           <a:lstStyle/>
           <a:p>
             <a:pPr algn="ctr"/>
+            <a:endParaRPr/>
           </a:p>
         </p:txBody>
       </p:sp>
@@ -26283,7 +26913,7 @@
           <a:noFill/>
         </p:spPr>
         <p:txBody>
-          <a:bodyPr wrap="square" anchor="t" lIns="0" rIns="0" tIns="0" bIns="0">
+          <a:bodyPr wrap="square" lIns="0" tIns="0" rIns="0" bIns="0" anchor="t">
             <a:spAutoFit/>
           </a:bodyPr>
           <a:lstStyle/>
@@ -26372,15 +27002,12 @@
                 <a:spcPts val="0"/>
               </a:spcAft>
             </a:pPr>
-            <a:r>
-              <a:rPr sz="1550" b="0" i="0">
-                <a:solidFill>
-                  <a:srgbClr val="E3E8F0"/>
-                </a:solidFill>
-                <a:latin typeface="Consolas"/>
-              </a:rPr>
-              <a:t/>
-            </a:r>
+            <a:endParaRPr sz="1550" b="0" i="0">
+              <a:solidFill>
+                <a:srgbClr val="E3E8F0"/>
+              </a:solidFill>
+              <a:latin typeface="Consolas"/>
+            </a:endParaRPr>
           </a:p>
           <a:p>
             <a:pPr algn="l">
@@ -26439,7 +27066,7 @@
           <a:noFill/>
         </p:spPr>
         <p:txBody>
-          <a:bodyPr wrap="square" anchor="t" lIns="0" rIns="0" tIns="0" bIns="0">
+          <a:bodyPr wrap="square" lIns="0" tIns="0" rIns="0" bIns="0" anchor="t">
             <a:spAutoFit/>
           </a:bodyPr>
           <a:lstStyle/>
@@ -26500,7 +27127,7 @@
           <a:noFill/>
         </p:spPr>
         <p:txBody>
-          <a:bodyPr wrap="square" anchor="t" lIns="0" rIns="0" tIns="0" bIns="0">
+          <a:bodyPr wrap="square" lIns="0" tIns="0" rIns="0" bIns="0" anchor="t">
             <a:spAutoFit/>
           </a:bodyPr>
           <a:lstStyle/>
@@ -26542,7 +27169,7 @@
           <a:noFill/>
         </p:spPr>
         <p:txBody>
-          <a:bodyPr wrap="square" anchor="t" lIns="0" rIns="0" tIns="0" bIns="0">
+          <a:bodyPr wrap="square" lIns="0" tIns="0" rIns="0" bIns="0" anchor="t">
             <a:spAutoFit/>
           </a:bodyPr>
           <a:lstStyle/>

--- a/presentation/couverture-code-conference.pptx
+++ b/presentation/couverture-code-conference.pptx
@@ -4555,7 +4555,7 @@
                 <a:solidFill>
                   <a:srgbClr val="C79A52"/>
                 </a:solidFill>
-                <a:latin typeface="Calibri"/>
+                <a:latin typeface="Helvetica Neue"/>
               </a:rPr>
               <a:t>CONFÉRENCE TECHNIQUE</a:t>
             </a:r>
@@ -4597,7 +4597,7 @@
                 <a:solidFill>
                   <a:srgbClr val="EFECE3"/>
                 </a:solidFill>
-                <a:latin typeface="Calibri"/>
+                <a:latin typeface="Helvetica Neue"/>
               </a:rPr>
               <a:t>La couverture de code,</a:t>
             </a:r>
@@ -4616,7 +4616,7 @@
                 <a:solidFill>
                   <a:srgbClr val="EFECE3"/>
                 </a:solidFill>
-                <a:latin typeface="Calibri"/>
+                <a:latin typeface="Helvetica Neue"/>
               </a:rPr>
               <a:t>sans blabla</a:t>
             </a:r>
@@ -4658,7 +4658,7 @@
                 <a:solidFill>
                   <a:srgbClr val="C79A52"/>
                 </a:solidFill>
-                <a:latin typeface="Calibri"/>
+                <a:latin typeface="Helvetica Neue"/>
               </a:rPr>
               <a:t>Quarkus  ·  JUnit  ·  Cucumber  ·  Jacoco  ·  (un peu de Sonar en bonus)</a:t>
             </a:r>
@@ -4700,7 +4700,7 @@
                 <a:solidFill>
                   <a:srgbClr val="C8CFDA"/>
                 </a:solidFill>
-                <a:latin typeface="Calibri"/>
+                <a:latin typeface="Helvetica Neue"/>
               </a:rPr>
               <a:t>Où l'on découvre que « 100 % de couverture » ne veut pas dire « 0 bug ».</a:t>
             </a:r>
@@ -4742,7 +4742,7 @@
                 <a:solidFill>
                   <a:srgbClr val="8B93A1"/>
                 </a:solidFill>
-                <a:latin typeface="Calibri"/>
+                <a:latin typeface="Helvetica Neue"/>
               </a:rPr>
               <a:t>Ton nom — Date de la conférence</a:t>
             </a:r>
@@ -4860,9 +4860,9 @@
             <a:r>
               <a:rPr sz="1300" b="1" i="0">
                 <a:solidFill>
-                  <a:srgbClr val="5C8C86"/>
-                </a:solidFill>
-                <a:latin typeface="Calibri"/>
+                  <a:srgbClr val="355C57"/>
+                </a:solidFill>
+                <a:latin typeface="Helvetica Neue"/>
               </a:rPr>
               <a:t>ZOOM — CUCUMBER</a:t>
             </a:r>
@@ -4904,7 +4904,7 @@
                 <a:solidFill>
                   <a:srgbClr val="162844"/>
                 </a:solidFill>
-                <a:latin typeface="Calibri"/>
+                <a:latin typeface="Helvetica Neue"/>
               </a:rPr>
               <a:t>Le grand angle</a:t>
             </a:r>
@@ -4946,7 +4946,7 @@
                 <a:solidFill>
                   <a:srgbClr val="333A47"/>
                 </a:solidFill>
-                <a:latin typeface="Calibri"/>
+                <a:latin typeface="Helvetica Neue"/>
               </a:rPr>
               <a:t>Cucumber teste le comportement observable, de bout en bout, en français</a:t>
             </a:r>
@@ -4965,7 +4965,7 @@
                 <a:solidFill>
                   <a:srgbClr val="333A47"/>
                 </a:solidFill>
-                <a:latin typeface="Calibri"/>
+                <a:latin typeface="Helvetica Neue"/>
               </a:rPr>
               <a:t>lisible. Le même texte sert de spec fonctionnelle ET de test automatisé.</a:t>
             </a:r>
@@ -5097,7 +5097,7 @@
                 <a:solidFill>
                   <a:srgbClr val="162844"/>
                 </a:solidFill>
-                <a:latin typeface="Calibri"/>
+                <a:latin typeface="Helvetica Neue"/>
               </a:rPr>
               <a:t>Lisible</a:t>
             </a:r>
@@ -5139,7 +5139,7 @@
                 <a:solidFill>
                   <a:srgbClr val="333A47"/>
                 </a:solidFill>
-                <a:latin typeface="Calibri"/>
+                <a:latin typeface="Helvetica Neue"/>
               </a:rPr>
               <a:t>Même un product owner peut le relire (et le corriger).</a:t>
             </a:r>
@@ -5271,7 +5271,7 @@
                 <a:solidFill>
                   <a:srgbClr val="162844"/>
                 </a:solidFill>
-                <a:latin typeface="Calibri"/>
+                <a:latin typeface="Helvetica Neue"/>
               </a:rPr>
               <a:t>Bout en bout</a:t>
             </a:r>
@@ -5313,7 +5313,7 @@
                 <a:solidFill>
                   <a:srgbClr val="333A47"/>
                 </a:solidFill>
-                <a:latin typeface="Calibri"/>
+                <a:latin typeface="Helvetica Neue"/>
               </a:rPr>
               <a:t>Passe par la vraie API REST, pas un mock.</a:t>
             </a:r>
@@ -5445,7 +5445,7 @@
                 <a:solidFill>
                   <a:srgbClr val="162844"/>
                 </a:solidFill>
-                <a:latin typeface="Calibri"/>
+                <a:latin typeface="Helvetica Neue"/>
               </a:rPr>
               <a:t>Fonctionnel</a:t>
             </a:r>
@@ -5487,7 +5487,7 @@
                 <a:solidFill>
                   <a:srgbClr val="333A47"/>
                 </a:solidFill>
-                <a:latin typeface="Calibri"/>
+                <a:latin typeface="Helvetica Neue"/>
               </a:rPr>
               <a:t>Décrit ce que fait le produit, pas comment.</a:t>
             </a:r>
@@ -5529,7 +5529,7 @@
                 <a:solidFill>
                   <a:srgbClr val="333A47"/>
                 </a:solidFill>
-                <a:latin typeface="Calibri"/>
+                <a:latin typeface="Helvetica Neue"/>
               </a:rPr>
               <a:t>Dans notre agenda malin : la création d'événement, la détection de conflit,</a:t>
             </a:r>
@@ -5548,7 +5548,7 @@
                 <a:solidFill>
                   <a:srgbClr val="333A47"/>
                 </a:solidFill>
-                <a:latin typeface="Calibri"/>
+                <a:latin typeface="Helvetica Neue"/>
               </a:rPr>
               <a:t>le signalement d'un jour férié — trois scénarios, en français.</a:t>
             </a:r>
@@ -5588,9 +5588,9 @@
             <a:r>
               <a:rPr sz="1000" b="0" i="0">
                 <a:solidFill>
-                  <a:srgbClr val="8B93A1"/>
-                </a:solidFill>
-                <a:latin typeface="Calibri"/>
+                  <a:srgbClr val="5E6674"/>
+                </a:solidFill>
+                <a:latin typeface="Helvetica Neue"/>
               </a:rPr>
               <a:t>10 / 28</a:t>
             </a:r>
@@ -5630,9 +5630,9 @@
             <a:r>
               <a:rPr sz="800" b="0" i="0">
                 <a:solidFill>
-                  <a:srgbClr val="8B93A1"/>
-                </a:solidFill>
-                <a:latin typeface="Calibri"/>
+                  <a:srgbClr val="5E6674"/>
+                </a:solidFill>
+                <a:latin typeface="Helvetica Neue"/>
               </a:rPr>
               <a:t>COUVERTURE DE CODE — QUARKUS · JUNIT · CUCUMBER · JACOCO</a:t>
             </a:r>
@@ -5750,9 +5750,9 @@
             <a:r>
               <a:rPr sz="1300" b="1" i="0">
                 <a:solidFill>
-                  <a:srgbClr val="5C8C86"/>
-                </a:solidFill>
-                <a:latin typeface="Calibri"/>
+                  <a:srgbClr val="355C57"/>
+                </a:solidFill>
+                <a:latin typeface="Helvetica Neue"/>
               </a:rPr>
               <a:t>CUCUMBER — EN ACTION</a:t>
             </a:r>
@@ -5794,7 +5794,7 @@
                 <a:solidFill>
                   <a:srgbClr val="162844"/>
                 </a:solidFill>
-                <a:latin typeface="Calibri"/>
+                <a:latin typeface="Helvetica Neue"/>
               </a:rPr>
               <a:t>Le scénario que tout le monde comprend</a:t>
             </a:r>
@@ -5881,7 +5881,7 @@
                 <a:solidFill>
                   <a:srgbClr val="E3E8F0"/>
                 </a:solidFill>
-                <a:latin typeface="Consolas"/>
+                <a:latin typeface="Menlo"/>
               </a:rPr>
               <a:t>Scénario: Refus d'un événement qui chevauche un</a:t>
             </a:r>
@@ -5900,7 +5900,7 @@
                 <a:solidFill>
                   <a:srgbClr val="E3E8F0"/>
                 </a:solidFill>
-                <a:latin typeface="Consolas"/>
+                <a:latin typeface="Menlo"/>
               </a:rPr>
               <a:t>          événement existant</a:t>
             </a:r>
@@ -5918,7 +5918,7 @@
               <a:solidFill>
                 <a:srgbClr val="E3E8F0"/>
               </a:solidFill>
-              <a:latin typeface="Consolas"/>
+              <a:latin typeface="Menlo"/>
             </a:endParaRPr>
           </a:p>
           <a:p>
@@ -5935,7 +5935,7 @@
                 <a:solidFill>
                   <a:srgbClr val="E3E8F0"/>
                 </a:solidFill>
-                <a:latin typeface="Consolas"/>
+                <a:latin typeface="Menlo"/>
               </a:rPr>
               <a:t>  Étant donné que j'ai déjà l'événement "Comité de</a:t>
             </a:r>
@@ -5954,7 +5954,7 @@
                 <a:solidFill>
                   <a:srgbClr val="E3E8F0"/>
                 </a:solidFill>
-                <a:latin typeface="Consolas"/>
+                <a:latin typeface="Menlo"/>
               </a:rPr>
               <a:t>  pilotage" de "14:00" à "15:00" le "2026-09-15"</a:t>
             </a:r>
@@ -5973,7 +5973,7 @@
                 <a:solidFill>
                   <a:srgbClr val="E3E8F0"/>
                 </a:solidFill>
-                <a:latin typeface="Consolas"/>
+                <a:latin typeface="Menlo"/>
               </a:rPr>
               <a:t>  Quand je crée l'événement "Revue de code" de</a:t>
             </a:r>
@@ -5992,7 +5992,7 @@
                 <a:solidFill>
                   <a:srgbClr val="E3E8F0"/>
                 </a:solidFill>
-                <a:latin typeface="Consolas"/>
+                <a:latin typeface="Menlo"/>
               </a:rPr>
               <a:t>  "14:30" à "15:30" le "2026-09-15"</a:t>
             </a:r>
@@ -6011,7 +6011,7 @@
                 <a:solidFill>
                   <a:srgbClr val="E3E8F0"/>
                 </a:solidFill>
-                <a:latin typeface="Consolas"/>
+                <a:latin typeface="Menlo"/>
               </a:rPr>
               <a:t>  Alors la création est refusée pour cause de</a:t>
             </a:r>
@@ -6030,7 +6030,7 @@
                 <a:solidFill>
                   <a:srgbClr val="E3E8F0"/>
                 </a:solidFill>
-                <a:latin typeface="Consolas"/>
+                <a:latin typeface="Menlo"/>
               </a:rPr>
               <a:t>  conflit d'horaire</a:t>
             </a:r>
@@ -6072,7 +6072,7 @@
                 <a:solidFill>
                   <a:srgbClr val="333A47"/>
                 </a:solidFill>
-                <a:latin typeface="Calibri"/>
+                <a:latin typeface="Helvetica Neue"/>
               </a:rPr>
               <a:t>Ce même texte sert de spécification fonctionnelle et de test d'intégration,</a:t>
             </a:r>
@@ -6091,7 +6091,7 @@
                 <a:solidFill>
                   <a:srgbClr val="333A47"/>
                 </a:solidFill>
-                <a:latin typeface="Calibri"/>
+                <a:latin typeface="Helvetica Neue"/>
               </a:rPr>
               <a:t>exécuté en vrai contre l'API REST via RestAssured.</a:t>
             </a:r>
@@ -6131,9 +6131,9 @@
             <a:r>
               <a:rPr sz="1000" b="0" i="0">
                 <a:solidFill>
-                  <a:srgbClr val="8B93A1"/>
-                </a:solidFill>
-                <a:latin typeface="Calibri"/>
+                  <a:srgbClr val="5E6674"/>
+                </a:solidFill>
+                <a:latin typeface="Helvetica Neue"/>
               </a:rPr>
               <a:t>11 / 28</a:t>
             </a:r>
@@ -6173,9 +6173,9 @@
             <a:r>
               <a:rPr sz="800" b="0" i="0">
                 <a:solidFill>
-                  <a:srgbClr val="8B93A1"/>
-                </a:solidFill>
-                <a:latin typeface="Calibri"/>
+                  <a:srgbClr val="5E6674"/>
+                </a:solidFill>
+                <a:latin typeface="Helvetica Neue"/>
               </a:rPr>
               <a:t>COUVERTURE DE CODE — QUARKUS · JUNIT · CUCUMBER · JACOCO</a:t>
             </a:r>
@@ -6293,9 +6293,9 @@
             <a:r>
               <a:rPr sz="1300" b="1" i="0">
                 <a:solidFill>
-                  <a:srgbClr val="C79A52"/>
-                </a:solidFill>
-                <a:latin typeface="Calibri"/>
+                  <a:srgbClr val="8A6530"/>
+                </a:solidFill>
+                <a:latin typeface="Helvetica Neue"/>
               </a:rPr>
               <a:t>LE MATCH</a:t>
             </a:r>
@@ -6337,7 +6337,7 @@
                 <a:solidFill>
                   <a:srgbClr val="162844"/>
                 </a:solidFill>
-                <a:latin typeface="Calibri"/>
+                <a:latin typeface="Helvetica Neue"/>
               </a:rPr>
               <a:t>JUnit vs Cucumber : qui gagne ?</a:t>
             </a:r>
@@ -6469,7 +6469,7 @@
                 <a:solidFill>
                   <a:srgbClr val="162844"/>
                 </a:solidFill>
-                <a:latin typeface="Calibri"/>
+                <a:latin typeface="Helvetica Neue"/>
               </a:rPr>
               <a:t>JUnit</a:t>
             </a:r>
@@ -6511,7 +6511,7 @@
                 <a:solidFill>
                   <a:srgbClr val="333A47"/>
                 </a:solidFill>
-                <a:latin typeface="Calibri"/>
+                <a:latin typeface="Helvetica Neue"/>
               </a:rPr>
               <a:t>— Rapide</a:t>
             </a:r>
@@ -6553,7 +6553,7 @@
                 <a:solidFill>
                   <a:srgbClr val="333A47"/>
                 </a:solidFill>
-                <a:latin typeface="Calibri"/>
+                <a:latin typeface="Helvetica Neue"/>
               </a:rPr>
               <a:t>— Isolé</a:t>
             </a:r>
@@ -6595,7 +6595,7 @@
                 <a:solidFill>
                   <a:srgbClr val="333A47"/>
                 </a:solidFill>
-                <a:latin typeface="Calibri"/>
+                <a:latin typeface="Helvetica Neue"/>
               </a:rPr>
               <a:t>— Technique</a:t>
             </a:r>
@@ -6637,7 +6637,7 @@
                 <a:solidFill>
                   <a:srgbClr val="333A47"/>
                 </a:solidFill>
-                <a:latin typeface="Calibri"/>
+                <a:latin typeface="Helvetica Neue"/>
               </a:rPr>
               <a:t>— Pour les devs</a:t>
             </a:r>
@@ -6769,7 +6769,7 @@
                 <a:solidFill>
                   <a:srgbClr val="162844"/>
                 </a:solidFill>
-                <a:latin typeface="Calibri"/>
+                <a:latin typeface="Helvetica Neue"/>
               </a:rPr>
               <a:t>Cucumber</a:t>
             </a:r>
@@ -6811,7 +6811,7 @@
                 <a:solidFill>
                   <a:srgbClr val="333A47"/>
                 </a:solidFill>
-                <a:latin typeface="Calibri"/>
+                <a:latin typeface="Helvetica Neue"/>
               </a:rPr>
               <a:t>— Lisible</a:t>
             </a:r>
@@ -6853,7 +6853,7 @@
                 <a:solidFill>
                   <a:srgbClr val="333A47"/>
                 </a:solidFill>
-                <a:latin typeface="Calibri"/>
+                <a:latin typeface="Helvetica Neue"/>
               </a:rPr>
               <a:t>— Bout en bout</a:t>
             </a:r>
@@ -6895,7 +6895,7 @@
                 <a:solidFill>
                   <a:srgbClr val="333A47"/>
                 </a:solidFill>
-                <a:latin typeface="Calibri"/>
+                <a:latin typeface="Helvetica Neue"/>
               </a:rPr>
               <a:t>— Fonctionnel</a:t>
             </a:r>
@@ -6937,7 +6937,7 @@
                 <a:solidFill>
                   <a:srgbClr val="333A47"/>
                 </a:solidFill>
-                <a:latin typeface="Calibri"/>
+                <a:latin typeface="Helvetica Neue"/>
               </a:rPr>
               <a:t>— Pour tout le monde</a:t>
             </a:r>
@@ -6977,9 +6977,9 @@
             <a:r>
               <a:rPr sz="1400" b="1" i="1">
                 <a:solidFill>
-                  <a:srgbClr val="C79A52"/>
-                </a:solidFill>
-                <a:latin typeface="Calibri"/>
+                  <a:srgbClr val="8A6530"/>
+                </a:solidFill>
+                <a:latin typeface="Helvetica Neue"/>
               </a:rPr>
               <a:t>Spoiler : il n'y a pas de gagnant. Le seul qui gagne, c'est le code — testé sous deux angles.</a:t>
             </a:r>
@@ -7019,9 +7019,9 @@
             <a:r>
               <a:rPr sz="1000" b="0" i="0">
                 <a:solidFill>
-                  <a:srgbClr val="8B93A1"/>
-                </a:solidFill>
-                <a:latin typeface="Calibri"/>
+                  <a:srgbClr val="5E6674"/>
+                </a:solidFill>
+                <a:latin typeface="Helvetica Neue"/>
               </a:rPr>
               <a:t>12 / 28</a:t>
             </a:r>
@@ -7061,9 +7061,9 @@
             <a:r>
               <a:rPr sz="800" b="0" i="0">
                 <a:solidFill>
-                  <a:srgbClr val="8B93A1"/>
-                </a:solidFill>
-                <a:latin typeface="Calibri"/>
+                  <a:srgbClr val="5E6674"/>
+                </a:solidFill>
+                <a:latin typeface="Helvetica Neue"/>
               </a:rPr>
               <a:t>COUVERTURE DE CODE — QUARKUS · JUNIT · CUCUMBER · JACOCO</a:t>
             </a:r>
@@ -8455,7 +8455,52 @@
       </p:sp>
       <p:sp>
         <p:nvSpPr>
-          <p:cNvPr id="32" name="TextBox 31"/>
+          <p:cNvPr id="32" name="Oval 31"/>
+          <p:cNvSpPr/>
+          <p:nvPr/>
+        </p:nvSpPr>
+        <p:spPr>
+          <a:xfrm>
+            <a:off x="5995263" y="2286000"/>
+            <a:ext cx="201168" cy="201168"/>
+          </a:xfrm>
+          <a:prstGeom prst="ellipse">
+            <a:avLst/>
+          </a:prstGeom>
+          <a:solidFill>
+            <a:srgbClr val="BF6F5D"/>
+          </a:solidFill>
+          <a:ln>
+            <a:noFill/>
+          </a:ln>
+          <a:effectLst/>
+        </p:spPr>
+        <p:style>
+          <a:lnRef idx="1">
+            <a:schemeClr val="accent1"/>
+          </a:lnRef>
+          <a:fillRef idx="3">
+            <a:schemeClr val="accent1"/>
+          </a:fillRef>
+          <a:effectRef idx="2">
+            <a:schemeClr val="accent1"/>
+          </a:effectRef>
+          <a:fontRef idx="minor">
+            <a:schemeClr val="lt1"/>
+          </a:fontRef>
+        </p:style>
+        <p:txBody>
+          <a:bodyPr rtlCol="0" anchor="ctr"/>
+          <a:lstStyle/>
+          <a:p>
+            <a:pPr algn="ctr"/>
+            <a:endParaRPr/>
+          </a:p>
+        </p:txBody>
+      </p:sp>
+      <p:sp>
+        <p:nvSpPr>
+          <p:cNvPr id="33" name="TextBox 32"/>
           <p:cNvSpPr txBox="1"/>
           <p:nvPr/>
         </p:nvSpPr>
@@ -8488,16 +8533,16 @@
                 <a:solidFill>
                   <a:srgbClr val="EFECE3"/>
                 </a:solidFill>
-                <a:latin typeface="Calibri"/>
-              </a:rPr>
-              <a:t>🎬  EN DIRECT</a:t>
-            </a:r>
-          </a:p>
-        </p:txBody>
-      </p:sp>
-      <p:sp>
-        <p:nvSpPr>
-          <p:cNvPr id="33" name="TextBox 32"/>
+                <a:latin typeface="Helvetica Neue"/>
+              </a:rPr>
+              <a:t>EN DIRECT</a:t>
+            </a:r>
+          </a:p>
+        </p:txBody>
+      </p:sp>
+      <p:sp>
+        <p:nvSpPr>
+          <p:cNvPr id="34" name="TextBox 33"/>
           <p:cNvSpPr txBox="1"/>
           <p:nvPr/>
         </p:nvSpPr>
@@ -8530,7 +8575,7 @@
                 <a:solidFill>
                   <a:srgbClr val="C79A52"/>
                 </a:solidFill>
-                <a:latin typeface="Calibri"/>
+                <a:latin typeface="Helvetica Neue"/>
               </a:rPr>
               <a:t>(fermez Slack. ça va aller vite, mais pas invisible)</a:t>
             </a:r>
@@ -8539,7 +8584,7 @@
       </p:sp>
       <p:sp>
         <p:nvSpPr>
-          <p:cNvPr id="34" name="TextBox 33"/>
+          <p:cNvPr id="35" name="TextBox 34"/>
           <p:cNvSpPr txBox="1"/>
           <p:nvPr/>
         </p:nvSpPr>
@@ -8570,9 +8615,9 @@
             <a:r>
               <a:rPr sz="1000" b="0" i="0">
                 <a:solidFill>
-                  <a:srgbClr val="6E7A8E"/>
-                </a:solidFill>
-                <a:latin typeface="Calibri"/>
+                  <a:srgbClr val="8B93A1"/>
+                </a:solidFill>
+                <a:latin typeface="Helvetica Neue"/>
               </a:rPr>
               <a:t>13 / 28</a:t>
             </a:r>
@@ -8581,7 +8626,7 @@
       </p:sp>
       <p:sp>
         <p:nvSpPr>
-          <p:cNvPr id="35" name="TextBox 34"/>
+          <p:cNvPr id="36" name="TextBox 35"/>
           <p:cNvSpPr txBox="1"/>
           <p:nvPr/>
         </p:nvSpPr>
@@ -8612,9 +8657,9 @@
             <a:r>
               <a:rPr sz="800" b="0" i="0">
                 <a:solidFill>
-                  <a:srgbClr val="6E7A8E"/>
-                </a:solidFill>
-                <a:latin typeface="Calibri"/>
+                  <a:srgbClr val="8B93A1"/>
+                </a:solidFill>
+                <a:latin typeface="Helvetica Neue"/>
               </a:rPr>
               <a:t>COUVERTURE DE CODE — QUARKUS · JUNIT · CUCUMBER · JACOCO</a:t>
             </a:r>
@@ -8732,9 +8777,9 @@
             <a:r>
               <a:rPr sz="1300" b="1" i="0">
                 <a:solidFill>
-                  <a:srgbClr val="BF6F5D"/>
-                </a:solidFill>
-                <a:latin typeface="Calibri"/>
+                  <a:srgbClr val="8F4536"/>
+                </a:solidFill>
+                <a:latin typeface="Helvetica Neue"/>
               </a:rPr>
               <a:t>ZOOM — JACOCO</a:t>
             </a:r>
@@ -8776,7 +8821,7 @@
                 <a:solidFill>
                   <a:srgbClr val="162844"/>
                 </a:solidFill>
-                <a:latin typeface="Calibri"/>
+                <a:latin typeface="Helvetica Neue"/>
               </a:rPr>
               <a:t>Un agent qui espionne le bytecode (légalement)</a:t>
             </a:r>
@@ -8863,7 +8908,7 @@
                 <a:solidFill>
                   <a:srgbClr val="C79A52"/>
                 </a:solidFill>
-                <a:latin typeface="Calibri"/>
+                <a:latin typeface="Helvetica Neue"/>
               </a:rPr>
               <a:t>1</a:t>
             </a:r>
@@ -8905,7 +8950,7 @@
                 <a:solidFill>
                   <a:srgbClr val="162844"/>
                 </a:solidFill>
-                <a:latin typeface="Calibri"/>
+                <a:latin typeface="Helvetica Neue"/>
               </a:rPr>
               <a:t>Au démarrage de la JVM</a:t>
             </a:r>
@@ -8947,7 +8992,7 @@
                 <a:solidFill>
                   <a:srgbClr val="333A47"/>
                 </a:solidFill>
-                <a:latin typeface="Calibri"/>
+                <a:latin typeface="Helvetica Neue"/>
               </a:rPr>
               <a:t>Un agent Java (-javaagent) s'attache et instrumente chaque classe chargée.</a:t>
             </a:r>
@@ -9034,7 +9079,7 @@
                 <a:solidFill>
                   <a:srgbClr val="C79A52"/>
                 </a:solidFill>
-                <a:latin typeface="Calibri"/>
+                <a:latin typeface="Helvetica Neue"/>
               </a:rPr>
               <a:t>2</a:t>
             </a:r>
@@ -9076,7 +9121,7 @@
                 <a:solidFill>
                   <a:srgbClr val="162844"/>
                 </a:solidFill>
-                <a:latin typeface="Calibri"/>
+                <a:latin typeface="Helvetica Neue"/>
               </a:rPr>
               <a:t>Pendant les tests</a:t>
             </a:r>
@@ -9118,7 +9163,7 @@
                 <a:solidFill>
                   <a:srgbClr val="333A47"/>
                 </a:solidFill>
-                <a:latin typeface="Calibri"/>
+                <a:latin typeface="Helvetica Neue"/>
               </a:rPr>
               <a:t>Chaque ligne, chaque branche exécutée est comptée — en silence, sans ralentir grand-chose.</a:t>
             </a:r>
@@ -9205,7 +9250,7 @@
                 <a:solidFill>
                   <a:srgbClr val="C79A52"/>
                 </a:solidFill>
-                <a:latin typeface="Calibri"/>
+                <a:latin typeface="Helvetica Neue"/>
               </a:rPr>
               <a:t>3</a:t>
             </a:r>
@@ -9247,7 +9292,7 @@
                 <a:solidFill>
                   <a:srgbClr val="162844"/>
                 </a:solidFill>
-                <a:latin typeface="Calibri"/>
+                <a:latin typeface="Helvetica Neue"/>
               </a:rPr>
               <a:t>À l'arrêt de la JVM</a:t>
             </a:r>
@@ -9289,7 +9334,7 @@
                 <a:solidFill>
                   <a:srgbClr val="333A47"/>
                 </a:solidFill>
-                <a:latin typeface="Calibri"/>
+                <a:latin typeface="Helvetica Neue"/>
               </a:rPr>
               <a:t>Tout est vidé dans un fichier .exec. Puis jacoco-maven-plugin le transforme en rapport HTML/XML/CSV.</a:t>
             </a:r>
@@ -9329,9 +9374,9 @@
             <a:r>
               <a:rPr sz="1350" b="0" i="1">
                 <a:solidFill>
-                  <a:srgbClr val="BF6F5D"/>
-                </a:solidFill>
-                <a:latin typeface="Calibri"/>
+                  <a:srgbClr val="8F4536"/>
+                </a:solidFill>
+                <a:latin typeface="Helvetica Neue"/>
               </a:rPr>
               <a:t>Non, ce n'est pas de l'espionnage industriel. C'est juste un agent très curieux.</a:t>
             </a:r>
@@ -9371,9 +9416,9 @@
             <a:r>
               <a:rPr sz="1000" b="0" i="0">
                 <a:solidFill>
-                  <a:srgbClr val="8B93A1"/>
-                </a:solidFill>
-                <a:latin typeface="Calibri"/>
+                  <a:srgbClr val="5E6674"/>
+                </a:solidFill>
+                <a:latin typeface="Helvetica Neue"/>
               </a:rPr>
               <a:t>14 / 28</a:t>
             </a:r>
@@ -9413,9 +9458,9 @@
             <a:r>
               <a:rPr sz="800" b="0" i="0">
                 <a:solidFill>
-                  <a:srgbClr val="8B93A1"/>
-                </a:solidFill>
-                <a:latin typeface="Calibri"/>
+                  <a:srgbClr val="5E6674"/>
+                </a:solidFill>
+                <a:latin typeface="Helvetica Neue"/>
               </a:rPr>
               <a:t>COUVERTURE DE CODE — QUARKUS · JUNIT · CUCUMBER · JACOCO</a:t>
             </a:r>
@@ -9533,9 +9578,9 @@
             <a:r>
               <a:rPr sz="1300" b="1" i="0">
                 <a:solidFill>
-                  <a:srgbClr val="BF6F5D"/>
-                </a:solidFill>
-                <a:latin typeface="Calibri"/>
+                  <a:srgbClr val="8F4536"/>
+                </a:solidFill>
+                <a:latin typeface="Helvetica Neue"/>
               </a:rPr>
               <a:t>JACOCO — LE RAPPORT</a:t>
             </a:r>
@@ -9577,7 +9622,7 @@
                 <a:solidFill>
                   <a:srgbClr val="162844"/>
                 </a:solidFill>
-                <a:latin typeface="Calibri"/>
+                <a:latin typeface="Helvetica Neue"/>
               </a:rPr>
               <a:t>Pas une maquette. Le vrai rapport.</a:t>
             </a:r>
@@ -9686,9 +9731,9 @@
             <a:r>
               <a:rPr sz="1300" b="0" i="1">
                 <a:solidFill>
-                  <a:srgbClr val="8B93A1"/>
-                </a:solidFill>
-                <a:latin typeface="Calibri"/>
+                  <a:srgbClr val="5E6674"/>
+                </a:solidFill>
+                <a:latin typeface="Helvetica Neue"/>
               </a:rPr>
               <a:t>Capture d'écran réelle de target/jacoco-report/index.html sur ce projet, à l'instant T.</a:t>
             </a:r>
@@ -9728,9 +9773,9 @@
             <a:r>
               <a:rPr sz="1000" b="0" i="0">
                 <a:solidFill>
-                  <a:srgbClr val="8B93A1"/>
-                </a:solidFill>
-                <a:latin typeface="Calibri"/>
+                  <a:srgbClr val="5E6674"/>
+                </a:solidFill>
+                <a:latin typeface="Helvetica Neue"/>
               </a:rPr>
               <a:t>15 / 28</a:t>
             </a:r>
@@ -9770,9 +9815,9 @@
             <a:r>
               <a:rPr sz="800" b="0" i="0">
                 <a:solidFill>
-                  <a:srgbClr val="8B93A1"/>
-                </a:solidFill>
-                <a:latin typeface="Calibri"/>
+                  <a:srgbClr val="5E6674"/>
+                </a:solidFill>
+                <a:latin typeface="Helvetica Neue"/>
               </a:rPr>
               <a:t>COUVERTURE DE CODE — QUARKUS · JUNIT · CUCUMBER · JACOCO</a:t>
             </a:r>
@@ -9890,9 +9935,9 @@
             <a:r>
               <a:rPr sz="1300" b="1" i="0">
                 <a:solidFill>
-                  <a:srgbClr val="BF6F5D"/>
-                </a:solidFill>
-                <a:latin typeface="Calibri"/>
+                  <a:srgbClr val="8F4536"/>
+                </a:solidFill>
+                <a:latin typeface="Helvetica Neue"/>
               </a:rPr>
               <a:t>JACOCO — LA PREUVE</a:t>
             </a:r>
@@ -9934,7 +9979,7 @@
                 <a:solidFill>
                   <a:srgbClr val="162844"/>
                 </a:solidFill>
-                <a:latin typeface="Calibri"/>
+                <a:latin typeface="Helvetica Neue"/>
               </a:rPr>
               <a:t>La branche MENSUELLE, prise en flagrant délit</a:t>
             </a:r>
@@ -10043,9 +10088,9 @@
             <a:r>
               <a:rPr sz="1000" b="0" i="0">
                 <a:solidFill>
-                  <a:srgbClr val="8B93A1"/>
-                </a:solidFill>
-                <a:latin typeface="Calibri"/>
+                  <a:srgbClr val="5E6674"/>
+                </a:solidFill>
+                <a:latin typeface="Helvetica Neue"/>
               </a:rPr>
               <a:t>16 / 28</a:t>
             </a:r>
@@ -10085,9 +10130,9 @@
             <a:r>
               <a:rPr sz="800" b="0" i="0">
                 <a:solidFill>
-                  <a:srgbClr val="8B93A1"/>
-                </a:solidFill>
-                <a:latin typeface="Calibri"/>
+                  <a:srgbClr val="5E6674"/>
+                </a:solidFill>
+                <a:latin typeface="Helvetica Neue"/>
               </a:rPr>
               <a:t>COUVERTURE DE CODE — QUARKUS · JUNIT · CUCUMBER · JACOCO</a:t>
             </a:r>
@@ -10205,9 +10250,9 @@
             <a:r>
               <a:rPr sz="1300" b="1" i="0">
                 <a:solidFill>
-                  <a:srgbClr val="BF6F5D"/>
-                </a:solidFill>
-                <a:latin typeface="Calibri"/>
+                  <a:srgbClr val="8F4536"/>
+                </a:solidFill>
+                <a:latin typeface="Helvetica Neue"/>
               </a:rPr>
               <a:t>JACOCO</a:t>
             </a:r>
@@ -10249,7 +10294,7 @@
                 <a:solidFill>
                   <a:srgbClr val="162844"/>
                 </a:solidFill>
-                <a:latin typeface="Calibri"/>
+                <a:latin typeface="Helvetica Neue"/>
               </a:rPr>
               <a:t>Ce que les tests ont vraiment touché</a:t>
             </a:r>
@@ -10289,9 +10334,9 @@
             <a:r>
               <a:rPr sz="1300" b="0" i="1">
                 <a:solidFill>
-                  <a:srgbClr val="8B93A1"/>
-                </a:solidFill>
-                <a:latin typeface="Calibri"/>
+                  <a:srgbClr val="5E6674"/>
+                </a:solidFill>
+                <a:latin typeface="Helvetica Neue"/>
               </a:rPr>
               <a:t>Mesure réelle, extraite du build — couverture de lignes, JUnit contre Cucumber</a:t>
             </a:r>
@@ -10313,7 +10358,7 @@
             <a:avLst/>
           </a:prstGeom>
           <a:solidFill>
-            <a:srgbClr val="C79A52"/>
+            <a:srgbClr val="8A6530"/>
           </a:solidFill>
           <a:ln>
             <a:noFill/>
@@ -10378,7 +10423,7 @@
                 <a:solidFill>
                   <a:srgbClr val="162844"/>
                 </a:solidFill>
-                <a:latin typeface="Calibri"/>
+                <a:latin typeface="Helvetica Neue"/>
               </a:rPr>
               <a:t>JUnit (unitaire)</a:t>
             </a:r>
@@ -10465,7 +10510,7 @@
                 <a:solidFill>
                   <a:srgbClr val="162844"/>
                 </a:solidFill>
-                <a:latin typeface="Calibri"/>
+                <a:latin typeface="Helvetica Neue"/>
               </a:rPr>
               <a:t>Cucumber (intégration)</a:t>
             </a:r>
@@ -10507,7 +10552,7 @@
                 <a:solidFill>
                   <a:srgbClr val="162844"/>
                 </a:solidFill>
-                <a:latin typeface="Calibri"/>
+                <a:latin typeface="Helvetica Neue"/>
               </a:rPr>
               <a:t>CalendarResource</a:t>
             </a:r>
@@ -10574,7 +10619,7 @@
             <a:avLst/>
           </a:prstGeom>
           <a:solidFill>
-            <a:srgbClr val="C79A52"/>
+            <a:srgbClr val="8A6530"/>
           </a:solidFill>
           <a:ln>
             <a:noFill/>
@@ -10639,7 +10684,7 @@
                 <a:solidFill>
                   <a:srgbClr val="162844"/>
                 </a:solidFill>
-                <a:latin typeface="Calibri"/>
+                <a:latin typeface="Helvetica Neue"/>
               </a:rPr>
               <a:t>0%</a:t>
             </a:r>
@@ -10771,7 +10816,7 @@
                 <a:solidFill>
                   <a:srgbClr val="162844"/>
                 </a:solidFill>
-                <a:latin typeface="Calibri"/>
+                <a:latin typeface="Helvetica Neue"/>
               </a:rPr>
               <a:t>58%</a:t>
             </a:r>
@@ -10813,7 +10858,7 @@
                 <a:solidFill>
                   <a:srgbClr val="162844"/>
                 </a:solidFill>
-                <a:latin typeface="Calibri"/>
+                <a:latin typeface="Helvetica Neue"/>
               </a:rPr>
               <a:t>HolidayService</a:t>
             </a:r>
@@ -10880,7 +10925,7 @@
             <a:avLst/>
           </a:prstGeom>
           <a:solidFill>
-            <a:srgbClr val="C79A52"/>
+            <a:srgbClr val="8A6530"/>
           </a:solidFill>
           <a:ln>
             <a:noFill/>
@@ -10945,7 +10990,7 @@
                 <a:solidFill>
                   <a:srgbClr val="162844"/>
                 </a:solidFill>
-                <a:latin typeface="Calibri"/>
+                <a:latin typeface="Helvetica Neue"/>
               </a:rPr>
               <a:t>0%</a:t>
             </a:r>
@@ -11077,7 +11122,7 @@
                 <a:solidFill>
                   <a:srgbClr val="162844"/>
                 </a:solidFill>
-                <a:latin typeface="Calibri"/>
+                <a:latin typeface="Helvetica Neue"/>
               </a:rPr>
               <a:t>93%</a:t>
             </a:r>
@@ -11119,7 +11164,7 @@
                 <a:solidFill>
                   <a:srgbClr val="162844"/>
                 </a:solidFill>
-                <a:latin typeface="Calibri"/>
+                <a:latin typeface="Helvetica Neue"/>
               </a:rPr>
               <a:t>RecurrenceService</a:t>
             </a:r>
@@ -11186,7 +11231,7 @@
             <a:avLst/>
           </a:prstGeom>
           <a:solidFill>
-            <a:srgbClr val="C79A52"/>
+            <a:srgbClr val="8A6530"/>
           </a:solidFill>
           <a:ln>
             <a:noFill/>
@@ -11251,7 +11296,7 @@
                 <a:solidFill>
                   <a:srgbClr val="162844"/>
                 </a:solidFill>
-                <a:latin typeface="Calibri"/>
+                <a:latin typeface="Helvetica Neue"/>
               </a:rPr>
               <a:t>78%</a:t>
             </a:r>
@@ -11383,7 +11428,7 @@
                 <a:solidFill>
                   <a:srgbClr val="162844"/>
                 </a:solidFill>
-                <a:latin typeface="Calibri"/>
+                <a:latin typeface="Helvetica Neue"/>
               </a:rPr>
               <a:t>4%</a:t>
             </a:r>
@@ -11425,7 +11470,7 @@
                 <a:solidFill>
                   <a:srgbClr val="162844"/>
                 </a:solidFill>
-                <a:latin typeface="Calibri"/>
+                <a:latin typeface="Helvetica Neue"/>
               </a:rPr>
               <a:t>ConflictDetector</a:t>
             </a:r>
@@ -11492,7 +11537,7 @@
             <a:avLst/>
           </a:prstGeom>
           <a:solidFill>
-            <a:srgbClr val="C79A52"/>
+            <a:srgbClr val="8A6530"/>
           </a:solidFill>
           <a:ln>
             <a:noFill/>
@@ -11557,7 +11602,7 @@
                 <a:solidFill>
                   <a:srgbClr val="162844"/>
                 </a:solidFill>
-                <a:latin typeface="Calibri"/>
+                <a:latin typeface="Helvetica Neue"/>
               </a:rPr>
               <a:t>100%</a:t>
             </a:r>
@@ -11689,7 +11734,7 @@
                 <a:solidFill>
                   <a:srgbClr val="162844"/>
                 </a:solidFill>
-                <a:latin typeface="Calibri"/>
+                <a:latin typeface="Helvetica Neue"/>
               </a:rPr>
               <a:t>75%</a:t>
             </a:r>
@@ -11731,7 +11776,7 @@
                 <a:solidFill>
                   <a:srgbClr val="162844"/>
                 </a:solidFill>
-                <a:latin typeface="Calibri"/>
+                <a:latin typeface="Helvetica Neue"/>
               </a:rPr>
               <a:t>EventService</a:t>
             </a:r>
@@ -11798,7 +11843,7 @@
             <a:avLst/>
           </a:prstGeom>
           <a:solidFill>
-            <a:srgbClr val="C79A52"/>
+            <a:srgbClr val="8A6530"/>
           </a:solidFill>
           <a:ln>
             <a:noFill/>
@@ -11863,7 +11908,7 @@
                 <a:solidFill>
                   <a:srgbClr val="162844"/>
                 </a:solidFill>
-                <a:latin typeface="Calibri"/>
+                <a:latin typeface="Helvetica Neue"/>
               </a:rPr>
               <a:t>88%</a:t>
             </a:r>
@@ -11995,7 +12040,7 @@
                 <a:solidFill>
                   <a:srgbClr val="162844"/>
                 </a:solidFill>
-                <a:latin typeface="Calibri"/>
+                <a:latin typeface="Helvetica Neue"/>
               </a:rPr>
               <a:t>88%</a:t>
             </a:r>
@@ -12037,7 +12082,7 @@
                 <a:solidFill>
                   <a:srgbClr val="162844"/>
                 </a:solidFill>
-                <a:latin typeface="Calibri"/>
+                <a:latin typeface="Helvetica Neue"/>
               </a:rPr>
               <a:t>RecurrenceRequest (DTO)</a:t>
             </a:r>
@@ -12104,7 +12149,7 @@
             <a:avLst/>
           </a:prstGeom>
           <a:solidFill>
-            <a:srgbClr val="C79A52"/>
+            <a:srgbClr val="8A6530"/>
           </a:solidFill>
           <a:ln>
             <a:noFill/>
@@ -12169,7 +12214,7 @@
                 <a:solidFill>
                   <a:srgbClr val="162844"/>
                 </a:solidFill>
-                <a:latin typeface="Calibri"/>
+                <a:latin typeface="Helvetica Neue"/>
               </a:rPr>
               <a:t>0%</a:t>
             </a:r>
@@ -12301,7 +12346,7 @@
                 <a:solidFill>
                   <a:srgbClr val="162844"/>
                 </a:solidFill>
-                <a:latin typeface="Calibri"/>
+                <a:latin typeface="Helvetica Neue"/>
               </a:rPr>
               <a:t>0%</a:t>
             </a:r>
@@ -12341,9 +12386,9 @@
             <a:r>
               <a:rPr sz="1200" b="0" i="1">
                 <a:solidFill>
-                  <a:srgbClr val="8B93A1"/>
-                </a:solidFill>
-                <a:latin typeface="Calibri"/>
+                  <a:srgbClr val="5E6674"/>
+                </a:solidFill>
+                <a:latin typeface="Helvetica Neue"/>
               </a:rPr>
               <a:t>JUnit couvre la logique métier ; Cucumber couvre la couche REST — presque aucun recouvrement.</a:t>
             </a:r>
@@ -12383,9 +12428,9 @@
             <a:r>
               <a:rPr sz="1000" b="0" i="0">
                 <a:solidFill>
-                  <a:srgbClr val="8B93A1"/>
-                </a:solidFill>
-                <a:latin typeface="Calibri"/>
+                  <a:srgbClr val="5E6674"/>
+                </a:solidFill>
+                <a:latin typeface="Helvetica Neue"/>
               </a:rPr>
               <a:t>17 / 28</a:t>
             </a:r>
@@ -12425,9 +12470,9 @@
             <a:r>
               <a:rPr sz="800" b="0" i="0">
                 <a:solidFill>
-                  <a:srgbClr val="8B93A1"/>
-                </a:solidFill>
-                <a:latin typeface="Calibri"/>
+                  <a:srgbClr val="5E6674"/>
+                </a:solidFill>
+                <a:latin typeface="Helvetica Neue"/>
               </a:rPr>
               <a:t>COUVERTURE DE CODE — QUARKUS · JUNIT · CUCUMBER · JACOCO</a:t>
             </a:r>
@@ -12502,7 +12547,7 @@
                 <a:solidFill>
                   <a:srgbClr val="C79A52"/>
                 </a:solidFill>
-                <a:latin typeface="Calibri"/>
+                <a:latin typeface="Helvetica Neue"/>
               </a:rPr>
               <a:t>SANS OUVRIR DE NAVIGATEUR</a:t>
             </a:r>
@@ -12544,7 +12589,7 @@
                 <a:solidFill>
                   <a:srgbClr val="EFECE3"/>
                 </a:solidFill>
-                <a:latin typeface="Calibri"/>
+                <a:latin typeface="Helvetica Neue"/>
               </a:rPr>
               <a:t>Le récap, direct dans le terminal</a:t>
             </a:r>
@@ -12653,9 +12698,9 @@
             <a:r>
               <a:rPr sz="1000" b="0" i="0">
                 <a:solidFill>
-                  <a:srgbClr val="6E7A8E"/>
-                </a:solidFill>
-                <a:latin typeface="Calibri"/>
+                  <a:srgbClr val="8B93A1"/>
+                </a:solidFill>
+                <a:latin typeface="Helvetica Neue"/>
               </a:rPr>
               <a:t>18 / 28</a:t>
             </a:r>
@@ -12695,9 +12740,9 @@
             <a:r>
               <a:rPr sz="800" b="0" i="0">
                 <a:solidFill>
-                  <a:srgbClr val="6E7A8E"/>
-                </a:solidFill>
-                <a:latin typeface="Calibri"/>
+                  <a:srgbClr val="8B93A1"/>
+                </a:solidFill>
+                <a:latin typeface="Helvetica Neue"/>
               </a:rPr>
               <a:t>COUVERTURE DE CODE — QUARKUS · JUNIT · CUCUMBER · JACOCO</a:t>
             </a:r>
@@ -12815,9 +12860,9 @@
             <a:r>
               <a:rPr sz="1300" b="1" i="0">
                 <a:solidFill>
-                  <a:srgbClr val="C79A52"/>
-                </a:solidFill>
-                <a:latin typeface="Calibri"/>
+                  <a:srgbClr val="8A6530"/>
+                </a:solidFill>
+                <a:latin typeface="Helvetica Neue"/>
               </a:rPr>
               <a:t>EN DIRECT</a:t>
             </a:r>
@@ -12859,7 +12904,7 @@
                 <a:solidFill>
                   <a:srgbClr val="162844"/>
                 </a:solidFill>
-                <a:latin typeface="Calibri"/>
+                <a:latin typeface="Helvetica Neue"/>
               </a:rPr>
               <a:t>Trois commandes, un radar complet</a:t>
             </a:r>
@@ -12946,7 +12991,7 @@
                 <a:solidFill>
                   <a:srgbClr val="C79A52"/>
                 </a:solidFill>
-                <a:latin typeface="Calibri"/>
+                <a:latin typeface="Helvetica Neue"/>
               </a:rPr>
               <a:t>1</a:t>
             </a:r>
@@ -12988,7 +13033,7 @@
                 <a:solidFill>
                   <a:srgbClr val="162844"/>
                 </a:solidFill>
-                <a:latin typeface="Consolas"/>
+                <a:latin typeface="Menlo"/>
               </a:rPr>
               <a:t>./mvnw test</a:t>
             </a:r>
@@ -13030,7 +13075,7 @@
                 <a:solidFill>
                   <a:srgbClr val="333A47"/>
                 </a:solidFill>
-                <a:latin typeface="Calibri"/>
+                <a:latin typeface="Helvetica Neue"/>
               </a:rPr>
               <a:t>Build + JUnit + Cucumber + 3 rapports Jacoco générés automatiquement.</a:t>
             </a:r>
@@ -13117,7 +13162,7 @@
                 <a:solidFill>
                   <a:srgbClr val="C79A52"/>
                 </a:solidFill>
-                <a:latin typeface="Calibri"/>
+                <a:latin typeface="Helvetica Neue"/>
               </a:rPr>
               <a:t>2</a:t>
             </a:r>
@@ -13159,7 +13204,7 @@
                 <a:solidFill>
                   <a:srgbClr val="162844"/>
                 </a:solidFill>
-                <a:latin typeface="Consolas"/>
+                <a:latin typeface="Menlo"/>
               </a:rPr>
               <a:t>./scripts/coverage-summary.sh</a:t>
             </a:r>
@@ -13201,7 +13246,7 @@
                 <a:solidFill>
                   <a:srgbClr val="333A47"/>
                 </a:solidFill>
-                <a:latin typeface="Calibri"/>
+                <a:latin typeface="Helvetica Neue"/>
               </a:rPr>
               <a:t>Le récap coloré JUnit / Cucumber / global, côte à côte, dans le terminal.</a:t>
             </a:r>
@@ -13288,7 +13333,7 @@
                 <a:solidFill>
                   <a:srgbClr val="C79A52"/>
                 </a:solidFill>
-                <a:latin typeface="Calibri"/>
+                <a:latin typeface="Helvetica Neue"/>
               </a:rPr>
               <a:t>3</a:t>
             </a:r>
@@ -13330,7 +13375,7 @@
                 <a:solidFill>
                   <a:srgbClr val="162844"/>
                 </a:solidFill>
-                <a:latin typeface="Consolas"/>
+                <a:latin typeface="Menlo"/>
               </a:rPr>
               <a:t>open target/jacoco-report/index.html</a:t>
             </a:r>
@@ -13372,7 +13417,7 @@
                 <a:solidFill>
                   <a:srgbClr val="333A47"/>
                 </a:solidFill>
-                <a:latin typeface="Calibri"/>
+                <a:latin typeface="Helvetica Neue"/>
               </a:rPr>
               <a:t>Le détail ligne par ligne — et les variantes -junit / -cucumber pour comparer.</a:t>
             </a:r>
@@ -13412,9 +13457,9 @@
             <a:r>
               <a:rPr sz="1000" b="0" i="0">
                 <a:solidFill>
-                  <a:srgbClr val="8B93A1"/>
-                </a:solidFill>
-                <a:latin typeface="Calibri"/>
+                  <a:srgbClr val="5E6674"/>
+                </a:solidFill>
+                <a:latin typeface="Helvetica Neue"/>
               </a:rPr>
               <a:t>19 / 28</a:t>
             </a:r>
@@ -13454,9 +13499,9 @@
             <a:r>
               <a:rPr sz="800" b="0" i="0">
                 <a:solidFill>
-                  <a:srgbClr val="8B93A1"/>
-                </a:solidFill>
-                <a:latin typeface="Calibri"/>
+                  <a:srgbClr val="5E6674"/>
+                </a:solidFill>
+                <a:latin typeface="Helvetica Neue"/>
               </a:rPr>
               <a:t>COUVERTURE DE CODE — QUARKUS · JUNIT · CUCUMBER · JACOCO</a:t>
             </a:r>
@@ -13574,9 +13619,9 @@
             <a:r>
               <a:rPr sz="1300" b="1" i="0">
                 <a:solidFill>
-                  <a:srgbClr val="C79A52"/>
-                </a:solidFill>
-                <a:latin typeface="Calibri"/>
+                  <a:srgbClr val="8A6530"/>
+                </a:solidFill>
+                <a:latin typeface="Helvetica Neue"/>
               </a:rPr>
               <a:t>AVANT DE COMMENCER</a:t>
             </a:r>
@@ -13618,7 +13663,7 @@
                 <a:solidFill>
                   <a:srgbClr val="162844"/>
                 </a:solidFill>
-                <a:latin typeface="Calibri"/>
+                <a:latin typeface="Helvetica Neue"/>
               </a:rPr>
               <a:t>Qui suis-je ?</a:t>
             </a:r>
@@ -13750,7 +13795,7 @@
                 <a:solidFill>
                   <a:srgbClr val="162844"/>
                 </a:solidFill>
-                <a:latin typeface="Calibri"/>
+                <a:latin typeface="Helvetica Neue"/>
               </a:rPr>
               <a:t>Développeur Java</a:t>
             </a:r>
@@ -13792,7 +13837,7 @@
                 <a:solidFill>
                   <a:srgbClr val="333A47"/>
                 </a:solidFill>
-                <a:latin typeface="Calibri"/>
+                <a:latin typeface="Helvetica Neue"/>
               </a:rPr>
               <a:t>Suffisamment d'années pour avoir déjà tout cassé au moins une fois.</a:t>
             </a:r>
@@ -13924,7 +13969,7 @@
                 <a:solidFill>
                   <a:srgbClr val="162844"/>
                 </a:solidFill>
-                <a:latin typeface="Calibri"/>
+                <a:latin typeface="Helvetica Neue"/>
               </a:rPr>
               <a:t>Écrit des tests</a:t>
             </a:r>
@@ -13966,7 +14011,7 @@
                 <a:solidFill>
                   <a:srgbClr val="333A47"/>
                 </a:solidFill>
-                <a:latin typeface="Calibri"/>
+                <a:latin typeface="Helvetica Neue"/>
               </a:rPr>
               <a:t>Un ratio tests / code que je ne montrerai à personne aujourd'hui.</a:t>
             </a:r>
@@ -14098,7 +14143,7 @@
                 <a:solidFill>
                   <a:srgbClr val="162844"/>
                 </a:solidFill>
-                <a:latin typeface="Calibri"/>
+                <a:latin typeface="Helvetica Neue"/>
               </a:rPr>
               <a:t>Ici pour une raison précise</a:t>
             </a:r>
@@ -14140,7 +14185,7 @@
                 <a:solidFill>
                   <a:srgbClr val="333A47"/>
                 </a:solidFill>
-                <a:latin typeface="Calibri"/>
+                <a:latin typeface="Helvetica Neue"/>
               </a:rPr>
               <a:t>Vous convaincre de regarder VOTRE rapport de couverture. Le vrai. Pas celui que vous imaginez.</a:t>
             </a:r>
@@ -14180,9 +14225,9 @@
             <a:r>
               <a:rPr sz="1100" b="0" i="1">
                 <a:solidFill>
-                  <a:srgbClr val="8B93A1"/>
-                </a:solidFill>
-                <a:latin typeface="Calibri"/>
+                  <a:srgbClr val="5E6674"/>
+                </a:solidFill>
+                <a:latin typeface="Helvetica Neue"/>
               </a:rPr>
               <a:t>(personnalisez cette slide avec votre vraie bio avant le jour J)</a:t>
             </a:r>
@@ -14222,9 +14267,9 @@
             <a:r>
               <a:rPr sz="1000" b="0" i="0">
                 <a:solidFill>
-                  <a:srgbClr val="8B93A1"/>
-                </a:solidFill>
-                <a:latin typeface="Calibri"/>
+                  <a:srgbClr val="5E6674"/>
+                </a:solidFill>
+                <a:latin typeface="Helvetica Neue"/>
               </a:rPr>
               <a:t>02 / 28</a:t>
             </a:r>
@@ -14264,9 +14309,9 @@
             <a:r>
               <a:rPr sz="800" b="0" i="0">
                 <a:solidFill>
-                  <a:srgbClr val="8B93A1"/>
-                </a:solidFill>
-                <a:latin typeface="Calibri"/>
+                  <a:srgbClr val="5E6674"/>
+                </a:solidFill>
+                <a:latin typeface="Helvetica Neue"/>
               </a:rPr>
               <a:t>COUVERTURE DE CODE — QUARKUS · JUNIT · CUCUMBER · JACOCO</a:t>
             </a:r>
@@ -14341,7 +14386,7 @@
                 <a:solidFill>
                   <a:srgbClr val="C79A52"/>
                 </a:solidFill>
-                <a:latin typeface="Calibri"/>
+                <a:latin typeface="Helvetica Neue"/>
               </a:rPr>
               <a:t>BONUS</a:t>
             </a:r>
@@ -14383,7 +14428,7 @@
                 <a:solidFill>
                   <a:srgbClr val="EFECE3"/>
                 </a:solidFill>
-                <a:latin typeface="Calibri"/>
+                <a:latin typeface="Helvetica Neue"/>
               </a:rPr>
               <a:t>Et dans un vrai dashboard ?</a:t>
             </a:r>
@@ -14425,7 +14470,7 @@
                 <a:solidFill>
                   <a:srgbClr val="C8CFDA"/>
                 </a:solidFill>
-                <a:latin typeface="Calibri"/>
+                <a:latin typeface="Helvetica Neue"/>
               </a:rPr>
               <a:t>Les deux mêmes rapports Jacoco XML, importés tels quels dans SonarQube.</a:t>
             </a:r>
@@ -14557,7 +14602,7 @@
                 <a:solidFill>
                   <a:srgbClr val="C79A52"/>
                 </a:solidFill>
-                <a:latin typeface="Calibri"/>
+                <a:latin typeface="Helvetica Neue"/>
               </a:rPr>
               <a:t>77,7 %</a:t>
             </a:r>
@@ -14597,9 +14642,9 @@
             <a:r>
               <a:rPr sz="1300" b="0" i="0">
                 <a:solidFill>
-                  <a:srgbClr val="8B93A1"/>
-                </a:solidFill>
-                <a:latin typeface="Calibri"/>
+                  <a:srgbClr val="9BA3B1"/>
+                </a:solidFill>
+                <a:latin typeface="Helvetica Neue"/>
               </a:rPr>
               <a:t>couverture globale</a:t>
             </a:r>
@@ -14731,7 +14776,7 @@
                 <a:solidFill>
                   <a:srgbClr val="C79A52"/>
                 </a:solidFill>
-                <a:latin typeface="Calibri"/>
+                <a:latin typeface="Helvetica Neue"/>
               </a:rPr>
               <a:t>82 %</a:t>
             </a:r>
@@ -14771,9 +14816,9 @@
             <a:r>
               <a:rPr sz="1300" b="0" i="0">
                 <a:solidFill>
-                  <a:srgbClr val="8B93A1"/>
-                </a:solidFill>
-                <a:latin typeface="Calibri"/>
+                  <a:srgbClr val="9BA3B1"/>
+                </a:solidFill>
+                <a:latin typeface="Helvetica Neue"/>
               </a:rPr>
               <a:t>lignes</a:t>
             </a:r>
@@ -14905,7 +14950,7 @@
                 <a:solidFill>
                   <a:srgbClr val="C79A52"/>
                 </a:solidFill>
-                <a:latin typeface="Calibri"/>
+                <a:latin typeface="Helvetica Neue"/>
               </a:rPr>
               <a:t>65 %</a:t>
             </a:r>
@@ -14945,9 +14990,9 @@
             <a:r>
               <a:rPr sz="1300" b="0" i="0">
                 <a:solidFill>
-                  <a:srgbClr val="8B93A1"/>
-                </a:solidFill>
-                <a:latin typeface="Calibri"/>
+                  <a:srgbClr val="9BA3B1"/>
+                </a:solidFill>
+                <a:latin typeface="Helvetica Neue"/>
               </a:rPr>
               <a:t>branches</a:t>
             </a:r>
@@ -14989,7 +15034,7 @@
                 <a:solidFill>
                   <a:srgbClr val="8B93A1"/>
                 </a:solidFill>
-                <a:latin typeface="Calibri"/>
+                <a:latin typeface="Helvetica Neue"/>
               </a:rPr>
               <a:t>Mesure réelle, obtenue en lançant l'analyse sur ce projet — pas une maquette.</a:t>
             </a:r>
@@ -15076,7 +15121,7 @@
                 <a:solidFill>
                   <a:srgbClr val="E3E8F0"/>
                 </a:solidFill>
-                <a:latin typeface="Consolas"/>
+                <a:latin typeface="Menlo"/>
               </a:rPr>
               <a:t>docker compose -f sonarqube/docker-compose.yml up -d</a:t>
             </a:r>
@@ -15095,7 +15140,7 @@
                 <a:solidFill>
                   <a:srgbClr val="E3E8F0"/>
                 </a:solidFill>
-                <a:latin typeface="Consolas"/>
+                <a:latin typeface="Menlo"/>
               </a:rPr>
               <a:t>./mvnw test sonar:sonar -Dsonar.token=&lt;ton_token&gt;</a:t>
             </a:r>
@@ -15137,7 +15182,7 @@
                 <a:solidFill>
                   <a:srgbClr val="8B93A1"/>
                 </a:solidFill>
-                <a:latin typeface="Calibri"/>
+                <a:latin typeface="Helvetica Neue"/>
               </a:rPr>
               <a:t>SonarQube Community en local — aucun compte SonarCloud, aucune dépendance réseau pendant le talk.</a:t>
             </a:r>
@@ -15177,9 +15222,9 @@
             <a:r>
               <a:rPr sz="1000" b="0" i="0">
                 <a:solidFill>
-                  <a:srgbClr val="6E7A8E"/>
-                </a:solidFill>
-                <a:latin typeface="Calibri"/>
+                  <a:srgbClr val="8B93A1"/>
+                </a:solidFill>
+                <a:latin typeface="Helvetica Neue"/>
               </a:rPr>
               <a:t>20 / 28</a:t>
             </a:r>
@@ -15219,9 +15264,9 @@
             <a:r>
               <a:rPr sz="800" b="0" i="0">
                 <a:solidFill>
-                  <a:srgbClr val="6E7A8E"/>
-                </a:solidFill>
-                <a:latin typeface="Calibri"/>
+                  <a:srgbClr val="8B93A1"/>
+                </a:solidFill>
+                <a:latin typeface="Helvetica Neue"/>
               </a:rPr>
               <a:t>COUVERTURE DE CODE — QUARKUS · JUNIT · CUCUMBER · JACOCO</a:t>
             </a:r>
@@ -15339,9 +15384,9 @@
             <a:r>
               <a:rPr sz="1300" b="1" i="0">
                 <a:solidFill>
-                  <a:srgbClr val="C79A52"/>
-                </a:solidFill>
-                <a:latin typeface="Calibri"/>
+                  <a:srgbClr val="8A6530"/>
+                </a:solidFill>
+                <a:latin typeface="Helvetica Neue"/>
               </a:rPr>
               <a:t>SONARQUBE — DASHBOARD</a:t>
             </a:r>
@@ -15383,7 +15428,7 @@
                 <a:solidFill>
                   <a:srgbClr val="162844"/>
                 </a:solidFill>
-                <a:latin typeface="Calibri"/>
+                <a:latin typeface="Helvetica Neue"/>
               </a:rPr>
               <a:t>Coverage 77,7 %, en vrai, dans l'interface</a:t>
             </a:r>
@@ -15492,9 +15537,9 @@
             <a:r>
               <a:rPr sz="1000" b="0" i="0">
                 <a:solidFill>
-                  <a:srgbClr val="8B93A1"/>
-                </a:solidFill>
-                <a:latin typeface="Calibri"/>
+                  <a:srgbClr val="5E6674"/>
+                </a:solidFill>
+                <a:latin typeface="Helvetica Neue"/>
               </a:rPr>
               <a:t>21 / 28</a:t>
             </a:r>
@@ -15534,9 +15579,9 @@
             <a:r>
               <a:rPr sz="800" b="0" i="0">
                 <a:solidFill>
-                  <a:srgbClr val="8B93A1"/>
-                </a:solidFill>
-                <a:latin typeface="Calibri"/>
+                  <a:srgbClr val="5E6674"/>
+                </a:solidFill>
+                <a:latin typeface="Helvetica Neue"/>
               </a:rPr>
               <a:t>COUVERTURE DE CODE — QUARKUS · JUNIT · CUCUMBER · JACOCO</a:t>
             </a:r>
@@ -15654,9 +15699,9 @@
             <a:r>
               <a:rPr sz="1300" b="1" i="0">
                 <a:solidFill>
-                  <a:srgbClr val="C79A52"/>
-                </a:solidFill>
-                <a:latin typeface="Calibri"/>
+                  <a:srgbClr val="8A6530"/>
+                </a:solidFill>
+                <a:latin typeface="Helvetica Neue"/>
               </a:rPr>
               <a:t>SONARQUBE — MESURES</a:t>
             </a:r>
@@ -15698,7 +15743,7 @@
                 <a:solidFill>
                   <a:srgbClr val="162844"/>
                 </a:solidFill>
-                <a:latin typeface="Calibri"/>
+                <a:latin typeface="Helvetica Neue"/>
               </a:rPr>
               <a:t>Le détail, fichier par fichier</a:t>
             </a:r>
@@ -15807,9 +15852,9 @@
             <a:r>
               <a:rPr sz="1000" b="0" i="0">
                 <a:solidFill>
-                  <a:srgbClr val="8B93A1"/>
-                </a:solidFill>
-                <a:latin typeface="Calibri"/>
+                  <a:srgbClr val="5E6674"/>
+                </a:solidFill>
+                <a:latin typeface="Helvetica Neue"/>
               </a:rPr>
               <a:t>22 / 28</a:t>
             </a:r>
@@ -15849,9 +15894,9 @@
             <a:r>
               <a:rPr sz="800" b="0" i="0">
                 <a:solidFill>
-                  <a:srgbClr val="8B93A1"/>
-                </a:solidFill>
-                <a:latin typeface="Calibri"/>
+                  <a:srgbClr val="5E6674"/>
+                </a:solidFill>
+                <a:latin typeface="Helvetica Neue"/>
               </a:rPr>
               <a:t>COUVERTURE DE CODE — QUARKUS · JUNIT · CUCUMBER · JACOCO</a:t>
             </a:r>
@@ -15969,9 +16014,9 @@
             <a:r>
               <a:rPr sz="1300" b="1" i="0">
                 <a:solidFill>
-                  <a:srgbClr val="C79A52"/>
-                </a:solidFill>
-                <a:latin typeface="Calibri"/>
+                  <a:srgbClr val="8A6530"/>
+                </a:solidFill>
+                <a:latin typeface="Helvetica Neue"/>
               </a:rPr>
               <a:t>SONARQUBE — LA PREUVE, ENCORE</a:t>
             </a:r>
@@ -16013,7 +16058,7 @@
                 <a:solidFill>
                   <a:srgbClr val="162844"/>
                 </a:solidFill>
-                <a:latin typeface="Calibri"/>
+                <a:latin typeface="Helvetica Neue"/>
               </a:rPr>
               <a:t>Même branche rouge, autre outil</a:t>
             </a:r>
@@ -16122,9 +16167,9 @@
             <a:r>
               <a:rPr sz="1000" b="0" i="0">
                 <a:solidFill>
-                  <a:srgbClr val="8B93A1"/>
-                </a:solidFill>
-                <a:latin typeface="Calibri"/>
+                  <a:srgbClr val="5E6674"/>
+                </a:solidFill>
+                <a:latin typeface="Helvetica Neue"/>
               </a:rPr>
               <a:t>23 / 28</a:t>
             </a:r>
@@ -16164,9 +16209,9 @@
             <a:r>
               <a:rPr sz="800" b="0" i="0">
                 <a:solidFill>
-                  <a:srgbClr val="8B93A1"/>
-                </a:solidFill>
-                <a:latin typeface="Calibri"/>
+                  <a:srgbClr val="5E6674"/>
+                </a:solidFill>
+                <a:latin typeface="Helvetica Neue"/>
               </a:rPr>
               <a:t>COUVERTURE DE CODE — QUARKUS · JUNIT · CUCUMBER · JACOCO</a:t>
             </a:r>
@@ -16284,9 +16329,9 @@
             <a:r>
               <a:rPr sz="1300" b="1" i="0">
                 <a:solidFill>
-                  <a:srgbClr val="BF6F5D"/>
-                </a:solidFill>
-                <a:latin typeface="Calibri"/>
+                  <a:srgbClr val="8F4536"/>
+                </a:solidFill>
+                <a:latin typeface="Helvetica Neue"/>
               </a:rPr>
               <a:t>PETIT INTERLUDE</a:t>
             </a:r>
@@ -16328,7 +16373,7 @@
                 <a:solidFill>
                   <a:srgbClr val="162844"/>
                 </a:solidFill>
-                <a:latin typeface="Calibri"/>
+                <a:latin typeface="Helvetica Neue"/>
               </a:rPr>
               <a:t>Le best-of des excuses pour ne pas tester</a:t>
             </a:r>
@@ -16368,9 +16413,9 @@
             <a:r>
               <a:rPr sz="1800" b="1" i="0">
                 <a:solidFill>
-                  <a:srgbClr val="BF6F5D"/>
-                </a:solidFill>
-                <a:latin typeface="Calibri"/>
+                  <a:srgbClr val="8F4536"/>
+                </a:solidFill>
+                <a:latin typeface="Helvetica Neue"/>
               </a:rPr>
               <a:t>01</a:t>
             </a:r>
@@ -16412,7 +16457,7 @@
                 <a:solidFill>
                   <a:srgbClr val="162844"/>
                 </a:solidFill>
-                <a:latin typeface="Calibri"/>
+                <a:latin typeface="Helvetica Neue"/>
               </a:rPr>
               <a:t>« Ça marche sur ma machine. »</a:t>
             </a:r>
@@ -16452,9 +16497,9 @@
             <a:r>
               <a:rPr sz="1800" b="1" i="0">
                 <a:solidFill>
-                  <a:srgbClr val="BF6F5D"/>
-                </a:solidFill>
-                <a:latin typeface="Calibri"/>
+                  <a:srgbClr val="8F4536"/>
+                </a:solidFill>
+                <a:latin typeface="Helvetica Neue"/>
               </a:rPr>
               <a:t>02</a:t>
             </a:r>
@@ -16496,7 +16541,7 @@
                 <a:solidFill>
                   <a:srgbClr val="162844"/>
                 </a:solidFill>
-                <a:latin typeface="Calibri"/>
+                <a:latin typeface="Helvetica Neue"/>
               </a:rPr>
               <a:t>« On testera après le sprint. » (le sprint suivant aussi)</a:t>
             </a:r>
@@ -16536,9 +16581,9 @@
             <a:r>
               <a:rPr sz="1800" b="1" i="0">
                 <a:solidFill>
-                  <a:srgbClr val="BF6F5D"/>
-                </a:solidFill>
-                <a:latin typeface="Calibri"/>
+                  <a:srgbClr val="8F4536"/>
+                </a:solidFill>
+                <a:latin typeface="Helvetica Neue"/>
               </a:rPr>
               <a:t>03</a:t>
             </a:r>
@@ -16580,7 +16625,7 @@
                 <a:solidFill>
                   <a:srgbClr val="162844"/>
                 </a:solidFill>
-                <a:latin typeface="Calibri"/>
+                <a:latin typeface="Helvetica Neue"/>
               </a:rPr>
               <a:t>« C'est trop simple pour bugger. »</a:t>
             </a:r>
@@ -16620,9 +16665,9 @@
             <a:r>
               <a:rPr sz="1800" b="1" i="0">
                 <a:solidFill>
-                  <a:srgbClr val="BF6F5D"/>
-                </a:solidFill>
-                <a:latin typeface="Calibri"/>
+                  <a:srgbClr val="8F4536"/>
+                </a:solidFill>
+                <a:latin typeface="Helvetica Neue"/>
               </a:rPr>
               <a:t>04</a:t>
             </a:r>
@@ -16638,7 +16683,7 @@
         <p:spPr>
           <a:xfrm>
             <a:off x="1463040" y="3931920"/>
-            <a:ext cx="9144000" cy="457200"/>
+            <a:ext cx="9144000" cy="261610"/>
           </a:xfrm>
           <a:prstGeom prst="rect">
             <a:avLst/>
@@ -16660,13 +16705,31 @@
               </a:spcAft>
             </a:pPr>
             <a:r>
-              <a:rPr sz="1700" b="0" i="0">
+              <a:rPr sz="1700" b="0" i="0" dirty="0">
                 <a:solidFill>
                   <a:srgbClr val="162844"/>
                 </a:solidFill>
-                <a:latin typeface="Calibri"/>
-              </a:rPr>
-              <a:t>« Le stagiaire a dit que ça passait. »</a:t>
+                <a:latin typeface="Helvetica Neue"/>
+              </a:rPr>
+              <a:t>« </a:t>
+            </a:r>
+            <a:r>
+              <a:rPr lang="fr-FR" sz="1700" b="0" i="0" dirty="0">
+                <a:solidFill>
+                  <a:srgbClr val="162844"/>
+                </a:solidFill>
+                <a:latin typeface="Helvetica Neue"/>
+              </a:rPr>
+              <a:t>Le test passe normalement</a:t>
+            </a:r>
+            <a:r>
+              <a:rPr sz="1700" b="0" i="0" dirty="0">
+                <a:solidFill>
+                  <a:srgbClr val="162844"/>
+                </a:solidFill>
+                <a:latin typeface="Helvetica Neue"/>
+              </a:rPr>
+              <a:t> »</a:t>
             </a:r>
           </a:p>
         </p:txBody>
@@ -16704,9 +16767,9 @@
             <a:r>
               <a:rPr sz="1800" b="1" i="0">
                 <a:solidFill>
-                  <a:srgbClr val="BF6F5D"/>
-                </a:solidFill>
-                <a:latin typeface="Calibri"/>
+                  <a:srgbClr val="8F4536"/>
+                </a:solidFill>
+                <a:latin typeface="Helvetica Neue"/>
               </a:rPr>
               <a:t>05</a:t>
             </a:r>
@@ -16748,7 +16811,7 @@
                 <a:solidFill>
                   <a:srgbClr val="162844"/>
                 </a:solidFill>
-                <a:latin typeface="Calibri"/>
+                <a:latin typeface="Helvetica Neue"/>
               </a:rPr>
               <a:t>« 100 % de couverture, on n'a plus besoin de relire. »</a:t>
             </a:r>
@@ -16788,9 +16851,9 @@
             <a:r>
               <a:rPr sz="1450" b="1" i="1">
                 <a:solidFill>
-                  <a:srgbClr val="BF6F5D"/>
-                </a:solidFill>
-                <a:latin typeface="Calibri"/>
+                  <a:srgbClr val="8F4536"/>
+                </a:solidFill>
+                <a:latin typeface="Helvetica Neue"/>
               </a:rPr>
               <a:t>Spoiler : aucune de ces phrases n'a jamais empêché un incendie en prod.</a:t>
             </a:r>
@@ -16830,9 +16893,9 @@
             <a:r>
               <a:rPr sz="1000" b="0" i="0">
                 <a:solidFill>
-                  <a:srgbClr val="8B93A1"/>
-                </a:solidFill>
-                <a:latin typeface="Calibri"/>
+                  <a:srgbClr val="5E6674"/>
+                </a:solidFill>
+                <a:latin typeface="Helvetica Neue"/>
               </a:rPr>
               <a:t>24 / 28</a:t>
             </a:r>
@@ -16872,9 +16935,9 @@
             <a:r>
               <a:rPr sz="800" b="0" i="0">
                 <a:solidFill>
-                  <a:srgbClr val="8B93A1"/>
-                </a:solidFill>
-                <a:latin typeface="Calibri"/>
+                  <a:srgbClr val="5E6674"/>
+                </a:solidFill>
+                <a:latin typeface="Helvetica Neue"/>
               </a:rPr>
               <a:t>COUVERTURE DE CODE — QUARKUS · JUNIT · CUCUMBER · JACOCO</a:t>
             </a:r>
@@ -16949,7 +17012,7 @@
                 <a:solidFill>
                   <a:srgbClr val="C79A52"/>
                 </a:solidFill>
-                <a:latin typeface="Calibri"/>
+                <a:latin typeface="Helvetica Neue"/>
               </a:rPr>
               <a:t>RETOUR D'EXPÉRIENCE</a:t>
             </a:r>
@@ -16991,7 +17054,7 @@
                 <a:solidFill>
                   <a:srgbClr val="EFECE3"/>
                 </a:solidFill>
-                <a:latin typeface="Calibri"/>
+                <a:latin typeface="Helvetica Neue"/>
               </a:rPr>
               <a:t>Deux pièges qu'on a vraiment eus en préparant cette conf</a:t>
             </a:r>
@@ -17123,7 +17186,7 @@
                 <a:solidFill>
                   <a:srgbClr val="EFECE3"/>
                 </a:solidFill>
-                <a:latin typeface="Calibri"/>
+                <a:latin typeface="Helvetica Neue"/>
               </a:rPr>
               <a:t>Le QuarkusClassLoader fantôme</a:t>
             </a:r>
@@ -17163,9 +17226,9 @@
             <a:r>
               <a:rPr sz="1300" b="0" i="0">
                 <a:solidFill>
-                  <a:srgbClr val="8B93A1"/>
-                </a:solidFill>
-                <a:latin typeface="Calibri"/>
+                  <a:srgbClr val="9BA3B1"/>
+                </a:solidFill>
+                <a:latin typeface="Helvetica Neue"/>
               </a:rPr>
               <a:t>Deux exécutions Surefire, deux agents Jacoco... et pourtant tout à 0 %. Coupable : l'extension quarkus-jacoco mesure le code CDI toute seule, dans son coin, sans prévenir personne.</a:t>
             </a:r>
@@ -17297,7 +17360,7 @@
                 <a:solidFill>
                   <a:srgbClr val="EFECE3"/>
                 </a:solidFill>
-                <a:latin typeface="Calibri"/>
+                <a:latin typeface="Helvetica Neue"/>
               </a:rPr>
               <a:t>L'accent qui a cassé Gherkin</a:t>
             </a:r>
@@ -17337,9 +17400,9 @@
             <a:r>
               <a:rPr sz="1300" b="0" i="0">
                 <a:solidFill>
-                  <a:srgbClr val="8B93A1"/>
-                </a:solidFill>
-                <a:latin typeface="Calibri"/>
+                  <a:srgbClr val="9BA3B1"/>
+                </a:solidFill>
+                <a:latin typeface="Helvetica Neue"/>
               </a:rPr>
               <a:t>« Fonctionnalite » sans accent ne veut RIEN dire pour un parseur Gherkin en français. Une lettre manquante, un stacktrace de 100 lignes.</a:t>
             </a:r>
@@ -17381,7 +17444,7 @@
                 <a:solidFill>
                   <a:srgbClr val="C79A52"/>
                 </a:solidFill>
-                <a:latin typeface="Calibri"/>
+                <a:latin typeface="Helvetica Neue"/>
               </a:rPr>
               <a:t>Bref : même en préparant une conf sur les tests, on s'est fait avoir. C'est le principe.</a:t>
             </a:r>
@@ -17421,9 +17484,9 @@
             <a:r>
               <a:rPr sz="1000" b="0" i="0">
                 <a:solidFill>
-                  <a:srgbClr val="6E7A8E"/>
-                </a:solidFill>
-                <a:latin typeface="Calibri"/>
+                  <a:srgbClr val="8B93A1"/>
+                </a:solidFill>
+                <a:latin typeface="Helvetica Neue"/>
               </a:rPr>
               <a:t>25 / 28</a:t>
             </a:r>
@@ -17463,9 +17526,9 @@
             <a:r>
               <a:rPr sz="800" b="0" i="0">
                 <a:solidFill>
-                  <a:srgbClr val="6E7A8E"/>
-                </a:solidFill>
-                <a:latin typeface="Calibri"/>
+                  <a:srgbClr val="8B93A1"/>
+                </a:solidFill>
+                <a:latin typeface="Helvetica Neue"/>
               </a:rPr>
               <a:t>COUVERTURE DE CODE — QUARKUS · JUNIT · CUCUMBER · JACOCO</a:t>
             </a:r>
@@ -17540,7 +17603,7 @@
                 <a:solidFill>
                   <a:srgbClr val="C79A52"/>
                 </a:solidFill>
-                <a:latin typeface="Calibri"/>
+                <a:latin typeface="Helvetica Neue"/>
               </a:rPr>
               <a:t>À RETENIR</a:t>
             </a:r>
@@ -17582,7 +17645,7 @@
                 <a:solidFill>
                   <a:srgbClr val="EFECE3"/>
                 </a:solidFill>
-                <a:latin typeface="Calibri"/>
+                <a:latin typeface="Helvetica Neue"/>
               </a:rPr>
               <a:t>Ce qu'il faut retenir</a:t>
             </a:r>
@@ -17624,7 +17687,7 @@
                 <a:solidFill>
                   <a:srgbClr val="C79A52"/>
                 </a:solidFill>
-                <a:latin typeface="Calibri"/>
+                <a:latin typeface="Helvetica Neue"/>
               </a:rPr>
               <a:t>01</a:t>
             </a:r>
@@ -17666,7 +17729,7 @@
                 <a:solidFill>
                   <a:srgbClr val="EFECE3"/>
                 </a:solidFill>
-                <a:latin typeface="Calibri"/>
+                <a:latin typeface="Helvetica Neue"/>
               </a:rPr>
               <a:t>Un test vert ne dit pas ce qu'il a vérifié.</a:t>
             </a:r>
@@ -17708,7 +17771,7 @@
                 <a:solidFill>
                   <a:srgbClr val="8B93A1"/>
                 </a:solidFill>
-                <a:latin typeface="Calibri"/>
+                <a:latin typeface="Helvetica Neue"/>
               </a:rPr>
               <a:t>La couverture, si.</a:t>
             </a:r>
@@ -17750,7 +17813,7 @@
                 <a:solidFill>
                   <a:srgbClr val="C79A52"/>
                 </a:solidFill>
-                <a:latin typeface="Calibri"/>
+                <a:latin typeface="Helvetica Neue"/>
               </a:rPr>
               <a:t>02</a:t>
             </a:r>
@@ -17792,7 +17855,7 @@
                 <a:solidFill>
                   <a:srgbClr val="EFECE3"/>
                 </a:solidFill>
-                <a:latin typeface="Calibri"/>
+                <a:latin typeface="Helvetica Neue"/>
               </a:rPr>
               <a:t>JUnit et Cucumber répondent à deux questions différentes.</a:t>
             </a:r>
@@ -17834,7 +17897,7 @@
                 <a:solidFill>
                   <a:srgbClr val="8B93A1"/>
                 </a:solidFill>
-                <a:latin typeface="Calibri"/>
+                <a:latin typeface="Helvetica Neue"/>
               </a:rPr>
               <a:t>« Ça marche ? » contre « c'est le bon comportement ? »</a:t>
             </a:r>
@@ -17876,7 +17939,7 @@
                 <a:solidFill>
                   <a:srgbClr val="C79A52"/>
                 </a:solidFill>
-                <a:latin typeface="Calibri"/>
+                <a:latin typeface="Helvetica Neue"/>
               </a:rPr>
               <a:t>03</a:t>
             </a:r>
@@ -17918,7 +17981,7 @@
                 <a:solidFill>
                   <a:srgbClr val="EFECE3"/>
                 </a:solidFill>
-                <a:latin typeface="Calibri"/>
+                <a:latin typeface="Helvetica Neue"/>
               </a:rPr>
               <a:t>Le rapport de couverture n'est pas un objectif.</a:t>
             </a:r>
@@ -17960,7 +18023,7 @@
                 <a:solidFill>
                   <a:srgbClr val="8B93A1"/>
                 </a:solidFill>
-                <a:latin typeface="Calibri"/>
+                <a:latin typeface="Helvetica Neue"/>
               </a:rPr>
               <a:t>C'est un radar : il montre où regarder en premier.</a:t>
             </a:r>
@@ -18002,7 +18065,7 @@
                 <a:solidFill>
                   <a:srgbClr val="C79A52"/>
                 </a:solidFill>
-                <a:latin typeface="Calibri"/>
+                <a:latin typeface="Helvetica Neue"/>
               </a:rPr>
               <a:t>04</a:t>
             </a:r>
@@ -18044,7 +18107,7 @@
                 <a:solidFill>
                   <a:srgbClr val="EFECE3"/>
                 </a:solidFill>
-                <a:latin typeface="Calibri"/>
+                <a:latin typeface="Helvetica Neue"/>
               </a:rPr>
               <a:t>Un outil ne remplace pas la question qu'on ne s'est pas posée.</a:t>
             </a:r>
@@ -18086,7 +18149,7 @@
                 <a:solidFill>
                   <a:srgbClr val="8B93A1"/>
                 </a:solidFill>
-                <a:latin typeface="Calibri"/>
+                <a:latin typeface="Helvetica Neue"/>
               </a:rPr>
               <a:t>Ni Jacoco, ni Sonar, ni celui d'après.</a:t>
             </a:r>
@@ -18126,9 +18189,9 @@
             <a:r>
               <a:rPr sz="1000" b="0" i="0">
                 <a:solidFill>
-                  <a:srgbClr val="6E7A8E"/>
-                </a:solidFill>
-                <a:latin typeface="Calibri"/>
+                  <a:srgbClr val="8B93A1"/>
+                </a:solidFill>
+                <a:latin typeface="Helvetica Neue"/>
               </a:rPr>
               <a:t>26 / 28</a:t>
             </a:r>
@@ -18168,9 +18231,9 @@
             <a:r>
               <a:rPr sz="800" b="0" i="0">
                 <a:solidFill>
-                  <a:srgbClr val="6E7A8E"/>
-                </a:solidFill>
-                <a:latin typeface="Calibri"/>
+                  <a:srgbClr val="8B93A1"/>
+                </a:solidFill>
+                <a:latin typeface="Helvetica Neue"/>
               </a:rPr>
               <a:t>COUVERTURE DE CODE — QUARKUS · JUNIT · CUCUMBER · JACOCO</a:t>
             </a:r>
@@ -18288,9 +18351,9 @@
             <a:r>
               <a:rPr sz="1300" b="1" i="0">
                 <a:solidFill>
-                  <a:srgbClr val="C79A52"/>
-                </a:solidFill>
-                <a:latin typeface="Calibri"/>
+                  <a:srgbClr val="8A6530"/>
+                </a:solidFill>
+                <a:latin typeface="Helvetica Neue"/>
               </a:rPr>
               <a:t>POUR LA SUITE</a:t>
             </a:r>
@@ -18332,7 +18395,7 @@
                 <a:solidFill>
                   <a:srgbClr val="162844"/>
                 </a:solidFill>
-                <a:latin typeface="Calibri"/>
+                <a:latin typeface="Helvetica Neue"/>
               </a:rPr>
               <a:t>Si vous voulez creuser</a:t>
             </a:r>
@@ -18419,7 +18482,7 @@
                 <a:solidFill>
                   <a:srgbClr val="162844"/>
                 </a:solidFill>
-                <a:latin typeface="Calibri"/>
+                <a:latin typeface="Helvetica Neue"/>
               </a:rPr>
               <a:t>Le dépôt de ce projet</a:t>
             </a:r>
@@ -18461,7 +18524,7 @@
                 <a:solidFill>
                   <a:srgbClr val="333A47"/>
                 </a:solidFill>
-                <a:latin typeface="Consolas"/>
+                <a:latin typeface="Menlo"/>
               </a:rPr>
               <a:t>github.com/sidevconcept/couverture-junit-cucumber-jacoco</a:t>
             </a:r>
@@ -18548,7 +18611,7 @@
                 <a:solidFill>
                   <a:srgbClr val="162844"/>
                 </a:solidFill>
-                <a:latin typeface="Calibri"/>
+                <a:latin typeface="Helvetica Neue"/>
               </a:rPr>
               <a:t>Guide Quarkus + Jacoco</a:t>
             </a:r>
@@ -18590,7 +18653,7 @@
                 <a:solidFill>
                   <a:srgbClr val="333A47"/>
                 </a:solidFill>
-                <a:latin typeface="Consolas"/>
+                <a:latin typeface="Menlo"/>
               </a:rPr>
               <a:t>quarkus.io/guides/tests-with-coverage</a:t>
             </a:r>
@@ -18677,7 +18740,7 @@
                 <a:solidFill>
                   <a:srgbClr val="162844"/>
                 </a:solidFill>
-                <a:latin typeface="Calibri"/>
+                <a:latin typeface="Helvetica Neue"/>
               </a:rPr>
               <a:t>Extension Cucumber pour Quarkus</a:t>
             </a:r>
@@ -18719,7 +18782,7 @@
                 <a:solidFill>
                   <a:srgbClr val="333A47"/>
                 </a:solidFill>
-                <a:latin typeface="Consolas"/>
+                <a:latin typeface="Menlo"/>
               </a:rPr>
               <a:t>docs.quarkiverse.io/quarkus-cucumber</a:t>
             </a:r>
@@ -18806,7 +18869,7 @@
                 <a:solidFill>
                   <a:srgbClr val="162844"/>
                 </a:solidFill>
-                <a:latin typeface="Calibri"/>
+                <a:latin typeface="Helvetica Neue"/>
               </a:rPr>
               <a:t>SonarQube Community</a:t>
             </a:r>
@@ -18848,7 +18911,7 @@
                 <a:solidFill>
                   <a:srgbClr val="333A47"/>
                 </a:solidFill>
-                <a:latin typeface="Consolas"/>
+                <a:latin typeface="Menlo"/>
               </a:rPr>
               <a:t>docs.sonarsource.com</a:t>
             </a:r>
@@ -18888,9 +18951,9 @@
             <a:r>
               <a:rPr sz="1000" b="0" i="0">
                 <a:solidFill>
-                  <a:srgbClr val="8B93A1"/>
-                </a:solidFill>
-                <a:latin typeface="Calibri"/>
+                  <a:srgbClr val="5E6674"/>
+                </a:solidFill>
+                <a:latin typeface="Helvetica Neue"/>
               </a:rPr>
               <a:t>27 / 28</a:t>
             </a:r>
@@ -18930,9 +18993,9 @@
             <a:r>
               <a:rPr sz="800" b="0" i="0">
                 <a:solidFill>
-                  <a:srgbClr val="8B93A1"/>
-                </a:solidFill>
-                <a:latin typeface="Calibri"/>
+                  <a:srgbClr val="5E6674"/>
+                </a:solidFill>
+                <a:latin typeface="Helvetica Neue"/>
               </a:rPr>
               <a:t>COUVERTURE DE CODE — QUARKUS · JUNIT · CUCUMBER · JACOCO</a:t>
             </a:r>
@@ -19784,553 +19847,13 @@
       </p:sp>
       <p:sp>
         <p:nvSpPr>
-          <p:cNvPr id="20" name="Oval 19"/>
-          <p:cNvSpPr/>
-          <p:nvPr/>
-        </p:nvSpPr>
-        <p:spPr>
-          <a:xfrm>
-            <a:off x="640080" y="5724144"/>
-            <a:ext cx="82296" cy="82296"/>
-          </a:xfrm>
-          <a:prstGeom prst="ellipse">
-            <a:avLst/>
-          </a:prstGeom>
-          <a:solidFill>
-            <a:srgbClr val="C79A52"/>
-          </a:solidFill>
-          <a:ln>
-            <a:noFill/>
-          </a:ln>
-          <a:effectLst/>
-        </p:spPr>
-        <p:style>
-          <a:lnRef idx="1">
-            <a:schemeClr val="accent1"/>
-          </a:lnRef>
-          <a:fillRef idx="3">
-            <a:schemeClr val="accent1"/>
-          </a:fillRef>
-          <a:effectRef idx="2">
-            <a:schemeClr val="accent1"/>
-          </a:effectRef>
-          <a:fontRef idx="minor">
-            <a:schemeClr val="lt1"/>
-          </a:fontRef>
-        </p:style>
-        <p:txBody>
-          <a:bodyPr rtlCol="0" anchor="ctr"/>
-          <a:lstStyle/>
-          <a:p>
-            <a:pPr algn="ctr"/>
-            <a:endParaRPr/>
-          </a:p>
-        </p:txBody>
-      </p:sp>
-      <p:sp>
-        <p:nvSpPr>
-          <p:cNvPr id="21" name="Oval 20"/>
-          <p:cNvSpPr/>
-          <p:nvPr/>
-        </p:nvSpPr>
-        <p:spPr>
-          <a:xfrm>
-            <a:off x="932688" y="5724144"/>
-            <a:ext cx="82296" cy="82296"/>
-          </a:xfrm>
-          <a:prstGeom prst="ellipse">
-            <a:avLst/>
-          </a:prstGeom>
-          <a:solidFill>
-            <a:srgbClr val="C79A52"/>
-          </a:solidFill>
-          <a:ln>
-            <a:noFill/>
-          </a:ln>
-          <a:effectLst/>
-        </p:spPr>
-        <p:style>
-          <a:lnRef idx="1">
-            <a:schemeClr val="accent1"/>
-          </a:lnRef>
-          <a:fillRef idx="3">
-            <a:schemeClr val="accent1"/>
-          </a:fillRef>
-          <a:effectRef idx="2">
-            <a:schemeClr val="accent1"/>
-          </a:effectRef>
-          <a:fontRef idx="minor">
-            <a:schemeClr val="lt1"/>
-          </a:fontRef>
-        </p:style>
-        <p:txBody>
-          <a:bodyPr rtlCol="0" anchor="ctr"/>
-          <a:lstStyle/>
-          <a:p>
-            <a:pPr algn="ctr"/>
-            <a:endParaRPr/>
-          </a:p>
-        </p:txBody>
-      </p:sp>
-      <p:sp>
-        <p:nvSpPr>
-          <p:cNvPr id="22" name="Oval 21"/>
-          <p:cNvSpPr/>
-          <p:nvPr/>
-        </p:nvSpPr>
-        <p:spPr>
-          <a:xfrm>
-            <a:off x="1225296" y="5724144"/>
-            <a:ext cx="82296" cy="82296"/>
-          </a:xfrm>
-          <a:prstGeom prst="ellipse">
-            <a:avLst/>
-          </a:prstGeom>
-          <a:solidFill>
-            <a:srgbClr val="C79A52"/>
-          </a:solidFill>
-          <a:ln>
-            <a:noFill/>
-          </a:ln>
-          <a:effectLst/>
-        </p:spPr>
-        <p:style>
-          <a:lnRef idx="1">
-            <a:schemeClr val="accent1"/>
-          </a:lnRef>
-          <a:fillRef idx="3">
-            <a:schemeClr val="accent1"/>
-          </a:fillRef>
-          <a:effectRef idx="2">
-            <a:schemeClr val="accent1"/>
-          </a:effectRef>
-          <a:fontRef idx="minor">
-            <a:schemeClr val="lt1"/>
-          </a:fontRef>
-        </p:style>
-        <p:txBody>
-          <a:bodyPr rtlCol="0" anchor="ctr"/>
-          <a:lstStyle/>
-          <a:p>
-            <a:pPr algn="ctr"/>
-            <a:endParaRPr/>
-          </a:p>
-        </p:txBody>
-      </p:sp>
-      <p:sp>
-        <p:nvSpPr>
-          <p:cNvPr id="23" name="Oval 22"/>
-          <p:cNvSpPr/>
-          <p:nvPr/>
-        </p:nvSpPr>
-        <p:spPr>
-          <a:xfrm>
-            <a:off x="1517904" y="5724144"/>
-            <a:ext cx="82296" cy="82296"/>
-          </a:xfrm>
-          <a:prstGeom prst="ellipse">
-            <a:avLst/>
-          </a:prstGeom>
-          <a:solidFill>
-            <a:srgbClr val="C79A52"/>
-          </a:solidFill>
-          <a:ln>
-            <a:noFill/>
-          </a:ln>
-          <a:effectLst/>
-        </p:spPr>
-        <p:style>
-          <a:lnRef idx="1">
-            <a:schemeClr val="accent1"/>
-          </a:lnRef>
-          <a:fillRef idx="3">
-            <a:schemeClr val="accent1"/>
-          </a:fillRef>
-          <a:effectRef idx="2">
-            <a:schemeClr val="accent1"/>
-          </a:effectRef>
-          <a:fontRef idx="minor">
-            <a:schemeClr val="lt1"/>
-          </a:fontRef>
-        </p:style>
-        <p:txBody>
-          <a:bodyPr rtlCol="0" anchor="ctr"/>
-          <a:lstStyle/>
-          <a:p>
-            <a:pPr algn="ctr"/>
-            <a:endParaRPr/>
-          </a:p>
-        </p:txBody>
-      </p:sp>
-      <p:sp>
-        <p:nvSpPr>
-          <p:cNvPr id="24" name="Oval 23"/>
-          <p:cNvSpPr/>
-          <p:nvPr/>
-        </p:nvSpPr>
-        <p:spPr>
-          <a:xfrm>
-            <a:off x="1810512" y="5724144"/>
-            <a:ext cx="82296" cy="82296"/>
-          </a:xfrm>
-          <a:prstGeom prst="ellipse">
-            <a:avLst/>
-          </a:prstGeom>
-          <a:solidFill>
-            <a:srgbClr val="C79A52"/>
-          </a:solidFill>
-          <a:ln>
-            <a:noFill/>
-          </a:ln>
-          <a:effectLst/>
-        </p:spPr>
-        <p:style>
-          <a:lnRef idx="1">
-            <a:schemeClr val="accent1"/>
-          </a:lnRef>
-          <a:fillRef idx="3">
-            <a:schemeClr val="accent1"/>
-          </a:fillRef>
-          <a:effectRef idx="2">
-            <a:schemeClr val="accent1"/>
-          </a:effectRef>
-          <a:fontRef idx="minor">
-            <a:schemeClr val="lt1"/>
-          </a:fontRef>
-        </p:style>
-        <p:txBody>
-          <a:bodyPr rtlCol="0" anchor="ctr"/>
-          <a:lstStyle/>
-          <a:p>
-            <a:pPr algn="ctr"/>
-            <a:endParaRPr/>
-          </a:p>
-        </p:txBody>
-      </p:sp>
-      <p:sp>
-        <p:nvSpPr>
-          <p:cNvPr id="25" name="Oval 24"/>
-          <p:cNvSpPr/>
-          <p:nvPr/>
-        </p:nvSpPr>
-        <p:spPr>
-          <a:xfrm>
-            <a:off x="2103120" y="5724144"/>
-            <a:ext cx="82296" cy="82296"/>
-          </a:xfrm>
-          <a:prstGeom prst="ellipse">
-            <a:avLst/>
-          </a:prstGeom>
-          <a:solidFill>
-            <a:srgbClr val="C79A52"/>
-          </a:solidFill>
-          <a:ln>
-            <a:noFill/>
-          </a:ln>
-          <a:effectLst/>
-        </p:spPr>
-        <p:style>
-          <a:lnRef idx="1">
-            <a:schemeClr val="accent1"/>
-          </a:lnRef>
-          <a:fillRef idx="3">
-            <a:schemeClr val="accent1"/>
-          </a:fillRef>
-          <a:effectRef idx="2">
-            <a:schemeClr val="accent1"/>
-          </a:effectRef>
-          <a:fontRef idx="minor">
-            <a:schemeClr val="lt1"/>
-          </a:fontRef>
-        </p:style>
-        <p:txBody>
-          <a:bodyPr rtlCol="0" anchor="ctr"/>
-          <a:lstStyle/>
-          <a:p>
-            <a:pPr algn="ctr"/>
-            <a:endParaRPr/>
-          </a:p>
-        </p:txBody>
-      </p:sp>
-      <p:sp>
-        <p:nvSpPr>
-          <p:cNvPr id="26" name="Oval 25"/>
-          <p:cNvSpPr/>
-          <p:nvPr/>
-        </p:nvSpPr>
-        <p:spPr>
-          <a:xfrm>
-            <a:off x="640080" y="6016752"/>
-            <a:ext cx="82296" cy="82296"/>
-          </a:xfrm>
-          <a:prstGeom prst="ellipse">
-            <a:avLst/>
-          </a:prstGeom>
-          <a:solidFill>
-            <a:srgbClr val="C79A52"/>
-          </a:solidFill>
-          <a:ln>
-            <a:noFill/>
-          </a:ln>
-          <a:effectLst/>
-        </p:spPr>
-        <p:style>
-          <a:lnRef idx="1">
-            <a:schemeClr val="accent1"/>
-          </a:lnRef>
-          <a:fillRef idx="3">
-            <a:schemeClr val="accent1"/>
-          </a:fillRef>
-          <a:effectRef idx="2">
-            <a:schemeClr val="accent1"/>
-          </a:effectRef>
-          <a:fontRef idx="minor">
-            <a:schemeClr val="lt1"/>
-          </a:fontRef>
-        </p:style>
-        <p:txBody>
-          <a:bodyPr rtlCol="0" anchor="ctr"/>
-          <a:lstStyle/>
-          <a:p>
-            <a:pPr algn="ctr"/>
-            <a:endParaRPr/>
-          </a:p>
-        </p:txBody>
-      </p:sp>
-      <p:sp>
-        <p:nvSpPr>
-          <p:cNvPr id="27" name="Oval 26"/>
-          <p:cNvSpPr/>
-          <p:nvPr/>
-        </p:nvSpPr>
-        <p:spPr>
-          <a:xfrm>
-            <a:off x="932688" y="6016752"/>
-            <a:ext cx="82296" cy="82296"/>
-          </a:xfrm>
-          <a:prstGeom prst="ellipse">
-            <a:avLst/>
-          </a:prstGeom>
-          <a:solidFill>
-            <a:srgbClr val="C79A52"/>
-          </a:solidFill>
-          <a:ln>
-            <a:noFill/>
-          </a:ln>
-          <a:effectLst/>
-        </p:spPr>
-        <p:style>
-          <a:lnRef idx="1">
-            <a:schemeClr val="accent1"/>
-          </a:lnRef>
-          <a:fillRef idx="3">
-            <a:schemeClr val="accent1"/>
-          </a:fillRef>
-          <a:effectRef idx="2">
-            <a:schemeClr val="accent1"/>
-          </a:effectRef>
-          <a:fontRef idx="minor">
-            <a:schemeClr val="lt1"/>
-          </a:fontRef>
-        </p:style>
-        <p:txBody>
-          <a:bodyPr rtlCol="0" anchor="ctr"/>
-          <a:lstStyle/>
-          <a:p>
-            <a:pPr algn="ctr"/>
-            <a:endParaRPr/>
-          </a:p>
-        </p:txBody>
-      </p:sp>
-      <p:sp>
-        <p:nvSpPr>
-          <p:cNvPr id="28" name="Oval 27"/>
-          <p:cNvSpPr/>
-          <p:nvPr/>
-        </p:nvSpPr>
-        <p:spPr>
-          <a:xfrm>
-            <a:off x="1225296" y="6016752"/>
-            <a:ext cx="82296" cy="82296"/>
-          </a:xfrm>
-          <a:prstGeom prst="ellipse">
-            <a:avLst/>
-          </a:prstGeom>
-          <a:solidFill>
-            <a:srgbClr val="C79A52"/>
-          </a:solidFill>
-          <a:ln>
-            <a:noFill/>
-          </a:ln>
-          <a:effectLst/>
-        </p:spPr>
-        <p:style>
-          <a:lnRef idx="1">
-            <a:schemeClr val="accent1"/>
-          </a:lnRef>
-          <a:fillRef idx="3">
-            <a:schemeClr val="accent1"/>
-          </a:fillRef>
-          <a:effectRef idx="2">
-            <a:schemeClr val="accent1"/>
-          </a:effectRef>
-          <a:fontRef idx="minor">
-            <a:schemeClr val="lt1"/>
-          </a:fontRef>
-        </p:style>
-        <p:txBody>
-          <a:bodyPr rtlCol="0" anchor="ctr"/>
-          <a:lstStyle/>
-          <a:p>
-            <a:pPr algn="ctr"/>
-            <a:endParaRPr/>
-          </a:p>
-        </p:txBody>
-      </p:sp>
-      <p:sp>
-        <p:nvSpPr>
-          <p:cNvPr id="29" name="Oval 28"/>
-          <p:cNvSpPr/>
-          <p:nvPr/>
-        </p:nvSpPr>
-        <p:spPr>
-          <a:xfrm>
-            <a:off x="1517904" y="6016752"/>
-            <a:ext cx="82296" cy="82296"/>
-          </a:xfrm>
-          <a:prstGeom prst="ellipse">
-            <a:avLst/>
-          </a:prstGeom>
-          <a:solidFill>
-            <a:srgbClr val="C79A52"/>
-          </a:solidFill>
-          <a:ln>
-            <a:noFill/>
-          </a:ln>
-          <a:effectLst/>
-        </p:spPr>
-        <p:style>
-          <a:lnRef idx="1">
-            <a:schemeClr val="accent1"/>
-          </a:lnRef>
-          <a:fillRef idx="3">
-            <a:schemeClr val="accent1"/>
-          </a:fillRef>
-          <a:effectRef idx="2">
-            <a:schemeClr val="accent1"/>
-          </a:effectRef>
-          <a:fontRef idx="minor">
-            <a:schemeClr val="lt1"/>
-          </a:fontRef>
-        </p:style>
-        <p:txBody>
-          <a:bodyPr rtlCol="0" anchor="ctr"/>
-          <a:lstStyle/>
-          <a:p>
-            <a:pPr algn="ctr"/>
-            <a:endParaRPr/>
-          </a:p>
-        </p:txBody>
-      </p:sp>
-      <p:sp>
-        <p:nvSpPr>
-          <p:cNvPr id="30" name="Oval 29"/>
-          <p:cNvSpPr/>
-          <p:nvPr/>
-        </p:nvSpPr>
-        <p:spPr>
-          <a:xfrm>
-            <a:off x="1810512" y="6016752"/>
-            <a:ext cx="82296" cy="82296"/>
-          </a:xfrm>
-          <a:prstGeom prst="ellipse">
-            <a:avLst/>
-          </a:prstGeom>
-          <a:solidFill>
-            <a:srgbClr val="C79A52"/>
-          </a:solidFill>
-          <a:ln>
-            <a:noFill/>
-          </a:ln>
-          <a:effectLst/>
-        </p:spPr>
-        <p:style>
-          <a:lnRef idx="1">
-            <a:schemeClr val="accent1"/>
-          </a:lnRef>
-          <a:fillRef idx="3">
-            <a:schemeClr val="accent1"/>
-          </a:fillRef>
-          <a:effectRef idx="2">
-            <a:schemeClr val="accent1"/>
-          </a:effectRef>
-          <a:fontRef idx="minor">
-            <a:schemeClr val="lt1"/>
-          </a:fontRef>
-        </p:style>
-        <p:txBody>
-          <a:bodyPr rtlCol="0" anchor="ctr"/>
-          <a:lstStyle/>
-          <a:p>
-            <a:pPr algn="ctr"/>
-            <a:endParaRPr/>
-          </a:p>
-        </p:txBody>
-      </p:sp>
-      <p:sp>
-        <p:nvSpPr>
-          <p:cNvPr id="31" name="Oval 30"/>
-          <p:cNvSpPr/>
-          <p:nvPr/>
-        </p:nvSpPr>
-        <p:spPr>
-          <a:xfrm>
-            <a:off x="2103120" y="6016752"/>
-            <a:ext cx="82296" cy="82296"/>
-          </a:xfrm>
-          <a:prstGeom prst="ellipse">
-            <a:avLst/>
-          </a:prstGeom>
-          <a:solidFill>
-            <a:srgbClr val="C79A52"/>
-          </a:solidFill>
-          <a:ln>
-            <a:noFill/>
-          </a:ln>
-          <a:effectLst/>
-        </p:spPr>
-        <p:style>
-          <a:lnRef idx="1">
-            <a:schemeClr val="accent1"/>
-          </a:lnRef>
-          <a:fillRef idx="3">
-            <a:schemeClr val="accent1"/>
-          </a:fillRef>
-          <a:effectRef idx="2">
-            <a:schemeClr val="accent1"/>
-          </a:effectRef>
-          <a:fontRef idx="minor">
-            <a:schemeClr val="lt1"/>
-          </a:fontRef>
-        </p:style>
-        <p:txBody>
-          <a:bodyPr rtlCol="0" anchor="ctr"/>
-          <a:lstStyle/>
-          <a:p>
-            <a:pPr algn="ctr"/>
-            <a:endParaRPr/>
-          </a:p>
-        </p:txBody>
-      </p:sp>
-      <p:sp>
-        <p:nvSpPr>
-          <p:cNvPr id="32" name="TextBox 31"/>
-          <p:cNvSpPr txBox="1"/>
-          <p:nvPr/>
-        </p:nvSpPr>
-        <p:spPr>
-          <a:xfrm>
-            <a:off x="868680" y="882396"/>
+          <p:cNvPr id="20" name="TextBox 19"/>
+          <p:cNvSpPr txBox="1"/>
+          <p:nvPr/>
+        </p:nvSpPr>
+        <p:spPr>
+          <a:xfrm>
+            <a:off x="868680" y="809802"/>
             <a:ext cx="7589520" cy="1280160"/>
           </a:xfrm>
           <a:prstGeom prst="rect">
@@ -20357,7 +19880,7 @@
                 <a:solidFill>
                   <a:srgbClr val="EFECE3"/>
                 </a:solidFill>
-                <a:latin typeface="Calibri"/>
+                <a:latin typeface="Helvetica Neue"/>
               </a:rPr>
               <a:t>Merci.</a:t>
             </a:r>
@@ -20366,13 +19889,13 @@
       </p:sp>
       <p:sp>
         <p:nvSpPr>
-          <p:cNvPr id="33" name="TextBox 32"/>
-          <p:cNvSpPr txBox="1"/>
-          <p:nvPr/>
-        </p:nvSpPr>
-        <p:spPr>
-          <a:xfrm>
-            <a:off x="868680" y="1732788"/>
+          <p:cNvPr id="21" name="TextBox 20"/>
+          <p:cNvSpPr txBox="1"/>
+          <p:nvPr/>
+        </p:nvSpPr>
+        <p:spPr>
+          <a:xfrm>
+            <a:off x="868680" y="1925370"/>
             <a:ext cx="7589520" cy="640080"/>
           </a:xfrm>
           <a:prstGeom prst="rect">
@@ -20399,7 +19922,7 @@
                 <a:solidFill>
                   <a:srgbClr val="C79A52"/>
                 </a:solidFill>
-                <a:latin typeface="Calibri"/>
+                <a:latin typeface="Helvetica Neue"/>
               </a:rPr>
               <a:t>Questions ?</a:t>
             </a:r>
@@ -20408,14 +19931,14 @@
       </p:sp>
       <p:sp>
         <p:nvSpPr>
-          <p:cNvPr id="34" name="TextBox 33"/>
-          <p:cNvSpPr txBox="1"/>
-          <p:nvPr/>
-        </p:nvSpPr>
-        <p:spPr>
-          <a:xfrm>
-            <a:off x="1098395" y="2936557"/>
-            <a:ext cx="7359805" cy="984885"/>
+          <p:cNvPr id="22" name="TextBox 21"/>
+          <p:cNvSpPr txBox="1"/>
+          <p:nvPr/>
+        </p:nvSpPr>
+        <p:spPr>
+          <a:xfrm>
+            <a:off x="356839" y="2837205"/>
+            <a:ext cx="8090210" cy="1231106"/>
           </a:xfrm>
           <a:prstGeom prst="rect">
             <a:avLst/>
@@ -20437,82 +19960,98 @@
               </a:spcAft>
             </a:pPr>
             <a:r>
-              <a:rPr sz="2000" b="0" i="0" dirty="0">
+              <a:rPr lang="fr-FR" sz="2000" b="0" i="0" dirty="0">
                 <a:solidFill>
                   <a:srgbClr val="8B93A1"/>
                 </a:solidFill>
-                <a:latin typeface="Calibri"/>
+                <a:latin typeface="Helvetica Neue"/>
               </a:rPr>
               <a:t>https://</a:t>
             </a:r>
             <a:r>
-              <a:rPr sz="2000" b="0" i="0" dirty="0" err="1">
+              <a:rPr lang="fr-FR" sz="2000" b="0" i="0" dirty="0" err="1">
                 <a:solidFill>
                   <a:srgbClr val="8B93A1"/>
                 </a:solidFill>
-                <a:latin typeface="Calibri"/>
+                <a:latin typeface="Helvetica Neue"/>
               </a:rPr>
               <a:t>github.com</a:t>
             </a:r>
             <a:r>
-              <a:rPr sz="2000" b="0" i="0" dirty="0">
+              <a:rPr lang="fr-FR" sz="2000" b="0" i="0" dirty="0">
                 <a:solidFill>
                   <a:srgbClr val="8B93A1"/>
                 </a:solidFill>
-                <a:latin typeface="Calibri"/>
+                <a:latin typeface="Helvetica Neue"/>
               </a:rPr>
               <a:t>/</a:t>
             </a:r>
             <a:r>
-              <a:rPr sz="2000" b="0" i="0" dirty="0" err="1">
+              <a:rPr lang="fr-FR" sz="2000" b="0" i="0" dirty="0" err="1">
                 <a:solidFill>
                   <a:srgbClr val="8B93A1"/>
                 </a:solidFill>
-                <a:latin typeface="Calibri"/>
+                <a:latin typeface="Helvetica Neue"/>
               </a:rPr>
               <a:t>sidevconcept</a:t>
             </a:r>
             <a:r>
-              <a:rPr sz="2000" b="0" i="0" dirty="0">
+              <a:rPr lang="fr-FR" sz="2000" b="0" i="0" dirty="0">
                 <a:solidFill>
                   <a:srgbClr val="8B93A1"/>
                 </a:solidFill>
-                <a:latin typeface="Calibri"/>
+                <a:latin typeface="Helvetica Neue"/>
               </a:rPr>
               <a:t>/couverture-</a:t>
             </a:r>
             <a:r>
-              <a:rPr sz="2000" b="0" i="0" dirty="0" err="1">
+              <a:rPr lang="fr-FR" sz="2000" b="0" i="0" dirty="0" err="1">
                 <a:solidFill>
                   <a:srgbClr val="8B93A1"/>
                 </a:solidFill>
-                <a:latin typeface="Calibri"/>
+                <a:latin typeface="Helvetica Neue"/>
               </a:rPr>
               <a:t>junit</a:t>
             </a:r>
             <a:r>
-              <a:rPr sz="2000" b="0" i="0" dirty="0">
+              <a:rPr lang="fr-FR" sz="2000" b="0" i="0" dirty="0">
                 <a:solidFill>
                   <a:srgbClr val="8B93A1"/>
                 </a:solidFill>
-                <a:latin typeface="Calibri"/>
-              </a:rPr>
-              <a:t>-cucumber-</a:t>
-            </a:r>
-            <a:r>
-              <a:rPr sz="2000" b="0" i="0" dirty="0" err="1">
+                <a:latin typeface="Helvetica Neue"/>
+              </a:rPr>
+              <a:t>-</a:t>
+            </a:r>
+            <a:r>
+              <a:rPr lang="fr-FR" sz="2000" b="0" i="0" dirty="0" err="1">
                 <a:solidFill>
                   <a:srgbClr val="8B93A1"/>
                 </a:solidFill>
-                <a:latin typeface="Calibri"/>
-              </a:rPr>
-              <a:t>jacoco</a:t>
-            </a:r>
+                <a:latin typeface="Helvetica Neue"/>
+              </a:rPr>
+              <a:t>cucumber-jacoco</a:t>
+            </a:r>
+            <a:endParaRPr lang="fr-FR" sz="2000" dirty="0">
+              <a:solidFill>
+                <a:srgbClr val="8B93A1"/>
+              </a:solidFill>
+              <a:latin typeface="Helvetica Neue"/>
+            </a:endParaRPr>
+          </a:p>
+          <a:p>
+            <a:pPr algn="l">
+              <a:lnSpc>
+                <a:spcPct val="100000"/>
+              </a:lnSpc>
+              <a:spcAft>
+                <a:spcPts val="0"/>
+              </a:spcAft>
+            </a:pPr>
             <a:endParaRPr lang="fr-FR" sz="2000" b="0" i="0" dirty="0">
               <a:solidFill>
                 <a:srgbClr val="8B93A1"/>
               </a:solidFill>
-              <a:latin typeface="Calibri"/>
+              <a:latin typeface="Helvetica Neue"/>
             </a:endParaRPr>
           </a:p>
           <a:p>
@@ -20524,11 +20063,11 @@
                 <a:spcPts val="0"/>
               </a:spcAft>
             </a:pPr>
-            <a:endParaRPr lang="fr-FR" sz="2400" dirty="0">
+            <a:endParaRPr lang="fr-FR" sz="2000" dirty="0">
               <a:solidFill>
                 <a:srgbClr val="8B93A1"/>
               </a:solidFill>
-              <a:latin typeface="Calibri"/>
+              <a:latin typeface="Helvetica Neue"/>
             </a:endParaRPr>
           </a:p>
           <a:p>
@@ -20541,20 +20080,26 @@
               </a:spcAft>
             </a:pPr>
             <a:r>
-              <a:rPr sz="2000" b="0" i="0" dirty="0">
+              <a:rPr lang="fr-FR" sz="2000" b="0" i="0" dirty="0">
                 <a:solidFill>
                   <a:srgbClr val="8B93A1"/>
                 </a:solidFill>
-                <a:latin typeface="Calibri"/>
+                <a:latin typeface="Helvetica Neue"/>
               </a:rPr>
               <a:t>sidev.concept06@gmail.com</a:t>
             </a:r>
-          </a:p>
-        </p:txBody>
-      </p:sp>
-      <p:sp>
-        <p:nvSpPr>
-          <p:cNvPr id="35" name="TextBox 34"/>
+            <a:endParaRPr sz="2000" b="0" i="0" dirty="0">
+              <a:solidFill>
+                <a:srgbClr val="8B93A1"/>
+              </a:solidFill>
+              <a:latin typeface="Helvetica Neue"/>
+            </a:endParaRPr>
+          </a:p>
+        </p:txBody>
+      </p:sp>
+      <p:sp>
+        <p:nvSpPr>
+          <p:cNvPr id="23" name="TextBox 22"/>
           <p:cNvSpPr txBox="1"/>
           <p:nvPr/>
         </p:nvSpPr>
@@ -20583,29 +20128,20 @@
               </a:spcAft>
             </a:pPr>
             <a:r>
-              <a:rPr sz="1300" b="1" i="0" dirty="0" err="1">
+              <a:rPr sz="1300" b="1" i="0">
                 <a:solidFill>
                   <a:srgbClr val="C79A52"/>
                 </a:solidFill>
-                <a:latin typeface="Calibri"/>
-              </a:rPr>
-              <a:t>Scanne</a:t>
-            </a:r>
-            <a:r>
-              <a:rPr sz="1300" b="1" i="0" dirty="0">
-                <a:solidFill>
-                  <a:srgbClr val="C79A52"/>
-                </a:solidFill>
-                <a:latin typeface="Calibri"/>
-              </a:rPr>
-              <a:t>-moi</a:t>
-            </a:r>
-          </a:p>
-        </p:txBody>
-      </p:sp>
-      <p:sp>
-        <p:nvSpPr>
-          <p:cNvPr id="36" name="Rectangle 35"/>
+                <a:latin typeface="Helvetica Neue"/>
+              </a:rPr>
+              <a:t>Scanne-moi</a:t>
+            </a:r>
+          </a:p>
+        </p:txBody>
+      </p:sp>
+      <p:sp>
+        <p:nvSpPr>
+          <p:cNvPr id="24" name="Rectangle 23"/>
           <p:cNvSpPr/>
           <p:nvPr/>
         </p:nvSpPr>
@@ -20650,7 +20186,7 @@
       </p:sp>
       <p:pic>
         <p:nvPicPr>
-          <p:cNvPr id="37" name="Picture 36" descr="qr-github.png"/>
+          <p:cNvPr id="25" name="Picture 24" descr="qr-github.png"/>
           <p:cNvPicPr>
             <a:picLocks noChangeAspect="1"/>
           </p:cNvPicPr>
@@ -20740,7 +20276,7 @@
                 <a:solidFill>
                   <a:srgbClr val="C79A52"/>
                 </a:solidFill>
-                <a:latin typeface="Calibri"/>
+                <a:latin typeface="Helvetica Neue"/>
               </a:rPr>
               <a:t>POUR COMMENCER</a:t>
             </a:r>
@@ -20782,7 +20318,7 @@
                 <a:solidFill>
                   <a:srgbClr val="EFECE3"/>
                 </a:solidFill>
-                <a:latin typeface="Calibri"/>
+                <a:latin typeface="Helvetica Neue"/>
               </a:rPr>
               <a:t>Levez la main si...</a:t>
             </a:r>
@@ -20869,7 +20405,7 @@
                 <a:solidFill>
                   <a:srgbClr val="EFECE3"/>
                 </a:solidFill>
-                <a:latin typeface="Calibri"/>
+                <a:latin typeface="Helvetica Neue"/>
               </a:rPr>
               <a:t>...vous avez déjà écrit un test juste pour faire plaisir à la CI.</a:t>
             </a:r>
@@ -20956,7 +20492,7 @@
                 <a:solidFill>
                   <a:srgbClr val="EFECE3"/>
                 </a:solidFill>
-                <a:latin typeface="Calibri"/>
+                <a:latin typeface="Helvetica Neue"/>
               </a:rPr>
               <a:t>...vous avez déjà vu 100 % de couverture sur un fichier plein de bugs.</a:t>
             </a:r>
@@ -21043,7 +20579,7 @@
                 <a:solidFill>
                   <a:srgbClr val="EFECE3"/>
                 </a:solidFill>
-                <a:latin typeface="Calibri"/>
+                <a:latin typeface="Helvetica Neue"/>
               </a:rPr>
               <a:t>...vous ne savez pas, là, maintenant, ce que couvrent VOS tests.</a:t>
             </a:r>
@@ -21085,7 +20621,7 @@
                 <a:solidFill>
                   <a:srgbClr val="C79A52"/>
                 </a:solidFill>
-                <a:latin typeface="Calibri"/>
+                <a:latin typeface="Helvetica Neue"/>
               </a:rPr>
               <a:t>Pas de jugement. Enfin... un peu.</a:t>
             </a:r>
@@ -21125,9 +20661,9 @@
             <a:r>
               <a:rPr sz="1000" b="0" i="0">
                 <a:solidFill>
-                  <a:srgbClr val="6E7A8E"/>
-                </a:solidFill>
-                <a:latin typeface="Calibri"/>
+                  <a:srgbClr val="8B93A1"/>
+                </a:solidFill>
+                <a:latin typeface="Helvetica Neue"/>
               </a:rPr>
               <a:t>03 / 28</a:t>
             </a:r>
@@ -21167,9 +20703,9 @@
             <a:r>
               <a:rPr sz="800" b="0" i="0">
                 <a:solidFill>
-                  <a:srgbClr val="6E7A8E"/>
-                </a:solidFill>
-                <a:latin typeface="Calibri"/>
+                  <a:srgbClr val="8B93A1"/>
+                </a:solidFill>
+                <a:latin typeface="Helvetica Neue"/>
               </a:rPr>
               <a:t>COUVERTURE DE CODE — QUARKUS · JUNIT · CUCUMBER · JACOCO</a:t>
             </a:r>
@@ -21287,9 +20823,9 @@
             <a:r>
               <a:rPr sz="1300" b="1" i="0">
                 <a:solidFill>
-                  <a:srgbClr val="C79A52"/>
-                </a:solidFill>
-                <a:latin typeface="Calibri"/>
+                  <a:srgbClr val="8A6530"/>
+                </a:solidFill>
+                <a:latin typeface="Helvetica Neue"/>
               </a:rPr>
               <a:t>AU PROGRAMME</a:t>
             </a:r>
@@ -21331,7 +20867,7 @@
                 <a:solidFill>
                   <a:srgbClr val="162844"/>
                 </a:solidFill>
-                <a:latin typeface="Calibri"/>
+                <a:latin typeface="Helvetica Neue"/>
               </a:rPr>
               <a:t>Une heure, quatre outils, zéro slide inutile (promis)</a:t>
             </a:r>
@@ -21371,9 +20907,9 @@
             <a:r>
               <a:rPr sz="2000" b="1" i="0">
                 <a:solidFill>
-                  <a:srgbClr val="C79A52"/>
-                </a:solidFill>
-                <a:latin typeface="Calibri"/>
+                  <a:srgbClr val="8A6530"/>
+                </a:solidFill>
+                <a:latin typeface="Helvetica Neue"/>
               </a:rPr>
               <a:t>1</a:t>
             </a:r>
@@ -21415,7 +20951,7 @@
                 <a:solidFill>
                   <a:srgbClr val="162844"/>
                 </a:solidFill>
-                <a:latin typeface="Calibri"/>
+                <a:latin typeface="Helvetica Neue"/>
               </a:rPr>
               <a:t>Le problème</a:t>
             </a:r>
@@ -21457,7 +20993,7 @@
                 <a:solidFill>
                   <a:srgbClr val="333A47"/>
                 </a:solidFill>
-                <a:latin typeface="Calibri"/>
+                <a:latin typeface="Helvetica Neue"/>
               </a:rPr>
               <a:t>Pourquoi une suite de tests verte ne suffit pas</a:t>
             </a:r>
@@ -21497,9 +21033,9 @@
             <a:r>
               <a:rPr sz="1300" b="0" i="0">
                 <a:solidFill>
-                  <a:srgbClr val="8B93A1"/>
-                </a:solidFill>
-                <a:latin typeface="Calibri"/>
+                  <a:srgbClr val="5E6674"/>
+                </a:solidFill>
+                <a:latin typeface="Helvetica Neue"/>
               </a:rPr>
               <a:t>5 min</a:t>
             </a:r>
@@ -21539,9 +21075,9 @@
             <a:r>
               <a:rPr sz="2000" b="1" i="0">
                 <a:solidFill>
-                  <a:srgbClr val="C79A52"/>
-                </a:solidFill>
-                <a:latin typeface="Calibri"/>
+                  <a:srgbClr val="8A6530"/>
+                </a:solidFill>
+                <a:latin typeface="Helvetica Neue"/>
               </a:rPr>
               <a:t>2</a:t>
             </a:r>
@@ -21583,7 +21119,7 @@
                 <a:solidFill>
                   <a:srgbClr val="162844"/>
                 </a:solidFill>
-                <a:latin typeface="Calibri"/>
+                <a:latin typeface="Helvetica Neue"/>
               </a:rPr>
               <a:t>La stack</a:t>
             </a:r>
@@ -21625,7 +21161,7 @@
                 <a:solidFill>
                   <a:srgbClr val="333A47"/>
                 </a:solidFill>
-                <a:latin typeface="Calibri"/>
+                <a:latin typeface="Helvetica Neue"/>
               </a:rPr>
               <a:t>JUnit, Cucumber, Quarkus, Jacoco — qui fait quoi</a:t>
             </a:r>
@@ -21665,9 +21201,9 @@
             <a:r>
               <a:rPr sz="1300" b="0" i="0">
                 <a:solidFill>
-                  <a:srgbClr val="8B93A1"/>
-                </a:solidFill>
-                <a:latin typeface="Calibri"/>
+                  <a:srgbClr val="5E6674"/>
+                </a:solidFill>
+                <a:latin typeface="Helvetica Neue"/>
               </a:rPr>
               <a:t>10 min</a:t>
             </a:r>
@@ -21707,9 +21243,9 @@
             <a:r>
               <a:rPr sz="2000" b="1" i="0">
                 <a:solidFill>
-                  <a:srgbClr val="C79A52"/>
-                </a:solidFill>
-                <a:latin typeface="Calibri"/>
+                  <a:srgbClr val="8A6530"/>
+                </a:solidFill>
+                <a:latin typeface="Helvetica Neue"/>
               </a:rPr>
               <a:t>3</a:t>
             </a:r>
@@ -21751,7 +21287,7 @@
                 <a:solidFill>
                   <a:srgbClr val="162844"/>
                 </a:solidFill>
-                <a:latin typeface="Calibri"/>
+                <a:latin typeface="Helvetica Neue"/>
               </a:rPr>
               <a:t>Démo : le projet</a:t>
             </a:r>
@@ -21793,7 +21329,7 @@
                 <a:solidFill>
                   <a:srgbClr val="333A47"/>
                 </a:solidFill>
-                <a:latin typeface="Calibri"/>
+                <a:latin typeface="Helvetica Neue"/>
               </a:rPr>
               <a:t>Un agenda malin, ses tests, ses angles morts</a:t>
             </a:r>
@@ -21833,9 +21369,9 @@
             <a:r>
               <a:rPr sz="1300" b="0" i="0">
                 <a:solidFill>
-                  <a:srgbClr val="8B93A1"/>
-                </a:solidFill>
-                <a:latin typeface="Calibri"/>
+                  <a:srgbClr val="5E6674"/>
+                </a:solidFill>
+                <a:latin typeface="Helvetica Neue"/>
               </a:rPr>
               <a:t>10 min</a:t>
             </a:r>
@@ -21875,9 +21411,9 @@
             <a:r>
               <a:rPr sz="2000" b="1" i="0">
                 <a:solidFill>
-                  <a:srgbClr val="C79A52"/>
-                </a:solidFill>
-                <a:latin typeface="Calibri"/>
+                  <a:srgbClr val="8A6530"/>
+                </a:solidFill>
+                <a:latin typeface="Helvetica Neue"/>
               </a:rPr>
               <a:t>4</a:t>
             </a:r>
@@ -21919,7 +21455,7 @@
                 <a:solidFill>
                   <a:srgbClr val="162844"/>
                 </a:solidFill>
-                <a:latin typeface="Calibri"/>
+                <a:latin typeface="Helvetica Neue"/>
               </a:rPr>
               <a:t>Le rapport qui ne ment pas</a:t>
             </a:r>
@@ -21961,7 +21497,7 @@
                 <a:solidFill>
                   <a:srgbClr val="333A47"/>
                 </a:solidFill>
-                <a:latin typeface="Calibri"/>
+                <a:latin typeface="Helvetica Neue"/>
               </a:rPr>
               <a:t>Jacoco en direct, JUnit contre Cucumber</a:t>
             </a:r>
@@ -22001,9 +21537,9 @@
             <a:r>
               <a:rPr sz="1300" b="0" i="0">
                 <a:solidFill>
-                  <a:srgbClr val="8B93A1"/>
-                </a:solidFill>
-                <a:latin typeface="Calibri"/>
+                  <a:srgbClr val="5E6674"/>
+                </a:solidFill>
+                <a:latin typeface="Helvetica Neue"/>
               </a:rPr>
               <a:t>15 min</a:t>
             </a:r>
@@ -22043,9 +21579,9 @@
             <a:r>
               <a:rPr sz="2000" b="1" i="0">
                 <a:solidFill>
-                  <a:srgbClr val="C79A52"/>
-                </a:solidFill>
-                <a:latin typeface="Calibri"/>
+                  <a:srgbClr val="8A6530"/>
+                </a:solidFill>
+                <a:latin typeface="Helvetica Neue"/>
               </a:rPr>
               <a:t>5</a:t>
             </a:r>
@@ -22087,7 +21623,7 @@
                 <a:solidFill>
                   <a:srgbClr val="162844"/>
                 </a:solidFill>
-                <a:latin typeface="Calibri"/>
+                <a:latin typeface="Helvetica Neue"/>
               </a:rPr>
               <a:t>Bonus : SonarQube</a:t>
             </a:r>
@@ -22129,7 +21665,7 @@
                 <a:solidFill>
                   <a:srgbClr val="333A47"/>
                 </a:solidFill>
-                <a:latin typeface="Calibri"/>
+                <a:latin typeface="Helvetica Neue"/>
               </a:rPr>
               <a:t>Le même rapport, dans un vrai dashboard</a:t>
             </a:r>
@@ -22169,9 +21705,9 @@
             <a:r>
               <a:rPr sz="1300" b="0" i="0">
                 <a:solidFill>
-                  <a:srgbClr val="8B93A1"/>
-                </a:solidFill>
-                <a:latin typeface="Calibri"/>
+                  <a:srgbClr val="5E6674"/>
+                </a:solidFill>
+                <a:latin typeface="Helvetica Neue"/>
               </a:rPr>
               <a:t>10 min</a:t>
             </a:r>
@@ -22211,9 +21747,9 @@
             <a:r>
               <a:rPr sz="2000" b="1" i="0">
                 <a:solidFill>
-                  <a:srgbClr val="C79A52"/>
-                </a:solidFill>
-                <a:latin typeface="Calibri"/>
+                  <a:srgbClr val="8A6530"/>
+                </a:solidFill>
+                <a:latin typeface="Helvetica Neue"/>
               </a:rPr>
               <a:t>6</a:t>
             </a:r>
@@ -22255,7 +21791,7 @@
                 <a:solidFill>
                   <a:srgbClr val="162844"/>
                 </a:solidFill>
-                <a:latin typeface="Calibri"/>
+                <a:latin typeface="Helvetica Neue"/>
               </a:rPr>
               <a:t>Ce qu'on retient</a:t>
             </a:r>
@@ -22297,7 +21833,7 @@
                 <a:solidFill>
                   <a:srgbClr val="333A47"/>
                 </a:solidFill>
-                <a:latin typeface="Calibri"/>
+                <a:latin typeface="Helvetica Neue"/>
               </a:rPr>
               <a:t>Et deux ou trois pièges qu'on a vraiment eus</a:t>
             </a:r>
@@ -22337,9 +21873,9 @@
             <a:r>
               <a:rPr sz="1300" b="0" i="0">
                 <a:solidFill>
-                  <a:srgbClr val="8B93A1"/>
-                </a:solidFill>
-                <a:latin typeface="Calibri"/>
+                  <a:srgbClr val="5E6674"/>
+                </a:solidFill>
+                <a:latin typeface="Helvetica Neue"/>
               </a:rPr>
               <a:t>5 min</a:t>
             </a:r>
@@ -22379,9 +21915,9 @@
             <a:r>
               <a:rPr sz="1000" b="0" i="0">
                 <a:solidFill>
-                  <a:srgbClr val="8B93A1"/>
-                </a:solidFill>
-                <a:latin typeface="Calibri"/>
+                  <a:srgbClr val="5E6674"/>
+                </a:solidFill>
+                <a:latin typeface="Helvetica Neue"/>
               </a:rPr>
               <a:t>04 / 28</a:t>
             </a:r>
@@ -22421,9 +21957,9 @@
             <a:r>
               <a:rPr sz="800" b="0" i="0">
                 <a:solidFill>
-                  <a:srgbClr val="8B93A1"/>
-                </a:solidFill>
-                <a:latin typeface="Calibri"/>
+                  <a:srgbClr val="5E6674"/>
+                </a:solidFill>
+                <a:latin typeface="Helvetica Neue"/>
               </a:rPr>
               <a:t>COUVERTURE DE CODE — QUARKUS · JUNIT · CUCUMBER · JACOCO</a:t>
             </a:r>
@@ -22541,9 +22077,9 @@
             <a:r>
               <a:rPr sz="1300" b="1" i="0">
                 <a:solidFill>
-                  <a:srgbClr val="C79A52"/>
-                </a:solidFill>
-                <a:latin typeface="Calibri"/>
+                  <a:srgbClr val="8A6530"/>
+                </a:solidFill>
+                <a:latin typeface="Helvetica Neue"/>
               </a:rPr>
               <a:t>LE CONSTAT</a:t>
             </a:r>
@@ -22585,7 +22121,7 @@
                 <a:solidFill>
                   <a:srgbClr val="162844"/>
                 </a:solidFill>
-                <a:latin typeface="Calibri"/>
+                <a:latin typeface="Helvetica Neue"/>
               </a:rPr>
               <a:t>On a des tests. On n'a pas de visibilité.</a:t>
             </a:r>
@@ -22715,9 +22251,9 @@
             <a:r>
               <a:rPr sz="3000" b="1" i="0">
                 <a:solidFill>
-                  <a:srgbClr val="5C8C86"/>
-                </a:solidFill>
-                <a:latin typeface="Calibri"/>
+                  <a:srgbClr val="355C57"/>
+                </a:solidFill>
+                <a:latin typeface="Helvetica Neue"/>
               </a:rPr>
               <a:t>01</a:t>
             </a:r>
@@ -22759,7 +22295,7 @@
                 <a:solidFill>
                   <a:srgbClr val="162844"/>
                 </a:solidFill>
-                <a:latin typeface="Calibri"/>
+                <a:latin typeface="Helvetica Neue"/>
               </a:rPr>
               <a:t>On écrit des tests</a:t>
             </a:r>
@@ -22801,7 +22337,7 @@
                 <a:solidFill>
                   <a:srgbClr val="333A47"/>
                 </a:solidFill>
-                <a:latin typeface="Calibri"/>
+                <a:latin typeface="Helvetica Neue"/>
               </a:rPr>
               <a:t>JUnit, Cucumber : les suites tournent au vert à chaque build.</a:t>
             </a:r>
@@ -22931,9 +22467,9 @@
             <a:r>
               <a:rPr sz="3000" b="1" i="0">
                 <a:solidFill>
-                  <a:srgbClr val="C79A52"/>
-                </a:solidFill>
-                <a:latin typeface="Calibri"/>
+                  <a:srgbClr val="8A6530"/>
+                </a:solidFill>
+                <a:latin typeface="Helvetica Neue"/>
               </a:rPr>
               <a:t>02</a:t>
             </a:r>
@@ -22975,7 +22511,7 @@
                 <a:solidFill>
                   <a:srgbClr val="162844"/>
                 </a:solidFill>
-                <a:latin typeface="Calibri"/>
+                <a:latin typeface="Helvetica Neue"/>
               </a:rPr>
               <a:t>On ne sait pas ce qu'ils couvrent</a:t>
             </a:r>
@@ -23017,7 +22553,7 @@
                 <a:solidFill>
                   <a:srgbClr val="333A47"/>
                 </a:solidFill>
-                <a:latin typeface="Calibri"/>
+                <a:latin typeface="Helvetica Neue"/>
               </a:rPr>
               <a:t>Quelles classes ? Quelles branches ? Personne ne regarde vraiment.</a:t>
             </a:r>
@@ -23147,9 +22683,9 @@
             <a:r>
               <a:rPr sz="3000" b="1" i="0">
                 <a:solidFill>
-                  <a:srgbClr val="BF6F5D"/>
-                </a:solidFill>
-                <a:latin typeface="Calibri"/>
+                  <a:srgbClr val="8F4536"/>
+                </a:solidFill>
+                <a:latin typeface="Helvetica Neue"/>
               </a:rPr>
               <a:t>03</a:t>
             </a:r>
@@ -23191,7 +22727,7 @@
                 <a:solidFill>
                   <a:srgbClr val="162844"/>
                 </a:solidFill>
-                <a:latin typeface="Calibri"/>
+                <a:latin typeface="Helvetica Neue"/>
               </a:rPr>
               <a:t>Les angles morts restent invisibles</a:t>
             </a:r>
@@ -23233,7 +22769,7 @@
                 <a:solidFill>
                   <a:srgbClr val="333A47"/>
                 </a:solidFill>
-                <a:latin typeface="Calibri"/>
+                <a:latin typeface="Helvetica Neue"/>
               </a:rPr>
               <a:t>Jusqu'au bug en prod, dans le code qu'aucun test n'a jamais exécuté.</a:t>
             </a:r>
@@ -23273,9 +22809,9 @@
             <a:r>
               <a:rPr sz="1000" b="0" i="0">
                 <a:solidFill>
-                  <a:srgbClr val="8B93A1"/>
-                </a:solidFill>
-                <a:latin typeface="Calibri"/>
+                  <a:srgbClr val="5E6674"/>
+                </a:solidFill>
+                <a:latin typeface="Helvetica Neue"/>
               </a:rPr>
               <a:t>05 / 28</a:t>
             </a:r>
@@ -23315,9 +22851,9 @@
             <a:r>
               <a:rPr sz="800" b="0" i="0">
                 <a:solidFill>
-                  <a:srgbClr val="8B93A1"/>
-                </a:solidFill>
-                <a:latin typeface="Calibri"/>
+                  <a:srgbClr val="5E6674"/>
+                </a:solidFill>
+                <a:latin typeface="Helvetica Neue"/>
               </a:rPr>
               <a:t>COUVERTURE DE CODE — QUARKUS · JUNIT · CUCUMBER · JACOCO</a:t>
             </a:r>
@@ -23435,9 +22971,9 @@
             <a:r>
               <a:rPr sz="1300" b="1" i="0">
                 <a:solidFill>
-                  <a:srgbClr val="C79A52"/>
-                </a:solidFill>
-                <a:latin typeface="Calibri"/>
+                  <a:srgbClr val="8A6530"/>
+                </a:solidFill>
+                <a:latin typeface="Helvetica Neue"/>
               </a:rPr>
               <a:t>LA STACK TECHNIQUE</a:t>
             </a:r>
@@ -23479,7 +23015,7 @@
                 <a:solidFill>
                   <a:srgbClr val="162844"/>
                 </a:solidFill>
-                <a:latin typeface="Calibri"/>
+                <a:latin typeface="Helvetica Neue"/>
               </a:rPr>
               <a:t>Quatre outils, quatre questions différentes</a:t>
             </a:r>
@@ -23611,7 +23147,7 @@
                 <a:solidFill>
                   <a:srgbClr val="162844"/>
                 </a:solidFill>
-                <a:latin typeface="Calibri"/>
+                <a:latin typeface="Helvetica Neue"/>
               </a:rPr>
               <a:t>JUnit 5</a:t>
             </a:r>
@@ -23653,7 +23189,7 @@
                 <a:solidFill>
                   <a:srgbClr val="333A47"/>
                 </a:solidFill>
-                <a:latin typeface="Calibri"/>
+                <a:latin typeface="Helvetica Neue"/>
               </a:rPr>
               <a:t>« La logique métier fait-elle ce qu'elle doit ? »</a:t>
             </a:r>
@@ -23672,7 +23208,7 @@
                 <a:solidFill>
                   <a:srgbClr val="333A47"/>
                 </a:solidFill>
-                <a:latin typeface="Calibri"/>
+                <a:latin typeface="Helvetica Neue"/>
               </a:rPr>
               <a:t>Tests unitaires ciblés, rapides, isolés.</a:t>
             </a:r>
@@ -23804,7 +23340,7 @@
                 <a:solidFill>
                   <a:srgbClr val="162844"/>
                 </a:solidFill>
-                <a:latin typeface="Calibri"/>
+                <a:latin typeface="Helvetica Neue"/>
               </a:rPr>
               <a:t>Cucumber</a:t>
             </a:r>
@@ -23846,7 +23382,7 @@
                 <a:solidFill>
                   <a:srgbClr val="333A47"/>
                 </a:solidFill>
-                <a:latin typeface="Calibri"/>
+                <a:latin typeface="Helvetica Neue"/>
               </a:rPr>
               <a:t>« Le comportement attendu est-il respecté ? »</a:t>
             </a:r>
@@ -23865,7 +23401,7 @@
                 <a:solidFill>
                   <a:srgbClr val="333A47"/>
                 </a:solidFill>
-                <a:latin typeface="Calibri"/>
+                <a:latin typeface="Helvetica Neue"/>
               </a:rPr>
               <a:t>Scénarios Gherkin lisibles, exécutés via l'API REST.</a:t>
             </a:r>
@@ -23997,7 +23533,7 @@
                 <a:solidFill>
                   <a:srgbClr val="162844"/>
                 </a:solidFill>
-                <a:latin typeface="Calibri"/>
+                <a:latin typeface="Helvetica Neue"/>
               </a:rPr>
               <a:t>Quarkus</a:t>
             </a:r>
@@ -24039,7 +23575,7 @@
                 <a:solidFill>
                   <a:srgbClr val="333A47"/>
                 </a:solidFill>
-                <a:latin typeface="Calibri"/>
+                <a:latin typeface="Helvetica Neue"/>
               </a:rPr>
               <a:t>« Comment tout ça tourne ensemble ? »</a:t>
             </a:r>
@@ -24058,7 +23594,7 @@
                 <a:solidFill>
                   <a:srgbClr val="333A47"/>
                 </a:solidFill>
-                <a:latin typeface="Calibri"/>
+                <a:latin typeface="Helvetica Neue"/>
               </a:rPr>
               <a:t>Le framework qui démarre l'appli et pilote les tests.</a:t>
             </a:r>
@@ -24190,7 +23726,7 @@
                 <a:solidFill>
                   <a:srgbClr val="162844"/>
                 </a:solidFill>
-                <a:latin typeface="Calibri"/>
+                <a:latin typeface="Helvetica Neue"/>
               </a:rPr>
               <a:t>Jacoco</a:t>
             </a:r>
@@ -24232,7 +23768,7 @@
                 <a:solidFill>
                   <a:srgbClr val="333A47"/>
                 </a:solidFill>
-                <a:latin typeface="Calibri"/>
+                <a:latin typeface="Helvetica Neue"/>
               </a:rPr>
               <a:t>« Qu'est-ce qui a vraiment été exécuté ? »</a:t>
             </a:r>
@@ -24251,7 +23787,7 @@
                 <a:solidFill>
                   <a:srgbClr val="333A47"/>
                 </a:solidFill>
-                <a:latin typeface="Calibri"/>
+                <a:latin typeface="Helvetica Neue"/>
               </a:rPr>
               <a:t>L'instrument de mesure de la couverture, à chaque build.</a:t>
             </a:r>
@@ -24291,9 +23827,9 @@
             <a:r>
               <a:rPr sz="1000" b="0" i="0">
                 <a:solidFill>
-                  <a:srgbClr val="8B93A1"/>
-                </a:solidFill>
-                <a:latin typeface="Calibri"/>
+                  <a:srgbClr val="5E6674"/>
+                </a:solidFill>
+                <a:latin typeface="Helvetica Neue"/>
               </a:rPr>
               <a:t>06 / 28</a:t>
             </a:r>
@@ -24333,9 +23869,9 @@
             <a:r>
               <a:rPr sz="800" b="0" i="0">
                 <a:solidFill>
-                  <a:srgbClr val="8B93A1"/>
-                </a:solidFill>
-                <a:latin typeface="Calibri"/>
+                  <a:srgbClr val="5E6674"/>
+                </a:solidFill>
+                <a:latin typeface="Helvetica Neue"/>
               </a:rPr>
               <a:t>COUVERTURE DE CODE — QUARKUS · JUNIT · CUCUMBER · JACOCO</a:t>
             </a:r>
@@ -24410,7 +23946,7 @@
                 <a:solidFill>
                   <a:srgbClr val="C79A52"/>
                 </a:solidFill>
-                <a:latin typeface="Calibri"/>
+                <a:latin typeface="Helvetica Neue"/>
               </a:rPr>
               <a:t>LE TERRAIN DE JEU</a:t>
             </a:r>
@@ -24452,7 +23988,7 @@
                 <a:solidFill>
                   <a:srgbClr val="EFECE3"/>
                 </a:solidFill>
-                <a:latin typeface="Calibri"/>
+                <a:latin typeface="Helvetica Neue"/>
               </a:rPr>
               <a:t>Un agenda malin</a:t>
             </a:r>
@@ -24494,7 +24030,7 @@
                 <a:solidFill>
                   <a:srgbClr val="C8CFDA"/>
                 </a:solidFill>
-                <a:latin typeface="Calibri"/>
+                <a:latin typeface="Helvetica Neue"/>
               </a:rPr>
               <a:t>Une API Quarkus qui planifie des événements, détecte les conflits d'horaire,</a:t>
             </a:r>
@@ -24513,7 +24049,7 @@
                 <a:solidFill>
                   <a:srgbClr val="C8CFDA"/>
                 </a:solidFill>
-                <a:latin typeface="Calibri"/>
+                <a:latin typeface="Helvetica Neue"/>
               </a:rPr>
               <a:t>génère des récurrences, et glisse une citation du jour.</a:t>
             </a:r>
@@ -24645,7 +24181,7 @@
                 <a:solidFill>
                   <a:srgbClr val="EFECE3"/>
                 </a:solidFill>
-                <a:latin typeface="Calibri"/>
+                <a:latin typeface="Helvetica Neue"/>
               </a:rPr>
               <a:t>CalendarResource</a:t>
             </a:r>
@@ -24685,9 +24221,9 @@
             <a:r>
               <a:rPr sz="1050" b="0" i="0">
                 <a:solidFill>
-                  <a:srgbClr val="8B93A1"/>
-                </a:solidFill>
-                <a:latin typeface="Calibri"/>
+                  <a:srgbClr val="9BA3B1"/>
+                </a:solidFill>
+                <a:latin typeface="Helvetica Neue"/>
               </a:rPr>
               <a:t>Couche REST — JSON in/out</a:t>
             </a:r>
@@ -24864,7 +24400,7 @@
                 <a:solidFill>
                   <a:srgbClr val="EFECE3"/>
                 </a:solidFill>
-                <a:latin typeface="Calibri"/>
+                <a:latin typeface="Helvetica Neue"/>
               </a:rPr>
               <a:t>EventService</a:t>
             </a:r>
@@ -24904,9 +24440,9 @@
             <a:r>
               <a:rPr sz="1050" b="0" i="0">
                 <a:solidFill>
-                  <a:srgbClr val="8B93A1"/>
-                </a:solidFill>
-                <a:latin typeface="Calibri"/>
+                  <a:srgbClr val="9BA3B1"/>
+                </a:solidFill>
+                <a:latin typeface="Helvetica Neue"/>
               </a:rPr>
               <a:t>création + recherche</a:t>
             </a:r>
@@ -25038,7 +24574,7 @@
                 <a:solidFill>
                   <a:srgbClr val="EFECE3"/>
                 </a:solidFill>
-                <a:latin typeface="Calibri"/>
+                <a:latin typeface="Helvetica Neue"/>
               </a:rPr>
               <a:t>RecurrenceService</a:t>
             </a:r>
@@ -25078,9 +24614,9 @@
             <a:r>
               <a:rPr sz="1050" b="0" i="0">
                 <a:solidFill>
-                  <a:srgbClr val="8B93A1"/>
-                </a:solidFill>
-                <a:latin typeface="Calibri"/>
+                  <a:srgbClr val="9BA3B1"/>
+                </a:solidFill>
+                <a:latin typeface="Helvetica Neue"/>
               </a:rPr>
               <a:t>quotidien / hebdo / mensuel</a:t>
             </a:r>
@@ -25212,7 +24748,7 @@
                 <a:solidFill>
                   <a:srgbClr val="EFECE3"/>
                 </a:solidFill>
-                <a:latin typeface="Calibri"/>
+                <a:latin typeface="Helvetica Neue"/>
               </a:rPr>
               <a:t>HolidayService</a:t>
             </a:r>
@@ -25252,9 +24788,9 @@
             <a:r>
               <a:rPr sz="1050" b="0" i="0">
                 <a:solidFill>
-                  <a:srgbClr val="8B93A1"/>
-                </a:solidFill>
-                <a:latin typeface="Calibri"/>
+                  <a:srgbClr val="9BA3B1"/>
+                </a:solidFill>
+                <a:latin typeface="Helvetica Neue"/>
               </a:rPr>
               <a:t>jours fériés</a:t>
             </a:r>
@@ -25386,7 +24922,7 @@
                 <a:solidFill>
                   <a:srgbClr val="EFECE3"/>
                 </a:solidFill>
-                <a:latin typeface="Calibri"/>
+                <a:latin typeface="Helvetica Neue"/>
               </a:rPr>
               <a:t>QuoteOfTheDayService</a:t>
             </a:r>
@@ -25426,9 +24962,9 @@
             <a:r>
               <a:rPr sz="1050" b="0" i="0">
                 <a:solidFill>
-                  <a:srgbClr val="8B93A1"/>
-                </a:solidFill>
-                <a:latin typeface="Calibri"/>
+                  <a:srgbClr val="9BA3B1"/>
+                </a:solidFill>
+                <a:latin typeface="Helvetica Neue"/>
               </a:rPr>
               <a:t>citation du jour</a:t>
             </a:r>
@@ -25605,7 +25141,7 @@
                 <a:solidFill>
                   <a:srgbClr val="EFECE3"/>
                 </a:solidFill>
-                <a:latin typeface="Calibri"/>
+                <a:latin typeface="Helvetica Neue"/>
               </a:rPr>
               <a:t>ConflictDetector</a:t>
             </a:r>
@@ -25645,9 +25181,9 @@
             <a:r>
               <a:rPr sz="1050" b="0" i="0">
                 <a:solidFill>
-                  <a:srgbClr val="8B93A1"/>
-                </a:solidFill>
-                <a:latin typeface="Calibri"/>
+                  <a:srgbClr val="9BA3B1"/>
+                </a:solidFill>
+                <a:latin typeface="Helvetica Neue"/>
               </a:rPr>
               <a:t>logique pure — aucune dépendance</a:t>
             </a:r>
@@ -25689,7 +25225,7 @@
                 <a:solidFill>
                   <a:srgbClr val="8B93A1"/>
                 </a:solidFill>
-                <a:latin typeface="Calibri"/>
+                <a:latin typeface="Helvetica Neue"/>
               </a:rPr>
               <a:t>Aucune base de données : le sujet du jour, c'est la couverture</a:t>
             </a:r>
@@ -25708,7 +25244,7 @@
                 <a:solidFill>
                   <a:srgbClr val="8B93A1"/>
                 </a:solidFill>
-                <a:latin typeface="Calibri"/>
+                <a:latin typeface="Helvetica Neue"/>
               </a:rPr>
               <a:t>de tests — pas la persistance.</a:t>
             </a:r>
@@ -25748,9 +25284,9 @@
             <a:r>
               <a:rPr sz="1000" b="0" i="0">
                 <a:solidFill>
-                  <a:srgbClr val="6E7A8E"/>
-                </a:solidFill>
-                <a:latin typeface="Calibri"/>
+                  <a:srgbClr val="8B93A1"/>
+                </a:solidFill>
+                <a:latin typeface="Helvetica Neue"/>
               </a:rPr>
               <a:t>07 / 28</a:t>
             </a:r>
@@ -25790,9 +25326,9 @@
             <a:r>
               <a:rPr sz="800" b="0" i="0">
                 <a:solidFill>
-                  <a:srgbClr val="6E7A8E"/>
-                </a:solidFill>
-                <a:latin typeface="Calibri"/>
+                  <a:srgbClr val="8B93A1"/>
+                </a:solidFill>
+                <a:latin typeface="Helvetica Neue"/>
               </a:rPr>
               <a:t>COUVERTURE DE CODE — QUARKUS · JUNIT · CUCUMBER · JACOCO</a:t>
             </a:r>
@@ -25910,9 +25446,9 @@
             <a:r>
               <a:rPr sz="1300" b="1" i="0">
                 <a:solidFill>
-                  <a:srgbClr val="C79A52"/>
-                </a:solidFill>
-                <a:latin typeface="Calibri"/>
+                  <a:srgbClr val="8A6530"/>
+                </a:solidFill>
+                <a:latin typeface="Helvetica Neue"/>
               </a:rPr>
               <a:t>ZOOM — JUNIT</a:t>
             </a:r>
@@ -25954,7 +25490,7 @@
                 <a:solidFill>
                   <a:srgbClr val="162844"/>
                 </a:solidFill>
-                <a:latin typeface="Calibri"/>
+                <a:latin typeface="Helvetica Neue"/>
               </a:rPr>
               <a:t>Le microscope</a:t>
             </a:r>
@@ -25996,7 +25532,7 @@
                 <a:solidFill>
                   <a:srgbClr val="333A47"/>
                 </a:solidFill>
-                <a:latin typeface="Calibri"/>
+                <a:latin typeface="Helvetica Neue"/>
               </a:rPr>
               <a:t>JUnit teste une unité de code isolée — une méthode, une classe — sans lancer</a:t>
             </a:r>
@@ -26015,7 +25551,7 @@
                 <a:solidFill>
                   <a:srgbClr val="333A47"/>
                 </a:solidFill>
-                <a:latin typeface="Calibri"/>
+                <a:latin typeface="Helvetica Neue"/>
               </a:rPr>
               <a:t>toute l'application. C'est rapide, précis, et ça ne pardonne rien.</a:t>
             </a:r>
@@ -26147,7 +25683,7 @@
                 <a:solidFill>
                   <a:srgbClr val="162844"/>
                 </a:solidFill>
-                <a:latin typeface="Calibri"/>
+                <a:latin typeface="Helvetica Neue"/>
               </a:rPr>
               <a:t>Rapide</a:t>
             </a:r>
@@ -26189,7 +25725,7 @@
                 <a:solidFill>
                   <a:srgbClr val="333A47"/>
                 </a:solidFill>
-                <a:latin typeface="Calibri"/>
+                <a:latin typeface="Helvetica Neue"/>
               </a:rPr>
               <a:t>Des milliers de tests en quelques secondes.</a:t>
             </a:r>
@@ -26321,7 +25857,7 @@
                 <a:solidFill>
                   <a:srgbClr val="162844"/>
                 </a:solidFill>
-                <a:latin typeface="Calibri"/>
+                <a:latin typeface="Helvetica Neue"/>
               </a:rPr>
               <a:t>Isolé</a:t>
             </a:r>
@@ -26363,7 +25899,7 @@
                 <a:solidFill>
                   <a:srgbClr val="333A47"/>
                 </a:solidFill>
-                <a:latin typeface="Calibri"/>
+                <a:latin typeface="Helvetica Neue"/>
               </a:rPr>
               <a:t>Pas de serveur, pas de réseau, pas de surprise.</a:t>
             </a:r>
@@ -26495,7 +26031,7 @@
                 <a:solidFill>
                   <a:srgbClr val="162844"/>
                 </a:solidFill>
-                <a:latin typeface="Calibri"/>
+                <a:latin typeface="Helvetica Neue"/>
               </a:rPr>
               <a:t>Technique</a:t>
             </a:r>
@@ -26537,7 +26073,7 @@
                 <a:solidFill>
                   <a:srgbClr val="333A47"/>
                 </a:solidFill>
-                <a:latin typeface="Calibri"/>
+                <a:latin typeface="Helvetica Neue"/>
               </a:rPr>
               <a:t>Pensé par et pour les développeurs.</a:t>
             </a:r>
@@ -26579,7 +26115,7 @@
                 <a:solidFill>
                   <a:srgbClr val="333A47"/>
                 </a:solidFill>
-                <a:latin typeface="Calibri"/>
+                <a:latin typeface="Helvetica Neue"/>
               </a:rPr>
               <a:t>Dans notre agenda malin : ConflictDetector, RecurrenceService — de la logique</a:t>
             </a:r>
@@ -26598,7 +26134,7 @@
                 <a:solidFill>
                   <a:srgbClr val="333A47"/>
                 </a:solidFill>
-                <a:latin typeface="Calibri"/>
+                <a:latin typeface="Helvetica Neue"/>
               </a:rPr>
               <a:t>pure, testée sans jamais démarrer Quarkus.</a:t>
             </a:r>
@@ -26638,9 +26174,9 @@
             <a:r>
               <a:rPr sz="1000" b="0" i="0">
                 <a:solidFill>
-                  <a:srgbClr val="8B93A1"/>
-                </a:solidFill>
-                <a:latin typeface="Calibri"/>
+                  <a:srgbClr val="5E6674"/>
+                </a:solidFill>
+                <a:latin typeface="Helvetica Neue"/>
               </a:rPr>
               <a:t>08 / 28</a:t>
             </a:r>
@@ -26680,9 +26216,9 @@
             <a:r>
               <a:rPr sz="800" b="0" i="0">
                 <a:solidFill>
-                  <a:srgbClr val="8B93A1"/>
-                </a:solidFill>
-                <a:latin typeface="Calibri"/>
+                  <a:srgbClr val="5E6674"/>
+                </a:solidFill>
+                <a:latin typeface="Helvetica Neue"/>
               </a:rPr>
               <a:t>COUVERTURE DE CODE — QUARKUS · JUNIT · CUCUMBER · JACOCO</a:t>
             </a:r>
@@ -26800,9 +26336,9 @@
             <a:r>
               <a:rPr sz="1300" b="1" i="0">
                 <a:solidFill>
-                  <a:srgbClr val="C79A52"/>
-                </a:solidFill>
-                <a:latin typeface="Calibri"/>
+                  <a:srgbClr val="8A6530"/>
+                </a:solidFill>
+                <a:latin typeface="Helvetica Neue"/>
               </a:rPr>
               <a:t>JUNIT — EN ACTION</a:t>
             </a:r>
@@ -26844,7 +26380,7 @@
                 <a:solidFill>
                   <a:srgbClr val="162844"/>
                 </a:solidFill>
-                <a:latin typeface="Calibri"/>
+                <a:latin typeface="Helvetica Neue"/>
               </a:rPr>
               <a:t>Viser juste, vite</a:t>
             </a:r>
@@ -26931,7 +26467,7 @@
                 <a:solidFill>
                   <a:srgbClr val="E3E8F0"/>
                 </a:solidFill>
-                <a:latin typeface="Consolas"/>
+                <a:latin typeface="Menlo"/>
               </a:rPr>
               <a:t>@Test</a:t>
             </a:r>
@@ -26950,7 +26486,7 @@
                 <a:solidFill>
                   <a:srgbClr val="E3E8F0"/>
                 </a:solidFill>
-                <a:latin typeface="Consolas"/>
+                <a:latin typeface="Menlo"/>
               </a:rPr>
               <a:t>void deuxEvenementsQuiSeTouchentNeSontPasEnConflit() {</a:t>
             </a:r>
@@ -26969,7 +26505,7 @@
                 <a:solidFill>
                   <a:srgbClr val="E3E8F0"/>
                 </a:solidFill>
-                <a:latin typeface="Consolas"/>
+                <a:latin typeface="Menlo"/>
               </a:rPr>
               <a:t>    Event a = eventAt("a", 9, 10);</a:t>
             </a:r>
@@ -26988,7 +26524,7 @@
                 <a:solidFill>
                   <a:srgbClr val="E3E8F0"/>
                 </a:solidFill>
-                <a:latin typeface="Consolas"/>
+                <a:latin typeface="Menlo"/>
               </a:rPr>
               <a:t>    Event b = eventAt("b", 10, 11);</a:t>
             </a:r>
@@ -27006,7 +26542,7 @@
               <a:solidFill>
                 <a:srgbClr val="E3E8F0"/>
               </a:solidFill>
-              <a:latin typeface="Consolas"/>
+              <a:latin typeface="Menlo"/>
             </a:endParaRPr>
           </a:p>
           <a:p>
@@ -27023,7 +26559,7 @@
                 <a:solidFill>
                   <a:srgbClr val="E3E8F0"/>
                 </a:solidFill>
-                <a:latin typeface="Consolas"/>
+                <a:latin typeface="Menlo"/>
               </a:rPr>
               <a:t>    assertFalse(detector.isConflicting(a, b));</a:t>
             </a:r>
@@ -27042,7 +26578,7 @@
                 <a:solidFill>
                   <a:srgbClr val="E3E8F0"/>
                 </a:solidFill>
-                <a:latin typeface="Consolas"/>
+                <a:latin typeface="Menlo"/>
               </a:rPr>
               <a:t>}</a:t>
             </a:r>
@@ -27084,7 +26620,7 @@
                 <a:solidFill>
                   <a:srgbClr val="333A47"/>
                 </a:solidFill>
-                <a:latin typeface="Calibri"/>
+                <a:latin typeface="Helvetica Neue"/>
               </a:rPr>
               <a:t>ConflictDetectorTest : 4 tests, 4 cas limites — chevauchement, contact exact,</a:t>
             </a:r>
@@ -27103,7 +26639,7 @@
                 <a:solidFill>
                   <a:srgbClr val="333A47"/>
                 </a:solidFill>
-                <a:latin typeface="Calibri"/>
+                <a:latin typeface="Helvetica Neue"/>
               </a:rPr>
               <a:t>séparation nette, réflexivité. Une classe pure, sans Quarkus, testée en quelques ms.</a:t>
             </a:r>
@@ -27143,9 +26679,9 @@
             <a:r>
               <a:rPr sz="1000" b="0" i="0">
                 <a:solidFill>
-                  <a:srgbClr val="8B93A1"/>
-                </a:solidFill>
-                <a:latin typeface="Calibri"/>
+                  <a:srgbClr val="5E6674"/>
+                </a:solidFill>
+                <a:latin typeface="Helvetica Neue"/>
               </a:rPr>
               <a:t>09 / 28</a:t>
             </a:r>
@@ -27185,9 +26721,9 @@
             <a:r>
               <a:rPr sz="800" b="0" i="0">
                 <a:solidFill>
-                  <a:srgbClr val="8B93A1"/>
-                </a:solidFill>
-                <a:latin typeface="Calibri"/>
+                  <a:srgbClr val="5E6674"/>
+                </a:solidFill>
+                <a:latin typeface="Helvetica Neue"/>
               </a:rPr>
               <a:t>COUVERTURE DE CODE — QUARKUS · JUNIT · CUCUMBER · JACOCO</a:t>
             </a:r>
